--- a/russian-handwriting-checker-new/RusYazyk_AI_v2.pptx
+++ b/russian-handwriting-checker-new/RusYazyk_AI_v2.pptx
@@ -3841,7 +3841,7 @@
         <p:spPr>
           <a:xfrm>
             <a:off x="457200" y="2926080"/>
-            <a:ext cx="7315200" cy="1097280"/>
+            <a:ext cx="7315200" cy="1483227"/>
           </a:xfrm>
           <a:prstGeom prst="rect">
             <a:avLst/>
@@ -3860,14 +3860,38 @@
               </a:lnSpc>
             </a:pPr>
             <a:r>
-              <a:rPr sz="1500" b="0">
+              <a:rPr sz="1500" b="0" dirty="0" err="1">
                 <a:solidFill>
                   <a:srgbClr val="C7D2FE"/>
                 </a:solidFill>
                 <a:latin typeface="Calibri"/>
               </a:rPr>
-              <a:t>Дипломный проект</a:t>
-            </a:r>
+              <a:t>Дипломный</a:t>
+            </a:r>
+            <a:r>
+              <a:rPr sz="1500" b="0" dirty="0">
+                <a:solidFill>
+                  <a:srgbClr val="C7D2FE"/>
+                </a:solidFill>
+                <a:latin typeface="Calibri"/>
+              </a:rPr>
+              <a:t> </a:t>
+            </a:r>
+            <a:r>
+              <a:rPr sz="1500" b="0" dirty="0" err="1">
+                <a:solidFill>
+                  <a:srgbClr val="C7D2FE"/>
+                </a:solidFill>
+                <a:latin typeface="Calibri"/>
+              </a:rPr>
+              <a:t>проект</a:t>
+            </a:r>
+            <a:endParaRPr sz="1500" b="0" dirty="0">
+              <a:solidFill>
+                <a:srgbClr val="C7D2FE"/>
+              </a:solidFill>
+              <a:latin typeface="Calibri"/>
+            </a:endParaRPr>
           </a:p>
           <a:p>
             <a:pPr algn="l">
@@ -3876,14 +3900,74 @@
               </a:lnSpc>
             </a:pPr>
             <a:r>
-              <a:rPr sz="1500" b="0">
+              <a:rPr sz="1500" b="0" dirty="0" err="1">
                 <a:solidFill>
                   <a:srgbClr val="C7D2FE"/>
                 </a:solidFill>
                 <a:latin typeface="Calibri"/>
               </a:rPr>
-              <a:t>Специальность: Разработка программного обеспечения</a:t>
-            </a:r>
+              <a:t>Специальность</a:t>
+            </a:r>
+            <a:r>
+              <a:rPr sz="1500" b="0" dirty="0">
+                <a:solidFill>
+                  <a:srgbClr val="C7D2FE"/>
+                </a:solidFill>
+                <a:latin typeface="Calibri"/>
+              </a:rPr>
+              <a:t>: </a:t>
+            </a:r>
+            <a:r>
+              <a:rPr sz="1500" b="0" dirty="0" err="1">
+                <a:solidFill>
+                  <a:srgbClr val="C7D2FE"/>
+                </a:solidFill>
+                <a:latin typeface="Calibri"/>
+              </a:rPr>
+              <a:t>Разработка</a:t>
+            </a:r>
+            <a:r>
+              <a:rPr sz="1500" b="0" dirty="0">
+                <a:solidFill>
+                  <a:srgbClr val="C7D2FE"/>
+                </a:solidFill>
+                <a:latin typeface="Calibri"/>
+              </a:rPr>
+              <a:t> </a:t>
+            </a:r>
+            <a:r>
+              <a:rPr sz="1500" b="0" dirty="0" err="1">
+                <a:solidFill>
+                  <a:srgbClr val="C7D2FE"/>
+                </a:solidFill>
+                <a:latin typeface="Calibri"/>
+              </a:rPr>
+              <a:t>программного</a:t>
+            </a:r>
+            <a:r>
+              <a:rPr sz="1500" b="0" dirty="0">
+                <a:solidFill>
+                  <a:srgbClr val="C7D2FE"/>
+                </a:solidFill>
+                <a:latin typeface="Calibri"/>
+              </a:rPr>
+              <a:t> </a:t>
+            </a:r>
+            <a:r>
+              <a:rPr sz="1500" b="0" dirty="0" err="1">
+                <a:solidFill>
+                  <a:srgbClr val="C7D2FE"/>
+                </a:solidFill>
+                <a:latin typeface="Calibri"/>
+              </a:rPr>
+              <a:t>обеспечения</a:t>
+            </a:r>
+            <a:endParaRPr lang="ru-RU" sz="1500" b="0" dirty="0">
+              <a:solidFill>
+                <a:srgbClr val="C7D2FE"/>
+              </a:solidFill>
+              <a:latin typeface="Calibri"/>
+            </a:endParaRPr>
           </a:p>
           <a:p>
             <a:pPr algn="l">
@@ -3892,14 +3976,67 @@
               </a:lnSpc>
             </a:pPr>
             <a:r>
-              <a:rPr sz="1500" b="0">
+              <a:rPr lang="ru-RU" sz="1500" dirty="0">
                 <a:solidFill>
                   <a:srgbClr val="C7D2FE"/>
                 </a:solidFill>
                 <a:latin typeface="Calibri"/>
               </a:rPr>
-              <a:t>2026 год</a:t>
-            </a:r>
+              <a:t>Группа П211</a:t>
+            </a:r>
+          </a:p>
+          <a:p>
+            <a:pPr algn="l">
+              <a:lnSpc>
+                <a:spcPts val="2200"/>
+              </a:lnSpc>
+            </a:pPr>
+            <a:r>
+              <a:rPr lang="ru-RU" sz="1500" b="0" dirty="0">
+                <a:solidFill>
+                  <a:srgbClr val="C7D2FE"/>
+                </a:solidFill>
+                <a:latin typeface="Calibri"/>
+              </a:rPr>
+              <a:t>Долгова Екатерина Александровна</a:t>
+            </a:r>
+            <a:endParaRPr sz="1500" b="0" dirty="0">
+              <a:solidFill>
+                <a:srgbClr val="C7D2FE"/>
+              </a:solidFill>
+              <a:latin typeface="Calibri"/>
+            </a:endParaRPr>
+          </a:p>
+          <a:p>
+            <a:pPr algn="l">
+              <a:lnSpc>
+                <a:spcPts val="2200"/>
+              </a:lnSpc>
+            </a:pPr>
+            <a:r>
+              <a:rPr sz="1500" b="0" dirty="0">
+                <a:solidFill>
+                  <a:srgbClr val="C7D2FE"/>
+                </a:solidFill>
+                <a:latin typeface="Calibri"/>
+              </a:rPr>
+              <a:t>2026 </a:t>
+            </a:r>
+            <a:r>
+              <a:rPr sz="1500" b="0" dirty="0" err="1">
+                <a:solidFill>
+                  <a:srgbClr val="C7D2FE"/>
+                </a:solidFill>
+                <a:latin typeface="Calibri"/>
+              </a:rPr>
+              <a:t>год</a:t>
+            </a:r>
+            <a:endParaRPr sz="1500" b="0" dirty="0">
+              <a:solidFill>
+                <a:srgbClr val="C7D2FE"/>
+              </a:solidFill>
+              <a:latin typeface="Calibri"/>
+            </a:endParaRPr>
           </a:p>
         </p:txBody>
       </p:sp>
@@ -3975,7 +4112,7 @@
                   <a:srgbClr val="1E293B"/>
                 </a:solidFill>
               </a:rPr>
-              <a:t>✏️</a:t>
+              <a:t>✎</a:t>
             </a:r>
             <a:endParaRPr sz="2800" b="0" i="0" dirty="0">
               <a:solidFill>
@@ -4075,29 +4212,33 @@
         <p:spPr>
           <a:xfrm>
             <a:off x="3429000" y="5120640"/>
-            <a:ext cx="502920" cy="502920"/>
-          </a:xfrm>
-          <a:prstGeom prst="rect">
-            <a:avLst/>
-          </a:prstGeom>
-          <a:noFill/>
-        </p:spPr>
-        <p:txBody>
-          <a:bodyPr wrap="square">
-            <a:spAutoFit/>
-          </a:bodyPr>
-          <a:lstStyle/>
-          <a:p>
-            <a:pPr algn="l"/>
-            <a:r>
-              <a:rPr sz="2800" b="0" i="0">
+            <a:ext cx="502920" cy="523220"/>
+          </a:xfrm>
+          <a:prstGeom prst="rect">
+            <a:avLst/>
+          </a:prstGeom>
+          <a:noFill/>
+        </p:spPr>
+        <p:txBody>
+          <a:bodyPr wrap="square">
+            <a:spAutoFit/>
+          </a:bodyPr>
+          <a:lstStyle/>
+          <a:p>
+            <a:r>
+              <a:rPr lang="ru-RU" sz="2800" dirty="0">
                 <a:solidFill>
                   <a:srgbClr val="1E293B"/>
                 </a:solidFill>
-                <a:latin typeface="Calibri"/>
-              </a:rPr>
-              <a:t>🤖</a:t>
-            </a:r>
+              </a:rPr>
+              <a:t>👾</a:t>
+            </a:r>
+            <a:endParaRPr sz="2800" b="0" i="0" dirty="0">
+              <a:solidFill>
+                <a:srgbClr val="1E293B"/>
+              </a:solidFill>
+              <a:latin typeface="Calibri"/>
+            </a:endParaRPr>
           </a:p>
         </p:txBody>
       </p:sp>
@@ -4503,14 +4644,146 @@
           <a:p>
             <a:pPr algn="l"/>
             <a:r>
-              <a:rPr sz="1300" b="0" i="0">
+              <a:rPr sz="1300" b="0" i="0" dirty="0" err="1">
                 <a:solidFill>
                   <a:srgbClr val="E0E7FF"/>
                 </a:solidFill>
                 <a:latin typeface="Calibri"/>
               </a:rPr>
-              <a:t>BackgroundTasks FastAPI + polling — клиент не ждёт OCR блокируя соединение</a:t>
-            </a:r>
+              <a:t>BackgroundTasks</a:t>
+            </a:r>
+            <a:r>
+              <a:rPr sz="1300" b="0" i="0" dirty="0">
+                <a:solidFill>
+                  <a:srgbClr val="E0E7FF"/>
+                </a:solidFill>
+                <a:latin typeface="Calibri"/>
+              </a:rPr>
+              <a:t> </a:t>
+            </a:r>
+            <a:r>
+              <a:rPr sz="1300" b="0" i="0" dirty="0" err="1">
+                <a:solidFill>
+                  <a:srgbClr val="E0E7FF"/>
+                </a:solidFill>
+                <a:latin typeface="Calibri"/>
+              </a:rPr>
+              <a:t>FastAPI</a:t>
+            </a:r>
+            <a:r>
+              <a:rPr sz="1300" b="0" i="0" dirty="0">
+                <a:solidFill>
+                  <a:srgbClr val="E0E7FF"/>
+                </a:solidFill>
+                <a:latin typeface="Calibri"/>
+              </a:rPr>
+              <a:t> + polling </a:t>
+            </a:r>
+            <a:r>
+              <a:rPr lang="en-US" sz="1300" b="0" i="0" dirty="0">
+                <a:solidFill>
+                  <a:srgbClr val="E0E7FF"/>
+                </a:solidFill>
+                <a:latin typeface="Calibri"/>
+              </a:rPr>
+              <a:t>-</a:t>
+            </a:r>
+            <a:r>
+              <a:rPr sz="1300" b="0" i="0" dirty="0">
+                <a:solidFill>
+                  <a:srgbClr val="E0E7FF"/>
+                </a:solidFill>
+                <a:latin typeface="Calibri"/>
+              </a:rPr>
+              <a:t> </a:t>
+            </a:r>
+            <a:r>
+              <a:rPr sz="1300" b="0" i="0" dirty="0" err="1">
+                <a:solidFill>
+                  <a:srgbClr val="E0E7FF"/>
+                </a:solidFill>
+                <a:latin typeface="Calibri"/>
+              </a:rPr>
+              <a:t>клиент</a:t>
+            </a:r>
+            <a:r>
+              <a:rPr sz="1300" b="0" i="0" dirty="0">
+                <a:solidFill>
+                  <a:srgbClr val="E0E7FF"/>
+                </a:solidFill>
+                <a:latin typeface="Calibri"/>
+              </a:rPr>
+              <a:t> </a:t>
+            </a:r>
+            <a:r>
+              <a:rPr sz="1300" b="0" i="0" dirty="0" err="1">
+                <a:solidFill>
+                  <a:srgbClr val="E0E7FF"/>
+                </a:solidFill>
+                <a:latin typeface="Calibri"/>
+              </a:rPr>
+              <a:t>не</a:t>
+            </a:r>
+            <a:r>
+              <a:rPr sz="1300" b="0" i="0" dirty="0">
+                <a:solidFill>
+                  <a:srgbClr val="E0E7FF"/>
+                </a:solidFill>
+                <a:latin typeface="Calibri"/>
+              </a:rPr>
+              <a:t> </a:t>
+            </a:r>
+            <a:r>
+              <a:rPr sz="1300" b="0" i="0" dirty="0" err="1">
+                <a:solidFill>
+                  <a:srgbClr val="E0E7FF"/>
+                </a:solidFill>
+                <a:latin typeface="Calibri"/>
+              </a:rPr>
+              <a:t>ждёт</a:t>
+            </a:r>
+            <a:r>
+              <a:rPr sz="1300" b="0" i="0" dirty="0">
+                <a:solidFill>
+                  <a:srgbClr val="E0E7FF"/>
+                </a:solidFill>
+                <a:latin typeface="Calibri"/>
+              </a:rPr>
+              <a:t> OCR </a:t>
+            </a:r>
+            <a:r>
+              <a:rPr sz="1300" b="0" i="0" dirty="0" err="1">
+                <a:solidFill>
+                  <a:srgbClr val="E0E7FF"/>
+                </a:solidFill>
+                <a:latin typeface="Calibri"/>
+              </a:rPr>
+              <a:t>блокируя</a:t>
+            </a:r>
+            <a:r>
+              <a:rPr sz="1300" b="0" i="0" dirty="0">
+                <a:solidFill>
+                  <a:srgbClr val="E0E7FF"/>
+                </a:solidFill>
+                <a:latin typeface="Calibri"/>
+              </a:rPr>
+              <a:t> </a:t>
+            </a:r>
+            <a:r>
+              <a:rPr sz="1300" b="0" i="0" dirty="0" err="1">
+                <a:solidFill>
+                  <a:srgbClr val="E0E7FF"/>
+                </a:solidFill>
+                <a:latin typeface="Calibri"/>
+              </a:rPr>
+              <a:t>соединение</a:t>
+            </a:r>
+            <a:endParaRPr sz="1300" b="0" i="0" dirty="0">
+              <a:solidFill>
+                <a:srgbClr val="E0E7FF"/>
+              </a:solidFill>
+              <a:latin typeface="Calibri"/>
+            </a:endParaRPr>
           </a:p>
         </p:txBody>
       </p:sp>
@@ -5710,7 +5983,7 @@
         <p:spPr>
           <a:xfrm>
             <a:off x="6720837" y="1408684"/>
-            <a:ext cx="1234439" cy="347472"/>
+            <a:ext cx="1362455" cy="671576"/>
           </a:xfrm>
           <a:prstGeom prst="rect">
             <a:avLst/>
@@ -6714,7 +6987,7 @@
         <p:spPr>
           <a:xfrm>
             <a:off x="685800" y="4160520"/>
-            <a:ext cx="10789920" cy="822960"/>
+            <a:ext cx="10789920" cy="646331"/>
           </a:xfrm>
           <a:prstGeom prst="rect">
             <a:avLst/>
@@ -6729,26 +7002,413 @@
           <a:p>
             <a:pPr algn="l"/>
             <a:r>
-              <a:rPr sz="1200" b="0">
+              <a:rPr sz="1200" b="0" dirty="0" err="1">
                 <a:solidFill>
                   <a:srgbClr val="1E293B"/>
                 </a:solidFill>
                 <a:latin typeface="Calibri"/>
               </a:rPr>
-              <a:t>Зачем polling, а не держать соединение открытым?</a:t>
+              <a:t>Зачем</a:t>
+            </a:r>
+            <a:r>
+              <a:rPr sz="1200" b="0" dirty="0">
+                <a:solidFill>
+                  <a:srgbClr val="1E293B"/>
+                </a:solidFill>
+                <a:latin typeface="Calibri"/>
+              </a:rPr>
+              <a:t> polling, а </a:t>
+            </a:r>
+            <a:r>
+              <a:rPr sz="1200" b="0" dirty="0" err="1">
+                <a:solidFill>
+                  <a:srgbClr val="1E293B"/>
+                </a:solidFill>
+                <a:latin typeface="Calibri"/>
+              </a:rPr>
+              <a:t>не</a:t>
+            </a:r>
+            <a:r>
+              <a:rPr sz="1200" b="0" dirty="0">
+                <a:solidFill>
+                  <a:srgbClr val="1E293B"/>
+                </a:solidFill>
+                <a:latin typeface="Calibri"/>
+              </a:rPr>
+              <a:t> </a:t>
+            </a:r>
+            <a:r>
+              <a:rPr sz="1200" b="0" dirty="0" err="1">
+                <a:solidFill>
+                  <a:srgbClr val="1E293B"/>
+                </a:solidFill>
+                <a:latin typeface="Calibri"/>
+              </a:rPr>
+              <a:t>держать</a:t>
+            </a:r>
+            <a:r>
+              <a:rPr sz="1200" b="0" dirty="0">
+                <a:solidFill>
+                  <a:srgbClr val="1E293B"/>
+                </a:solidFill>
+                <a:latin typeface="Calibri"/>
+              </a:rPr>
+              <a:t> </a:t>
+            </a:r>
+            <a:r>
+              <a:rPr sz="1200" b="0" dirty="0" err="1">
+                <a:solidFill>
+                  <a:srgbClr val="1E293B"/>
+                </a:solidFill>
+                <a:latin typeface="Calibri"/>
+              </a:rPr>
+              <a:t>соединение</a:t>
+            </a:r>
+            <a:r>
+              <a:rPr sz="1200" b="0" dirty="0">
+                <a:solidFill>
+                  <a:srgbClr val="1E293B"/>
+                </a:solidFill>
+                <a:latin typeface="Calibri"/>
+              </a:rPr>
+              <a:t> </a:t>
+            </a:r>
+            <a:r>
+              <a:rPr sz="1200" b="0" dirty="0" err="1">
+                <a:solidFill>
+                  <a:srgbClr val="1E293B"/>
+                </a:solidFill>
+                <a:latin typeface="Calibri"/>
+              </a:rPr>
+              <a:t>открытым</a:t>
+            </a:r>
+            <a:r>
+              <a:rPr sz="1200" b="0" dirty="0">
+                <a:solidFill>
+                  <a:srgbClr val="1E293B"/>
+                </a:solidFill>
+                <a:latin typeface="Calibri"/>
+              </a:rPr>
+              <a:t>?</a:t>
             </a:r>
           </a:p>
           <a:p>
             <a:pPr algn="l"/>
             <a:r>
-              <a:rPr sz="1200" b="0">
+              <a:rPr sz="1200" b="0" dirty="0">
                 <a:solidFill>
                   <a:srgbClr val="1E293B"/>
                 </a:solidFill>
                 <a:latin typeface="Calibri"/>
               </a:rPr>
-              <a:t>OCR (особенно PaddleOCR) занимает 5–30 секунд. Браузер закрывает HTTP-соединение по таймауту.
-Polling: быстрый ответ сразу → периодическая проверка → результат когда готов.</a:t>
+              <a:t>OCR (</a:t>
+            </a:r>
+            <a:r>
+              <a:rPr sz="1200" b="0" dirty="0" err="1">
+                <a:solidFill>
+                  <a:srgbClr val="1E293B"/>
+                </a:solidFill>
+                <a:latin typeface="Calibri"/>
+              </a:rPr>
+              <a:t>особенно</a:t>
+            </a:r>
+            <a:r>
+              <a:rPr sz="1200" b="0" dirty="0">
+                <a:solidFill>
+                  <a:srgbClr val="1E293B"/>
+                </a:solidFill>
+                <a:latin typeface="Calibri"/>
+              </a:rPr>
+              <a:t> </a:t>
+            </a:r>
+            <a:r>
+              <a:rPr sz="1200" b="0" dirty="0" err="1">
+                <a:solidFill>
+                  <a:srgbClr val="1E293B"/>
+                </a:solidFill>
+                <a:latin typeface="Calibri"/>
+              </a:rPr>
+              <a:t>PaddleOCR</a:t>
+            </a:r>
+            <a:r>
+              <a:rPr sz="1200" b="0" dirty="0">
+                <a:solidFill>
+                  <a:srgbClr val="1E293B"/>
+                </a:solidFill>
+                <a:latin typeface="Calibri"/>
+              </a:rPr>
+              <a:t>) </a:t>
+            </a:r>
+            <a:r>
+              <a:rPr sz="1200" b="0" dirty="0" err="1">
+                <a:solidFill>
+                  <a:srgbClr val="1E293B"/>
+                </a:solidFill>
+                <a:latin typeface="Calibri"/>
+              </a:rPr>
+              <a:t>занимает</a:t>
+            </a:r>
+            <a:r>
+              <a:rPr sz="1200" b="0" dirty="0">
+                <a:solidFill>
+                  <a:srgbClr val="1E293B"/>
+                </a:solidFill>
+                <a:latin typeface="Calibri"/>
+              </a:rPr>
+              <a:t> 5</a:t>
+            </a:r>
+            <a:r>
+              <a:rPr lang="en-US" sz="1200" b="0" dirty="0">
+                <a:solidFill>
+                  <a:srgbClr val="1E293B"/>
+                </a:solidFill>
+                <a:latin typeface="Calibri"/>
+              </a:rPr>
+              <a:t>-</a:t>
+            </a:r>
+            <a:r>
+              <a:rPr sz="1200" b="0" dirty="0">
+                <a:solidFill>
+                  <a:srgbClr val="1E293B"/>
+                </a:solidFill>
+                <a:latin typeface="Calibri"/>
+              </a:rPr>
+              <a:t>30 </a:t>
+            </a:r>
+            <a:r>
+              <a:rPr sz="1200" b="0" dirty="0" err="1">
+                <a:solidFill>
+                  <a:srgbClr val="1E293B"/>
+                </a:solidFill>
+                <a:latin typeface="Calibri"/>
+              </a:rPr>
+              <a:t>секунд</a:t>
+            </a:r>
+            <a:r>
+              <a:rPr sz="1200" b="0" dirty="0">
+                <a:solidFill>
+                  <a:srgbClr val="1E293B"/>
+                </a:solidFill>
+                <a:latin typeface="Calibri"/>
+              </a:rPr>
+              <a:t>. Браузер </a:t>
+            </a:r>
+            <a:r>
+              <a:rPr sz="1200" b="0" dirty="0" err="1">
+                <a:solidFill>
+                  <a:srgbClr val="1E293B"/>
+                </a:solidFill>
+                <a:latin typeface="Calibri"/>
+              </a:rPr>
+              <a:t>закрывает</a:t>
+            </a:r>
+            <a:r>
+              <a:rPr sz="1200" b="0" dirty="0">
+                <a:solidFill>
+                  <a:srgbClr val="1E293B"/>
+                </a:solidFill>
+                <a:latin typeface="Calibri"/>
+              </a:rPr>
+              <a:t> HTTP-</a:t>
+            </a:r>
+            <a:r>
+              <a:rPr sz="1200" b="0" dirty="0" err="1">
+                <a:solidFill>
+                  <a:srgbClr val="1E293B"/>
+                </a:solidFill>
+                <a:latin typeface="Calibri"/>
+              </a:rPr>
+              <a:t>соединение</a:t>
+            </a:r>
+            <a:r>
+              <a:rPr sz="1200" b="0" dirty="0">
+                <a:solidFill>
+                  <a:srgbClr val="1E293B"/>
+                </a:solidFill>
+                <a:latin typeface="Calibri"/>
+              </a:rPr>
+              <a:t> </a:t>
+            </a:r>
+            <a:r>
+              <a:rPr sz="1200" b="0" dirty="0" err="1">
+                <a:solidFill>
+                  <a:srgbClr val="1E293B"/>
+                </a:solidFill>
+                <a:latin typeface="Calibri"/>
+              </a:rPr>
+              <a:t>по</a:t>
+            </a:r>
+            <a:r>
+              <a:rPr sz="1200" b="0" dirty="0">
+                <a:solidFill>
+                  <a:srgbClr val="1E293B"/>
+                </a:solidFill>
+                <a:latin typeface="Calibri"/>
+              </a:rPr>
+              <a:t> </a:t>
+            </a:r>
+            <a:r>
+              <a:rPr sz="1200" b="0" dirty="0" err="1">
+                <a:solidFill>
+                  <a:srgbClr val="1E293B"/>
+                </a:solidFill>
+                <a:latin typeface="Calibri"/>
+              </a:rPr>
+              <a:t>таймауту</a:t>
+            </a:r>
+            <a:r>
+              <a:rPr sz="1200" b="0" dirty="0">
+                <a:solidFill>
+                  <a:srgbClr val="1E293B"/>
+                </a:solidFill>
+                <a:latin typeface="Calibri"/>
+              </a:rPr>
+              <a:t>.
+Polling: </a:t>
+            </a:r>
+            <a:r>
+              <a:rPr sz="1200" b="0" dirty="0" err="1">
+                <a:solidFill>
+                  <a:srgbClr val="1E293B"/>
+                </a:solidFill>
+                <a:latin typeface="Calibri"/>
+              </a:rPr>
+              <a:t>быстрый</a:t>
+            </a:r>
+            <a:r>
+              <a:rPr sz="1200" b="0" dirty="0">
+                <a:solidFill>
+                  <a:srgbClr val="1E293B"/>
+                </a:solidFill>
+                <a:latin typeface="Calibri"/>
+              </a:rPr>
+              <a:t> </a:t>
+            </a:r>
+            <a:r>
+              <a:rPr sz="1200" b="0" dirty="0" err="1">
+                <a:solidFill>
+                  <a:srgbClr val="1E293B"/>
+                </a:solidFill>
+                <a:latin typeface="Calibri"/>
+              </a:rPr>
+              <a:t>ответ</a:t>
+            </a:r>
+            <a:r>
+              <a:rPr sz="1200" b="0" dirty="0">
+                <a:solidFill>
+                  <a:srgbClr val="1E293B"/>
+                </a:solidFill>
+                <a:latin typeface="Calibri"/>
+              </a:rPr>
+              <a:t> </a:t>
+            </a:r>
+            <a:r>
+              <a:rPr sz="1200" b="0" dirty="0" err="1">
+                <a:solidFill>
+                  <a:srgbClr val="1E293B"/>
+                </a:solidFill>
+                <a:latin typeface="Calibri"/>
+              </a:rPr>
+              <a:t>сразу</a:t>
+            </a:r>
+            <a:r>
+              <a:rPr sz="1200" b="0" dirty="0">
+                <a:solidFill>
+                  <a:srgbClr val="1E293B"/>
+                </a:solidFill>
+                <a:latin typeface="Calibri"/>
+              </a:rPr>
+              <a:t> → </a:t>
+            </a:r>
+            <a:r>
+              <a:rPr sz="1200" b="0" dirty="0" err="1">
+                <a:solidFill>
+                  <a:srgbClr val="1E293B"/>
+                </a:solidFill>
+                <a:latin typeface="Calibri"/>
+              </a:rPr>
+              <a:t>периодическая</a:t>
+            </a:r>
+            <a:r>
+              <a:rPr sz="1200" b="0" dirty="0">
+                <a:solidFill>
+                  <a:srgbClr val="1E293B"/>
+                </a:solidFill>
+                <a:latin typeface="Calibri"/>
+              </a:rPr>
+              <a:t> </a:t>
+            </a:r>
+            <a:r>
+              <a:rPr sz="1200" b="0" dirty="0" err="1">
+                <a:solidFill>
+                  <a:srgbClr val="1E293B"/>
+                </a:solidFill>
+                <a:latin typeface="Calibri"/>
+              </a:rPr>
+              <a:t>проверка</a:t>
+            </a:r>
+            <a:r>
+              <a:rPr sz="1200" b="0" dirty="0">
+                <a:solidFill>
+                  <a:srgbClr val="1E293B"/>
+                </a:solidFill>
+                <a:latin typeface="Calibri"/>
+              </a:rPr>
+              <a:t> → </a:t>
+            </a:r>
+            <a:r>
+              <a:rPr sz="1200" b="0" dirty="0" err="1">
+                <a:solidFill>
+                  <a:srgbClr val="1E293B"/>
+                </a:solidFill>
+                <a:latin typeface="Calibri"/>
+              </a:rPr>
+              <a:t>результат</a:t>
+            </a:r>
+            <a:r>
+              <a:rPr sz="1200" b="0" dirty="0">
+                <a:solidFill>
+                  <a:srgbClr val="1E293B"/>
+                </a:solidFill>
+                <a:latin typeface="Calibri"/>
+              </a:rPr>
+              <a:t> </a:t>
+            </a:r>
+            <a:r>
+              <a:rPr sz="1200" b="0" dirty="0" err="1">
+                <a:solidFill>
+                  <a:srgbClr val="1E293B"/>
+                </a:solidFill>
+                <a:latin typeface="Calibri"/>
+              </a:rPr>
+              <a:t>когда</a:t>
+            </a:r>
+            <a:r>
+              <a:rPr sz="1200" b="0" dirty="0">
+                <a:solidFill>
+                  <a:srgbClr val="1E293B"/>
+                </a:solidFill>
+                <a:latin typeface="Calibri"/>
+              </a:rPr>
+              <a:t> </a:t>
+            </a:r>
+            <a:r>
+              <a:rPr sz="1200" b="0" dirty="0" err="1">
+                <a:solidFill>
+                  <a:srgbClr val="1E293B"/>
+                </a:solidFill>
+                <a:latin typeface="Calibri"/>
+              </a:rPr>
+              <a:t>готов</a:t>
+            </a:r>
+            <a:r>
+              <a:rPr sz="1200" b="0" dirty="0">
+                <a:solidFill>
+                  <a:srgbClr val="1E293B"/>
+                </a:solidFill>
+                <a:latin typeface="Calibri"/>
+              </a:rPr>
+              <a:t>.</a:t>
             </a:r>
           </a:p>
         </p:txBody>
@@ -7541,7 +8201,7 @@
             <a:avLst/>
           </a:prstGeom>
           <a:solidFill>
-            <a:srgbClr val="1E293B"/>
+            <a:schemeClr val="accent1"/>
           </a:solidFill>
           <a:ln>
             <a:noFill/>
@@ -7566,7 +8226,14 @@
           <a:lstStyle/>
           <a:p>
             <a:pPr algn="ctr"/>
-            <a:endParaRPr/>
+            <a:endParaRPr>
+              <a:solidFill>
+                <a:schemeClr val="accent1">
+                  <a:lumMod val="60000"/>
+                  <a:lumOff val="40000"/>
+                </a:schemeClr>
+              </a:solidFill>
+            </a:endParaRPr>
           </a:p>
         </p:txBody>
       </p:sp>
@@ -7578,8 +8245,8 @@
         </p:nvSpPr>
         <p:spPr>
           <a:xfrm>
-            <a:off x="685800" y="2487168"/>
-            <a:ext cx="10789920" cy="256032"/>
+            <a:off x="588554" y="2446242"/>
+            <a:ext cx="10789920" cy="292388"/>
           </a:xfrm>
           <a:prstGeom prst="rect">
             <a:avLst/>
@@ -7594,13 +8261,121 @@
           <a:p>
             <a:pPr algn="l"/>
             <a:r>
-              <a:rPr sz="1300" b="1" i="0">
+              <a:rPr sz="1300" b="1" i="0" dirty="0">
                 <a:solidFill>
                   <a:srgbClr val="FFFFFF"/>
                 </a:solidFill>
                 <a:latin typeface="Calibri"/>
               </a:rPr>
-              <a:t>_build_result() — что входит в итоговый ответ:</a:t>
+              <a:t>_</a:t>
+            </a:r>
+            <a:r>
+              <a:rPr sz="1300" b="1" i="0" dirty="0" err="1">
+                <a:solidFill>
+                  <a:srgbClr val="FFFFFF"/>
+                </a:solidFill>
+                <a:latin typeface="Calibri"/>
+              </a:rPr>
+              <a:t>build_result</a:t>
+            </a:r>
+            <a:r>
+              <a:rPr sz="1300" b="1" i="0" dirty="0">
+                <a:solidFill>
+                  <a:srgbClr val="FFFFFF"/>
+                </a:solidFill>
+                <a:latin typeface="Calibri"/>
+              </a:rPr>
+              <a:t>() </a:t>
+            </a:r>
+            <a:r>
+              <a:rPr lang="en-US" sz="1300" b="1" i="0" dirty="0">
+                <a:solidFill>
+                  <a:srgbClr val="FFFFFF"/>
+                </a:solidFill>
+                <a:latin typeface="Calibri"/>
+              </a:rPr>
+              <a:t>-</a:t>
+            </a:r>
+            <a:r>
+              <a:rPr sz="1300" b="1" i="0" dirty="0">
+                <a:solidFill>
+                  <a:srgbClr val="FFFFFF"/>
+                </a:solidFill>
+                <a:latin typeface="Calibri"/>
+              </a:rPr>
+              <a:t> </a:t>
+            </a:r>
+            <a:r>
+              <a:rPr sz="1300" b="1" i="0" dirty="0" err="1">
+                <a:solidFill>
+                  <a:srgbClr val="FFFFFF"/>
+                </a:solidFill>
+                <a:latin typeface="Calibri"/>
+              </a:rPr>
+              <a:t>что</a:t>
+            </a:r>
+            <a:r>
+              <a:rPr sz="1300" b="1" i="0" dirty="0">
+                <a:solidFill>
+                  <a:srgbClr val="FFFFFF"/>
+                </a:solidFill>
+                <a:latin typeface="Calibri"/>
+              </a:rPr>
+              <a:t> </a:t>
+            </a:r>
+            <a:r>
+              <a:rPr sz="1300" b="1" i="0" dirty="0" err="1">
+                <a:solidFill>
+                  <a:srgbClr val="FFFFFF"/>
+                </a:solidFill>
+                <a:latin typeface="Calibri"/>
+              </a:rPr>
+              <a:t>входит</a:t>
+            </a:r>
+            <a:r>
+              <a:rPr sz="1300" b="1" i="0" dirty="0">
+                <a:solidFill>
+                  <a:srgbClr val="FFFFFF"/>
+                </a:solidFill>
+                <a:latin typeface="Calibri"/>
+              </a:rPr>
+              <a:t> в </a:t>
+            </a:r>
+            <a:r>
+              <a:rPr sz="1300" b="1" i="0" dirty="0" err="1">
+                <a:solidFill>
+                  <a:srgbClr val="FFFFFF"/>
+                </a:solidFill>
+                <a:latin typeface="Calibri"/>
+              </a:rPr>
+              <a:t>итоговый</a:t>
+            </a:r>
+            <a:r>
+              <a:rPr sz="1300" b="1" i="0" dirty="0">
+                <a:solidFill>
+                  <a:srgbClr val="FFFFFF"/>
+                </a:solidFill>
+                <a:latin typeface="Calibri"/>
+              </a:rPr>
+              <a:t> </a:t>
+            </a:r>
+            <a:r>
+              <a:rPr sz="1300" b="1" i="0" dirty="0" err="1">
+                <a:solidFill>
+                  <a:srgbClr val="FFFFFF"/>
+                </a:solidFill>
+                <a:latin typeface="Calibri"/>
+              </a:rPr>
+              <a:t>ответ</a:t>
+            </a:r>
+            <a:r>
+              <a:rPr sz="1300" b="1" i="0" dirty="0">
+                <a:solidFill>
+                  <a:srgbClr val="FFFFFF"/>
+                </a:solidFill>
+                <a:latin typeface="Calibri"/>
+              </a:rPr>
+              <a:t>:</a:t>
             </a:r>
           </a:p>
         </p:txBody>
@@ -8776,13 +9551,130 @@
           <a:p>
             <a:pPr algn="l"/>
             <a:r>
-              <a:rPr sz="1300" b="0" i="0">
+              <a:rPr sz="1300" b="0" i="0" dirty="0" err="1">
                 <a:solidFill>
                   <a:srgbClr val="E0E7FF"/>
                 </a:solidFill>
                 <a:latin typeface="Calibri"/>
               </a:rPr>
-              <a:t>Каждая функция — это system_prompt + user_template с плейсхолдером {text}</a:t>
+              <a:t>Каждая</a:t>
+            </a:r>
+            <a:r>
+              <a:rPr sz="1300" b="0" i="0" dirty="0">
+                <a:solidFill>
+                  <a:srgbClr val="E0E7FF"/>
+                </a:solidFill>
+                <a:latin typeface="Calibri"/>
+              </a:rPr>
+              <a:t> </a:t>
+            </a:r>
+            <a:r>
+              <a:rPr sz="1300" b="0" i="0" dirty="0" err="1">
+                <a:solidFill>
+                  <a:srgbClr val="E0E7FF"/>
+                </a:solidFill>
+                <a:latin typeface="Calibri"/>
+              </a:rPr>
+              <a:t>функция</a:t>
+            </a:r>
+            <a:r>
+              <a:rPr sz="1300" b="0" i="0" dirty="0">
+                <a:solidFill>
+                  <a:srgbClr val="E0E7FF"/>
+                </a:solidFill>
+                <a:latin typeface="Calibri"/>
+              </a:rPr>
+              <a:t> </a:t>
+            </a:r>
+            <a:r>
+              <a:rPr lang="en-US" sz="1300" b="0" i="0" dirty="0">
+                <a:solidFill>
+                  <a:srgbClr val="E0E7FF"/>
+                </a:solidFill>
+                <a:latin typeface="Calibri"/>
+              </a:rPr>
+              <a:t>-</a:t>
+            </a:r>
+            <a:r>
+              <a:rPr sz="1300" b="0" i="0" dirty="0">
+                <a:solidFill>
+                  <a:srgbClr val="E0E7FF"/>
+                </a:solidFill>
+                <a:latin typeface="Calibri"/>
+              </a:rPr>
+              <a:t> </a:t>
+            </a:r>
+            <a:r>
+              <a:rPr sz="1300" b="0" i="0" dirty="0" err="1">
+                <a:solidFill>
+                  <a:srgbClr val="E0E7FF"/>
+                </a:solidFill>
+                <a:latin typeface="Calibri"/>
+              </a:rPr>
+              <a:t>это</a:t>
+            </a:r>
+            <a:r>
+              <a:rPr sz="1300" b="0" i="0" dirty="0">
+                <a:solidFill>
+                  <a:srgbClr val="E0E7FF"/>
+                </a:solidFill>
+                <a:latin typeface="Calibri"/>
+              </a:rPr>
+              <a:t> </a:t>
+            </a:r>
+            <a:r>
+              <a:rPr sz="1300" b="0" i="0" dirty="0" err="1">
+                <a:solidFill>
+                  <a:srgbClr val="E0E7FF"/>
+                </a:solidFill>
+                <a:latin typeface="Calibri"/>
+              </a:rPr>
+              <a:t>system_prompt</a:t>
+            </a:r>
+            <a:r>
+              <a:rPr sz="1300" b="0" i="0" dirty="0">
+                <a:solidFill>
+                  <a:srgbClr val="E0E7FF"/>
+                </a:solidFill>
+                <a:latin typeface="Calibri"/>
+              </a:rPr>
+              <a:t> + </a:t>
+            </a:r>
+            <a:r>
+              <a:rPr sz="1300" b="0" i="0" dirty="0" err="1">
+                <a:solidFill>
+                  <a:srgbClr val="E0E7FF"/>
+                </a:solidFill>
+                <a:latin typeface="Calibri"/>
+              </a:rPr>
+              <a:t>user_template</a:t>
+            </a:r>
+            <a:r>
+              <a:rPr sz="1300" b="0" i="0" dirty="0">
+                <a:solidFill>
+                  <a:srgbClr val="E0E7FF"/>
+                </a:solidFill>
+                <a:latin typeface="Calibri"/>
+              </a:rPr>
+              <a:t> с </a:t>
+            </a:r>
+            <a:r>
+              <a:rPr sz="1300" b="0" i="0" dirty="0" err="1">
+                <a:solidFill>
+                  <a:srgbClr val="E0E7FF"/>
+                </a:solidFill>
+                <a:latin typeface="Calibri"/>
+              </a:rPr>
+              <a:t>плейсхолдером</a:t>
+            </a:r>
+            <a:r>
+              <a:rPr sz="1300" b="0" i="0" dirty="0">
+                <a:solidFill>
+                  <a:srgbClr val="E0E7FF"/>
+                </a:solidFill>
+                <a:latin typeface="Calibri"/>
+              </a:rPr>
+              <a:t> {text}</a:t>
             </a:r>
           </a:p>
         </p:txBody>
@@ -10183,7 +11075,7 @@
         <p:spPr>
           <a:xfrm>
             <a:off x="621792" y="1371600"/>
-            <a:ext cx="3291840" cy="347472"/>
+            <a:ext cx="3291840" cy="292388"/>
           </a:xfrm>
           <a:prstGeom prst="rect">
             <a:avLst/>
@@ -10198,14 +11090,47 @@
           <a:p>
             <a:pPr algn="l"/>
             <a:r>
-              <a:rPr sz="1300" b="1" i="0">
+              <a:rPr sz="1300" b="1" i="0" dirty="0">
                 <a:solidFill>
                   <a:srgbClr val="4F46E5"/>
                 </a:solidFill>
                 <a:latin typeface="Calibri"/>
               </a:rPr>
-              <a:t>React Router DOM — маршруты</a:t>
-            </a:r>
+              <a:t>React Router DOM </a:t>
+            </a:r>
+            <a:r>
+              <a:rPr lang="en-US" sz="1300" b="1" i="0" dirty="0">
+                <a:solidFill>
+                  <a:srgbClr val="4F46E5"/>
+                </a:solidFill>
+                <a:latin typeface="Calibri"/>
+              </a:rPr>
+              <a:t>-</a:t>
+            </a:r>
+            <a:r>
+              <a:rPr sz="1300" b="1" i="0" dirty="0">
+                <a:solidFill>
+                  <a:srgbClr val="4F46E5"/>
+                </a:solidFill>
+                <a:latin typeface="Calibri"/>
+              </a:rPr>
+              <a:t> </a:t>
+            </a:r>
+            <a:r>
+              <a:rPr sz="1300" b="1" i="0" dirty="0" err="1">
+                <a:solidFill>
+                  <a:srgbClr val="4F46E5"/>
+                </a:solidFill>
+                <a:latin typeface="Calibri"/>
+              </a:rPr>
+              <a:t>маршруты</a:t>
+            </a:r>
+            <a:endParaRPr sz="1300" b="1" i="0" dirty="0">
+              <a:solidFill>
+                <a:srgbClr val="4F46E5"/>
+              </a:solidFill>
+              <a:latin typeface="Calibri"/>
+            </a:endParaRPr>
           </a:p>
         </p:txBody>
       </p:sp>
@@ -10297,7 +11222,7 @@
         <p:spPr>
           <a:xfrm>
             <a:off x="685800" y="2157984"/>
-            <a:ext cx="3108960" cy="292608"/>
+            <a:ext cx="3108960" cy="261610"/>
           </a:xfrm>
           <a:prstGeom prst="rect">
             <a:avLst/>
@@ -10312,14 +11237,92 @@
           <a:p>
             <a:pPr algn="l"/>
             <a:r>
-              <a:rPr sz="1100" b="0" i="0">
+              <a:rPr sz="1100" b="0" i="0" dirty="0" err="1">
                 <a:solidFill>
                   <a:srgbClr val="64748B"/>
                 </a:solidFill>
                 <a:latin typeface="Calibri"/>
               </a:rPr>
-              <a:t>CheckPage  —  Главная страница проверки</a:t>
-            </a:r>
+              <a:t>CheckPage</a:t>
+            </a:r>
+            <a:r>
+              <a:rPr sz="1100" b="0" i="0" dirty="0">
+                <a:solidFill>
+                  <a:srgbClr val="64748B"/>
+                </a:solidFill>
+                <a:latin typeface="Calibri"/>
+              </a:rPr>
+              <a:t>  </a:t>
+            </a:r>
+            <a:r>
+              <a:rPr lang="en-US" sz="1100" b="0" i="0" dirty="0">
+                <a:solidFill>
+                  <a:srgbClr val="64748B"/>
+                </a:solidFill>
+                <a:latin typeface="Calibri"/>
+              </a:rPr>
+              <a:t>-</a:t>
+            </a:r>
+            <a:r>
+              <a:rPr sz="1100" b="0" i="0" dirty="0">
+                <a:solidFill>
+                  <a:srgbClr val="64748B"/>
+                </a:solidFill>
+                <a:latin typeface="Calibri"/>
+              </a:rPr>
+              <a:t>  </a:t>
+            </a:r>
+            <a:r>
+              <a:rPr sz="1100" b="0" i="0" dirty="0" err="1">
+                <a:solidFill>
+                  <a:srgbClr val="64748B"/>
+                </a:solidFill>
+                <a:latin typeface="Calibri"/>
+              </a:rPr>
+              <a:t>Главная</a:t>
+            </a:r>
+            <a:r>
+              <a:rPr sz="1100" b="0" i="0" dirty="0">
+                <a:solidFill>
+                  <a:srgbClr val="64748B"/>
+                </a:solidFill>
+                <a:latin typeface="Calibri"/>
+              </a:rPr>
+              <a:t> </a:t>
+            </a:r>
+            <a:r>
+              <a:rPr sz="1100" b="0" i="0" dirty="0" err="1">
+                <a:solidFill>
+                  <a:srgbClr val="64748B"/>
+                </a:solidFill>
+                <a:latin typeface="Calibri"/>
+              </a:rPr>
+              <a:t>страница</a:t>
+            </a:r>
+            <a:r>
+              <a:rPr sz="1100" b="0" i="0" dirty="0">
+                <a:solidFill>
+                  <a:srgbClr val="64748B"/>
+                </a:solidFill>
+                <a:latin typeface="Calibri"/>
+              </a:rPr>
+              <a:t> </a:t>
+            </a:r>
+            <a:r>
+              <a:rPr sz="1100" b="0" i="0" dirty="0" err="1">
+                <a:solidFill>
+                  <a:srgbClr val="64748B"/>
+                </a:solidFill>
+                <a:latin typeface="Calibri"/>
+              </a:rPr>
+              <a:t>проверки</a:t>
+            </a:r>
+            <a:endParaRPr sz="1100" b="0" i="0" dirty="0">
+              <a:solidFill>
+                <a:srgbClr val="64748B"/>
+              </a:solidFill>
+              <a:latin typeface="Calibri"/>
+            </a:endParaRPr>
           </a:p>
         </p:txBody>
       </p:sp>
@@ -10411,7 +11414,7 @@
         <p:spPr>
           <a:xfrm>
             <a:off x="685800" y="3072384"/>
-            <a:ext cx="3108960" cy="292608"/>
+            <a:ext cx="3108960" cy="261610"/>
           </a:xfrm>
           <a:prstGeom prst="rect">
             <a:avLst/>
@@ -10426,14 +11429,92 @@
           <a:p>
             <a:pPr algn="l"/>
             <a:r>
-              <a:rPr sz="1100" b="0" i="0">
+              <a:rPr sz="1100" b="0" i="0" dirty="0" err="1">
                 <a:solidFill>
                   <a:srgbClr val="64748B"/>
                 </a:solidFill>
                 <a:latin typeface="Calibri"/>
               </a:rPr>
-              <a:t>HistoryPage  —  История всех проверок</a:t>
-            </a:r>
+              <a:t>HistoryPage</a:t>
+            </a:r>
+            <a:r>
+              <a:rPr sz="1100" b="0" i="0" dirty="0">
+                <a:solidFill>
+                  <a:srgbClr val="64748B"/>
+                </a:solidFill>
+                <a:latin typeface="Calibri"/>
+              </a:rPr>
+              <a:t>  </a:t>
+            </a:r>
+            <a:r>
+              <a:rPr lang="en-US" sz="1100" b="0" i="0" dirty="0">
+                <a:solidFill>
+                  <a:srgbClr val="64748B"/>
+                </a:solidFill>
+                <a:latin typeface="Calibri"/>
+              </a:rPr>
+              <a:t>-</a:t>
+            </a:r>
+            <a:r>
+              <a:rPr sz="1100" b="0" i="0" dirty="0">
+                <a:solidFill>
+                  <a:srgbClr val="64748B"/>
+                </a:solidFill>
+                <a:latin typeface="Calibri"/>
+              </a:rPr>
+              <a:t>  </a:t>
+            </a:r>
+            <a:r>
+              <a:rPr sz="1100" b="0" i="0" dirty="0" err="1">
+                <a:solidFill>
+                  <a:srgbClr val="64748B"/>
+                </a:solidFill>
+                <a:latin typeface="Calibri"/>
+              </a:rPr>
+              <a:t>История</a:t>
+            </a:r>
+            <a:r>
+              <a:rPr sz="1100" b="0" i="0" dirty="0">
+                <a:solidFill>
+                  <a:srgbClr val="64748B"/>
+                </a:solidFill>
+                <a:latin typeface="Calibri"/>
+              </a:rPr>
+              <a:t> </a:t>
+            </a:r>
+            <a:r>
+              <a:rPr sz="1100" b="0" i="0" dirty="0" err="1">
+                <a:solidFill>
+                  <a:srgbClr val="64748B"/>
+                </a:solidFill>
+                <a:latin typeface="Calibri"/>
+              </a:rPr>
+              <a:t>всех</a:t>
+            </a:r>
+            <a:r>
+              <a:rPr sz="1100" b="0" i="0" dirty="0">
+                <a:solidFill>
+                  <a:srgbClr val="64748B"/>
+                </a:solidFill>
+                <a:latin typeface="Calibri"/>
+              </a:rPr>
+              <a:t> </a:t>
+            </a:r>
+            <a:r>
+              <a:rPr sz="1100" b="0" i="0" dirty="0" err="1">
+                <a:solidFill>
+                  <a:srgbClr val="64748B"/>
+                </a:solidFill>
+                <a:latin typeface="Calibri"/>
+              </a:rPr>
+              <a:t>проверок</a:t>
+            </a:r>
+            <a:endParaRPr sz="1100" b="0" i="0" dirty="0">
+              <a:solidFill>
+                <a:srgbClr val="64748B"/>
+              </a:solidFill>
+              <a:latin typeface="Calibri"/>
+            </a:endParaRPr>
           </a:p>
         </p:txBody>
       </p:sp>
@@ -10525,7 +11606,7 @@
         <p:spPr>
           <a:xfrm>
             <a:off x="685800" y="3986784"/>
-            <a:ext cx="3108960" cy="292608"/>
+            <a:ext cx="3108960" cy="261610"/>
           </a:xfrm>
           <a:prstGeom prst="rect">
             <a:avLst/>
@@ -10540,14 +11621,74 @@
           <a:p>
             <a:pPr algn="l"/>
             <a:r>
-              <a:rPr sz="1100" b="0" i="0">
+              <a:rPr sz="1100" b="0" i="0" dirty="0" err="1">
                 <a:solidFill>
                   <a:srgbClr val="64748B"/>
                 </a:solidFill>
                 <a:latin typeface="Calibri"/>
               </a:rPr>
-              <a:t>StudentsPage  —  Ученики и группы</a:t>
-            </a:r>
+              <a:t>StudentsPage</a:t>
+            </a:r>
+            <a:r>
+              <a:rPr sz="1100" b="0" i="0" dirty="0">
+                <a:solidFill>
+                  <a:srgbClr val="64748B"/>
+                </a:solidFill>
+                <a:latin typeface="Calibri"/>
+              </a:rPr>
+              <a:t>  </a:t>
+            </a:r>
+            <a:r>
+              <a:rPr lang="en-US" sz="1100" b="0" i="0" dirty="0">
+                <a:solidFill>
+                  <a:srgbClr val="64748B"/>
+                </a:solidFill>
+                <a:latin typeface="Calibri"/>
+              </a:rPr>
+              <a:t>-</a:t>
+            </a:r>
+            <a:r>
+              <a:rPr sz="1100" b="0" i="0" dirty="0">
+                <a:solidFill>
+                  <a:srgbClr val="64748B"/>
+                </a:solidFill>
+                <a:latin typeface="Calibri"/>
+              </a:rPr>
+              <a:t>  </a:t>
+            </a:r>
+            <a:r>
+              <a:rPr sz="1100" b="0" i="0" dirty="0" err="1">
+                <a:solidFill>
+                  <a:srgbClr val="64748B"/>
+                </a:solidFill>
+                <a:latin typeface="Calibri"/>
+              </a:rPr>
+              <a:t>Ученики</a:t>
+            </a:r>
+            <a:r>
+              <a:rPr sz="1100" b="0" i="0" dirty="0">
+                <a:solidFill>
+                  <a:srgbClr val="64748B"/>
+                </a:solidFill>
+                <a:latin typeface="Calibri"/>
+              </a:rPr>
+              <a:t> и </a:t>
+            </a:r>
+            <a:r>
+              <a:rPr sz="1100" b="0" i="0" dirty="0" err="1">
+                <a:solidFill>
+                  <a:srgbClr val="64748B"/>
+                </a:solidFill>
+                <a:latin typeface="Calibri"/>
+              </a:rPr>
+              <a:t>группы</a:t>
+            </a:r>
+            <a:endParaRPr sz="1100" b="0" i="0" dirty="0">
+              <a:solidFill>
+                <a:srgbClr val="64748B"/>
+              </a:solidFill>
+              <a:latin typeface="Calibri"/>
+            </a:endParaRPr>
           </a:p>
         </p:txBody>
       </p:sp>
@@ -10639,7 +11780,7 @@
         <p:spPr>
           <a:xfrm>
             <a:off x="685800" y="4901184"/>
-            <a:ext cx="3108960" cy="292608"/>
+            <a:ext cx="3108960" cy="261610"/>
           </a:xfrm>
           <a:prstGeom prst="rect">
             <a:avLst/>
@@ -10654,14 +11795,92 @@
           <a:p>
             <a:pPr algn="l"/>
             <a:r>
-              <a:rPr sz="1100" b="0" i="0">
+              <a:rPr sz="1100" b="0" i="0" dirty="0" err="1">
                 <a:solidFill>
                   <a:srgbClr val="64748B"/>
                 </a:solidFill>
                 <a:latin typeface="Calibri"/>
               </a:rPr>
-              <a:t>FunctionsPage  —  Мои функции + галерея</a:t>
-            </a:r>
+              <a:t>FunctionsPage</a:t>
+            </a:r>
+            <a:r>
+              <a:rPr sz="1100" b="0" i="0" dirty="0">
+                <a:solidFill>
+                  <a:srgbClr val="64748B"/>
+                </a:solidFill>
+                <a:latin typeface="Calibri"/>
+              </a:rPr>
+              <a:t>  </a:t>
+            </a:r>
+            <a:r>
+              <a:rPr lang="en-US" sz="1100" b="0" i="0" dirty="0">
+                <a:solidFill>
+                  <a:srgbClr val="64748B"/>
+                </a:solidFill>
+                <a:latin typeface="Calibri"/>
+              </a:rPr>
+              <a:t>-</a:t>
+            </a:r>
+            <a:r>
+              <a:rPr sz="1100" b="0" i="0" dirty="0">
+                <a:solidFill>
+                  <a:srgbClr val="64748B"/>
+                </a:solidFill>
+                <a:latin typeface="Calibri"/>
+              </a:rPr>
+              <a:t>  </a:t>
+            </a:r>
+            <a:r>
+              <a:rPr sz="1100" b="0" i="0" dirty="0" err="1">
+                <a:solidFill>
+                  <a:srgbClr val="64748B"/>
+                </a:solidFill>
+                <a:latin typeface="Calibri"/>
+              </a:rPr>
+              <a:t>Мои</a:t>
+            </a:r>
+            <a:r>
+              <a:rPr sz="1100" b="0" i="0" dirty="0">
+                <a:solidFill>
+                  <a:srgbClr val="64748B"/>
+                </a:solidFill>
+                <a:latin typeface="Calibri"/>
+              </a:rPr>
+              <a:t> </a:t>
+            </a:r>
+            <a:r>
+              <a:rPr sz="1100" b="0" i="0" dirty="0" err="1">
+                <a:solidFill>
+                  <a:srgbClr val="64748B"/>
+                </a:solidFill>
+                <a:latin typeface="Calibri"/>
+              </a:rPr>
+              <a:t>функции</a:t>
+            </a:r>
+            <a:r>
+              <a:rPr sz="1100" b="0" i="0" dirty="0">
+                <a:solidFill>
+                  <a:srgbClr val="64748B"/>
+                </a:solidFill>
+                <a:latin typeface="Calibri"/>
+              </a:rPr>
+              <a:t> + </a:t>
+            </a:r>
+            <a:r>
+              <a:rPr sz="1100" b="0" i="0" dirty="0" err="1">
+                <a:solidFill>
+                  <a:srgbClr val="64748B"/>
+                </a:solidFill>
+                <a:latin typeface="Calibri"/>
+              </a:rPr>
+              <a:t>галерея</a:t>
+            </a:r>
+            <a:endParaRPr sz="1100" b="0" i="0" dirty="0">
+              <a:solidFill>
+                <a:srgbClr val="64748B"/>
+              </a:solidFill>
+              <a:latin typeface="Calibri"/>
+            </a:endParaRPr>
           </a:p>
         </p:txBody>
       </p:sp>
@@ -10753,7 +11972,7 @@
         <p:spPr>
           <a:xfrm>
             <a:off x="685800" y="5815584"/>
-            <a:ext cx="3108960" cy="292608"/>
+            <a:ext cx="3108960" cy="261610"/>
           </a:xfrm>
           <a:prstGeom prst="rect">
             <a:avLst/>
@@ -10768,14 +11987,74 @@
           <a:p>
             <a:pPr algn="l"/>
             <a:r>
-              <a:rPr sz="1100" b="0" i="0">
+              <a:rPr sz="1100" b="0" i="0" dirty="0" err="1">
                 <a:solidFill>
                   <a:srgbClr val="64748B"/>
                 </a:solidFill>
                 <a:latin typeface="Calibri"/>
               </a:rPr>
-              <a:t>ProfilePage  —  Профиль и статистика</a:t>
-            </a:r>
+              <a:t>ProfilePage</a:t>
+            </a:r>
+            <a:r>
+              <a:rPr sz="1100" b="0" i="0" dirty="0">
+                <a:solidFill>
+                  <a:srgbClr val="64748B"/>
+                </a:solidFill>
+                <a:latin typeface="Calibri"/>
+              </a:rPr>
+              <a:t>  </a:t>
+            </a:r>
+            <a:r>
+              <a:rPr lang="en-US" sz="1100" b="0" i="0" dirty="0">
+                <a:solidFill>
+                  <a:srgbClr val="64748B"/>
+                </a:solidFill>
+                <a:latin typeface="Calibri"/>
+              </a:rPr>
+              <a:t>-</a:t>
+            </a:r>
+            <a:r>
+              <a:rPr sz="1100" b="0" i="0" dirty="0">
+                <a:solidFill>
+                  <a:srgbClr val="64748B"/>
+                </a:solidFill>
+                <a:latin typeface="Calibri"/>
+              </a:rPr>
+              <a:t>  </a:t>
+            </a:r>
+            <a:r>
+              <a:rPr sz="1100" b="0" i="0" dirty="0" err="1">
+                <a:solidFill>
+                  <a:srgbClr val="64748B"/>
+                </a:solidFill>
+                <a:latin typeface="Calibri"/>
+              </a:rPr>
+              <a:t>Профиль</a:t>
+            </a:r>
+            <a:r>
+              <a:rPr sz="1100" b="0" i="0" dirty="0">
+                <a:solidFill>
+                  <a:srgbClr val="64748B"/>
+                </a:solidFill>
+                <a:latin typeface="Calibri"/>
+              </a:rPr>
+              <a:t> и </a:t>
+            </a:r>
+            <a:r>
+              <a:rPr sz="1100" b="0" i="0" dirty="0" err="1">
+                <a:solidFill>
+                  <a:srgbClr val="64748B"/>
+                </a:solidFill>
+                <a:latin typeface="Calibri"/>
+              </a:rPr>
+              <a:t>статистика</a:t>
+            </a:r>
+            <a:endParaRPr sz="1100" b="0" i="0" dirty="0">
+              <a:solidFill>
+                <a:srgbClr val="64748B"/>
+              </a:solidFill>
+              <a:latin typeface="Calibri"/>
+            </a:endParaRPr>
           </a:p>
         </p:txBody>
       </p:sp>
@@ -10847,14 +12126,92 @@
           <a:p>
             <a:pPr algn="l"/>
             <a:r>
-              <a:rPr sz="1200" b="1" i="0">
+              <a:rPr sz="1200" b="1" i="0" dirty="0" err="1">
                 <a:solidFill>
                   <a:srgbClr val="FFFFFF"/>
                 </a:solidFill>
                 <a:latin typeface="Calibri"/>
               </a:rPr>
-              <a:t>CheckPage — компоненты главной страницы</a:t>
-            </a:r>
+              <a:t>CheckPage</a:t>
+            </a:r>
+            <a:r>
+              <a:rPr sz="1200" b="1" i="0" dirty="0">
+                <a:solidFill>
+                  <a:srgbClr val="FFFFFF"/>
+                </a:solidFill>
+                <a:latin typeface="Calibri"/>
+              </a:rPr>
+              <a:t> </a:t>
+            </a:r>
+            <a:r>
+              <a:rPr lang="en-US" sz="1200" b="1" i="0" dirty="0">
+                <a:solidFill>
+                  <a:srgbClr val="FFFFFF"/>
+                </a:solidFill>
+                <a:latin typeface="Calibri"/>
+              </a:rPr>
+              <a:t>-</a:t>
+            </a:r>
+            <a:r>
+              <a:rPr sz="1200" b="1" i="0" dirty="0">
+                <a:solidFill>
+                  <a:srgbClr val="FFFFFF"/>
+                </a:solidFill>
+                <a:latin typeface="Calibri"/>
+              </a:rPr>
+              <a:t> </a:t>
+            </a:r>
+            <a:r>
+              <a:rPr sz="1200" b="1" i="0" dirty="0" err="1">
+                <a:solidFill>
+                  <a:srgbClr val="FFFFFF"/>
+                </a:solidFill>
+                <a:latin typeface="Calibri"/>
+              </a:rPr>
+              <a:t>компоненты</a:t>
+            </a:r>
+            <a:r>
+              <a:rPr sz="1200" b="1" i="0" dirty="0">
+                <a:solidFill>
+                  <a:srgbClr val="FFFFFF"/>
+                </a:solidFill>
+                <a:latin typeface="Calibri"/>
+              </a:rPr>
+              <a:t> </a:t>
+            </a:r>
+            <a:r>
+              <a:rPr sz="1200" b="1" i="0" dirty="0" err="1">
+                <a:solidFill>
+                  <a:srgbClr val="FFFFFF"/>
+                </a:solidFill>
+                <a:latin typeface="Calibri"/>
+              </a:rPr>
+              <a:t>главной</a:t>
+            </a:r>
+            <a:r>
+              <a:rPr sz="1200" b="1" i="0" dirty="0">
+                <a:solidFill>
+                  <a:srgbClr val="FFFFFF"/>
+                </a:solidFill>
+                <a:latin typeface="Calibri"/>
+              </a:rPr>
+              <a:t> </a:t>
+            </a:r>
+            <a:r>
+              <a:rPr sz="1200" b="1" i="0" dirty="0" err="1">
+                <a:solidFill>
+                  <a:srgbClr val="FFFFFF"/>
+                </a:solidFill>
+                <a:latin typeface="Calibri"/>
+              </a:rPr>
+              <a:t>страницы</a:t>
+            </a:r>
+            <a:endParaRPr sz="1200" b="1" i="0" dirty="0">
+              <a:solidFill>
+                <a:srgbClr val="FFFFFF"/>
+              </a:solidFill>
+              <a:latin typeface="Calibri"/>
+            </a:endParaRPr>
           </a:p>
         </p:txBody>
       </p:sp>
@@ -11751,7 +13108,7 @@
         <p:spPr>
           <a:xfrm>
             <a:off x="4434840" y="3474720"/>
-            <a:ext cx="7223760" cy="1280160"/>
+            <a:ext cx="7223760" cy="1015663"/>
           </a:xfrm>
           <a:prstGeom prst="rect">
             <a:avLst/>
@@ -11766,39 +13123,273 @@
           <a:p>
             <a:pPr algn="l"/>
             <a:r>
-              <a:rPr sz="1200" b="0">
+              <a:rPr sz="1200" b="0" dirty="0" err="1">
                 <a:solidFill>
                   <a:srgbClr val="1E293B"/>
                 </a:solidFill>
                 <a:latin typeface="Calibri"/>
               </a:rPr>
-              <a:t>AuthContext (React Context API)</a:t>
+              <a:t>AuthContext</a:t>
+            </a:r>
+            <a:r>
+              <a:rPr sz="1200" b="0" dirty="0">
+                <a:solidFill>
+                  <a:srgbClr val="1E293B"/>
+                </a:solidFill>
+                <a:latin typeface="Calibri"/>
+              </a:rPr>
+              <a:t> (React Context API)</a:t>
             </a:r>
           </a:p>
           <a:p>
             <a:pPr algn="l"/>
             <a:r>
-              <a:rPr sz="1200" b="0">
+              <a:rPr sz="1200" b="0" dirty="0">
                 <a:solidFill>
                   <a:srgbClr val="1E293B"/>
                 </a:solidFill>
                 <a:latin typeface="Calibri"/>
               </a:rPr>
-              <a:t>JWT-токен хранится в localStorage.
-Axios-перехватчик автоматически добавляет
-Authorization: Bearer &lt;token&gt; к каждому запросу.</a:t>
+              <a:t>JWT-</a:t>
+            </a:r>
+            <a:r>
+              <a:rPr sz="1200" b="0" dirty="0" err="1">
+                <a:solidFill>
+                  <a:srgbClr val="1E293B"/>
+                </a:solidFill>
+                <a:latin typeface="Calibri"/>
+              </a:rPr>
+              <a:t>токен</a:t>
+            </a:r>
+            <a:r>
+              <a:rPr sz="1200" b="0" dirty="0">
+                <a:solidFill>
+                  <a:srgbClr val="1E293B"/>
+                </a:solidFill>
+                <a:latin typeface="Calibri"/>
+              </a:rPr>
+              <a:t> </a:t>
+            </a:r>
+            <a:r>
+              <a:rPr sz="1200" b="0" dirty="0" err="1">
+                <a:solidFill>
+                  <a:srgbClr val="1E293B"/>
+                </a:solidFill>
+                <a:latin typeface="Calibri"/>
+              </a:rPr>
+              <a:t>хранится</a:t>
+            </a:r>
+            <a:r>
+              <a:rPr sz="1200" b="0" dirty="0">
+                <a:solidFill>
+                  <a:srgbClr val="1E293B"/>
+                </a:solidFill>
+                <a:latin typeface="Calibri"/>
+              </a:rPr>
+              <a:t> в </a:t>
+            </a:r>
+            <a:r>
+              <a:rPr sz="1200" b="0" dirty="0" err="1">
+                <a:solidFill>
+                  <a:srgbClr val="1E293B"/>
+                </a:solidFill>
+                <a:latin typeface="Calibri"/>
+              </a:rPr>
+              <a:t>localStorage</a:t>
+            </a:r>
+            <a:r>
+              <a:rPr sz="1200" b="0" dirty="0">
+                <a:solidFill>
+                  <a:srgbClr val="1E293B"/>
+                </a:solidFill>
+                <a:latin typeface="Calibri"/>
+              </a:rPr>
+              <a:t>.
+Axios-</a:t>
+            </a:r>
+            <a:r>
+              <a:rPr sz="1200" b="0" dirty="0" err="1">
+                <a:solidFill>
+                  <a:srgbClr val="1E293B"/>
+                </a:solidFill>
+                <a:latin typeface="Calibri"/>
+              </a:rPr>
+              <a:t>перехватчик</a:t>
+            </a:r>
+            <a:r>
+              <a:rPr sz="1200" b="0" dirty="0">
+                <a:solidFill>
+                  <a:srgbClr val="1E293B"/>
+                </a:solidFill>
+                <a:latin typeface="Calibri"/>
+              </a:rPr>
+              <a:t> </a:t>
+            </a:r>
+            <a:r>
+              <a:rPr sz="1200" b="0" dirty="0" err="1">
+                <a:solidFill>
+                  <a:srgbClr val="1E293B"/>
+                </a:solidFill>
+                <a:latin typeface="Calibri"/>
+              </a:rPr>
+              <a:t>автоматически</a:t>
+            </a:r>
+            <a:r>
+              <a:rPr sz="1200" b="0" dirty="0">
+                <a:solidFill>
+                  <a:srgbClr val="1E293B"/>
+                </a:solidFill>
+                <a:latin typeface="Calibri"/>
+              </a:rPr>
+              <a:t> </a:t>
+            </a:r>
+            <a:r>
+              <a:rPr sz="1200" b="0" dirty="0" err="1">
+                <a:solidFill>
+                  <a:srgbClr val="1E293B"/>
+                </a:solidFill>
+                <a:latin typeface="Calibri"/>
+              </a:rPr>
+              <a:t>добавляет</a:t>
+            </a:r>
+            <a:r>
+              <a:rPr sz="1200" b="0" dirty="0">
+                <a:solidFill>
+                  <a:srgbClr val="1E293B"/>
+                </a:solidFill>
+                <a:latin typeface="Calibri"/>
+              </a:rPr>
+              <a:t>
+Authorization: Bearer &lt;token&gt; к </a:t>
+            </a:r>
+            <a:r>
+              <a:rPr sz="1200" b="0" dirty="0" err="1">
+                <a:solidFill>
+                  <a:srgbClr val="1E293B"/>
+                </a:solidFill>
+                <a:latin typeface="Calibri"/>
+              </a:rPr>
+              <a:t>каждому</a:t>
+            </a:r>
+            <a:r>
+              <a:rPr sz="1200" b="0" dirty="0">
+                <a:solidFill>
+                  <a:srgbClr val="1E293B"/>
+                </a:solidFill>
+                <a:latin typeface="Calibri"/>
+              </a:rPr>
+              <a:t> </a:t>
+            </a:r>
+            <a:r>
+              <a:rPr sz="1200" b="0" dirty="0" err="1">
+                <a:solidFill>
+                  <a:srgbClr val="1E293B"/>
+                </a:solidFill>
+                <a:latin typeface="Calibri"/>
+              </a:rPr>
+              <a:t>запросу</a:t>
+            </a:r>
+            <a:r>
+              <a:rPr sz="1200" b="0" dirty="0">
+                <a:solidFill>
+                  <a:srgbClr val="1E293B"/>
+                </a:solidFill>
+                <a:latin typeface="Calibri"/>
+              </a:rPr>
+              <a:t>.</a:t>
             </a:r>
           </a:p>
           <a:p>
             <a:pPr algn="l"/>
             <a:r>
-              <a:rPr sz="1200" b="0">
+              <a:rPr sz="1200" b="0" dirty="0" err="1">
                 <a:solidFill>
                   <a:srgbClr val="1E293B"/>
                 </a:solidFill>
                 <a:latin typeface="Calibri"/>
               </a:rPr>
-              <a:t>При 401 — выход из системы.</a:t>
+              <a:t>При</a:t>
+            </a:r>
+            <a:r>
+              <a:rPr sz="1200" b="0" dirty="0">
+                <a:solidFill>
+                  <a:srgbClr val="1E293B"/>
+                </a:solidFill>
+                <a:latin typeface="Calibri"/>
+              </a:rPr>
+              <a:t> 401 </a:t>
+            </a:r>
+            <a:r>
+              <a:rPr lang="en-US" sz="1200" b="0" dirty="0">
+                <a:solidFill>
+                  <a:srgbClr val="1E293B"/>
+                </a:solidFill>
+                <a:latin typeface="Calibri"/>
+              </a:rPr>
+              <a:t>-</a:t>
+            </a:r>
+            <a:r>
+              <a:rPr sz="1200" b="0" dirty="0">
+                <a:solidFill>
+                  <a:srgbClr val="1E293B"/>
+                </a:solidFill>
+                <a:latin typeface="Calibri"/>
+              </a:rPr>
+              <a:t> </a:t>
+            </a:r>
+            <a:r>
+              <a:rPr sz="1200" b="0" dirty="0" err="1">
+                <a:solidFill>
+                  <a:srgbClr val="1E293B"/>
+                </a:solidFill>
+                <a:latin typeface="Calibri"/>
+              </a:rPr>
+              <a:t>выход</a:t>
+            </a:r>
+            <a:r>
+              <a:rPr sz="1200" b="0" dirty="0">
+                <a:solidFill>
+                  <a:srgbClr val="1E293B"/>
+                </a:solidFill>
+                <a:latin typeface="Calibri"/>
+              </a:rPr>
+              <a:t> </a:t>
+            </a:r>
+            <a:r>
+              <a:rPr sz="1200" b="0" dirty="0" err="1">
+                <a:solidFill>
+                  <a:srgbClr val="1E293B"/>
+                </a:solidFill>
+                <a:latin typeface="Calibri"/>
+              </a:rPr>
+              <a:t>из</a:t>
+            </a:r>
+            <a:r>
+              <a:rPr sz="1200" b="0" dirty="0">
+                <a:solidFill>
+                  <a:srgbClr val="1E293B"/>
+                </a:solidFill>
+                <a:latin typeface="Calibri"/>
+              </a:rPr>
+              <a:t> </a:t>
+            </a:r>
+            <a:r>
+              <a:rPr sz="1200" b="0" dirty="0" err="1">
+                <a:solidFill>
+                  <a:srgbClr val="1E293B"/>
+                </a:solidFill>
+                <a:latin typeface="Calibri"/>
+              </a:rPr>
+              <a:t>системы</a:t>
+            </a:r>
+            <a:r>
+              <a:rPr sz="1200" b="0" dirty="0">
+                <a:solidFill>
+                  <a:srgbClr val="1E293B"/>
+                </a:solidFill>
+                <a:latin typeface="Calibri"/>
+              </a:rPr>
+              <a:t>.</a:t>
             </a:r>
           </a:p>
         </p:txBody>
@@ -11856,7 +13447,7 @@
         <p:spPr>
           <a:xfrm>
             <a:off x="4407408" y="5047488"/>
-            <a:ext cx="7315200" cy="1508760"/>
+            <a:ext cx="7315200" cy="938719"/>
           </a:xfrm>
           <a:prstGeom prst="rect">
             <a:avLst/>
@@ -11871,16 +13462,196 @@
           <a:p>
             <a:pPr algn="l"/>
             <a:r>
-              <a:rPr sz="1100" b="0" i="0">
+              <a:rPr sz="1100" b="0" i="0" dirty="0">
                 <a:solidFill>
                   <a:srgbClr val="A5B4FC"/>
                 </a:solidFill>
                 <a:latin typeface="Calibri"/>
               </a:rPr>
-              <a:t>// types.ts — все API-ответы строго типизированы
-interface CheckRecord { id: string; score: number | null;
-  errors: ...; corrected_text?: string; ... }
-interface Fn { id: string; name: string; system_prompt?: string; ... }
+              <a:t>// </a:t>
+            </a:r>
+            <a:r>
+              <a:rPr sz="1100" b="0" i="0" dirty="0" err="1">
+                <a:solidFill>
+                  <a:srgbClr val="A5B4FC"/>
+                </a:solidFill>
+                <a:latin typeface="Calibri"/>
+              </a:rPr>
+              <a:t>types.ts</a:t>
+            </a:r>
+            <a:r>
+              <a:rPr sz="1100" b="0" i="0" dirty="0">
+                <a:solidFill>
+                  <a:srgbClr val="A5B4FC"/>
+                </a:solidFill>
+                <a:latin typeface="Calibri"/>
+              </a:rPr>
+              <a:t> </a:t>
+            </a:r>
+            <a:r>
+              <a:rPr lang="en-US" sz="1100" b="0" i="0" dirty="0">
+                <a:solidFill>
+                  <a:srgbClr val="A5B4FC"/>
+                </a:solidFill>
+                <a:latin typeface="Calibri"/>
+              </a:rPr>
+              <a:t>-</a:t>
+            </a:r>
+            <a:r>
+              <a:rPr sz="1100" b="0" i="0" dirty="0">
+                <a:solidFill>
+                  <a:srgbClr val="A5B4FC"/>
+                </a:solidFill>
+                <a:latin typeface="Calibri"/>
+              </a:rPr>
+              <a:t> </a:t>
+            </a:r>
+            <a:r>
+              <a:rPr sz="1100" b="0" i="0" dirty="0" err="1">
+                <a:solidFill>
+                  <a:srgbClr val="A5B4FC"/>
+                </a:solidFill>
+                <a:latin typeface="Calibri"/>
+              </a:rPr>
+              <a:t>все</a:t>
+            </a:r>
+            <a:r>
+              <a:rPr sz="1100" b="0" i="0" dirty="0">
+                <a:solidFill>
+                  <a:srgbClr val="A5B4FC"/>
+                </a:solidFill>
+                <a:latin typeface="Calibri"/>
+              </a:rPr>
+              <a:t> API-</a:t>
+            </a:r>
+            <a:r>
+              <a:rPr sz="1100" b="0" i="0" dirty="0" err="1">
+                <a:solidFill>
+                  <a:srgbClr val="A5B4FC"/>
+                </a:solidFill>
+                <a:latin typeface="Calibri"/>
+              </a:rPr>
+              <a:t>ответы</a:t>
+            </a:r>
+            <a:r>
+              <a:rPr sz="1100" b="0" i="0" dirty="0">
+                <a:solidFill>
+                  <a:srgbClr val="A5B4FC"/>
+                </a:solidFill>
+                <a:latin typeface="Calibri"/>
+              </a:rPr>
+              <a:t> </a:t>
+            </a:r>
+            <a:r>
+              <a:rPr sz="1100" b="0" i="0" dirty="0" err="1">
+                <a:solidFill>
+                  <a:srgbClr val="A5B4FC"/>
+                </a:solidFill>
+                <a:latin typeface="Calibri"/>
+              </a:rPr>
+              <a:t>строго</a:t>
+            </a:r>
+            <a:r>
+              <a:rPr sz="1100" b="0" i="0" dirty="0">
+                <a:solidFill>
+                  <a:srgbClr val="A5B4FC"/>
+                </a:solidFill>
+                <a:latin typeface="Calibri"/>
+              </a:rPr>
+              <a:t> </a:t>
+            </a:r>
+            <a:r>
+              <a:rPr sz="1100" b="0" i="0" dirty="0" err="1">
+                <a:solidFill>
+                  <a:srgbClr val="A5B4FC"/>
+                </a:solidFill>
+                <a:latin typeface="Calibri"/>
+              </a:rPr>
+              <a:t>типизированы</a:t>
+            </a:r>
+            <a:r>
+              <a:rPr sz="1100" b="0" i="0" dirty="0">
+                <a:solidFill>
+                  <a:srgbClr val="A5B4FC"/>
+                </a:solidFill>
+                <a:latin typeface="Calibri"/>
+              </a:rPr>
+              <a:t>
+interface </a:t>
+            </a:r>
+            <a:r>
+              <a:rPr sz="1100" b="0" i="0" dirty="0" err="1">
+                <a:solidFill>
+                  <a:srgbClr val="A5B4FC"/>
+                </a:solidFill>
+                <a:latin typeface="Calibri"/>
+              </a:rPr>
+              <a:t>CheckRecord</a:t>
+            </a:r>
+            <a:r>
+              <a:rPr sz="1100" b="0" i="0" dirty="0">
+                <a:solidFill>
+                  <a:srgbClr val="A5B4FC"/>
+                </a:solidFill>
+                <a:latin typeface="Calibri"/>
+              </a:rPr>
+              <a:t> { id: string; score: number | null;
+  errors: ...; </a:t>
+            </a:r>
+            <a:r>
+              <a:rPr sz="1100" b="0" i="0" dirty="0" err="1">
+                <a:solidFill>
+                  <a:srgbClr val="A5B4FC"/>
+                </a:solidFill>
+                <a:latin typeface="Calibri"/>
+              </a:rPr>
+              <a:t>corrected_text</a:t>
+            </a:r>
+            <a:r>
+              <a:rPr sz="1100" b="0" i="0" dirty="0">
+                <a:solidFill>
+                  <a:srgbClr val="A5B4FC"/>
+                </a:solidFill>
+                <a:latin typeface="Calibri"/>
+              </a:rPr>
+              <a:t>?: string; ... }
+interface </a:t>
+            </a:r>
+            <a:r>
+              <a:rPr sz="1100" b="0" i="0" dirty="0" err="1">
+                <a:solidFill>
+                  <a:srgbClr val="A5B4FC"/>
+                </a:solidFill>
+                <a:latin typeface="Calibri"/>
+              </a:rPr>
+              <a:t>Fn</a:t>
+            </a:r>
+            <a:r>
+              <a:rPr sz="1100" b="0" i="0" dirty="0">
+                <a:solidFill>
+                  <a:srgbClr val="A5B4FC"/>
+                </a:solidFill>
+                <a:latin typeface="Calibri"/>
+              </a:rPr>
+              <a:t> { id: string; name: string; </a:t>
+            </a:r>
+            <a:r>
+              <a:rPr sz="1100" b="0" i="0" dirty="0" err="1">
+                <a:solidFill>
+                  <a:srgbClr val="A5B4FC"/>
+                </a:solidFill>
+                <a:latin typeface="Calibri"/>
+              </a:rPr>
+              <a:t>system_prompt</a:t>
+            </a:r>
+            <a:r>
+              <a:rPr sz="1100" b="0" i="0" dirty="0">
+                <a:solidFill>
+                  <a:srgbClr val="A5B4FC"/>
+                </a:solidFill>
+                <a:latin typeface="Calibri"/>
+              </a:rPr>
+              <a:t>?: string; ... }
 interface Pupil { id: string; name: string; }</a:t>
             </a:r>
           </a:p>
@@ -12022,13 +13793,166 @@
           <a:p>
             <a:pPr algn="l"/>
             <a:r>
-              <a:rPr sz="1300" b="0" i="0">
+              <a:rPr sz="1300" b="0" i="0" dirty="0" err="1">
                 <a:solidFill>
                   <a:srgbClr val="E0E7FF"/>
                 </a:solidFill>
                 <a:latin typeface="Calibri"/>
               </a:rPr>
-              <a:t>Токен валидируется на бэкенде через supabase.auth.get_user() — без ручного decode</a:t>
+              <a:t>Токен</a:t>
+            </a:r>
+            <a:r>
+              <a:rPr sz="1300" b="0" i="0" dirty="0">
+                <a:solidFill>
+                  <a:srgbClr val="E0E7FF"/>
+                </a:solidFill>
+                <a:latin typeface="Calibri"/>
+              </a:rPr>
+              <a:t> </a:t>
+            </a:r>
+            <a:r>
+              <a:rPr sz="1300" b="0" i="0" dirty="0" err="1">
+                <a:solidFill>
+                  <a:srgbClr val="E0E7FF"/>
+                </a:solidFill>
+                <a:latin typeface="Calibri"/>
+              </a:rPr>
+              <a:t>валидируется</a:t>
+            </a:r>
+            <a:r>
+              <a:rPr sz="1300" b="0" i="0" dirty="0">
+                <a:solidFill>
+                  <a:srgbClr val="E0E7FF"/>
+                </a:solidFill>
+                <a:latin typeface="Calibri"/>
+              </a:rPr>
+              <a:t> </a:t>
+            </a:r>
+            <a:r>
+              <a:rPr sz="1300" b="0" i="0" dirty="0" err="1">
+                <a:solidFill>
+                  <a:srgbClr val="E0E7FF"/>
+                </a:solidFill>
+                <a:latin typeface="Calibri"/>
+              </a:rPr>
+              <a:t>на</a:t>
+            </a:r>
+            <a:r>
+              <a:rPr sz="1300" b="0" i="0" dirty="0">
+                <a:solidFill>
+                  <a:srgbClr val="E0E7FF"/>
+                </a:solidFill>
+                <a:latin typeface="Calibri"/>
+              </a:rPr>
+              <a:t> </a:t>
+            </a:r>
+            <a:r>
+              <a:rPr sz="1300" b="0" i="0" dirty="0" err="1">
+                <a:solidFill>
+                  <a:srgbClr val="E0E7FF"/>
+                </a:solidFill>
+                <a:latin typeface="Calibri"/>
+              </a:rPr>
+              <a:t>бэкенде</a:t>
+            </a:r>
+            <a:r>
+              <a:rPr sz="1300" b="0" i="0" dirty="0">
+                <a:solidFill>
+                  <a:srgbClr val="E0E7FF"/>
+                </a:solidFill>
+                <a:latin typeface="Calibri"/>
+              </a:rPr>
+              <a:t> </a:t>
+            </a:r>
+            <a:r>
+              <a:rPr sz="1300" b="0" i="0" dirty="0" err="1">
+                <a:solidFill>
+                  <a:srgbClr val="E0E7FF"/>
+                </a:solidFill>
+                <a:latin typeface="Calibri"/>
+              </a:rPr>
+              <a:t>через</a:t>
+            </a:r>
+            <a:r>
+              <a:rPr sz="1300" b="0" i="0" dirty="0">
+                <a:solidFill>
+                  <a:srgbClr val="E0E7FF"/>
+                </a:solidFill>
+                <a:latin typeface="Calibri"/>
+              </a:rPr>
+              <a:t> </a:t>
+            </a:r>
+            <a:r>
+              <a:rPr sz="1300" b="0" i="0" dirty="0" err="1">
+                <a:solidFill>
+                  <a:srgbClr val="E0E7FF"/>
+                </a:solidFill>
+                <a:latin typeface="Calibri"/>
+              </a:rPr>
+              <a:t>supabase.auth.get_user</a:t>
+            </a:r>
+            <a:r>
+              <a:rPr sz="1300" b="0" i="0" dirty="0">
+                <a:solidFill>
+                  <a:srgbClr val="E0E7FF"/>
+                </a:solidFill>
+                <a:latin typeface="Calibri"/>
+              </a:rPr>
+              <a:t>() </a:t>
+            </a:r>
+            <a:r>
+              <a:rPr lang="en-US" sz="1300" b="0" i="0" dirty="0">
+                <a:solidFill>
+                  <a:srgbClr val="E0E7FF"/>
+                </a:solidFill>
+                <a:latin typeface="Calibri"/>
+              </a:rPr>
+              <a:t>-</a:t>
+            </a:r>
+            <a:r>
+              <a:rPr sz="1300" b="0" i="0" dirty="0">
+                <a:solidFill>
+                  <a:srgbClr val="E0E7FF"/>
+                </a:solidFill>
+                <a:latin typeface="Calibri"/>
+              </a:rPr>
+              <a:t> </a:t>
+            </a:r>
+            <a:r>
+              <a:rPr sz="1300" b="0" i="0" dirty="0" err="1">
+                <a:solidFill>
+                  <a:srgbClr val="E0E7FF"/>
+                </a:solidFill>
+                <a:latin typeface="Calibri"/>
+              </a:rPr>
+              <a:t>без</a:t>
+            </a:r>
+            <a:r>
+              <a:rPr sz="1300" b="0" i="0" dirty="0">
+                <a:solidFill>
+                  <a:srgbClr val="E0E7FF"/>
+                </a:solidFill>
+                <a:latin typeface="Calibri"/>
+              </a:rPr>
+              <a:t> </a:t>
+            </a:r>
+            <a:r>
+              <a:rPr sz="1300" b="0" i="0" dirty="0" err="1">
+                <a:solidFill>
+                  <a:srgbClr val="E0E7FF"/>
+                </a:solidFill>
+                <a:latin typeface="Calibri"/>
+              </a:rPr>
+              <a:t>ручного</a:t>
+            </a:r>
+            <a:r>
+              <a:rPr sz="1300" b="0" i="0" dirty="0">
+                <a:solidFill>
+                  <a:srgbClr val="E0E7FF"/>
+                </a:solidFill>
+                <a:latin typeface="Calibri"/>
+              </a:rPr>
+              <a:t> decode</a:t>
             </a:r>
           </a:p>
         </p:txBody>
@@ -13541,7 +15465,7 @@
         <p:spPr>
           <a:xfrm>
             <a:off x="6309360" y="3931920"/>
-            <a:ext cx="5303520" cy="2651760"/>
+            <a:ext cx="5303520" cy="1785104"/>
           </a:xfrm>
           <a:prstGeom prst="rect">
             <a:avLst/>
@@ -13556,19 +15480,253 @@
           <a:p>
             <a:pPr algn="l"/>
             <a:r>
-              <a:rPr sz="1000" b="0" i="0">
+              <a:rPr sz="1000" b="0" i="0" dirty="0">
                 <a:solidFill>
                   <a:srgbClr val="A5B4FC"/>
                 </a:solidFill>
                 <a:latin typeface="Calibri"/>
               </a:rPr>
-              <a:t>// api.ts — единственное место с токеном
-const api = axios.create({ baseURL: BASE_URL });
-api.interceptors.request.use((config) =&gt; {
-  const token = localStorage
-    .getItem('access_token');
+              <a:t>// </a:t>
+            </a:r>
+            <a:r>
+              <a:rPr sz="1000" b="0" i="0" dirty="0" err="1">
+                <a:solidFill>
+                  <a:srgbClr val="A5B4FC"/>
+                </a:solidFill>
+                <a:latin typeface="Calibri"/>
+              </a:rPr>
+              <a:t>api.ts</a:t>
+            </a:r>
+            <a:r>
+              <a:rPr sz="1000" b="0" i="0" dirty="0">
+                <a:solidFill>
+                  <a:srgbClr val="A5B4FC"/>
+                </a:solidFill>
+                <a:latin typeface="Calibri"/>
+              </a:rPr>
+              <a:t> </a:t>
+            </a:r>
+            <a:r>
+              <a:rPr lang="en-US" sz="1000" b="0" i="0" dirty="0">
+                <a:solidFill>
+                  <a:srgbClr val="A5B4FC"/>
+                </a:solidFill>
+                <a:latin typeface="Calibri"/>
+              </a:rPr>
+              <a:t>-</a:t>
+            </a:r>
+            <a:r>
+              <a:rPr sz="1000" b="0" i="0" dirty="0">
+                <a:solidFill>
+                  <a:srgbClr val="A5B4FC"/>
+                </a:solidFill>
+                <a:latin typeface="Calibri"/>
+              </a:rPr>
+              <a:t> </a:t>
+            </a:r>
+            <a:r>
+              <a:rPr sz="1000" b="0" i="0" dirty="0" err="1">
+                <a:solidFill>
+                  <a:srgbClr val="A5B4FC"/>
+                </a:solidFill>
+                <a:latin typeface="Calibri"/>
+              </a:rPr>
+              <a:t>единственное</a:t>
+            </a:r>
+            <a:r>
+              <a:rPr sz="1000" b="0" i="0" dirty="0">
+                <a:solidFill>
+                  <a:srgbClr val="A5B4FC"/>
+                </a:solidFill>
+                <a:latin typeface="Calibri"/>
+              </a:rPr>
+              <a:t> </a:t>
+            </a:r>
+            <a:r>
+              <a:rPr sz="1000" b="0" i="0" dirty="0" err="1">
+                <a:solidFill>
+                  <a:srgbClr val="A5B4FC"/>
+                </a:solidFill>
+                <a:latin typeface="Calibri"/>
+              </a:rPr>
+              <a:t>место</a:t>
+            </a:r>
+            <a:r>
+              <a:rPr sz="1000" b="0" i="0" dirty="0">
+                <a:solidFill>
+                  <a:srgbClr val="A5B4FC"/>
+                </a:solidFill>
+                <a:latin typeface="Calibri"/>
+              </a:rPr>
+              <a:t> с </a:t>
+            </a:r>
+            <a:r>
+              <a:rPr sz="1000" b="0" i="0" dirty="0" err="1">
+                <a:solidFill>
+                  <a:srgbClr val="A5B4FC"/>
+                </a:solidFill>
+                <a:latin typeface="Calibri"/>
+              </a:rPr>
+              <a:t>токеном</a:t>
+            </a:r>
+            <a:r>
+              <a:rPr sz="1000" b="0" i="0" dirty="0">
+                <a:solidFill>
+                  <a:srgbClr val="A5B4FC"/>
+                </a:solidFill>
+                <a:latin typeface="Calibri"/>
+              </a:rPr>
+              <a:t>
+const </a:t>
+            </a:r>
+            <a:r>
+              <a:rPr sz="1000" b="0" i="0" dirty="0" err="1">
+                <a:solidFill>
+                  <a:srgbClr val="A5B4FC"/>
+                </a:solidFill>
+                <a:latin typeface="Calibri"/>
+              </a:rPr>
+              <a:t>api</a:t>
+            </a:r>
+            <a:r>
+              <a:rPr sz="1000" b="0" i="0" dirty="0">
+                <a:solidFill>
+                  <a:srgbClr val="A5B4FC"/>
+                </a:solidFill>
+                <a:latin typeface="Calibri"/>
+              </a:rPr>
+              <a:t> = </a:t>
+            </a:r>
+            <a:r>
+              <a:rPr sz="1000" b="0" i="0" dirty="0" err="1">
+                <a:solidFill>
+                  <a:srgbClr val="A5B4FC"/>
+                </a:solidFill>
+                <a:latin typeface="Calibri"/>
+              </a:rPr>
+              <a:t>axios.create</a:t>
+            </a:r>
+            <a:r>
+              <a:rPr sz="1000" b="0" i="0" dirty="0">
+                <a:solidFill>
+                  <a:srgbClr val="A5B4FC"/>
+                </a:solidFill>
+                <a:latin typeface="Calibri"/>
+              </a:rPr>
+              <a:t>({ </a:t>
+            </a:r>
+            <a:r>
+              <a:rPr sz="1000" b="0" i="0" dirty="0" err="1">
+                <a:solidFill>
+                  <a:srgbClr val="A5B4FC"/>
+                </a:solidFill>
+                <a:latin typeface="Calibri"/>
+              </a:rPr>
+              <a:t>baseURL</a:t>
+            </a:r>
+            <a:r>
+              <a:rPr sz="1000" b="0" i="0" dirty="0">
+                <a:solidFill>
+                  <a:srgbClr val="A5B4FC"/>
+                </a:solidFill>
+                <a:latin typeface="Calibri"/>
+              </a:rPr>
+              <a:t>: BASE_URL });
+</a:t>
+            </a:r>
+            <a:r>
+              <a:rPr sz="1000" b="0" i="0" dirty="0" err="1">
+                <a:solidFill>
+                  <a:srgbClr val="A5B4FC"/>
+                </a:solidFill>
+                <a:latin typeface="Calibri"/>
+              </a:rPr>
+              <a:t>api.interceptors.request.use</a:t>
+            </a:r>
+            <a:r>
+              <a:rPr sz="1000" b="0" i="0" dirty="0">
+                <a:solidFill>
+                  <a:srgbClr val="A5B4FC"/>
+                </a:solidFill>
+                <a:latin typeface="Calibri"/>
+              </a:rPr>
+              <a:t>((config) =&gt; {
+  const token = </a:t>
+            </a:r>
+            <a:r>
+              <a:rPr sz="1000" b="0" i="0" dirty="0" err="1">
+                <a:solidFill>
+                  <a:srgbClr val="A5B4FC"/>
+                </a:solidFill>
+                <a:latin typeface="Calibri"/>
+              </a:rPr>
+              <a:t>localStorage</a:t>
+            </a:r>
+            <a:r>
+              <a:rPr sz="1000" b="0" i="0" dirty="0">
+                <a:solidFill>
+                  <a:srgbClr val="A5B4FC"/>
+                </a:solidFill>
+                <a:latin typeface="Calibri"/>
+              </a:rPr>
+              <a:t>
+    .</a:t>
+            </a:r>
+            <a:r>
+              <a:rPr sz="1000" b="0" i="0" dirty="0" err="1">
+                <a:solidFill>
+                  <a:srgbClr val="A5B4FC"/>
+                </a:solidFill>
+                <a:latin typeface="Calibri"/>
+              </a:rPr>
+              <a:t>getItem</a:t>
+            </a:r>
+            <a:r>
+              <a:rPr sz="1000" b="0" i="0" dirty="0">
+                <a:solidFill>
+                  <a:srgbClr val="A5B4FC"/>
+                </a:solidFill>
+                <a:latin typeface="Calibri"/>
+              </a:rPr>
+              <a:t>('</a:t>
+            </a:r>
+            <a:r>
+              <a:rPr sz="1000" b="0" i="0" dirty="0" err="1">
+                <a:solidFill>
+                  <a:srgbClr val="A5B4FC"/>
+                </a:solidFill>
+                <a:latin typeface="Calibri"/>
+              </a:rPr>
+              <a:t>access_token</a:t>
+            </a:r>
+            <a:r>
+              <a:rPr sz="1000" b="0" i="0" dirty="0">
+                <a:solidFill>
+                  <a:srgbClr val="A5B4FC"/>
+                </a:solidFill>
+                <a:latin typeface="Calibri"/>
+              </a:rPr>
+              <a:t>');
   if (token)
-    config.headers.Authorization =
+    </a:t>
+            </a:r>
+            <a:r>
+              <a:rPr sz="1000" b="0" i="0" dirty="0" err="1">
+                <a:solidFill>
+                  <a:srgbClr val="A5B4FC"/>
+                </a:solidFill>
+                <a:latin typeface="Calibri"/>
+              </a:rPr>
+              <a:t>config.headers.Authorization</a:t>
+            </a:r>
+            <a:r>
+              <a:rPr sz="1000" b="0" i="0" dirty="0">
+                <a:solidFill>
+                  <a:srgbClr val="A5B4FC"/>
+                </a:solidFill>
+                <a:latin typeface="Calibri"/>
+              </a:rPr>
+              <a:t> =
       `Bearer ${token}`;
   return config;
 });</a:t>
@@ -15993,7 +18151,7 @@
         <p:spPr>
           <a:xfrm>
             <a:off x="740664" y="5889752"/>
-            <a:ext cx="10789920" cy="594360"/>
+            <a:ext cx="10789920" cy="461665"/>
           </a:xfrm>
           <a:prstGeom prst="rect">
             <a:avLst/>
@@ -16008,14 +18166,374 @@
           <a:p>
             <a:pPr algn="l"/>
             <a:r>
-              <a:rPr sz="1200" b="0" i="0">
+              <a:rPr sz="1200" b="0" i="0" dirty="0">
                 <a:solidFill>
                   <a:srgbClr val="4F46E5"/>
                 </a:solidFill>
                 <a:latin typeface="Calibri"/>
               </a:rPr>
-              <a:t>💡  checks.errors — JSON-колонка: хранит Python-список объектов ошибок напрямую. SQLAlchemy автоматически
-сериализует/десериализует. Нет JOIN — все данные проверки читаются одним запросом.</a:t>
+              <a:t>💡  </a:t>
+            </a:r>
+            <a:r>
+              <a:rPr sz="1200" b="0" i="0" dirty="0" err="1">
+                <a:solidFill>
+                  <a:srgbClr val="4F46E5"/>
+                </a:solidFill>
+                <a:latin typeface="Calibri"/>
+              </a:rPr>
+              <a:t>checks.errors</a:t>
+            </a:r>
+            <a:r>
+              <a:rPr sz="1200" b="0" i="0" dirty="0">
+                <a:solidFill>
+                  <a:srgbClr val="4F46E5"/>
+                </a:solidFill>
+                <a:latin typeface="Calibri"/>
+              </a:rPr>
+              <a:t> </a:t>
+            </a:r>
+            <a:r>
+              <a:rPr lang="en-US" sz="1200" b="0" i="0" dirty="0">
+                <a:solidFill>
+                  <a:srgbClr val="4F46E5"/>
+                </a:solidFill>
+                <a:latin typeface="Calibri"/>
+              </a:rPr>
+              <a:t>-</a:t>
+            </a:r>
+            <a:r>
+              <a:rPr sz="1200" b="0" i="0" dirty="0">
+                <a:solidFill>
+                  <a:srgbClr val="4F46E5"/>
+                </a:solidFill>
+                <a:latin typeface="Calibri"/>
+              </a:rPr>
+              <a:t> JSON-</a:t>
+            </a:r>
+            <a:r>
+              <a:rPr sz="1200" b="0" i="0" dirty="0" err="1">
+                <a:solidFill>
+                  <a:srgbClr val="4F46E5"/>
+                </a:solidFill>
+                <a:latin typeface="Calibri"/>
+              </a:rPr>
+              <a:t>колонка</a:t>
+            </a:r>
+            <a:r>
+              <a:rPr sz="1200" b="0" i="0" dirty="0">
+                <a:solidFill>
+                  <a:srgbClr val="4F46E5"/>
+                </a:solidFill>
+                <a:latin typeface="Calibri"/>
+              </a:rPr>
+              <a:t>: </a:t>
+            </a:r>
+            <a:r>
+              <a:rPr sz="1200" b="0" i="0" dirty="0" err="1">
+                <a:solidFill>
+                  <a:srgbClr val="4F46E5"/>
+                </a:solidFill>
+                <a:latin typeface="Calibri"/>
+              </a:rPr>
+              <a:t>хранит</a:t>
+            </a:r>
+            <a:r>
+              <a:rPr sz="1200" b="0" i="0" dirty="0">
+                <a:solidFill>
+                  <a:srgbClr val="4F46E5"/>
+                </a:solidFill>
+                <a:latin typeface="Calibri"/>
+              </a:rPr>
+              <a:t> Python-</a:t>
+            </a:r>
+            <a:r>
+              <a:rPr sz="1200" b="0" i="0" dirty="0" err="1">
+                <a:solidFill>
+                  <a:srgbClr val="4F46E5"/>
+                </a:solidFill>
+                <a:latin typeface="Calibri"/>
+              </a:rPr>
+              <a:t>список</a:t>
+            </a:r>
+            <a:r>
+              <a:rPr sz="1200" b="0" i="0" dirty="0">
+                <a:solidFill>
+                  <a:srgbClr val="4F46E5"/>
+                </a:solidFill>
+                <a:latin typeface="Calibri"/>
+              </a:rPr>
+              <a:t> </a:t>
+            </a:r>
+            <a:r>
+              <a:rPr sz="1200" b="0" i="0" dirty="0" err="1">
+                <a:solidFill>
+                  <a:srgbClr val="4F46E5"/>
+                </a:solidFill>
+                <a:latin typeface="Calibri"/>
+              </a:rPr>
+              <a:t>объектов</a:t>
+            </a:r>
+            <a:r>
+              <a:rPr sz="1200" b="0" i="0" dirty="0">
+                <a:solidFill>
+                  <a:srgbClr val="4F46E5"/>
+                </a:solidFill>
+                <a:latin typeface="Calibri"/>
+              </a:rPr>
+              <a:t> </a:t>
+            </a:r>
+            <a:r>
+              <a:rPr sz="1200" b="0" i="0" dirty="0" err="1">
+                <a:solidFill>
+                  <a:srgbClr val="4F46E5"/>
+                </a:solidFill>
+                <a:latin typeface="Calibri"/>
+              </a:rPr>
+              <a:t>ошибок</a:t>
+            </a:r>
+            <a:r>
+              <a:rPr sz="1200" b="0" i="0" dirty="0">
+                <a:solidFill>
+                  <a:srgbClr val="4F46E5"/>
+                </a:solidFill>
+                <a:latin typeface="Calibri"/>
+              </a:rPr>
+              <a:t> </a:t>
+            </a:r>
+            <a:r>
+              <a:rPr sz="1200" b="0" i="0" dirty="0" err="1">
+                <a:solidFill>
+                  <a:srgbClr val="4F46E5"/>
+                </a:solidFill>
+                <a:latin typeface="Calibri"/>
+              </a:rPr>
+              <a:t>напрямую</a:t>
+            </a:r>
+            <a:r>
+              <a:rPr sz="1200" b="0" i="0" dirty="0">
+                <a:solidFill>
+                  <a:srgbClr val="4F46E5"/>
+                </a:solidFill>
+                <a:latin typeface="Calibri"/>
+              </a:rPr>
+              <a:t>. </a:t>
+            </a:r>
+            <a:r>
+              <a:rPr sz="1200" b="0" i="0" dirty="0" err="1">
+                <a:solidFill>
+                  <a:srgbClr val="4F46E5"/>
+                </a:solidFill>
+                <a:latin typeface="Calibri"/>
+              </a:rPr>
+              <a:t>SQLAlchemy</a:t>
+            </a:r>
+            <a:r>
+              <a:rPr sz="1200" b="0" i="0" dirty="0">
+                <a:solidFill>
+                  <a:srgbClr val="4F46E5"/>
+                </a:solidFill>
+                <a:latin typeface="Calibri"/>
+              </a:rPr>
+              <a:t> </a:t>
+            </a:r>
+            <a:r>
+              <a:rPr sz="1200" b="0" i="0" dirty="0" err="1">
+                <a:solidFill>
+                  <a:srgbClr val="4F46E5"/>
+                </a:solidFill>
+                <a:latin typeface="Calibri"/>
+              </a:rPr>
+              <a:t>автоматически</a:t>
+            </a:r>
+            <a:r>
+              <a:rPr sz="1200" b="0" i="0" dirty="0">
+                <a:solidFill>
+                  <a:srgbClr val="4F46E5"/>
+                </a:solidFill>
+                <a:latin typeface="Calibri"/>
+              </a:rPr>
+              <a:t>
+</a:t>
+            </a:r>
+            <a:r>
+              <a:rPr sz="1200" b="0" i="0" dirty="0" err="1">
+                <a:solidFill>
+                  <a:srgbClr val="4F46E5"/>
+                </a:solidFill>
+                <a:latin typeface="Calibri"/>
+              </a:rPr>
+              <a:t>сериализует</a:t>
+            </a:r>
+            <a:r>
+              <a:rPr sz="1200" b="0" i="0" dirty="0">
+                <a:solidFill>
+                  <a:srgbClr val="4F46E5"/>
+                </a:solidFill>
+                <a:latin typeface="Calibri"/>
+              </a:rPr>
+              <a:t>/</a:t>
+            </a:r>
+            <a:r>
+              <a:rPr sz="1200" b="0" i="0" dirty="0" err="1">
+                <a:solidFill>
+                  <a:srgbClr val="4F46E5"/>
+                </a:solidFill>
+                <a:latin typeface="Calibri"/>
+              </a:rPr>
+              <a:t>десериализует</a:t>
+            </a:r>
+            <a:r>
+              <a:rPr sz="1200" b="0" i="0" dirty="0">
+                <a:solidFill>
+                  <a:srgbClr val="4F46E5"/>
+                </a:solidFill>
+                <a:latin typeface="Calibri"/>
+              </a:rPr>
+              <a:t>. </a:t>
+            </a:r>
+            <a:r>
+              <a:rPr sz="1200" b="0" i="0" dirty="0" err="1">
+                <a:solidFill>
+                  <a:srgbClr val="4F46E5"/>
+                </a:solidFill>
+                <a:latin typeface="Calibri"/>
+              </a:rPr>
+              <a:t>Нет</a:t>
+            </a:r>
+            <a:r>
+              <a:rPr sz="1200" b="0" i="0" dirty="0">
+                <a:solidFill>
+                  <a:srgbClr val="4F46E5"/>
+                </a:solidFill>
+                <a:latin typeface="Calibri"/>
+              </a:rPr>
+              <a:t> JOIN </a:t>
+            </a:r>
+            <a:r>
+              <a:rPr lang="en-US" sz="1200" b="0" i="0" dirty="0">
+                <a:solidFill>
+                  <a:srgbClr val="4F46E5"/>
+                </a:solidFill>
+                <a:latin typeface="Calibri"/>
+              </a:rPr>
+              <a:t>-</a:t>
+            </a:r>
+            <a:r>
+              <a:rPr sz="1200" b="0" i="0" dirty="0">
+                <a:solidFill>
+                  <a:srgbClr val="4F46E5"/>
+                </a:solidFill>
+                <a:latin typeface="Calibri"/>
+              </a:rPr>
+              <a:t> </a:t>
+            </a:r>
+            <a:r>
+              <a:rPr sz="1200" b="0" i="0" dirty="0" err="1">
+                <a:solidFill>
+                  <a:srgbClr val="4F46E5"/>
+                </a:solidFill>
+                <a:latin typeface="Calibri"/>
+              </a:rPr>
+              <a:t>все</a:t>
+            </a:r>
+            <a:r>
+              <a:rPr sz="1200" b="0" i="0" dirty="0">
+                <a:solidFill>
+                  <a:srgbClr val="4F46E5"/>
+                </a:solidFill>
+                <a:latin typeface="Calibri"/>
+              </a:rPr>
+              <a:t> </a:t>
+            </a:r>
+            <a:r>
+              <a:rPr sz="1200" b="0" i="0" dirty="0" err="1">
+                <a:solidFill>
+                  <a:srgbClr val="4F46E5"/>
+                </a:solidFill>
+                <a:latin typeface="Calibri"/>
+              </a:rPr>
+              <a:t>данные</a:t>
+            </a:r>
+            <a:r>
+              <a:rPr sz="1200" b="0" i="0" dirty="0">
+                <a:solidFill>
+                  <a:srgbClr val="4F46E5"/>
+                </a:solidFill>
+                <a:latin typeface="Calibri"/>
+              </a:rPr>
+              <a:t> </a:t>
+            </a:r>
+            <a:r>
+              <a:rPr sz="1200" b="0" i="0" dirty="0" err="1">
+                <a:solidFill>
+                  <a:srgbClr val="4F46E5"/>
+                </a:solidFill>
+                <a:latin typeface="Calibri"/>
+              </a:rPr>
+              <a:t>проверки</a:t>
+            </a:r>
+            <a:r>
+              <a:rPr sz="1200" b="0" i="0" dirty="0">
+                <a:solidFill>
+                  <a:srgbClr val="4F46E5"/>
+                </a:solidFill>
+                <a:latin typeface="Calibri"/>
+              </a:rPr>
+              <a:t> </a:t>
+            </a:r>
+            <a:r>
+              <a:rPr sz="1200" b="0" i="0" dirty="0" err="1">
+                <a:solidFill>
+                  <a:srgbClr val="4F46E5"/>
+                </a:solidFill>
+                <a:latin typeface="Calibri"/>
+              </a:rPr>
+              <a:t>читаются</a:t>
+            </a:r>
+            <a:r>
+              <a:rPr sz="1200" b="0" i="0" dirty="0">
+                <a:solidFill>
+                  <a:srgbClr val="4F46E5"/>
+                </a:solidFill>
+                <a:latin typeface="Calibri"/>
+              </a:rPr>
+              <a:t> </a:t>
+            </a:r>
+            <a:r>
+              <a:rPr sz="1200" b="0" i="0" dirty="0" err="1">
+                <a:solidFill>
+                  <a:srgbClr val="4F46E5"/>
+                </a:solidFill>
+                <a:latin typeface="Calibri"/>
+              </a:rPr>
+              <a:t>одним</a:t>
+            </a:r>
+            <a:r>
+              <a:rPr sz="1200" b="0" i="0" dirty="0">
+                <a:solidFill>
+                  <a:srgbClr val="4F46E5"/>
+                </a:solidFill>
+                <a:latin typeface="Calibri"/>
+              </a:rPr>
+              <a:t> </a:t>
+            </a:r>
+            <a:r>
+              <a:rPr sz="1200" b="0" i="0" dirty="0" err="1">
+                <a:solidFill>
+                  <a:srgbClr val="4F46E5"/>
+                </a:solidFill>
+                <a:latin typeface="Calibri"/>
+              </a:rPr>
+              <a:t>запросом</a:t>
+            </a:r>
+            <a:r>
+              <a:rPr sz="1200" b="0" i="0" dirty="0">
+                <a:solidFill>
+                  <a:srgbClr val="4F46E5"/>
+                </a:solidFill>
+                <a:latin typeface="Calibri"/>
+              </a:rPr>
+              <a:t>.</a:t>
             </a:r>
           </a:p>
         </p:txBody>
@@ -16593,14 +19111,92 @@
           <a:p>
             <a:pPr algn="l"/>
             <a:r>
-              <a:rPr sz="1300" b="0" i="0">
+              <a:rPr sz="1300" b="0" i="0" dirty="0" err="1">
                 <a:solidFill>
                   <a:srgbClr val="1E1B4B"/>
                 </a:solidFill>
                 <a:latin typeface="Calibri"/>
               </a:rPr>
-              <a:t>Supabase Auth — учётные записи учителей</a:t>
-            </a:r>
+              <a:t>Supabase</a:t>
+            </a:r>
+            <a:r>
+              <a:rPr sz="1300" b="0" i="0" dirty="0">
+                <a:solidFill>
+                  <a:srgbClr val="1E1B4B"/>
+                </a:solidFill>
+                <a:latin typeface="Calibri"/>
+              </a:rPr>
+              <a:t> Auth </a:t>
+            </a:r>
+            <a:r>
+              <a:rPr lang="en-US" sz="1300" b="0" i="0" dirty="0">
+                <a:solidFill>
+                  <a:srgbClr val="1E1B4B"/>
+                </a:solidFill>
+                <a:latin typeface="Calibri"/>
+              </a:rPr>
+              <a:t>-</a:t>
+            </a:r>
+            <a:r>
+              <a:rPr sz="1300" b="0" i="0" dirty="0">
+                <a:solidFill>
+                  <a:srgbClr val="1E1B4B"/>
+                </a:solidFill>
+                <a:latin typeface="Calibri"/>
+              </a:rPr>
+              <a:t> </a:t>
+            </a:r>
+            <a:r>
+              <a:rPr sz="1300" b="0" i="0" dirty="0" err="1">
+                <a:solidFill>
+                  <a:srgbClr val="1E1B4B"/>
+                </a:solidFill>
+                <a:latin typeface="Calibri"/>
+              </a:rPr>
+              <a:t>учётные</a:t>
+            </a:r>
+            <a:r>
+              <a:rPr sz="1300" b="0" i="0" dirty="0">
+                <a:solidFill>
+                  <a:srgbClr val="1E1B4B"/>
+                </a:solidFill>
+                <a:latin typeface="Calibri"/>
+              </a:rPr>
+              <a:t> </a:t>
+            </a:r>
+            <a:r>
+              <a:rPr sz="1300" b="0" i="0" dirty="0" err="1">
+                <a:solidFill>
+                  <a:srgbClr val="1E1B4B"/>
+                </a:solidFill>
+                <a:latin typeface="Calibri"/>
+              </a:rPr>
+              <a:t>записи</a:t>
+            </a:r>
+            <a:r>
+              <a:rPr sz="1300" b="0" i="0" dirty="0">
+                <a:solidFill>
+                  <a:srgbClr val="1E1B4B"/>
+                </a:solidFill>
+                <a:latin typeface="Calibri"/>
+              </a:rPr>
+              <a:t> </a:t>
+            </a:r>
+            <a:r>
+              <a:rPr sz="1300" b="0" i="0" dirty="0" err="1">
+                <a:solidFill>
+                  <a:srgbClr val="1E1B4B"/>
+                </a:solidFill>
+                <a:latin typeface="Calibri"/>
+              </a:rPr>
+              <a:t>учителей</a:t>
+            </a:r>
+            <a:endParaRPr sz="1300" b="0" i="0" dirty="0">
+              <a:solidFill>
+                <a:srgbClr val="1E1B4B"/>
+              </a:solidFill>
+              <a:latin typeface="Calibri"/>
+            </a:endParaRPr>
           </a:p>
         </p:txBody>
       </p:sp>
@@ -20490,7 +23086,7 @@
         <p:spPr>
           <a:xfrm>
             <a:off x="4553712" y="4562856"/>
-            <a:ext cx="6501384" cy="292608"/>
+            <a:ext cx="6501384" cy="246221"/>
           </a:xfrm>
           <a:prstGeom prst="rect">
             <a:avLst/>
@@ -20505,13 +23101,148 @@
           <a:p>
             <a:pPr algn="l"/>
             <a:r>
-              <a:rPr sz="1000" b="0" i="0">
+              <a:rPr sz="1000" b="0" i="0" dirty="0" err="1">
                 <a:solidFill>
                   <a:srgbClr val="1E293B"/>
                 </a:solidFill>
                 <a:latin typeface="Calibri"/>
               </a:rPr>
-              <a:t>Локальный запуск — данные не утекают; 7B оптимален на CPU</a:t>
+              <a:t>Локальный</a:t>
+            </a:r>
+            <a:r>
+              <a:rPr sz="1000" b="0" i="0" dirty="0">
+                <a:solidFill>
+                  <a:srgbClr val="1E293B"/>
+                </a:solidFill>
+                <a:latin typeface="Calibri"/>
+              </a:rPr>
+              <a:t> </a:t>
+            </a:r>
+            <a:r>
+              <a:rPr sz="1000" b="0" i="0" dirty="0" err="1">
+                <a:solidFill>
+                  <a:srgbClr val="1E293B"/>
+                </a:solidFill>
+                <a:latin typeface="Calibri"/>
+              </a:rPr>
+              <a:t>запуск</a:t>
+            </a:r>
+            <a:r>
+              <a:rPr sz="1000" b="0" i="0" dirty="0">
+                <a:solidFill>
+                  <a:srgbClr val="1E293B"/>
+                </a:solidFill>
+                <a:latin typeface="Calibri"/>
+              </a:rPr>
+              <a:t> </a:t>
+            </a:r>
+            <a:r>
+              <a:rPr lang="en-US" sz="1000" b="0" i="0" dirty="0">
+                <a:solidFill>
+                  <a:srgbClr val="1E293B"/>
+                </a:solidFill>
+                <a:latin typeface="Calibri"/>
+              </a:rPr>
+              <a:t>-</a:t>
+            </a:r>
+            <a:r>
+              <a:rPr sz="1000" b="0" i="0" dirty="0">
+                <a:solidFill>
+                  <a:srgbClr val="1E293B"/>
+                </a:solidFill>
+                <a:latin typeface="Calibri"/>
+              </a:rPr>
+              <a:t> </a:t>
+            </a:r>
+            <a:r>
+              <a:rPr sz="1000" b="0" i="0" dirty="0" err="1">
+                <a:solidFill>
+                  <a:srgbClr val="1E293B"/>
+                </a:solidFill>
+                <a:latin typeface="Calibri"/>
+              </a:rPr>
+              <a:t>данные</a:t>
+            </a:r>
+            <a:r>
+              <a:rPr sz="1000" b="0" i="0" dirty="0">
+                <a:solidFill>
+                  <a:srgbClr val="1E293B"/>
+                </a:solidFill>
+                <a:latin typeface="Calibri"/>
+              </a:rPr>
+              <a:t> </a:t>
+            </a:r>
+            <a:r>
+              <a:rPr sz="1000" b="0" i="0" dirty="0" err="1">
+                <a:solidFill>
+                  <a:srgbClr val="1E293B"/>
+                </a:solidFill>
+                <a:latin typeface="Calibri"/>
+              </a:rPr>
+              <a:t>не</a:t>
+            </a:r>
+            <a:r>
+              <a:rPr sz="1000" b="0" i="0" dirty="0">
+                <a:solidFill>
+                  <a:srgbClr val="1E293B"/>
+                </a:solidFill>
+                <a:latin typeface="Calibri"/>
+              </a:rPr>
+              <a:t> </a:t>
+            </a:r>
+            <a:r>
+              <a:rPr sz="1000" b="0" i="0" dirty="0" err="1">
+                <a:solidFill>
+                  <a:srgbClr val="1E293B"/>
+                </a:solidFill>
+                <a:latin typeface="Calibri"/>
+              </a:rPr>
+              <a:t>утекают</a:t>
+            </a:r>
+            <a:r>
+              <a:rPr sz="1000" b="0" i="0" dirty="0">
+                <a:solidFill>
+                  <a:srgbClr val="1E293B"/>
+                </a:solidFill>
+                <a:latin typeface="Calibri"/>
+              </a:rPr>
+              <a:t>; 7B </a:t>
+            </a:r>
+            <a:r>
+              <a:rPr sz="1000" b="0" i="0" dirty="0" err="1">
+                <a:solidFill>
+                  <a:srgbClr val="1E293B"/>
+                </a:solidFill>
+                <a:latin typeface="Calibri"/>
+              </a:rPr>
+              <a:t>оптимален</a:t>
+            </a:r>
+            <a:r>
+              <a:rPr sz="1000" b="0" i="0" dirty="0">
+                <a:solidFill>
+                  <a:srgbClr val="1E293B"/>
+                </a:solidFill>
+                <a:latin typeface="Calibri"/>
+              </a:rPr>
+              <a:t> </a:t>
+            </a:r>
+            <a:r>
+              <a:rPr sz="1000" b="0" i="0" dirty="0" err="1">
+                <a:solidFill>
+                  <a:srgbClr val="1E293B"/>
+                </a:solidFill>
+                <a:latin typeface="Calibri"/>
+              </a:rPr>
+              <a:t>на</a:t>
+            </a:r>
+            <a:r>
+              <a:rPr sz="1000" b="0" i="0" dirty="0">
+                <a:solidFill>
+                  <a:srgbClr val="1E293B"/>
+                </a:solidFill>
+                <a:latin typeface="Calibri"/>
+              </a:rPr>
+              <a:t> CPU</a:t>
             </a:r>
           </a:p>
         </p:txBody>
@@ -21333,7 +24064,7 @@
         <p:spPr>
           <a:xfrm>
             <a:off x="4553712" y="5742432"/>
-            <a:ext cx="6501384" cy="292608"/>
+            <a:ext cx="6501384" cy="246221"/>
           </a:xfrm>
           <a:prstGeom prst="rect">
             <a:avLst/>
@@ -21348,13 +24079,130 @@
           <a:p>
             <a:pPr algn="l"/>
             <a:r>
-              <a:rPr sz="1000" b="0" i="0">
+              <a:rPr sz="1000" b="0" i="0" dirty="0" err="1">
                 <a:solidFill>
                   <a:srgbClr val="1E293B"/>
                 </a:solidFill>
                 <a:latin typeface="Calibri"/>
               </a:rPr>
-              <a:t>Мгновенный старт через ES-модули, Rolldown на Rust — быстрее Webpack</a:t>
+              <a:t>Мгновенный</a:t>
+            </a:r>
+            <a:r>
+              <a:rPr sz="1000" b="0" i="0" dirty="0">
+                <a:solidFill>
+                  <a:srgbClr val="1E293B"/>
+                </a:solidFill>
+                <a:latin typeface="Calibri"/>
+              </a:rPr>
+              <a:t> </a:t>
+            </a:r>
+            <a:r>
+              <a:rPr sz="1000" b="0" i="0" dirty="0" err="1">
+                <a:solidFill>
+                  <a:srgbClr val="1E293B"/>
+                </a:solidFill>
+                <a:latin typeface="Calibri"/>
+              </a:rPr>
+              <a:t>старт</a:t>
+            </a:r>
+            <a:r>
+              <a:rPr sz="1000" b="0" i="0" dirty="0">
+                <a:solidFill>
+                  <a:srgbClr val="1E293B"/>
+                </a:solidFill>
+                <a:latin typeface="Calibri"/>
+              </a:rPr>
+              <a:t> </a:t>
+            </a:r>
+            <a:r>
+              <a:rPr sz="1000" b="0" i="0" dirty="0" err="1">
+                <a:solidFill>
+                  <a:srgbClr val="1E293B"/>
+                </a:solidFill>
+                <a:latin typeface="Calibri"/>
+              </a:rPr>
+              <a:t>через</a:t>
+            </a:r>
+            <a:r>
+              <a:rPr sz="1000" b="0" i="0" dirty="0">
+                <a:solidFill>
+                  <a:srgbClr val="1E293B"/>
+                </a:solidFill>
+                <a:latin typeface="Calibri"/>
+              </a:rPr>
+              <a:t> ES-</a:t>
+            </a:r>
+            <a:r>
+              <a:rPr sz="1000" b="0" i="0" dirty="0" err="1">
+                <a:solidFill>
+                  <a:srgbClr val="1E293B"/>
+                </a:solidFill>
+                <a:latin typeface="Calibri"/>
+              </a:rPr>
+              <a:t>модули</a:t>
+            </a:r>
+            <a:r>
+              <a:rPr sz="1000" b="0" i="0" dirty="0">
+                <a:solidFill>
+                  <a:srgbClr val="1E293B"/>
+                </a:solidFill>
+                <a:latin typeface="Calibri"/>
+              </a:rPr>
+              <a:t>, Rolldown </a:t>
+            </a:r>
+            <a:r>
+              <a:rPr sz="1000" b="0" i="0" dirty="0" err="1">
+                <a:solidFill>
+                  <a:srgbClr val="1E293B"/>
+                </a:solidFill>
+                <a:latin typeface="Calibri"/>
+              </a:rPr>
+              <a:t>на</a:t>
+            </a:r>
+            <a:r>
+              <a:rPr sz="1000" b="0" i="0" dirty="0">
+                <a:solidFill>
+                  <a:srgbClr val="1E293B"/>
+                </a:solidFill>
+                <a:latin typeface="Calibri"/>
+              </a:rPr>
+              <a:t> Rust </a:t>
+            </a:r>
+            <a:r>
+              <a:rPr lang="en-US" sz="1000" b="0" i="0" dirty="0">
+                <a:solidFill>
+                  <a:srgbClr val="1E293B"/>
+                </a:solidFill>
+                <a:latin typeface="Calibri"/>
+              </a:rPr>
+              <a:t>-</a:t>
+            </a:r>
+            <a:r>
+              <a:rPr sz="1000" b="0" i="0" dirty="0">
+                <a:solidFill>
+                  <a:srgbClr val="1E293B"/>
+                </a:solidFill>
+                <a:latin typeface="Calibri"/>
+              </a:rPr>
+              <a:t> </a:t>
+            </a:r>
+            <a:r>
+              <a:rPr sz="1000" b="0" i="0" dirty="0" err="1">
+                <a:solidFill>
+                  <a:srgbClr val="1E293B"/>
+                </a:solidFill>
+                <a:latin typeface="Calibri"/>
+              </a:rPr>
+              <a:t>быстрее</a:t>
+            </a:r>
+            <a:r>
+              <a:rPr sz="1000" b="0" i="0" dirty="0">
+                <a:solidFill>
+                  <a:srgbClr val="1E293B"/>
+                </a:solidFill>
+                <a:latin typeface="Calibri"/>
+              </a:rPr>
+              <a:t> Webpack</a:t>
             </a:r>
           </a:p>
         </p:txBody>
@@ -21963,7 +24811,7 @@
         <p:spPr>
           <a:xfrm>
             <a:off x="457200" y="1920240"/>
-            <a:ext cx="3474720" cy="2029968"/>
+            <a:ext cx="3474720" cy="1446550"/>
           </a:xfrm>
           <a:prstGeom prst="rect">
             <a:avLst/>
@@ -21978,19 +24826,370 @@
           <a:p>
             <a:pPr algn="l"/>
             <a:r>
-              <a:rPr sz="1100" b="0" i="0">
+              <a:rPr sz="1100" b="0" i="0" dirty="0">
                 <a:solidFill>
                   <a:srgbClr val="64748B"/>
                 </a:solidFill>
                 <a:latin typeface="Calibri"/>
               </a:rPr>
               <a:t>ЗАЧЕМ:
-Легко добавить новый OCR-движок
-без изменения существующего кода
+</a:t>
+            </a:r>
+            <a:r>
+              <a:rPr sz="1100" b="0" i="0" dirty="0" err="1">
+                <a:solidFill>
+                  <a:srgbClr val="64748B"/>
+                </a:solidFill>
+                <a:latin typeface="Calibri"/>
+              </a:rPr>
+              <a:t>Легко</a:t>
+            </a:r>
+            <a:r>
+              <a:rPr sz="1100" b="0" i="0" dirty="0">
+                <a:solidFill>
+                  <a:srgbClr val="64748B"/>
+                </a:solidFill>
+                <a:latin typeface="Calibri"/>
+              </a:rPr>
+              <a:t> </a:t>
+            </a:r>
+            <a:r>
+              <a:rPr sz="1100" b="0" i="0" dirty="0" err="1">
+                <a:solidFill>
+                  <a:srgbClr val="64748B"/>
+                </a:solidFill>
+                <a:latin typeface="Calibri"/>
+              </a:rPr>
+              <a:t>добавить</a:t>
+            </a:r>
+            <a:r>
+              <a:rPr sz="1100" b="0" i="0" dirty="0">
+                <a:solidFill>
+                  <a:srgbClr val="64748B"/>
+                </a:solidFill>
+                <a:latin typeface="Calibri"/>
+              </a:rPr>
+              <a:t> </a:t>
+            </a:r>
+            <a:r>
+              <a:rPr sz="1100" b="0" i="0" dirty="0" err="1">
+                <a:solidFill>
+                  <a:srgbClr val="64748B"/>
+                </a:solidFill>
+                <a:latin typeface="Calibri"/>
+              </a:rPr>
+              <a:t>новый</a:t>
+            </a:r>
+            <a:r>
+              <a:rPr sz="1100" b="0" i="0" dirty="0">
+                <a:solidFill>
+                  <a:srgbClr val="64748B"/>
+                </a:solidFill>
+                <a:latin typeface="Calibri"/>
+              </a:rPr>
+              <a:t> OCR-</a:t>
+            </a:r>
+            <a:r>
+              <a:rPr sz="1100" b="0" i="0" dirty="0" err="1">
+                <a:solidFill>
+                  <a:srgbClr val="64748B"/>
+                </a:solidFill>
+                <a:latin typeface="Calibri"/>
+              </a:rPr>
+              <a:t>движок</a:t>
+            </a:r>
+            <a:r>
+              <a:rPr sz="1100" b="0" i="0" dirty="0">
+                <a:solidFill>
+                  <a:srgbClr val="64748B"/>
+                </a:solidFill>
+                <a:latin typeface="Calibri"/>
+              </a:rPr>
+              <a:t>
+</a:t>
+            </a:r>
+            <a:r>
+              <a:rPr sz="1100" b="0" i="0" dirty="0" err="1">
+                <a:solidFill>
+                  <a:srgbClr val="64748B"/>
+                </a:solidFill>
+                <a:latin typeface="Calibri"/>
+              </a:rPr>
+              <a:t>без</a:t>
+            </a:r>
+            <a:r>
+              <a:rPr sz="1100" b="0" i="0" dirty="0">
+                <a:solidFill>
+                  <a:srgbClr val="64748B"/>
+                </a:solidFill>
+                <a:latin typeface="Calibri"/>
+              </a:rPr>
+              <a:t> </a:t>
+            </a:r>
+            <a:r>
+              <a:rPr sz="1100" b="0" i="0" dirty="0" err="1">
+                <a:solidFill>
+                  <a:srgbClr val="64748B"/>
+                </a:solidFill>
+                <a:latin typeface="Calibri"/>
+              </a:rPr>
+              <a:t>изменения</a:t>
+            </a:r>
+            <a:r>
+              <a:rPr sz="1100" b="0" i="0" dirty="0">
+                <a:solidFill>
+                  <a:srgbClr val="64748B"/>
+                </a:solidFill>
+                <a:latin typeface="Calibri"/>
+              </a:rPr>
+              <a:t> </a:t>
+            </a:r>
+            <a:r>
+              <a:rPr sz="1100" b="0" i="0" dirty="0" err="1">
+                <a:solidFill>
+                  <a:srgbClr val="64748B"/>
+                </a:solidFill>
+                <a:latin typeface="Calibri"/>
+              </a:rPr>
+              <a:t>существующего</a:t>
+            </a:r>
+            <a:r>
+              <a:rPr sz="1100" b="0" i="0" dirty="0">
+                <a:solidFill>
+                  <a:srgbClr val="64748B"/>
+                </a:solidFill>
+                <a:latin typeface="Calibri"/>
+              </a:rPr>
+              <a:t> </a:t>
+            </a:r>
+            <a:r>
+              <a:rPr sz="1100" b="0" i="0" dirty="0" err="1">
+                <a:solidFill>
+                  <a:srgbClr val="64748B"/>
+                </a:solidFill>
+                <a:latin typeface="Calibri"/>
+              </a:rPr>
+              <a:t>кода</a:t>
+            </a:r>
+            <a:r>
+              <a:rPr sz="1100" b="0" i="0" dirty="0">
+                <a:solidFill>
+                  <a:srgbClr val="64748B"/>
+                </a:solidFill>
+                <a:latin typeface="Calibri"/>
+              </a:rPr>
+              <a:t>
 КАК:
-OCRStrategy — абстрактный класс
-PaddleStrategy, TesseractStrategy — реализации
-HybridOCR — агрегирует обе (◆)</a:t>
+</a:t>
+            </a:r>
+            <a:r>
+              <a:rPr sz="1100" b="0" i="0" dirty="0" err="1">
+                <a:solidFill>
+                  <a:srgbClr val="64748B"/>
+                </a:solidFill>
+                <a:latin typeface="Calibri"/>
+              </a:rPr>
+              <a:t>OCRStrategy</a:t>
+            </a:r>
+            <a:r>
+              <a:rPr sz="1100" b="0" i="0" dirty="0">
+                <a:solidFill>
+                  <a:srgbClr val="64748B"/>
+                </a:solidFill>
+                <a:latin typeface="Calibri"/>
+              </a:rPr>
+              <a:t> </a:t>
+            </a:r>
+            <a:r>
+              <a:rPr lang="en-US" sz="1100" b="0" i="0" dirty="0">
+                <a:solidFill>
+                  <a:srgbClr val="64748B"/>
+                </a:solidFill>
+                <a:latin typeface="Calibri"/>
+              </a:rPr>
+              <a:t>-</a:t>
+            </a:r>
+            <a:r>
+              <a:rPr sz="1100" b="0" i="0" dirty="0">
+                <a:solidFill>
+                  <a:srgbClr val="64748B"/>
+                </a:solidFill>
+                <a:latin typeface="Calibri"/>
+              </a:rPr>
+              <a:t> </a:t>
+            </a:r>
+            <a:r>
+              <a:rPr sz="1100" b="0" i="0" dirty="0" err="1">
+                <a:solidFill>
+                  <a:srgbClr val="64748B"/>
+                </a:solidFill>
+                <a:latin typeface="Calibri"/>
+              </a:rPr>
+              <a:t>абстрактный</a:t>
+            </a:r>
+            <a:r>
+              <a:rPr sz="1100" b="0" i="0" dirty="0">
+                <a:solidFill>
+                  <a:srgbClr val="64748B"/>
+                </a:solidFill>
+                <a:latin typeface="Calibri"/>
+              </a:rPr>
+              <a:t> </a:t>
+            </a:r>
+            <a:r>
+              <a:rPr sz="1100" b="0" i="0" dirty="0" err="1">
+                <a:solidFill>
+                  <a:srgbClr val="64748B"/>
+                </a:solidFill>
+                <a:latin typeface="Calibri"/>
+              </a:rPr>
+              <a:t>класс</a:t>
+            </a:r>
+            <a:r>
+              <a:rPr sz="1100" b="0" i="0" dirty="0">
+                <a:solidFill>
+                  <a:srgbClr val="64748B"/>
+                </a:solidFill>
+                <a:latin typeface="Calibri"/>
+              </a:rPr>
+              <a:t>
+</a:t>
+            </a:r>
+            <a:r>
+              <a:rPr sz="1100" b="0" i="0" dirty="0" err="1">
+                <a:solidFill>
+                  <a:srgbClr val="64748B"/>
+                </a:solidFill>
+                <a:latin typeface="Calibri"/>
+              </a:rPr>
+              <a:t>PaddleStrategy</a:t>
+            </a:r>
+            <a:r>
+              <a:rPr sz="1100" b="0" i="0" dirty="0">
+                <a:solidFill>
+                  <a:srgbClr val="64748B"/>
+                </a:solidFill>
+                <a:latin typeface="Calibri"/>
+              </a:rPr>
+              <a:t>, </a:t>
+            </a:r>
+            <a:r>
+              <a:rPr sz="1100" b="0" i="0" dirty="0" err="1">
+                <a:solidFill>
+                  <a:srgbClr val="64748B"/>
+                </a:solidFill>
+                <a:latin typeface="Calibri"/>
+              </a:rPr>
+              <a:t>TesseractStrategy</a:t>
+            </a:r>
+            <a:r>
+              <a:rPr lang="en-US" sz="1100" dirty="0">
+                <a:solidFill>
+                  <a:srgbClr val="64748B"/>
+                </a:solidFill>
+                <a:latin typeface="Calibri"/>
+              </a:rPr>
+              <a:t> -</a:t>
+            </a:r>
+            <a:r>
+              <a:rPr sz="1100" b="0" i="0" dirty="0">
+                <a:solidFill>
+                  <a:srgbClr val="64748B"/>
+                </a:solidFill>
+                <a:latin typeface="Calibri"/>
+              </a:rPr>
+              <a:t> </a:t>
+            </a:r>
+            <a:r>
+              <a:rPr sz="1100" b="0" i="0" dirty="0" err="1">
+                <a:solidFill>
+                  <a:srgbClr val="64748B"/>
+                </a:solidFill>
+                <a:latin typeface="Calibri"/>
+              </a:rPr>
+              <a:t>реализации</a:t>
+            </a:r>
+            <a:r>
+              <a:rPr sz="1100" b="0" i="0" dirty="0">
+                <a:solidFill>
+                  <a:srgbClr val="64748B"/>
+                </a:solidFill>
+                <a:latin typeface="Calibri"/>
+              </a:rPr>
+              <a:t>
+</a:t>
+            </a:r>
+            <a:r>
+              <a:rPr sz="1100" b="0" i="0" dirty="0" err="1">
+                <a:solidFill>
+                  <a:srgbClr val="64748B"/>
+                </a:solidFill>
+                <a:latin typeface="Calibri"/>
+              </a:rPr>
+              <a:t>HybridOCR</a:t>
+            </a:r>
+            <a:r>
+              <a:rPr sz="1100" b="0" i="0" dirty="0">
+                <a:solidFill>
+                  <a:srgbClr val="64748B"/>
+                </a:solidFill>
+                <a:latin typeface="Calibri"/>
+              </a:rPr>
+              <a:t> </a:t>
+            </a:r>
+            <a:r>
+              <a:rPr lang="en-US" sz="1100" b="0" i="0" dirty="0">
+                <a:solidFill>
+                  <a:srgbClr val="64748B"/>
+                </a:solidFill>
+                <a:latin typeface="Calibri"/>
+              </a:rPr>
+              <a:t>-</a:t>
+            </a:r>
+            <a:r>
+              <a:rPr sz="1100" b="0" i="0" dirty="0">
+                <a:solidFill>
+                  <a:srgbClr val="64748B"/>
+                </a:solidFill>
+                <a:latin typeface="Calibri"/>
+              </a:rPr>
+              <a:t> </a:t>
+            </a:r>
+            <a:r>
+              <a:rPr sz="1100" b="0" i="0" dirty="0" err="1">
+                <a:solidFill>
+                  <a:srgbClr val="64748B"/>
+                </a:solidFill>
+                <a:latin typeface="Calibri"/>
+              </a:rPr>
+              <a:t>агрегирует</a:t>
+            </a:r>
+            <a:r>
+              <a:rPr sz="1100" b="0" i="0" dirty="0">
+                <a:solidFill>
+                  <a:srgbClr val="64748B"/>
+                </a:solidFill>
+                <a:latin typeface="Calibri"/>
+              </a:rPr>
+              <a:t> </a:t>
+            </a:r>
+            <a:r>
+              <a:rPr sz="1100" b="0" i="0" dirty="0" err="1">
+                <a:solidFill>
+                  <a:srgbClr val="64748B"/>
+                </a:solidFill>
+                <a:latin typeface="Calibri"/>
+              </a:rPr>
+              <a:t>обе</a:t>
+            </a:r>
+            <a:r>
+              <a:rPr sz="1100" b="0" i="0" dirty="0">
+                <a:solidFill>
+                  <a:srgbClr val="64748B"/>
+                </a:solidFill>
+                <a:latin typeface="Calibri"/>
+              </a:rPr>
+              <a:t> (◆)</a:t>
             </a:r>
           </a:p>
         </p:txBody>
@@ -23564,7 +26763,7 @@
         <p:spPr>
           <a:xfrm>
             <a:off x="685800" y="1298448"/>
-            <a:ext cx="10789920" cy="658368"/>
+            <a:ext cx="10789920" cy="615553"/>
           </a:xfrm>
           <a:prstGeom prst="rect">
             <a:avLst/>
@@ -23811,7 +27010,25 @@
                 </a:solidFill>
                 <a:latin typeface="Calibri"/>
               </a:rPr>
-              <a:t> — </a:t>
+              <a:t> </a:t>
+            </a:r>
+            <a:r>
+              <a:rPr lang="en-US" sz="1700" b="1" i="0" dirty="0">
+                <a:solidFill>
+                  <a:srgbClr val="4F46E5"/>
+                </a:solidFill>
+                <a:latin typeface="Calibri"/>
+              </a:rPr>
+              <a:t>-</a:t>
+            </a:r>
+            <a:r>
+              <a:rPr sz="1700" b="1" i="0" dirty="0">
+                <a:solidFill>
+                  <a:srgbClr val="4F46E5"/>
+                </a:solidFill>
+                <a:latin typeface="Calibri"/>
+              </a:rPr>
+              <a:t> </a:t>
             </a:r>
             <a:r>
               <a:rPr sz="1700" b="1" i="0" dirty="0" err="1">
@@ -33481,7 +36698,7 @@
         <p:spPr>
           <a:xfrm>
             <a:off x="448056" y="2505456"/>
-            <a:ext cx="2468880" cy="749808"/>
+            <a:ext cx="2468880" cy="430887"/>
           </a:xfrm>
           <a:prstGeom prst="rect">
             <a:avLst/>
@@ -33496,15 +36713,75 @@
           <a:p>
             <a:pPr algn="l"/>
             <a:r>
-              <a:rPr sz="1100" b="0" i="0">
+              <a:rPr sz="1100" b="0" i="0" dirty="0" err="1">
                 <a:solidFill>
                   <a:srgbClr val="64748B"/>
                 </a:solidFill>
                 <a:latin typeface="Calibri"/>
               </a:rPr>
-              <a:t>Фото, PDF, DOCX, PPTX, TXT —
-любой формат</a:t>
-            </a:r>
+              <a:t>Фото</a:t>
+            </a:r>
+            <a:r>
+              <a:rPr sz="1100" b="0" i="0" dirty="0">
+                <a:solidFill>
+                  <a:srgbClr val="64748B"/>
+                </a:solidFill>
+                <a:latin typeface="Calibri"/>
+              </a:rPr>
+              <a:t>, PDF, DOCX, PPTX, TXT </a:t>
+            </a:r>
+            <a:r>
+              <a:rPr lang="en-US" sz="1100" b="0" i="0" dirty="0">
+                <a:solidFill>
+                  <a:srgbClr val="64748B"/>
+                </a:solidFill>
+                <a:latin typeface="Calibri"/>
+              </a:rPr>
+              <a:t>-</a:t>
+            </a:r>
+            <a:r>
+              <a:rPr sz="1100" b="0" i="0" dirty="0">
+                <a:solidFill>
+                  <a:srgbClr val="64748B"/>
+                </a:solidFill>
+                <a:latin typeface="Calibri"/>
+              </a:rPr>
+              <a:t>
+</a:t>
+            </a:r>
+            <a:r>
+              <a:rPr sz="1100" b="0" i="0" dirty="0" err="1">
+                <a:solidFill>
+                  <a:srgbClr val="64748B"/>
+                </a:solidFill>
+                <a:latin typeface="Calibri"/>
+              </a:rPr>
+              <a:t>любой</a:t>
+            </a:r>
+            <a:r>
+              <a:rPr sz="1100" b="0" i="0" dirty="0">
+                <a:solidFill>
+                  <a:srgbClr val="64748B"/>
+                </a:solidFill>
+                <a:latin typeface="Calibri"/>
+              </a:rPr>
+              <a:t> </a:t>
+            </a:r>
+            <a:r>
+              <a:rPr sz="1100" b="0" i="0" dirty="0" err="1">
+                <a:solidFill>
+                  <a:srgbClr val="64748B"/>
+                </a:solidFill>
+                <a:latin typeface="Calibri"/>
+              </a:rPr>
+              <a:t>формат</a:t>
+            </a:r>
+            <a:endParaRPr sz="1100" b="0" i="0" dirty="0">
+              <a:solidFill>
+                <a:srgbClr val="64748B"/>
+              </a:solidFill>
+              <a:latin typeface="Calibri"/>
+            </a:endParaRPr>
           </a:p>
         </p:txBody>
       </p:sp>
@@ -33799,29 +37076,33 @@
         <p:spPr>
           <a:xfrm>
             <a:off x="6217920" y="2048256"/>
-            <a:ext cx="438912" cy="438912"/>
-          </a:xfrm>
-          <a:prstGeom prst="rect">
-            <a:avLst/>
-          </a:prstGeom>
-          <a:noFill/>
-        </p:spPr>
-        <p:txBody>
-          <a:bodyPr wrap="square">
-            <a:spAutoFit/>
-          </a:bodyPr>
-          <a:lstStyle/>
-          <a:p>
-            <a:pPr algn="l"/>
-            <a:r>
-              <a:rPr sz="2400" b="0" i="0">
+            <a:ext cx="438912" cy="461665"/>
+          </a:xfrm>
+          <a:prstGeom prst="rect">
+            <a:avLst/>
+          </a:prstGeom>
+          <a:noFill/>
+        </p:spPr>
+        <p:txBody>
+          <a:bodyPr wrap="square">
+            <a:spAutoFit/>
+          </a:bodyPr>
+          <a:lstStyle/>
+          <a:p>
+            <a:r>
+              <a:rPr lang="ru-RU" sz="2400" dirty="0">
                 <a:solidFill>
                   <a:srgbClr val="1E293B"/>
                 </a:solidFill>
-                <a:latin typeface="Calibri"/>
-              </a:rPr>
-              <a:t>🤖</a:t>
-            </a:r>
+              </a:rPr>
+              <a:t>👾</a:t>
+            </a:r>
+            <a:endParaRPr sz="2400" b="0" i="0" dirty="0">
+              <a:solidFill>
+                <a:srgbClr val="1E293B"/>
+              </a:solidFill>
+              <a:latin typeface="Calibri"/>
+            </a:endParaRPr>
           </a:p>
         </p:txBody>
       </p:sp>
@@ -33869,7 +37150,7 @@
         <p:spPr>
           <a:xfrm>
             <a:off x="6245352" y="2505456"/>
-            <a:ext cx="2468880" cy="749808"/>
+            <a:ext cx="2468880" cy="430887"/>
           </a:xfrm>
           <a:prstGeom prst="rect">
             <a:avLst/>
@@ -33884,15 +37165,111 @@
           <a:p>
             <a:pPr algn="l"/>
             <a:r>
-              <a:rPr sz="1100" b="0" i="0">
+              <a:rPr sz="1100" b="0" i="0" dirty="0" err="1">
                 <a:solidFill>
                   <a:srgbClr val="64748B"/>
                 </a:solidFill>
                 <a:latin typeface="Calibri"/>
               </a:rPr>
-              <a:t>Стриминг результата —
-появляется в реальном времени</a:t>
-            </a:r>
+              <a:t>Стриминг</a:t>
+            </a:r>
+            <a:r>
+              <a:rPr sz="1100" b="0" i="0" dirty="0">
+                <a:solidFill>
+                  <a:srgbClr val="64748B"/>
+                </a:solidFill>
+                <a:latin typeface="Calibri"/>
+              </a:rPr>
+              <a:t> </a:t>
+            </a:r>
+            <a:r>
+              <a:rPr sz="1100" b="0" i="0" dirty="0" err="1">
+                <a:solidFill>
+                  <a:srgbClr val="64748B"/>
+                </a:solidFill>
+                <a:latin typeface="Calibri"/>
+              </a:rPr>
+              <a:t>результата</a:t>
+            </a:r>
+            <a:r>
+              <a:rPr sz="1100" b="0" i="0" dirty="0">
+                <a:solidFill>
+                  <a:srgbClr val="64748B"/>
+                </a:solidFill>
+                <a:latin typeface="Calibri"/>
+              </a:rPr>
+              <a:t> </a:t>
+            </a:r>
+            <a:r>
+              <a:rPr lang="en-US" sz="1100" b="0" i="0" dirty="0">
+                <a:solidFill>
+                  <a:srgbClr val="64748B"/>
+                </a:solidFill>
+                <a:latin typeface="Calibri"/>
+              </a:rPr>
+              <a:t>-</a:t>
+            </a:r>
+            <a:r>
+              <a:rPr sz="1100" b="0" i="0" dirty="0">
+                <a:solidFill>
+                  <a:srgbClr val="64748B"/>
+                </a:solidFill>
+                <a:latin typeface="Calibri"/>
+              </a:rPr>
+              <a:t>
+</a:t>
+            </a:r>
+            <a:r>
+              <a:rPr sz="1100" b="0" i="0" dirty="0" err="1">
+                <a:solidFill>
+                  <a:srgbClr val="64748B"/>
+                </a:solidFill>
+                <a:latin typeface="Calibri"/>
+              </a:rPr>
+              <a:t>появляется</a:t>
+            </a:r>
+            <a:r>
+              <a:rPr sz="1100" b="0" i="0" dirty="0">
+                <a:solidFill>
+                  <a:srgbClr val="64748B"/>
+                </a:solidFill>
+                <a:latin typeface="Calibri"/>
+              </a:rPr>
+              <a:t> в </a:t>
+            </a:r>
+            <a:r>
+              <a:rPr sz="1100" b="0" i="0" dirty="0" err="1">
+                <a:solidFill>
+                  <a:srgbClr val="64748B"/>
+                </a:solidFill>
+                <a:latin typeface="Calibri"/>
+              </a:rPr>
+              <a:t>реальном</a:t>
+            </a:r>
+            <a:r>
+              <a:rPr sz="1100" b="0" i="0" dirty="0">
+                <a:solidFill>
+                  <a:srgbClr val="64748B"/>
+                </a:solidFill>
+                <a:latin typeface="Calibri"/>
+              </a:rPr>
+              <a:t> </a:t>
+            </a:r>
+            <a:r>
+              <a:rPr sz="1100" b="0" i="0" dirty="0" err="1">
+                <a:solidFill>
+                  <a:srgbClr val="64748B"/>
+                </a:solidFill>
+                <a:latin typeface="Calibri"/>
+              </a:rPr>
+              <a:t>времени</a:t>
+            </a:r>
+            <a:endParaRPr sz="1100" b="0" i="0" dirty="0">
+              <a:solidFill>
+                <a:srgbClr val="64748B"/>
+              </a:solidFill>
+              <a:latin typeface="Calibri"/>
+            </a:endParaRPr>
           </a:p>
         </p:txBody>
       </p:sp>
@@ -35295,7 +38672,7 @@
         <p:spPr>
           <a:xfrm>
             <a:off x="566928" y="2880360"/>
-            <a:ext cx="1938528" cy="2651760"/>
+            <a:ext cx="1938528" cy="646331"/>
           </a:xfrm>
           <a:prstGeom prst="rect">
             <a:avLst/>
@@ -35310,16 +38687,112 @@
           <a:p>
             <a:pPr algn="l"/>
             <a:r>
-              <a:rPr sz="1200" b="0" i="0">
+              <a:rPr sz="1200" b="0" i="0" dirty="0" err="1">
                 <a:solidFill>
                   <a:srgbClr val="64748B"/>
                 </a:solidFill>
                 <a:latin typeface="Calibri"/>
               </a:rPr>
-              <a:t>Ошибки с объяснением
-Оценка 0–5
-Общий комментарий</a:t>
-            </a:r>
+              <a:t>Ошибки</a:t>
+            </a:r>
+            <a:r>
+              <a:rPr sz="1200" b="0" i="0" dirty="0">
+                <a:solidFill>
+                  <a:srgbClr val="64748B"/>
+                </a:solidFill>
+                <a:latin typeface="Calibri"/>
+              </a:rPr>
+              <a:t> с </a:t>
+            </a:r>
+            <a:r>
+              <a:rPr sz="1200" b="0" i="0" dirty="0" err="1">
+                <a:solidFill>
+                  <a:srgbClr val="64748B"/>
+                </a:solidFill>
+                <a:latin typeface="Calibri"/>
+              </a:rPr>
+              <a:t>объяснением</a:t>
+            </a:r>
+            <a:r>
+              <a:rPr sz="1200" b="0" i="0" dirty="0">
+                <a:solidFill>
+                  <a:srgbClr val="64748B"/>
+                </a:solidFill>
+                <a:latin typeface="Calibri"/>
+              </a:rPr>
+              <a:t>
+</a:t>
+            </a:r>
+            <a:r>
+              <a:rPr sz="1200" b="0" i="0" dirty="0" err="1">
+                <a:solidFill>
+                  <a:srgbClr val="64748B"/>
+                </a:solidFill>
+                <a:latin typeface="Calibri"/>
+              </a:rPr>
+              <a:t>Оценка</a:t>
+            </a:r>
+            <a:r>
+              <a:rPr sz="1200" b="0" i="0" dirty="0">
+                <a:solidFill>
+                  <a:srgbClr val="64748B"/>
+                </a:solidFill>
+                <a:latin typeface="Calibri"/>
+              </a:rPr>
+              <a:t> 0</a:t>
+            </a:r>
+            <a:r>
+              <a:rPr lang="en-US" sz="1200" b="0" i="0" dirty="0">
+                <a:solidFill>
+                  <a:srgbClr val="64748B"/>
+                </a:solidFill>
+                <a:latin typeface="Calibri"/>
+              </a:rPr>
+              <a:t>-</a:t>
+            </a:r>
+            <a:r>
+              <a:rPr sz="1200" b="0" i="0" dirty="0">
+                <a:solidFill>
+                  <a:srgbClr val="64748B"/>
+                </a:solidFill>
+                <a:latin typeface="Calibri"/>
+              </a:rPr>
+              <a:t>5
+</a:t>
+            </a:r>
+            <a:r>
+              <a:rPr sz="1200" b="0" i="0" dirty="0" err="1">
+                <a:solidFill>
+                  <a:srgbClr val="64748B"/>
+                </a:solidFill>
+                <a:latin typeface="Calibri"/>
+              </a:rPr>
+              <a:t>Общий</a:t>
+            </a:r>
+            <a:r>
+              <a:rPr sz="1200" b="0" i="0" dirty="0">
+                <a:solidFill>
+                  <a:srgbClr val="64748B"/>
+                </a:solidFill>
+                <a:latin typeface="Calibri"/>
+              </a:rPr>
+              <a:t> </a:t>
+            </a:r>
+            <a:r>
+              <a:rPr sz="1200" b="0" i="0" dirty="0" err="1">
+                <a:solidFill>
+                  <a:srgbClr val="64748B"/>
+                </a:solidFill>
+                <a:latin typeface="Calibri"/>
+              </a:rPr>
+              <a:t>комментарий</a:t>
+            </a:r>
+            <a:endParaRPr sz="1200" b="0" i="0" dirty="0">
+              <a:solidFill>
+                <a:srgbClr val="64748B"/>
+              </a:solidFill>
+              <a:latin typeface="Calibri"/>
+            </a:endParaRPr>
           </a:p>
         </p:txBody>
       </p:sp>
@@ -35500,7 +38973,7 @@
         <p:spPr>
           <a:xfrm>
             <a:off x="2916936" y="2880360"/>
-            <a:ext cx="1938528" cy="2651760"/>
+            <a:ext cx="1938528" cy="646331"/>
           </a:xfrm>
           <a:prstGeom prst="rect">
             <a:avLst/>
@@ -35515,15 +38988,105 @@
           <a:p>
             <a:pPr algn="l"/>
             <a:r>
-              <a:rPr sz="1200" b="0" i="0">
+              <a:rPr sz="1200" b="0" i="0" dirty="0">
                 <a:solidFill>
                   <a:srgbClr val="64748B"/>
                 </a:solidFill>
                 <a:latin typeface="Calibri"/>
               </a:rPr>
-              <a:t>8 критериев:
-СК1–СК4 (содержание)
-ГК1–ГК4 (грамотность)</a:t>
+              <a:t>8 </a:t>
+            </a:r>
+            <a:r>
+              <a:rPr sz="1200" b="0" i="0" dirty="0" err="1">
+                <a:solidFill>
+                  <a:srgbClr val="64748B"/>
+                </a:solidFill>
+                <a:latin typeface="Calibri"/>
+              </a:rPr>
+              <a:t>критериев</a:t>
+            </a:r>
+            <a:r>
+              <a:rPr sz="1200" b="0" i="0" dirty="0">
+                <a:solidFill>
+                  <a:srgbClr val="64748B"/>
+                </a:solidFill>
+                <a:latin typeface="Calibri"/>
+              </a:rPr>
+              <a:t>:
+СК1</a:t>
+            </a:r>
+            <a:r>
+              <a:rPr lang="en-US" sz="1200" b="0" i="0" dirty="0">
+                <a:solidFill>
+                  <a:srgbClr val="64748B"/>
+                </a:solidFill>
+                <a:latin typeface="Calibri"/>
+              </a:rPr>
+              <a:t>-</a:t>
+            </a:r>
+            <a:r>
+              <a:rPr sz="1200" b="0" i="0" dirty="0">
+                <a:solidFill>
+                  <a:srgbClr val="64748B"/>
+                </a:solidFill>
+                <a:latin typeface="Calibri"/>
+              </a:rPr>
+              <a:t>СК4 (</a:t>
+            </a:r>
+            <a:r>
+              <a:rPr sz="1200" b="0" i="0" dirty="0" err="1">
+                <a:solidFill>
+                  <a:srgbClr val="64748B"/>
+                </a:solidFill>
+                <a:latin typeface="Calibri"/>
+              </a:rPr>
+              <a:t>содержание</a:t>
+            </a:r>
+            <a:r>
+              <a:rPr sz="1200" b="0" i="0" dirty="0">
+                <a:solidFill>
+                  <a:srgbClr val="64748B"/>
+                </a:solidFill>
+                <a:latin typeface="Calibri"/>
+              </a:rPr>
+              <a:t>)
+ГК1</a:t>
+            </a:r>
+            <a:r>
+              <a:rPr lang="en-US" sz="1200" b="0" i="0" dirty="0">
+                <a:solidFill>
+                  <a:srgbClr val="64748B"/>
+                </a:solidFill>
+                <a:latin typeface="Calibri"/>
+              </a:rPr>
+              <a:t>-</a:t>
+            </a:r>
+            <a:r>
+              <a:rPr sz="1200" b="0" i="0" dirty="0">
+                <a:solidFill>
+                  <a:srgbClr val="64748B"/>
+                </a:solidFill>
+                <a:latin typeface="Calibri"/>
+              </a:rPr>
+              <a:t>ГК4 (</a:t>
+            </a:r>
+            <a:r>
+              <a:rPr sz="1200" b="0" i="0" dirty="0" err="1">
+                <a:solidFill>
+                  <a:srgbClr val="64748B"/>
+                </a:solidFill>
+                <a:latin typeface="Calibri"/>
+              </a:rPr>
+              <a:t>грамотность</a:t>
+            </a:r>
+            <a:r>
+              <a:rPr sz="1200" b="0" i="0" dirty="0">
+                <a:solidFill>
+                  <a:srgbClr val="64748B"/>
+                </a:solidFill>
+                <a:latin typeface="Calibri"/>
+              </a:rPr>
+              <a:t>)</a:t>
             </a:r>
           </a:p>
         </p:txBody>
@@ -38189,28 +41752,53 @@
         <p:spPr>
           <a:xfrm>
             <a:off x="9043416" y="4178808"/>
-            <a:ext cx="2880360" cy="384048"/>
-          </a:xfrm>
-          <a:prstGeom prst="rect">
-            <a:avLst/>
-          </a:prstGeom>
-          <a:noFill/>
-        </p:spPr>
-        <p:txBody>
-          <a:bodyPr wrap="square">
-            <a:spAutoFit/>
-          </a:bodyPr>
-          <a:lstStyle/>
-          <a:p>
-            <a:pPr algn="l"/>
-            <a:r>
-              <a:rPr sz="1300" b="1" i="0">
+            <a:ext cx="2880360" cy="292388"/>
+          </a:xfrm>
+          <a:prstGeom prst="rect">
+            <a:avLst/>
+          </a:prstGeom>
+          <a:noFill/>
+        </p:spPr>
+        <p:txBody>
+          <a:bodyPr wrap="square">
+            <a:spAutoFit/>
+          </a:bodyPr>
+          <a:lstStyle/>
+          <a:p>
+            <a:r>
+              <a:rPr lang="ru-RU" sz="1300" b="1" dirty="0">
                 <a:solidFill>
                   <a:srgbClr val="7C3AED"/>
                 </a:solidFill>
-                <a:latin typeface="Calibri"/>
-              </a:rPr>
-              <a:t>🤖  Ollama qwen2.5:7b</a:t>
+              </a:rPr>
+              <a:t>👾</a:t>
+            </a:r>
+            <a:r>
+              <a:rPr sz="1300" b="1" i="0" dirty="0">
+                <a:solidFill>
+                  <a:srgbClr val="7C3AED"/>
+                </a:solidFill>
+                <a:latin typeface="Calibri"/>
+              </a:rPr>
+              <a:t>  </a:t>
+            </a:r>
+            <a:r>
+              <a:rPr sz="1300" b="1" i="0" dirty="0" err="1">
+                <a:solidFill>
+                  <a:srgbClr val="7C3AED"/>
+                </a:solidFill>
+                <a:latin typeface="Calibri"/>
+              </a:rPr>
+              <a:t>Ollama</a:t>
+            </a:r>
+            <a:r>
+              <a:rPr sz="1300" b="1" i="0" dirty="0">
+                <a:solidFill>
+                  <a:srgbClr val="7C3AED"/>
+                </a:solidFill>
+                <a:latin typeface="Calibri"/>
+              </a:rPr>
+              <a:t> qwen2.5:7b</a:t>
             </a:r>
           </a:p>
         </p:txBody>
@@ -38544,14 +42132,146 @@
           <a:p>
             <a:pPr algn="l"/>
             <a:r>
-              <a:rPr sz="1300" b="0" i="0">
+              <a:rPr sz="1300" b="0" i="0" dirty="0" err="1">
                 <a:solidFill>
                   <a:srgbClr val="E0E7FF"/>
                 </a:solidFill>
                 <a:latin typeface="Calibri"/>
               </a:rPr>
-              <a:t>Два пути + fallback — единый интерфейс для любого формата</a:t>
-            </a:r>
+              <a:t>Два</a:t>
+            </a:r>
+            <a:r>
+              <a:rPr sz="1300" b="0" i="0" dirty="0">
+                <a:solidFill>
+                  <a:srgbClr val="E0E7FF"/>
+                </a:solidFill>
+                <a:latin typeface="Calibri"/>
+              </a:rPr>
+              <a:t> </a:t>
+            </a:r>
+            <a:r>
+              <a:rPr sz="1300" b="0" i="0" dirty="0" err="1">
+                <a:solidFill>
+                  <a:srgbClr val="E0E7FF"/>
+                </a:solidFill>
+                <a:latin typeface="Calibri"/>
+              </a:rPr>
+              <a:t>пути</a:t>
+            </a:r>
+            <a:r>
+              <a:rPr sz="1300" b="0" i="0" dirty="0">
+                <a:solidFill>
+                  <a:srgbClr val="E0E7FF"/>
+                </a:solidFill>
+                <a:latin typeface="Calibri"/>
+              </a:rPr>
+              <a:t> + fallback </a:t>
+            </a:r>
+            <a:r>
+              <a:rPr lang="en-US" sz="1300" b="0" i="0" dirty="0">
+                <a:solidFill>
+                  <a:srgbClr val="E0E7FF"/>
+                </a:solidFill>
+                <a:latin typeface="Calibri"/>
+              </a:rPr>
+              <a:t>-</a:t>
+            </a:r>
+            <a:r>
+              <a:rPr sz="1300" b="0" i="0" dirty="0">
+                <a:solidFill>
+                  <a:srgbClr val="E0E7FF"/>
+                </a:solidFill>
+                <a:latin typeface="Calibri"/>
+              </a:rPr>
+              <a:t> </a:t>
+            </a:r>
+            <a:r>
+              <a:rPr sz="1300" b="0" i="0" dirty="0" err="1">
+                <a:solidFill>
+                  <a:srgbClr val="E0E7FF"/>
+                </a:solidFill>
+                <a:latin typeface="Calibri"/>
+              </a:rPr>
+              <a:t>единый</a:t>
+            </a:r>
+            <a:r>
+              <a:rPr sz="1300" b="0" i="0" dirty="0">
+                <a:solidFill>
+                  <a:srgbClr val="E0E7FF"/>
+                </a:solidFill>
+                <a:latin typeface="Calibri"/>
+              </a:rPr>
+              <a:t> </a:t>
+            </a:r>
+            <a:r>
+              <a:rPr sz="1300" b="0" i="0" dirty="0" err="1">
+                <a:solidFill>
+                  <a:srgbClr val="E0E7FF"/>
+                </a:solidFill>
+                <a:latin typeface="Calibri"/>
+              </a:rPr>
+              <a:t>интерфейс</a:t>
+            </a:r>
+            <a:r>
+              <a:rPr sz="1300" b="0" i="0" dirty="0">
+                <a:solidFill>
+                  <a:srgbClr val="E0E7FF"/>
+                </a:solidFill>
+                <a:latin typeface="Calibri"/>
+              </a:rPr>
+              <a:t> </a:t>
+            </a:r>
+            <a:r>
+              <a:rPr sz="1300" b="0" i="0" dirty="0" err="1">
+                <a:solidFill>
+                  <a:srgbClr val="E0E7FF"/>
+                </a:solidFill>
+                <a:latin typeface="Calibri"/>
+              </a:rPr>
+              <a:t>для</a:t>
+            </a:r>
+            <a:r>
+              <a:rPr sz="1300" b="0" i="0" dirty="0">
+                <a:solidFill>
+                  <a:srgbClr val="E0E7FF"/>
+                </a:solidFill>
+                <a:latin typeface="Calibri"/>
+              </a:rPr>
+              <a:t> </a:t>
+            </a:r>
+            <a:r>
+              <a:rPr sz="1300" b="0" i="0" dirty="0" err="1">
+                <a:solidFill>
+                  <a:srgbClr val="E0E7FF"/>
+                </a:solidFill>
+                <a:latin typeface="Calibri"/>
+              </a:rPr>
+              <a:t>любого</a:t>
+            </a:r>
+            <a:r>
+              <a:rPr sz="1300" b="0" i="0" dirty="0">
+                <a:solidFill>
+                  <a:srgbClr val="E0E7FF"/>
+                </a:solidFill>
+                <a:latin typeface="Calibri"/>
+              </a:rPr>
+              <a:t> </a:t>
+            </a:r>
+            <a:r>
+              <a:rPr sz="1300" b="0" i="0" dirty="0" err="1">
+                <a:solidFill>
+                  <a:srgbClr val="E0E7FF"/>
+                </a:solidFill>
+                <a:latin typeface="Calibri"/>
+              </a:rPr>
+              <a:t>формата</a:t>
+            </a:r>
+            <a:endParaRPr sz="1300" b="0" i="0" dirty="0">
+              <a:solidFill>
+                <a:srgbClr val="E0E7FF"/>
+              </a:solidFill>
+              <a:latin typeface="Calibri"/>
+            </a:endParaRPr>
           </a:p>
         </p:txBody>
       </p:sp>
@@ -40090,14 +43810,119 @@
           <a:p>
             <a:pPr algn="l"/>
             <a:r>
-              <a:rPr sz="1300" b="0" i="0">
+              <a:rPr sz="1300" b="0" i="0" dirty="0">
                 <a:solidFill>
                   <a:srgbClr val="E0E7FF"/>
                 </a:solidFill>
                 <a:latin typeface="Calibri"/>
               </a:rPr>
-              <a:t>Server-Sent Events (SSE) — пользователь видит каждый токен сразу</a:t>
-            </a:r>
+              <a:t>Server-Sent Events (SSE) </a:t>
+            </a:r>
+            <a:r>
+              <a:rPr lang="en-US" sz="1300" b="0" i="0" dirty="0">
+                <a:solidFill>
+                  <a:srgbClr val="E0E7FF"/>
+                </a:solidFill>
+                <a:latin typeface="Calibri"/>
+              </a:rPr>
+              <a:t>-</a:t>
+            </a:r>
+            <a:r>
+              <a:rPr sz="1300" b="0" i="0" dirty="0">
+                <a:solidFill>
+                  <a:srgbClr val="E0E7FF"/>
+                </a:solidFill>
+                <a:latin typeface="Calibri"/>
+              </a:rPr>
+              <a:t> </a:t>
+            </a:r>
+            <a:r>
+              <a:rPr sz="1300" b="0" i="0" dirty="0" err="1">
+                <a:solidFill>
+                  <a:srgbClr val="E0E7FF"/>
+                </a:solidFill>
+                <a:latin typeface="Calibri"/>
+              </a:rPr>
+              <a:t>пользователь</a:t>
+            </a:r>
+            <a:r>
+              <a:rPr sz="1300" b="0" i="0" dirty="0">
+                <a:solidFill>
+                  <a:srgbClr val="E0E7FF"/>
+                </a:solidFill>
+                <a:latin typeface="Calibri"/>
+              </a:rPr>
+              <a:t> </a:t>
+            </a:r>
+            <a:r>
+              <a:rPr sz="1300" b="0" i="0" dirty="0" err="1">
+                <a:solidFill>
+                  <a:srgbClr val="E0E7FF"/>
+                </a:solidFill>
+                <a:latin typeface="Calibri"/>
+              </a:rPr>
+              <a:t>видит</a:t>
+            </a:r>
+            <a:r>
+              <a:rPr sz="1300" b="0" i="0" dirty="0">
+                <a:solidFill>
+                  <a:srgbClr val="E0E7FF"/>
+                </a:solidFill>
+                <a:latin typeface="Calibri"/>
+              </a:rPr>
+              <a:t> </a:t>
+            </a:r>
+            <a:r>
+              <a:rPr sz="1300" b="0" i="0" dirty="0" err="1">
+                <a:solidFill>
+                  <a:srgbClr val="E0E7FF"/>
+                </a:solidFill>
+                <a:latin typeface="Calibri"/>
+              </a:rPr>
+              <a:t>каждый</a:t>
+            </a:r>
+            <a:r>
+              <a:rPr sz="1300" b="0" i="0" dirty="0">
+                <a:solidFill>
+                  <a:srgbClr val="E0E7FF"/>
+                </a:solidFill>
+                <a:latin typeface="Calibri"/>
+              </a:rPr>
+              <a:t> </a:t>
+            </a:r>
+            <a:r>
+              <a:rPr sz="1300" b="0" i="0" dirty="0" err="1">
+                <a:solidFill>
+                  <a:srgbClr val="E0E7FF"/>
+                </a:solidFill>
+                <a:latin typeface="Calibri"/>
+              </a:rPr>
+              <a:t>токен</a:t>
+            </a:r>
+            <a:r>
+              <a:rPr sz="1300" b="0" i="0" dirty="0">
+                <a:solidFill>
+                  <a:srgbClr val="E0E7FF"/>
+                </a:solidFill>
+                <a:latin typeface="Calibri"/>
+              </a:rPr>
+              <a:t> </a:t>
+            </a:r>
+            <a:r>
+              <a:rPr sz="1300" b="0" i="0" dirty="0" err="1">
+                <a:solidFill>
+                  <a:srgbClr val="E0E7FF"/>
+                </a:solidFill>
+                <a:latin typeface="Calibri"/>
+              </a:rPr>
+              <a:t>сразу</a:t>
+            </a:r>
+            <a:endParaRPr sz="1300" b="0" i="0" dirty="0">
+              <a:solidFill>
+                <a:srgbClr val="E0E7FF"/>
+              </a:solidFill>
+              <a:latin typeface="Calibri"/>
+            </a:endParaRPr>
           </a:p>
         </p:txBody>
       </p:sp>
@@ -41584,20 +45409,326 @@
           <a:p>
             <a:pPr algn="l"/>
             <a:r>
-              <a:rPr sz="1000" b="0" i="0">
+              <a:rPr sz="1000" b="0" i="0" dirty="0">
                 <a:solidFill>
                   <a:srgbClr val="A5B4FC"/>
                 </a:solidFill>
                 <a:latin typeface="Calibri"/>
               </a:rPr>
-              <a:t>async def stream_check(text, function_id) -&gt; AsyncIterator[dict]:
-    messages = await self._build_messages(text, function_id)   # system + user
-    full_text = ''
-    async for chunk in self.llm.stream(messages):              # кусочки от LLM
-        full_text += chunk
-        yield {'type': 'chunk', 'text': chunk}                 # → клиенту сразу
-    result = self._build_result(text, self._parse(full_text))
-    yield {'type': 'done', 'result': result}                   # финальный JSON</a:t>
+              <a:t>async def </a:t>
+            </a:r>
+            <a:r>
+              <a:rPr sz="1000" b="0" i="0" dirty="0" err="1">
+                <a:solidFill>
+                  <a:srgbClr val="A5B4FC"/>
+                </a:solidFill>
+                <a:latin typeface="Calibri"/>
+              </a:rPr>
+              <a:t>stream_check</a:t>
+            </a:r>
+            <a:r>
+              <a:rPr sz="1000" b="0" i="0" dirty="0">
+                <a:solidFill>
+                  <a:srgbClr val="A5B4FC"/>
+                </a:solidFill>
+                <a:latin typeface="Calibri"/>
+              </a:rPr>
+              <a:t>(text, </a:t>
+            </a:r>
+            <a:r>
+              <a:rPr sz="1000" b="0" i="0" dirty="0" err="1">
+                <a:solidFill>
+                  <a:srgbClr val="A5B4FC"/>
+                </a:solidFill>
+                <a:latin typeface="Calibri"/>
+              </a:rPr>
+              <a:t>function_id</a:t>
+            </a:r>
+            <a:r>
+              <a:rPr sz="1000" b="0" i="0" dirty="0">
+                <a:solidFill>
+                  <a:srgbClr val="A5B4FC"/>
+                </a:solidFill>
+                <a:latin typeface="Calibri"/>
+              </a:rPr>
+              <a:t>) -&gt; </a:t>
+            </a:r>
+            <a:r>
+              <a:rPr sz="1000" b="0" i="0" dirty="0" err="1">
+                <a:solidFill>
+                  <a:srgbClr val="A5B4FC"/>
+                </a:solidFill>
+                <a:latin typeface="Calibri"/>
+              </a:rPr>
+              <a:t>AsyncIterator</a:t>
+            </a:r>
+            <a:r>
+              <a:rPr sz="1000" b="0" i="0" dirty="0">
+                <a:solidFill>
+                  <a:srgbClr val="A5B4FC"/>
+                </a:solidFill>
+                <a:latin typeface="Calibri"/>
+              </a:rPr>
+              <a:t>[</a:t>
+            </a:r>
+            <a:r>
+              <a:rPr sz="1000" b="0" i="0" dirty="0" err="1">
+                <a:solidFill>
+                  <a:srgbClr val="A5B4FC"/>
+                </a:solidFill>
+                <a:latin typeface="Calibri"/>
+              </a:rPr>
+              <a:t>dict</a:t>
+            </a:r>
+            <a:r>
+              <a:rPr sz="1000" b="0" i="0" dirty="0">
+                <a:solidFill>
+                  <a:srgbClr val="A5B4FC"/>
+                </a:solidFill>
+                <a:latin typeface="Calibri"/>
+              </a:rPr>
+              <a:t>]:
+    messages = await self._</a:t>
+            </a:r>
+            <a:r>
+              <a:rPr sz="1000" b="0" i="0" dirty="0" err="1">
+                <a:solidFill>
+                  <a:srgbClr val="A5B4FC"/>
+                </a:solidFill>
+                <a:latin typeface="Calibri"/>
+              </a:rPr>
+              <a:t>build_messages</a:t>
+            </a:r>
+            <a:r>
+              <a:rPr sz="1000" b="0" i="0" dirty="0">
+                <a:solidFill>
+                  <a:srgbClr val="A5B4FC"/>
+                </a:solidFill>
+                <a:latin typeface="Calibri"/>
+              </a:rPr>
+              <a:t>(text, </a:t>
+            </a:r>
+            <a:r>
+              <a:rPr sz="1000" b="0" i="0" dirty="0" err="1">
+                <a:solidFill>
+                  <a:srgbClr val="A5B4FC"/>
+                </a:solidFill>
+                <a:latin typeface="Calibri"/>
+              </a:rPr>
+              <a:t>function_id</a:t>
+            </a:r>
+            <a:r>
+              <a:rPr sz="1000" b="0" i="0" dirty="0">
+                <a:solidFill>
+                  <a:srgbClr val="A5B4FC"/>
+                </a:solidFill>
+                <a:latin typeface="Calibri"/>
+              </a:rPr>
+              <a:t>)   # system + user
+    </a:t>
+            </a:r>
+            <a:r>
+              <a:rPr sz="1000" b="0" i="0" dirty="0" err="1">
+                <a:solidFill>
+                  <a:srgbClr val="A5B4FC"/>
+                </a:solidFill>
+                <a:latin typeface="Calibri"/>
+              </a:rPr>
+              <a:t>full_text</a:t>
+            </a:r>
+            <a:r>
+              <a:rPr sz="1000" b="0" i="0" dirty="0">
+                <a:solidFill>
+                  <a:srgbClr val="A5B4FC"/>
+                </a:solidFill>
+                <a:latin typeface="Calibri"/>
+              </a:rPr>
+              <a:t> = ''
+    async for chunk in </a:t>
+            </a:r>
+            <a:r>
+              <a:rPr sz="1000" b="0" i="0" dirty="0" err="1">
+                <a:solidFill>
+                  <a:srgbClr val="A5B4FC"/>
+                </a:solidFill>
+                <a:latin typeface="Calibri"/>
+              </a:rPr>
+              <a:t>self.llm.stream</a:t>
+            </a:r>
+            <a:r>
+              <a:rPr sz="1000" b="0" i="0" dirty="0">
+                <a:solidFill>
+                  <a:srgbClr val="A5B4FC"/>
+                </a:solidFill>
+                <a:latin typeface="Calibri"/>
+              </a:rPr>
+              <a:t>(messages):              # </a:t>
+            </a:r>
+            <a:r>
+              <a:rPr sz="1000" b="0" i="0" dirty="0" err="1">
+                <a:solidFill>
+                  <a:srgbClr val="A5B4FC"/>
+                </a:solidFill>
+                <a:latin typeface="Calibri"/>
+              </a:rPr>
+              <a:t>кусочки</a:t>
+            </a:r>
+            <a:r>
+              <a:rPr sz="1000" b="0" i="0" dirty="0">
+                <a:solidFill>
+                  <a:srgbClr val="A5B4FC"/>
+                </a:solidFill>
+                <a:latin typeface="Calibri"/>
+              </a:rPr>
+              <a:t> </a:t>
+            </a:r>
+            <a:r>
+              <a:rPr sz="1000" b="0" i="0" dirty="0" err="1">
+                <a:solidFill>
+                  <a:srgbClr val="A5B4FC"/>
+                </a:solidFill>
+                <a:latin typeface="Calibri"/>
+              </a:rPr>
+              <a:t>от</a:t>
+            </a:r>
+            <a:r>
+              <a:rPr sz="1000" b="0" i="0" dirty="0">
+                <a:solidFill>
+                  <a:srgbClr val="A5B4FC"/>
+                </a:solidFill>
+                <a:latin typeface="Calibri"/>
+              </a:rPr>
+              <a:t> LLM
+        </a:t>
+            </a:r>
+            <a:r>
+              <a:rPr sz="1000" b="0" i="0" dirty="0" err="1">
+                <a:solidFill>
+                  <a:srgbClr val="A5B4FC"/>
+                </a:solidFill>
+                <a:latin typeface="Calibri"/>
+              </a:rPr>
+              <a:t>full_text</a:t>
+            </a:r>
+            <a:r>
+              <a:rPr sz="1000" b="0" i="0" dirty="0">
+                <a:solidFill>
+                  <a:srgbClr val="A5B4FC"/>
+                </a:solidFill>
+                <a:latin typeface="Calibri"/>
+              </a:rPr>
+              <a:t> += chunk
+        yield {'type': 'chunk', 'text': chunk}                 #  </a:t>
+            </a:r>
+            <a:r>
+              <a:rPr sz="1000" b="0" i="0" dirty="0" err="1">
+                <a:solidFill>
+                  <a:srgbClr val="A5B4FC"/>
+                </a:solidFill>
+                <a:latin typeface="Calibri"/>
+              </a:rPr>
+              <a:t>клиенту</a:t>
+            </a:r>
+            <a:r>
+              <a:rPr sz="1000" b="0" i="0" dirty="0">
+                <a:solidFill>
+                  <a:srgbClr val="A5B4FC"/>
+                </a:solidFill>
+                <a:latin typeface="Calibri"/>
+              </a:rPr>
+              <a:t> </a:t>
+            </a:r>
+            <a:r>
+              <a:rPr sz="1000" b="0" i="0" dirty="0" err="1">
+                <a:solidFill>
+                  <a:srgbClr val="A5B4FC"/>
+                </a:solidFill>
+                <a:latin typeface="Calibri"/>
+              </a:rPr>
+              <a:t>сразу</a:t>
+            </a:r>
+            <a:r>
+              <a:rPr sz="1000" b="0" i="0" dirty="0">
+                <a:solidFill>
+                  <a:srgbClr val="A5B4FC"/>
+                </a:solidFill>
+                <a:latin typeface="Calibri"/>
+              </a:rPr>
+              <a:t>
+    result = self._</a:t>
+            </a:r>
+            <a:r>
+              <a:rPr sz="1000" b="0" i="0" dirty="0" err="1">
+                <a:solidFill>
+                  <a:srgbClr val="A5B4FC"/>
+                </a:solidFill>
+                <a:latin typeface="Calibri"/>
+              </a:rPr>
+              <a:t>build_result</a:t>
+            </a:r>
+            <a:r>
+              <a:rPr sz="1000" b="0" i="0" dirty="0">
+                <a:solidFill>
+                  <a:srgbClr val="A5B4FC"/>
+                </a:solidFill>
+                <a:latin typeface="Calibri"/>
+              </a:rPr>
+              <a:t>(text, </a:t>
+            </a:r>
+            <a:r>
+              <a:rPr sz="1000" b="0" i="0" dirty="0" err="1">
+                <a:solidFill>
+                  <a:srgbClr val="A5B4FC"/>
+                </a:solidFill>
+                <a:latin typeface="Calibri"/>
+              </a:rPr>
+              <a:t>self._parse</a:t>
+            </a:r>
+            <a:r>
+              <a:rPr sz="1000" b="0" i="0" dirty="0">
+                <a:solidFill>
+                  <a:srgbClr val="A5B4FC"/>
+                </a:solidFill>
+                <a:latin typeface="Calibri"/>
+              </a:rPr>
+              <a:t>(</a:t>
+            </a:r>
+            <a:r>
+              <a:rPr sz="1000" b="0" i="0" dirty="0" err="1">
+                <a:solidFill>
+                  <a:srgbClr val="A5B4FC"/>
+                </a:solidFill>
+                <a:latin typeface="Calibri"/>
+              </a:rPr>
+              <a:t>full_text</a:t>
+            </a:r>
+            <a:r>
+              <a:rPr sz="1000" b="0" i="0" dirty="0">
+                <a:solidFill>
+                  <a:srgbClr val="A5B4FC"/>
+                </a:solidFill>
+                <a:latin typeface="Calibri"/>
+              </a:rPr>
+              <a:t>))
+    yield {'type': 'done', 'result': result}                   # </a:t>
+            </a:r>
+            <a:r>
+              <a:rPr sz="1000" b="0" i="0" dirty="0" err="1">
+                <a:solidFill>
+                  <a:srgbClr val="A5B4FC"/>
+                </a:solidFill>
+                <a:latin typeface="Calibri"/>
+              </a:rPr>
+              <a:t>финальный</a:t>
+            </a:r>
+            <a:r>
+              <a:rPr sz="1000" b="0" i="0" dirty="0">
+                <a:solidFill>
+                  <a:srgbClr val="A5B4FC"/>
+                </a:solidFill>
+                <a:latin typeface="Calibri"/>
+              </a:rPr>
+              <a:t> JSON</a:t>
             </a:r>
           </a:p>
         </p:txBody>

--- a/russian-handwriting-checker-new/RusYazyk_AI_v2.pptx
+++ b/russian-handwriting-checker-new/RusYazyk_AI_v2.pptx
@@ -655,6 +655,90 @@
     <p:extLst>
       <p:ext uri="{BB962C8B-B14F-4D97-AF65-F5344CB8AC3E}">
         <p14:creationId xmlns:p14="http://schemas.microsoft.com/office/powerpoint/2010/main" val="2619299520"/>
+      </p:ext>
+    </p:extLst>
+  </p:cSld>
+  <p:clrMapOvr>
+    <a:masterClrMapping/>
+  </p:clrMapOvr>
+</p:notes>
+</file>
+
+<file path=ppt/notesSlides/notesSlide3.xml><?xml version="1.0" encoding="utf-8"?>
+<p:notes xmlns:a="http://schemas.openxmlformats.org/drawingml/2006/main" xmlns:r="http://schemas.openxmlformats.org/officeDocument/2006/relationships" xmlns:p="http://schemas.openxmlformats.org/presentationml/2006/main">
+  <p:cSld>
+    <p:spTree>
+      <p:nvGrpSpPr>
+        <p:cNvPr id="1" name=""/>
+        <p:cNvGrpSpPr/>
+        <p:nvPr/>
+      </p:nvGrpSpPr>
+      <p:grpSpPr>
+        <a:xfrm>
+          <a:off x="0" y="0"/>
+          <a:ext cx="0" cy="0"/>
+          <a:chOff x="0" y="0"/>
+          <a:chExt cx="0" cy="0"/>
+        </a:xfrm>
+      </p:grpSpPr>
+      <p:sp>
+        <p:nvSpPr>
+          <p:cNvPr id="2" name="Образ слайда 1"/>
+          <p:cNvSpPr>
+            <a:spLocks noGrp="1" noRot="1" noChangeAspect="1"/>
+          </p:cNvSpPr>
+          <p:nvPr>
+            <p:ph type="sldImg"/>
+          </p:nvPr>
+        </p:nvSpPr>
+        <p:spPr/>
+      </p:sp>
+      <p:sp>
+        <p:nvSpPr>
+          <p:cNvPr id="3" name="Заметки 2"/>
+          <p:cNvSpPr>
+            <a:spLocks noGrp="1"/>
+          </p:cNvSpPr>
+          <p:nvPr>
+            <p:ph type="body" idx="1"/>
+          </p:nvPr>
+        </p:nvSpPr>
+        <p:spPr/>
+        <p:txBody>
+          <a:bodyPr/>
+          <a:lstStyle/>
+          <a:p>
+            <a:endParaRPr lang="ru-RU" dirty="0"/>
+          </a:p>
+        </p:txBody>
+      </p:sp>
+      <p:sp>
+        <p:nvSpPr>
+          <p:cNvPr id="4" name="Номер слайда 3"/>
+          <p:cNvSpPr>
+            <a:spLocks noGrp="1"/>
+          </p:cNvSpPr>
+          <p:nvPr>
+            <p:ph type="sldNum" sz="quarter" idx="5"/>
+          </p:nvPr>
+        </p:nvSpPr>
+        <p:spPr/>
+        <p:txBody>
+          <a:bodyPr/>
+          <a:lstStyle/>
+          <a:p>
+            <a:fld id="{4C205D05-FEBD-4ADB-A485-F121C0A06D52}" type="slidenum">
+              <a:rPr lang="ru-RU" smtClean="0"/>
+              <a:t>21</a:t>
+            </a:fld>
+            <a:endParaRPr lang="ru-RU"/>
+          </a:p>
+        </p:txBody>
+      </p:sp>
+    </p:spTree>
+    <p:extLst>
+      <p:ext uri="{BB962C8B-B14F-4D97-AF65-F5344CB8AC3E}">
+        <p14:creationId xmlns:p14="http://schemas.microsoft.com/office/powerpoint/2010/main" val="2276278387"/>
       </p:ext>
     </p:extLst>
   </p:cSld>
@@ -5014,15 +5098,84 @@
           <a:p>
             <a:pPr algn="l"/>
             <a:r>
-              <a:rPr sz="1000" b="0" i="0">
+              <a:rPr sz="1000" b="0" i="0" dirty="0">
                 <a:solidFill>
                   <a:srgbClr val="64748B"/>
                 </a:solidFill>
                 <a:latin typeface="Calibri"/>
               </a:rPr>
-              <a:t>Drag &amp; drop или диалог
-выбора файла</a:t>
-            </a:r>
+              <a:t>Drag &amp; drop </a:t>
+            </a:r>
+            <a:r>
+              <a:rPr sz="1000" b="0" i="0" dirty="0" err="1">
+                <a:solidFill>
+                  <a:srgbClr val="64748B"/>
+                </a:solidFill>
+                <a:latin typeface="Calibri"/>
+              </a:rPr>
+              <a:t>или</a:t>
+            </a:r>
+            <a:r>
+              <a:rPr sz="1000" b="0" i="0" dirty="0">
+                <a:solidFill>
+                  <a:srgbClr val="64748B"/>
+                </a:solidFill>
+                <a:latin typeface="Calibri"/>
+              </a:rPr>
+              <a:t> </a:t>
+            </a:r>
+            <a:r>
+              <a:rPr sz="1000" b="0" i="0" dirty="0" err="1">
+                <a:solidFill>
+                  <a:srgbClr val="64748B"/>
+                </a:solidFill>
+                <a:latin typeface="Calibri"/>
+              </a:rPr>
+              <a:t>диалог</a:t>
+            </a:r>
+            <a:r>
+              <a:rPr sz="1000" b="0" i="0" dirty="0">
+                <a:solidFill>
+                  <a:srgbClr val="64748B"/>
+                </a:solidFill>
+                <a:latin typeface="Calibri"/>
+              </a:rPr>
+              <a:t>
+</a:t>
+            </a:r>
+            <a:r>
+              <a:rPr sz="1000" b="0" i="0" dirty="0" err="1">
+                <a:solidFill>
+                  <a:srgbClr val="64748B"/>
+                </a:solidFill>
+                <a:latin typeface="Calibri"/>
+              </a:rPr>
+              <a:t>выбора</a:t>
+            </a:r>
+            <a:r>
+              <a:rPr sz="1000" b="0" i="0" dirty="0">
+                <a:solidFill>
+                  <a:srgbClr val="64748B"/>
+                </a:solidFill>
+                <a:latin typeface="Calibri"/>
+              </a:rPr>
+              <a:t> </a:t>
+            </a:r>
+            <a:r>
+              <a:rPr sz="1000" b="0" i="0" dirty="0" err="1">
+                <a:solidFill>
+                  <a:srgbClr val="64748B"/>
+                </a:solidFill>
+                <a:latin typeface="Calibri"/>
+              </a:rPr>
+              <a:t>файла</a:t>
+            </a:r>
+            <a:endParaRPr sz="1000" b="0" i="0" dirty="0">
+              <a:solidFill>
+                <a:srgbClr val="64748B"/>
+              </a:solidFill>
+              <a:latin typeface="Calibri"/>
+            </a:endParaRPr>
           </a:p>
         </p:txBody>
       </p:sp>
@@ -7541,7 +7694,7 @@
         <p:spPr>
           <a:xfrm>
             <a:off x="0" y="0"/>
-            <a:ext cx="12188952" cy="1078992"/>
+            <a:ext cx="12188952" cy="855472"/>
           </a:xfrm>
           <a:prstGeom prst="rect">
             <a:avLst/>
@@ -7584,7 +7737,7 @@
         </p:nvSpPr>
         <p:spPr>
           <a:xfrm>
-            <a:off x="457200" y="228600"/>
+            <a:off x="384048" y="25400"/>
             <a:ext cx="11247120" cy="548640"/>
           </a:xfrm>
           <a:prstGeom prst="rect">
@@ -7600,14 +7753,74 @@
           <a:p>
             <a:pPr algn="l"/>
             <a:r>
-              <a:rPr sz="2400" b="1" i="0">
+              <a:rPr sz="2400" b="1" i="0" dirty="0" err="1">
                 <a:solidFill>
                   <a:srgbClr val="FFFFFF"/>
                 </a:solidFill>
                 <a:latin typeface="Calibri"/>
               </a:rPr>
-              <a:t>Как работает проверка: CheckService</a:t>
-            </a:r>
+              <a:t>Как</a:t>
+            </a:r>
+            <a:r>
+              <a:rPr sz="2400" b="1" i="0" dirty="0">
+                <a:solidFill>
+                  <a:srgbClr val="FFFFFF"/>
+                </a:solidFill>
+                <a:latin typeface="Calibri"/>
+              </a:rPr>
+              <a:t> </a:t>
+            </a:r>
+            <a:r>
+              <a:rPr sz="2400" b="1" i="0" dirty="0" err="1">
+                <a:solidFill>
+                  <a:srgbClr val="FFFFFF"/>
+                </a:solidFill>
+                <a:latin typeface="Calibri"/>
+              </a:rPr>
+              <a:t>работает</a:t>
+            </a:r>
+            <a:r>
+              <a:rPr sz="2400" b="1" i="0" dirty="0">
+                <a:solidFill>
+                  <a:srgbClr val="FFFFFF"/>
+                </a:solidFill>
+                <a:latin typeface="Calibri"/>
+              </a:rPr>
+              <a:t> </a:t>
+            </a:r>
+            <a:r>
+              <a:rPr sz="2400" b="1" i="0" dirty="0" err="1">
+                <a:solidFill>
+                  <a:srgbClr val="FFFFFF"/>
+                </a:solidFill>
+                <a:latin typeface="Calibri"/>
+              </a:rPr>
+              <a:t>проверка</a:t>
+            </a:r>
+            <a:r>
+              <a:rPr sz="2400" b="1" i="0" dirty="0">
+                <a:solidFill>
+                  <a:srgbClr val="FFFFFF"/>
+                </a:solidFill>
+                <a:latin typeface="Calibri"/>
+              </a:rPr>
+              <a:t>: </a:t>
+            </a:r>
+            <a:r>
+              <a:rPr sz="2400" b="1" i="0" dirty="0" err="1">
+                <a:solidFill>
+                  <a:srgbClr val="FFFFFF"/>
+                </a:solidFill>
+                <a:latin typeface="Calibri"/>
+              </a:rPr>
+              <a:t>CheckService</a:t>
+            </a:r>
+            <a:endParaRPr sz="2400" b="1" i="0" dirty="0">
+              <a:solidFill>
+                <a:srgbClr val="FFFFFF"/>
+              </a:solidFill>
+              <a:latin typeface="Calibri"/>
+            </a:endParaRPr>
           </a:p>
         </p:txBody>
       </p:sp>
@@ -7619,7 +7832,7 @@
         </p:nvSpPr>
         <p:spPr>
           <a:xfrm>
-            <a:off x="457200" y="713232"/>
+            <a:off x="384048" y="436880"/>
             <a:ext cx="11247120" cy="292608"/>
           </a:xfrm>
           <a:prstGeom prst="rect">
@@ -7635,13 +7848,49 @@
           <a:p>
             <a:pPr algn="l"/>
             <a:r>
-              <a:rPr sz="1300" b="0" i="0">
+              <a:rPr sz="1300" b="0" i="0" dirty="0">
                 <a:solidFill>
                   <a:srgbClr val="E0E7FF"/>
                 </a:solidFill>
                 <a:latin typeface="Calibri"/>
               </a:rPr>
-              <a:t>Routes → CheckService → LLMService → parse JSON → highlight errors</a:t>
+              <a:t>Routes → </a:t>
+            </a:r>
+            <a:r>
+              <a:rPr sz="1300" b="0" i="0" dirty="0" err="1">
+                <a:solidFill>
+                  <a:srgbClr val="E0E7FF"/>
+                </a:solidFill>
+                <a:latin typeface="Calibri"/>
+              </a:rPr>
+              <a:t>CheckService</a:t>
+            </a:r>
+            <a:r>
+              <a:rPr sz="1300" b="0" i="0" dirty="0">
+                <a:solidFill>
+                  <a:srgbClr val="E0E7FF"/>
+                </a:solidFill>
+                <a:latin typeface="Calibri"/>
+              </a:rPr>
+              <a:t> → </a:t>
+            </a:r>
+            <a:r>
+              <a:rPr sz="1300" b="0" i="0" dirty="0" err="1">
+                <a:solidFill>
+                  <a:srgbClr val="E0E7FF"/>
+                </a:solidFill>
+                <a:latin typeface="Calibri"/>
+              </a:rPr>
+              <a:t>LLMService</a:t>
+            </a:r>
+            <a:r>
+              <a:rPr sz="1300" b="0" i="0" dirty="0">
+                <a:solidFill>
+                  <a:srgbClr val="E0E7FF"/>
+                </a:solidFill>
+                <a:latin typeface="Calibri"/>
+              </a:rPr>
+              <a:t> → parse JSON → highlight errors</a:t>
             </a:r>
           </a:p>
         </p:txBody>
@@ -7654,8 +7903,8 @@
         </p:nvSpPr>
         <p:spPr>
           <a:xfrm>
-            <a:off x="365760" y="1325880"/>
-            <a:ext cx="1920240" cy="868680"/>
+            <a:off x="433924" y="992632"/>
+            <a:ext cx="1920240" cy="688562"/>
           </a:xfrm>
           <a:prstGeom prst="rect">
             <a:avLst/>
@@ -7698,7 +7947,7 @@
         </p:nvSpPr>
         <p:spPr>
           <a:xfrm>
-            <a:off x="457200" y="1417320"/>
+            <a:off x="525364" y="1084072"/>
             <a:ext cx="1737360" cy="713232"/>
           </a:xfrm>
           <a:prstGeom prst="rect">
@@ -7734,8 +7983,8 @@
         </p:nvSpPr>
         <p:spPr>
           <a:xfrm>
-            <a:off x="2468880" y="1325880"/>
-            <a:ext cx="1920240" cy="868680"/>
+            <a:off x="2537044" y="992632"/>
+            <a:ext cx="1920240" cy="688562"/>
           </a:xfrm>
           <a:prstGeom prst="rect">
             <a:avLst/>
@@ -7778,7 +8027,7 @@
         </p:nvSpPr>
         <p:spPr>
           <a:xfrm>
-            <a:off x="2560320" y="1417320"/>
+            <a:off x="2628484" y="1084072"/>
             <a:ext cx="1737360" cy="713232"/>
           </a:xfrm>
           <a:prstGeom prst="rect">
@@ -7814,8 +8063,8 @@
         </p:nvSpPr>
         <p:spPr>
           <a:xfrm>
-            <a:off x="4572000" y="1325880"/>
-            <a:ext cx="1920240" cy="868680"/>
+            <a:off x="4640164" y="992632"/>
+            <a:ext cx="1920240" cy="688562"/>
           </a:xfrm>
           <a:prstGeom prst="rect">
             <a:avLst/>
@@ -7858,7 +8107,7 @@
         </p:nvSpPr>
         <p:spPr>
           <a:xfrm>
-            <a:off x="4663440" y="1417320"/>
+            <a:off x="4731604" y="1084072"/>
             <a:ext cx="1737360" cy="713232"/>
           </a:xfrm>
           <a:prstGeom prst="rect">
@@ -7894,8 +8143,8 @@
         </p:nvSpPr>
         <p:spPr>
           <a:xfrm>
-            <a:off x="6675120" y="1325880"/>
-            <a:ext cx="1920240" cy="868680"/>
+            <a:off x="6743284" y="992632"/>
+            <a:ext cx="1920240" cy="688562"/>
           </a:xfrm>
           <a:prstGeom prst="rect">
             <a:avLst/>
@@ -7938,7 +8187,7 @@
         </p:nvSpPr>
         <p:spPr>
           <a:xfrm>
-            <a:off x="6766560" y="1417320"/>
+            <a:off x="6834724" y="1084072"/>
             <a:ext cx="1737360" cy="713232"/>
           </a:xfrm>
           <a:prstGeom prst="rect">
@@ -7974,8 +8223,8 @@
         </p:nvSpPr>
         <p:spPr>
           <a:xfrm>
-            <a:off x="8778240" y="1325880"/>
-            <a:ext cx="1920240" cy="868680"/>
+            <a:off x="8846404" y="992632"/>
+            <a:ext cx="1920240" cy="688562"/>
           </a:xfrm>
           <a:prstGeom prst="rect">
             <a:avLst/>
@@ -8018,7 +8267,7 @@
         </p:nvSpPr>
         <p:spPr>
           <a:xfrm>
-            <a:off x="8869680" y="1417320"/>
+            <a:off x="8937844" y="1084072"/>
             <a:ext cx="1737360" cy="713232"/>
           </a:xfrm>
           <a:prstGeom prst="rect">
@@ -8034,15 +8283,30 @@
           <a:p>
             <a:pPr algn="ctr"/>
             <a:r>
-              <a:rPr sz="1200" b="1" i="0">
+              <a:rPr sz="1200" b="1" i="0" dirty="0">
                 <a:solidFill>
                   <a:srgbClr val="FFFFFF"/>
                 </a:solidFill>
                 <a:latin typeface="Calibri"/>
               </a:rPr>
               <a:t>_parse()
-JSON → dict</a:t>
-            </a:r>
+JSON → </a:t>
+            </a:r>
+            <a:r>
+              <a:rPr sz="1200" b="1" i="0" dirty="0" err="1">
+                <a:solidFill>
+                  <a:srgbClr val="FFFFFF"/>
+                </a:solidFill>
+                <a:latin typeface="Calibri"/>
+              </a:rPr>
+              <a:t>dict</a:t>
+            </a:r>
+            <a:endParaRPr sz="1200" b="1" i="0" dirty="0">
+              <a:solidFill>
+                <a:srgbClr val="FFFFFF"/>
+              </a:solidFill>
+              <a:latin typeface="Calibri"/>
+            </a:endParaRPr>
           </a:p>
         </p:txBody>
       </p:sp>
@@ -8054,7 +8318,7 @@
         </p:nvSpPr>
         <p:spPr>
           <a:xfrm>
-            <a:off x="2240280" y="1645920"/>
+            <a:off x="2308444" y="1178195"/>
             <a:ext cx="274320" cy="320040"/>
           </a:xfrm>
           <a:prstGeom prst="rect">
@@ -8089,7 +8353,7 @@
         </p:nvSpPr>
         <p:spPr>
           <a:xfrm>
-            <a:off x="4343400" y="1645920"/>
+            <a:off x="4411564" y="1184148"/>
             <a:ext cx="274320" cy="320040"/>
           </a:xfrm>
           <a:prstGeom prst="rect">
@@ -8124,7 +8388,7 @@
         </p:nvSpPr>
         <p:spPr>
           <a:xfrm>
-            <a:off x="6446520" y="1659414"/>
+            <a:off x="6514684" y="1166146"/>
             <a:ext cx="274320" cy="320040"/>
           </a:xfrm>
           <a:prstGeom prst="rect">
@@ -8159,7 +8423,7 @@
         </p:nvSpPr>
         <p:spPr>
           <a:xfrm>
-            <a:off x="8549640" y="1645920"/>
+            <a:off x="8617804" y="1190974"/>
             <a:ext cx="274320" cy="320040"/>
           </a:xfrm>
           <a:prstGeom prst="rect">
@@ -8194,8 +8458,8 @@
         </p:nvSpPr>
         <p:spPr>
           <a:xfrm>
-            <a:off x="457200" y="2423160"/>
-            <a:ext cx="11247120" cy="347472"/>
+            <a:off x="365760" y="1810512"/>
+            <a:ext cx="11247120" cy="359156"/>
           </a:xfrm>
           <a:prstGeom prst="rect">
             <a:avLst/>
@@ -8245,7 +8509,7 @@
         </p:nvSpPr>
         <p:spPr>
           <a:xfrm>
-            <a:off x="588554" y="2446242"/>
+            <a:off x="497114" y="1833594"/>
             <a:ext cx="10789920" cy="292388"/>
           </a:xfrm>
           <a:prstGeom prst="rect">
@@ -8388,8 +8652,8 @@
         </p:nvSpPr>
         <p:spPr>
           <a:xfrm>
-            <a:off x="457200" y="2880360"/>
-            <a:ext cx="3566160" cy="841248"/>
+            <a:off x="365760" y="2267712"/>
+            <a:ext cx="3566160" cy="869536"/>
           </a:xfrm>
           <a:prstGeom prst="rect">
             <a:avLst/>
@@ -8432,8 +8696,8 @@
         </p:nvSpPr>
         <p:spPr>
           <a:xfrm>
-            <a:off x="457200" y="2880360"/>
-            <a:ext cx="3566160" cy="50800"/>
+            <a:off x="365760" y="2267712"/>
+            <a:ext cx="3566160" cy="52508"/>
           </a:xfrm>
           <a:prstGeom prst="rect">
             <a:avLst/>
@@ -8476,7 +8740,7 @@
         </p:nvSpPr>
         <p:spPr>
           <a:xfrm>
-            <a:off x="594360" y="2953512"/>
+            <a:off x="502920" y="2340864"/>
             <a:ext cx="3383280" cy="365760"/>
           </a:xfrm>
           <a:prstGeom prst="rect">
@@ -8511,7 +8775,7 @@
         </p:nvSpPr>
         <p:spPr>
           <a:xfrm>
-            <a:off x="594360" y="3337560"/>
+            <a:off x="502920" y="2724912"/>
             <a:ext cx="3383280" cy="347472"/>
           </a:xfrm>
           <a:prstGeom prst="rect">
@@ -8546,8 +8810,8 @@
         </p:nvSpPr>
         <p:spPr>
           <a:xfrm>
-            <a:off x="4224528" y="2880360"/>
-            <a:ext cx="3566160" cy="841248"/>
+            <a:off x="4133088" y="2267712"/>
+            <a:ext cx="3566160" cy="869536"/>
           </a:xfrm>
           <a:prstGeom prst="rect">
             <a:avLst/>
@@ -8590,8 +8854,8 @@
         </p:nvSpPr>
         <p:spPr>
           <a:xfrm>
-            <a:off x="4224528" y="2880360"/>
-            <a:ext cx="3566160" cy="50800"/>
+            <a:off x="4133088" y="2267712"/>
+            <a:ext cx="3566160" cy="52508"/>
           </a:xfrm>
           <a:prstGeom prst="rect">
             <a:avLst/>
@@ -8634,7 +8898,7 @@
         </p:nvSpPr>
         <p:spPr>
           <a:xfrm>
-            <a:off x="4361688" y="2953512"/>
+            <a:off x="4270248" y="2340864"/>
             <a:ext cx="3383280" cy="365760"/>
           </a:xfrm>
           <a:prstGeom prst="rect">
@@ -8669,7 +8933,7 @@
         </p:nvSpPr>
         <p:spPr>
           <a:xfrm>
-            <a:off x="4361688" y="3337560"/>
+            <a:off x="4270248" y="2724912"/>
             <a:ext cx="3383280" cy="347472"/>
           </a:xfrm>
           <a:prstGeom prst="rect">
@@ -8704,8 +8968,8 @@
         </p:nvSpPr>
         <p:spPr>
           <a:xfrm>
-            <a:off x="7991856" y="2880360"/>
-            <a:ext cx="3566160" cy="841248"/>
+            <a:off x="7900416" y="2267712"/>
+            <a:ext cx="3566160" cy="869536"/>
           </a:xfrm>
           <a:prstGeom prst="rect">
             <a:avLst/>
@@ -8748,8 +9012,8 @@
         </p:nvSpPr>
         <p:spPr>
           <a:xfrm>
-            <a:off x="7991856" y="2880360"/>
-            <a:ext cx="3566160" cy="50800"/>
+            <a:off x="7900416" y="2267712"/>
+            <a:ext cx="3566160" cy="52508"/>
           </a:xfrm>
           <a:prstGeom prst="rect">
             <a:avLst/>
@@ -8792,7 +9056,7 @@
         </p:nvSpPr>
         <p:spPr>
           <a:xfrm>
-            <a:off x="8129016" y="2953512"/>
+            <a:off x="8037576" y="2340864"/>
             <a:ext cx="3383280" cy="365760"/>
           </a:xfrm>
           <a:prstGeom prst="rect">
@@ -8827,7 +9091,7 @@
         </p:nvSpPr>
         <p:spPr>
           <a:xfrm>
-            <a:off x="8129016" y="3337560"/>
+            <a:off x="8037576" y="2724912"/>
             <a:ext cx="3383280" cy="347472"/>
           </a:xfrm>
           <a:prstGeom prst="rect">
@@ -8862,8 +9126,8 @@
         </p:nvSpPr>
         <p:spPr>
           <a:xfrm>
-            <a:off x="457200" y="3849624"/>
-            <a:ext cx="3566160" cy="841248"/>
+            <a:off x="365760" y="3221042"/>
+            <a:ext cx="3566160" cy="869536"/>
           </a:xfrm>
           <a:prstGeom prst="rect">
             <a:avLst/>
@@ -8906,8 +9170,8 @@
         </p:nvSpPr>
         <p:spPr>
           <a:xfrm>
-            <a:off x="457200" y="3849624"/>
-            <a:ext cx="3566160" cy="50800"/>
+            <a:off x="365760" y="3221042"/>
+            <a:ext cx="3566160" cy="52508"/>
           </a:xfrm>
           <a:prstGeom prst="rect">
             <a:avLst/>
@@ -8950,7 +9214,7 @@
         </p:nvSpPr>
         <p:spPr>
           <a:xfrm>
-            <a:off x="594360" y="3922776"/>
+            <a:off x="502920" y="3294194"/>
             <a:ext cx="3383280" cy="365760"/>
           </a:xfrm>
           <a:prstGeom prst="rect">
@@ -8985,7 +9249,7 @@
         </p:nvSpPr>
         <p:spPr>
           <a:xfrm>
-            <a:off x="594360" y="4306824"/>
+            <a:off x="502920" y="3678242"/>
             <a:ext cx="3383280" cy="347472"/>
           </a:xfrm>
           <a:prstGeom prst="rect">
@@ -9020,8 +9284,8 @@
         </p:nvSpPr>
         <p:spPr>
           <a:xfrm>
-            <a:off x="4224528" y="3849624"/>
-            <a:ext cx="3566160" cy="841248"/>
+            <a:off x="4133088" y="3221042"/>
+            <a:ext cx="3566160" cy="869536"/>
           </a:xfrm>
           <a:prstGeom prst="rect">
             <a:avLst/>
@@ -9064,8 +9328,8 @@
         </p:nvSpPr>
         <p:spPr>
           <a:xfrm>
-            <a:off x="4224528" y="3849624"/>
-            <a:ext cx="3566160" cy="50800"/>
+            <a:off x="4133088" y="3221042"/>
+            <a:ext cx="3566160" cy="52508"/>
           </a:xfrm>
           <a:prstGeom prst="rect">
             <a:avLst/>
@@ -9108,7 +9372,7 @@
         </p:nvSpPr>
         <p:spPr>
           <a:xfrm>
-            <a:off x="4361688" y="3922776"/>
+            <a:off x="4270248" y="3294194"/>
             <a:ext cx="3383280" cy="365760"/>
           </a:xfrm>
           <a:prstGeom prst="rect">
@@ -9143,8 +9407,8 @@
         </p:nvSpPr>
         <p:spPr>
           <a:xfrm>
-            <a:off x="4361688" y="4306824"/>
-            <a:ext cx="3383280" cy="347472"/>
+            <a:off x="4270248" y="3678242"/>
+            <a:ext cx="3383280" cy="261610"/>
           </a:xfrm>
           <a:prstGeom prst="rect">
             <a:avLst/>
@@ -9159,14 +9423,74 @@
           <a:p>
             <a:pPr algn="l"/>
             <a:r>
-              <a:rPr sz="1100" b="0" i="0">
+              <a:rPr sz="1100" b="0" i="0" dirty="0" err="1">
                 <a:solidFill>
                   <a:srgbClr val="64748B"/>
                 </a:solidFill>
                 <a:latin typeface="Calibri"/>
               </a:rPr>
-              <a:t>Текст с &lt;span&gt; вокруг ошибок</a:t>
-            </a:r>
+              <a:t>Текст</a:t>
+            </a:r>
+            <a:r>
+              <a:rPr sz="1100" b="0" i="0" dirty="0">
+                <a:solidFill>
+                  <a:srgbClr val="64748B"/>
+                </a:solidFill>
+                <a:latin typeface="Calibri"/>
+              </a:rPr>
+              <a:t> с </a:t>
+            </a:r>
+            <a:r>
+              <a:rPr lang="ru-RU" sz="1100" b="0" i="0" dirty="0">
+                <a:solidFill>
+                  <a:srgbClr val="64748B"/>
+                </a:solidFill>
+                <a:latin typeface="Calibri"/>
+              </a:rPr>
+              <a:t>тегом </a:t>
+            </a:r>
+            <a:r>
+              <a:rPr sz="1100" b="0" i="0" dirty="0">
+                <a:solidFill>
+                  <a:srgbClr val="64748B"/>
+                </a:solidFill>
+                <a:latin typeface="Calibri"/>
+              </a:rPr>
+              <a:t>&lt;span&gt; </a:t>
+            </a:r>
+            <a:r>
+              <a:rPr sz="1100" b="0" i="0" dirty="0" err="1">
+                <a:solidFill>
+                  <a:srgbClr val="64748B"/>
+                </a:solidFill>
+                <a:latin typeface="Calibri"/>
+              </a:rPr>
+              <a:t>вокруг</a:t>
+            </a:r>
+            <a:r>
+              <a:rPr sz="1100" b="0" i="0" dirty="0">
+                <a:solidFill>
+                  <a:srgbClr val="64748B"/>
+                </a:solidFill>
+                <a:latin typeface="Calibri"/>
+              </a:rPr>
+              <a:t> </a:t>
+            </a:r>
+            <a:r>
+              <a:rPr sz="1100" b="0" i="0" dirty="0" err="1">
+                <a:solidFill>
+                  <a:srgbClr val="64748B"/>
+                </a:solidFill>
+                <a:latin typeface="Calibri"/>
+              </a:rPr>
+              <a:t>ошибок</a:t>
+            </a:r>
+            <a:endParaRPr sz="1100" b="0" i="0" dirty="0">
+              <a:solidFill>
+                <a:srgbClr val="64748B"/>
+              </a:solidFill>
+              <a:latin typeface="Calibri"/>
+            </a:endParaRPr>
           </a:p>
         </p:txBody>
       </p:sp>
@@ -9178,8 +9502,8 @@
         </p:nvSpPr>
         <p:spPr>
           <a:xfrm>
-            <a:off x="7991856" y="3849624"/>
-            <a:ext cx="3566160" cy="841248"/>
+            <a:off x="7900416" y="3221042"/>
+            <a:ext cx="3566160" cy="869536"/>
           </a:xfrm>
           <a:prstGeom prst="rect">
             <a:avLst/>
@@ -9222,8 +9546,8 @@
         </p:nvSpPr>
         <p:spPr>
           <a:xfrm>
-            <a:off x="7991856" y="3849624"/>
-            <a:ext cx="3566160" cy="50800"/>
+            <a:off x="7900416" y="3221042"/>
+            <a:ext cx="3566160" cy="52508"/>
           </a:xfrm>
           <a:prstGeom prst="rect">
             <a:avLst/>
@@ -9266,7 +9590,7 @@
         </p:nvSpPr>
         <p:spPr>
           <a:xfrm>
-            <a:off x="8129016" y="3922776"/>
+            <a:off x="8037576" y="3294194"/>
             <a:ext cx="3383280" cy="365760"/>
           </a:xfrm>
           <a:prstGeom prst="rect">
@@ -9301,7 +9625,7 @@
         </p:nvSpPr>
         <p:spPr>
           <a:xfrm>
-            <a:off x="8129016" y="4306824"/>
+            <a:off x="8037576" y="3678242"/>
             <a:ext cx="3383280" cy="347472"/>
           </a:xfrm>
           <a:prstGeom prst="rect">
@@ -9336,7 +9660,7 @@
         </p:nvSpPr>
         <p:spPr>
           <a:xfrm>
-            <a:off x="457200" y="4983480"/>
+            <a:off x="384048" y="5101844"/>
             <a:ext cx="11247120" cy="1664208"/>
           </a:xfrm>
           <a:prstGeom prst="rect">
@@ -9380,7 +9704,7 @@
         </p:nvSpPr>
         <p:spPr>
           <a:xfrm>
-            <a:off x="640080" y="5074920"/>
+            <a:off x="566928" y="5220208"/>
             <a:ext cx="10972800" cy="1527048"/>
           </a:xfrm>
           <a:prstGeom prst="rect">
@@ -9396,7 +9720,7 @@
           <a:p>
             <a:pPr algn="l"/>
             <a:r>
-              <a:rPr sz="1000" b="0" i="0">
+              <a:rPr sz="1000" b="0" i="0" dirty="0">
                 <a:solidFill>
                   <a:srgbClr val="A5B4FC"/>
                 </a:solidFill>
@@ -9405,13 +9729,818 @@
               <a:t>def _highlight(self, text: str, errors: list) -&gt; str:
     result = text
     for e in errors:
-        original = e.get('original', '')          # слово с ошибкой из JSON
-        result = re.sub(
-            re.escape(original),                  # экранируем спецсимволы
+        original = </a:t>
+            </a:r>
+            <a:r>
+              <a:rPr sz="1000" b="0" i="0" dirty="0" err="1">
+                <a:solidFill>
+                  <a:srgbClr val="A5B4FC"/>
+                </a:solidFill>
+                <a:latin typeface="Calibri"/>
+              </a:rPr>
+              <a:t>e.get</a:t>
+            </a:r>
+            <a:r>
+              <a:rPr sz="1000" b="0" i="0" dirty="0">
+                <a:solidFill>
+                  <a:srgbClr val="A5B4FC"/>
+                </a:solidFill>
+                <a:latin typeface="Calibri"/>
+              </a:rPr>
+              <a:t>('original', '')          # </a:t>
+            </a:r>
+            <a:r>
+              <a:rPr sz="1000" b="0" i="0" dirty="0" err="1">
+                <a:solidFill>
+                  <a:srgbClr val="A5B4FC"/>
+                </a:solidFill>
+                <a:latin typeface="Calibri"/>
+              </a:rPr>
+              <a:t>слово</a:t>
+            </a:r>
+            <a:r>
+              <a:rPr sz="1000" b="0" i="0" dirty="0">
+                <a:solidFill>
+                  <a:srgbClr val="A5B4FC"/>
+                </a:solidFill>
+                <a:latin typeface="Calibri"/>
+              </a:rPr>
+              <a:t> с </a:t>
+            </a:r>
+            <a:r>
+              <a:rPr sz="1000" b="0" i="0" dirty="0" err="1">
+                <a:solidFill>
+                  <a:srgbClr val="A5B4FC"/>
+                </a:solidFill>
+                <a:latin typeface="Calibri"/>
+              </a:rPr>
+              <a:t>ошибкой</a:t>
+            </a:r>
+            <a:r>
+              <a:rPr sz="1000" b="0" i="0" dirty="0">
+                <a:solidFill>
+                  <a:srgbClr val="A5B4FC"/>
+                </a:solidFill>
+                <a:latin typeface="Calibri"/>
+              </a:rPr>
+              <a:t> </a:t>
+            </a:r>
+            <a:r>
+              <a:rPr sz="1000" b="0" i="0" dirty="0" err="1">
+                <a:solidFill>
+                  <a:srgbClr val="A5B4FC"/>
+                </a:solidFill>
+                <a:latin typeface="Calibri"/>
+              </a:rPr>
+              <a:t>из</a:t>
+            </a:r>
+            <a:r>
+              <a:rPr sz="1000" b="0" i="0" dirty="0">
+                <a:solidFill>
+                  <a:srgbClr val="A5B4FC"/>
+                </a:solidFill>
+                <a:latin typeface="Calibri"/>
+              </a:rPr>
+              <a:t> JSON
+        result = </a:t>
+            </a:r>
+            <a:r>
+              <a:rPr sz="1000" b="0" i="0" dirty="0" err="1">
+                <a:solidFill>
+                  <a:srgbClr val="A5B4FC"/>
+                </a:solidFill>
+                <a:latin typeface="Calibri"/>
+              </a:rPr>
+              <a:t>re.sub</a:t>
+            </a:r>
+            <a:r>
+              <a:rPr sz="1000" b="0" i="0" dirty="0">
+                <a:solidFill>
+                  <a:srgbClr val="A5B4FC"/>
+                </a:solidFill>
+                <a:latin typeface="Calibri"/>
+              </a:rPr>
+              <a:t>(
+            </a:t>
+            </a:r>
+            <a:r>
+              <a:rPr sz="1000" b="0" i="0" dirty="0" err="1">
+                <a:solidFill>
+                  <a:srgbClr val="A5B4FC"/>
+                </a:solidFill>
+                <a:latin typeface="Calibri"/>
+              </a:rPr>
+              <a:t>re.escape</a:t>
+            </a:r>
+            <a:r>
+              <a:rPr sz="1000" b="0" i="0" dirty="0">
+                <a:solidFill>
+                  <a:srgbClr val="A5B4FC"/>
+                </a:solidFill>
+                <a:latin typeface="Calibri"/>
+              </a:rPr>
+              <a:t>(original),                  # </a:t>
+            </a:r>
+            <a:r>
+              <a:rPr sz="1000" b="0" i="0" dirty="0" err="1">
+                <a:solidFill>
+                  <a:srgbClr val="A5B4FC"/>
+                </a:solidFill>
+                <a:latin typeface="Calibri"/>
+              </a:rPr>
+              <a:t>экранируем</a:t>
+            </a:r>
+            <a:r>
+              <a:rPr sz="1000" b="0" i="0" dirty="0">
+                <a:solidFill>
+                  <a:srgbClr val="A5B4FC"/>
+                </a:solidFill>
+                <a:latin typeface="Calibri"/>
+              </a:rPr>
+              <a:t> </a:t>
+            </a:r>
+            <a:r>
+              <a:rPr sz="1000" b="0" i="0" dirty="0" err="1">
+                <a:solidFill>
+                  <a:srgbClr val="A5B4FC"/>
+                </a:solidFill>
+                <a:latin typeface="Calibri"/>
+              </a:rPr>
+              <a:t>спецсимволы</a:t>
+            </a:r>
+            <a:r>
+              <a:rPr sz="1000" b="0" i="0" dirty="0">
+                <a:solidFill>
+                  <a:srgbClr val="A5B4FC"/>
+                </a:solidFill>
+                <a:latin typeface="Calibri"/>
+              </a:rPr>
+              <a:t>
             f'&lt;span class="error-highlight"&gt;{original}&lt;/span&gt;',
-            result, count=1)                      # только первое вхождение
+            result, count=1)                      # </a:t>
+            </a:r>
+            <a:r>
+              <a:rPr sz="1000" b="0" i="0" dirty="0" err="1">
+                <a:solidFill>
+                  <a:srgbClr val="A5B4FC"/>
+                </a:solidFill>
+                <a:latin typeface="Calibri"/>
+              </a:rPr>
+              <a:t>только</a:t>
+            </a:r>
+            <a:r>
+              <a:rPr sz="1000" b="0" i="0" dirty="0">
+                <a:solidFill>
+                  <a:srgbClr val="A5B4FC"/>
+                </a:solidFill>
+                <a:latin typeface="Calibri"/>
+              </a:rPr>
+              <a:t> </a:t>
+            </a:r>
+            <a:r>
+              <a:rPr sz="1000" b="0" i="0" dirty="0" err="1">
+                <a:solidFill>
+                  <a:srgbClr val="A5B4FC"/>
+                </a:solidFill>
+                <a:latin typeface="Calibri"/>
+              </a:rPr>
+              <a:t>первое</a:t>
+            </a:r>
+            <a:r>
+              <a:rPr sz="1000" b="0" i="0" dirty="0">
+                <a:solidFill>
+                  <a:srgbClr val="A5B4FC"/>
+                </a:solidFill>
+                <a:latin typeface="Calibri"/>
+              </a:rPr>
+              <a:t> </a:t>
+            </a:r>
+            <a:r>
+              <a:rPr sz="1000" b="0" i="0" dirty="0" err="1">
+                <a:solidFill>
+                  <a:srgbClr val="A5B4FC"/>
+                </a:solidFill>
+                <a:latin typeface="Calibri"/>
+              </a:rPr>
+              <a:t>вхождение</a:t>
+            </a:r>
+            <a:r>
+              <a:rPr sz="1000" b="0" i="0" dirty="0">
+                <a:solidFill>
+                  <a:srgbClr val="A5B4FC"/>
+                </a:solidFill>
+                <a:latin typeface="Calibri"/>
+              </a:rPr>
+              <a:t>
     return result</a:t>
             </a:r>
+          </a:p>
+        </p:txBody>
+      </p:sp>
+      <p:sp>
+        <p:nvSpPr>
+          <p:cNvPr id="48" name="Rectangle 32">
+            <a:extLst>
+              <a:ext uri="{FF2B5EF4-FFF2-40B4-BE49-F238E27FC236}">
+                <a16:creationId xmlns:a16="http://schemas.microsoft.com/office/drawing/2014/main" id="{E3411291-8AC2-1974-7142-C596F1E47570}"/>
+              </a:ext>
+            </a:extLst>
+          </p:cNvPr>
+          <p:cNvSpPr/>
+          <p:nvPr/>
+        </p:nvSpPr>
+        <p:spPr>
+          <a:xfrm>
+            <a:off x="365760" y="4190638"/>
+            <a:ext cx="3566160" cy="869536"/>
+          </a:xfrm>
+          <a:prstGeom prst="rect">
+            <a:avLst/>
+          </a:prstGeom>
+          <a:solidFill>
+            <a:schemeClr val="accent5">
+              <a:lumMod val="20000"/>
+              <a:lumOff val="80000"/>
+            </a:schemeClr>
+          </a:solidFill>
+          <a:ln>
+            <a:noFill/>
+          </a:ln>
+        </p:spPr>
+        <p:style>
+          <a:lnRef idx="1">
+            <a:schemeClr val="accent1"/>
+          </a:lnRef>
+          <a:fillRef idx="3">
+            <a:schemeClr val="accent1"/>
+          </a:fillRef>
+          <a:effectRef idx="2">
+            <a:schemeClr val="accent1"/>
+          </a:effectRef>
+          <a:fontRef idx="minor">
+            <a:schemeClr val="lt1"/>
+          </a:fontRef>
+        </p:style>
+        <p:txBody>
+          <a:bodyPr rtlCol="0" anchor="ctr"/>
+          <a:lstStyle/>
+          <a:p>
+            <a:pPr algn="ctr"/>
+            <a:endParaRPr/>
+          </a:p>
+        </p:txBody>
+      </p:sp>
+      <p:sp>
+        <p:nvSpPr>
+          <p:cNvPr id="49" name="Rectangle 33">
+            <a:extLst>
+              <a:ext uri="{FF2B5EF4-FFF2-40B4-BE49-F238E27FC236}">
+                <a16:creationId xmlns:a16="http://schemas.microsoft.com/office/drawing/2014/main" id="{E4E308DE-84AF-B513-09F5-DFD08A591BB7}"/>
+              </a:ext>
+            </a:extLst>
+          </p:cNvPr>
+          <p:cNvSpPr/>
+          <p:nvPr/>
+        </p:nvSpPr>
+        <p:spPr>
+          <a:xfrm>
+            <a:off x="365760" y="4190638"/>
+            <a:ext cx="3566160" cy="52508"/>
+          </a:xfrm>
+          <a:prstGeom prst="rect">
+            <a:avLst/>
+          </a:prstGeom>
+          <a:solidFill>
+            <a:schemeClr val="accent5">
+              <a:lumMod val="60000"/>
+              <a:lumOff val="40000"/>
+            </a:schemeClr>
+          </a:solidFill>
+          <a:ln>
+            <a:noFill/>
+          </a:ln>
+        </p:spPr>
+        <p:style>
+          <a:lnRef idx="1">
+            <a:schemeClr val="accent1"/>
+          </a:lnRef>
+          <a:fillRef idx="3">
+            <a:schemeClr val="accent1"/>
+          </a:fillRef>
+          <a:effectRef idx="2">
+            <a:schemeClr val="accent1"/>
+          </a:effectRef>
+          <a:fontRef idx="minor">
+            <a:schemeClr val="lt1"/>
+          </a:fontRef>
+        </p:style>
+        <p:txBody>
+          <a:bodyPr rtlCol="0" anchor="ctr"/>
+          <a:lstStyle/>
+          <a:p>
+            <a:pPr algn="ctr"/>
+            <a:endParaRPr/>
+          </a:p>
+        </p:txBody>
+      </p:sp>
+      <p:sp>
+        <p:nvSpPr>
+          <p:cNvPr id="50" name="TextBox 49">
+            <a:extLst>
+              <a:ext uri="{FF2B5EF4-FFF2-40B4-BE49-F238E27FC236}">
+                <a16:creationId xmlns:a16="http://schemas.microsoft.com/office/drawing/2014/main" id="{271F9862-ADAF-7183-06A5-DE7D0F449180}"/>
+              </a:ext>
+            </a:extLst>
+          </p:cNvPr>
+          <p:cNvSpPr txBox="1"/>
+          <p:nvPr/>
+        </p:nvSpPr>
+        <p:spPr>
+          <a:xfrm>
+            <a:off x="502920" y="4263790"/>
+            <a:ext cx="3383280" cy="276999"/>
+          </a:xfrm>
+          <a:prstGeom prst="rect">
+            <a:avLst/>
+          </a:prstGeom>
+          <a:noFill/>
+        </p:spPr>
+        <p:txBody>
+          <a:bodyPr wrap="square">
+            <a:spAutoFit/>
+          </a:bodyPr>
+          <a:lstStyle/>
+          <a:p>
+            <a:r>
+              <a:rPr lang="en-US" sz="1200" b="1" dirty="0" err="1">
+                <a:solidFill>
+                  <a:schemeClr val="accent5">
+                    <a:lumMod val="50000"/>
+                  </a:schemeClr>
+                </a:solidFill>
+              </a:rPr>
+              <a:t>pass_fail</a:t>
+            </a:r>
+            <a:endParaRPr lang="en-US" sz="1200" b="1" dirty="0">
+              <a:solidFill>
+                <a:schemeClr val="accent5">
+                  <a:lumMod val="50000"/>
+                </a:schemeClr>
+              </a:solidFill>
+            </a:endParaRPr>
+          </a:p>
+        </p:txBody>
+      </p:sp>
+      <p:sp>
+        <p:nvSpPr>
+          <p:cNvPr id="51" name="TextBox 50">
+            <a:extLst>
+              <a:ext uri="{FF2B5EF4-FFF2-40B4-BE49-F238E27FC236}">
+                <a16:creationId xmlns:a16="http://schemas.microsoft.com/office/drawing/2014/main" id="{9389037E-63D4-178B-FCDB-C75D1960CEB3}"/>
+              </a:ext>
+            </a:extLst>
+          </p:cNvPr>
+          <p:cNvSpPr txBox="1"/>
+          <p:nvPr/>
+        </p:nvSpPr>
+        <p:spPr>
+          <a:xfrm>
+            <a:off x="502920" y="4647838"/>
+            <a:ext cx="3383280" cy="261610"/>
+          </a:xfrm>
+          <a:prstGeom prst="rect">
+            <a:avLst/>
+          </a:prstGeom>
+          <a:noFill/>
+        </p:spPr>
+        <p:txBody>
+          <a:bodyPr wrap="square">
+            <a:spAutoFit/>
+          </a:bodyPr>
+          <a:lstStyle/>
+          <a:p>
+            <a:r>
+              <a:rPr lang="ru-RU" sz="1100" dirty="0">
+                <a:solidFill>
+                  <a:srgbClr val="1E293B"/>
+                </a:solidFill>
+              </a:rPr>
+              <a:t>«зачёт» / «незачёт» (итоговое сочинение)</a:t>
+            </a:r>
+            <a:endParaRPr sz="1100" b="0" i="0" dirty="0">
+              <a:solidFill>
+                <a:srgbClr val="64748B"/>
+              </a:solidFill>
+              <a:latin typeface="Calibri"/>
+            </a:endParaRPr>
+          </a:p>
+        </p:txBody>
+      </p:sp>
+      <p:sp>
+        <p:nvSpPr>
+          <p:cNvPr id="52" name="Rectangle 36">
+            <a:extLst>
+              <a:ext uri="{FF2B5EF4-FFF2-40B4-BE49-F238E27FC236}">
+                <a16:creationId xmlns:a16="http://schemas.microsoft.com/office/drawing/2014/main" id="{48101C2E-712E-3876-46FD-332B2082FA8D}"/>
+              </a:ext>
+            </a:extLst>
+          </p:cNvPr>
+          <p:cNvSpPr/>
+          <p:nvPr/>
+        </p:nvSpPr>
+        <p:spPr>
+          <a:xfrm>
+            <a:off x="4133088" y="4190638"/>
+            <a:ext cx="3566160" cy="869536"/>
+          </a:xfrm>
+          <a:prstGeom prst="rect">
+            <a:avLst/>
+          </a:prstGeom>
+          <a:solidFill>
+            <a:schemeClr val="accent3">
+              <a:lumMod val="40000"/>
+              <a:lumOff val="60000"/>
+            </a:schemeClr>
+          </a:solidFill>
+          <a:ln>
+            <a:noFill/>
+          </a:ln>
+        </p:spPr>
+        <p:style>
+          <a:lnRef idx="1">
+            <a:schemeClr val="accent1"/>
+          </a:lnRef>
+          <a:fillRef idx="3">
+            <a:schemeClr val="accent1"/>
+          </a:fillRef>
+          <a:effectRef idx="2">
+            <a:schemeClr val="accent1"/>
+          </a:effectRef>
+          <a:fontRef idx="minor">
+            <a:schemeClr val="lt1"/>
+          </a:fontRef>
+        </p:style>
+        <p:txBody>
+          <a:bodyPr rtlCol="0" anchor="ctr"/>
+          <a:lstStyle/>
+          <a:p>
+            <a:pPr algn="ctr"/>
+            <a:endParaRPr/>
+          </a:p>
+        </p:txBody>
+      </p:sp>
+      <p:sp>
+        <p:nvSpPr>
+          <p:cNvPr id="53" name="Rectangle 37">
+            <a:extLst>
+              <a:ext uri="{FF2B5EF4-FFF2-40B4-BE49-F238E27FC236}">
+                <a16:creationId xmlns:a16="http://schemas.microsoft.com/office/drawing/2014/main" id="{001F6047-83E0-B847-0DB9-B98F14287161}"/>
+              </a:ext>
+            </a:extLst>
+          </p:cNvPr>
+          <p:cNvSpPr/>
+          <p:nvPr/>
+        </p:nvSpPr>
+        <p:spPr>
+          <a:xfrm>
+            <a:off x="4133088" y="4190638"/>
+            <a:ext cx="3566160" cy="52508"/>
+          </a:xfrm>
+          <a:prstGeom prst="rect">
+            <a:avLst/>
+          </a:prstGeom>
+          <a:solidFill>
+            <a:schemeClr val="accent3">
+              <a:lumMod val="75000"/>
+            </a:schemeClr>
+          </a:solidFill>
+          <a:ln>
+            <a:noFill/>
+          </a:ln>
+        </p:spPr>
+        <p:style>
+          <a:lnRef idx="1">
+            <a:schemeClr val="accent1"/>
+          </a:lnRef>
+          <a:fillRef idx="3">
+            <a:schemeClr val="accent1"/>
+          </a:fillRef>
+          <a:effectRef idx="2">
+            <a:schemeClr val="accent1"/>
+          </a:effectRef>
+          <a:fontRef idx="minor">
+            <a:schemeClr val="lt1"/>
+          </a:fontRef>
+        </p:style>
+        <p:txBody>
+          <a:bodyPr rtlCol="0" anchor="ctr"/>
+          <a:lstStyle/>
+          <a:p>
+            <a:pPr algn="ctr"/>
+            <a:endParaRPr/>
+          </a:p>
+        </p:txBody>
+      </p:sp>
+      <p:sp>
+        <p:nvSpPr>
+          <p:cNvPr id="54" name="TextBox 53">
+            <a:extLst>
+              <a:ext uri="{FF2B5EF4-FFF2-40B4-BE49-F238E27FC236}">
+                <a16:creationId xmlns:a16="http://schemas.microsoft.com/office/drawing/2014/main" id="{2CE2AAEE-07B1-86B2-7C18-97F48EF384D7}"/>
+              </a:ext>
+            </a:extLst>
+          </p:cNvPr>
+          <p:cNvSpPr txBox="1"/>
+          <p:nvPr/>
+        </p:nvSpPr>
+        <p:spPr>
+          <a:xfrm>
+            <a:off x="4270248" y="4263790"/>
+            <a:ext cx="3383280" cy="276999"/>
+          </a:xfrm>
+          <a:prstGeom prst="rect">
+            <a:avLst/>
+          </a:prstGeom>
+          <a:noFill/>
+        </p:spPr>
+        <p:txBody>
+          <a:bodyPr wrap="square">
+            <a:spAutoFit/>
+          </a:bodyPr>
+          <a:lstStyle/>
+          <a:p>
+            <a:r>
+              <a:rPr lang="en-US" sz="1200" b="1" dirty="0">
+                <a:solidFill>
+                  <a:schemeClr val="accent3">
+                    <a:lumMod val="50000"/>
+                  </a:schemeClr>
+                </a:solidFill>
+              </a:rPr>
+              <a:t>criteria</a:t>
+            </a:r>
+            <a:endParaRPr sz="1200" b="1" i="0" dirty="0">
+              <a:solidFill>
+                <a:schemeClr val="accent3">
+                  <a:lumMod val="50000"/>
+                </a:schemeClr>
+              </a:solidFill>
+              <a:latin typeface="Calibri"/>
+            </a:endParaRPr>
+          </a:p>
+        </p:txBody>
+      </p:sp>
+      <p:sp>
+        <p:nvSpPr>
+          <p:cNvPr id="55" name="TextBox 54">
+            <a:extLst>
+              <a:ext uri="{FF2B5EF4-FFF2-40B4-BE49-F238E27FC236}">
+                <a16:creationId xmlns:a16="http://schemas.microsoft.com/office/drawing/2014/main" id="{E7BB9628-3B73-B3E4-2F99-AB53CC6E71FD}"/>
+              </a:ext>
+            </a:extLst>
+          </p:cNvPr>
+          <p:cNvSpPr txBox="1"/>
+          <p:nvPr/>
+        </p:nvSpPr>
+        <p:spPr>
+          <a:xfrm>
+            <a:off x="4270248" y="4647838"/>
+            <a:ext cx="3383280" cy="261610"/>
+          </a:xfrm>
+          <a:prstGeom prst="rect">
+            <a:avLst/>
+          </a:prstGeom>
+          <a:noFill/>
+        </p:spPr>
+        <p:txBody>
+          <a:bodyPr wrap="square">
+            <a:spAutoFit/>
+          </a:bodyPr>
+          <a:lstStyle/>
+          <a:p>
+            <a:r>
+              <a:rPr lang="ru-RU" sz="1100" dirty="0">
+                <a:solidFill>
+                  <a:schemeClr val="bg1">
+                    <a:lumMod val="50000"/>
+                  </a:schemeClr>
+                </a:solidFill>
+              </a:rPr>
+              <a:t>Баллы по критериям ОГЭ/ЕГЭ</a:t>
+            </a:r>
+            <a:endParaRPr sz="1100" b="0" i="0" dirty="0">
+              <a:solidFill>
+                <a:schemeClr val="bg1">
+                  <a:lumMod val="50000"/>
+                </a:schemeClr>
+              </a:solidFill>
+              <a:latin typeface="Calibri"/>
+            </a:endParaRPr>
+          </a:p>
+        </p:txBody>
+      </p:sp>
+      <p:sp>
+        <p:nvSpPr>
+          <p:cNvPr id="56" name="Rectangle 40">
+            <a:extLst>
+              <a:ext uri="{FF2B5EF4-FFF2-40B4-BE49-F238E27FC236}">
+                <a16:creationId xmlns:a16="http://schemas.microsoft.com/office/drawing/2014/main" id="{BE77FF72-629F-E9B5-C6C4-A17B9985B734}"/>
+              </a:ext>
+            </a:extLst>
+          </p:cNvPr>
+          <p:cNvSpPr/>
+          <p:nvPr/>
+        </p:nvSpPr>
+        <p:spPr>
+          <a:xfrm>
+            <a:off x="7900416" y="4190638"/>
+            <a:ext cx="3566160" cy="869536"/>
+          </a:xfrm>
+          <a:prstGeom prst="rect">
+            <a:avLst/>
+          </a:prstGeom>
+          <a:solidFill>
+            <a:srgbClr val="F2E8CE"/>
+          </a:solidFill>
+          <a:ln>
+            <a:noFill/>
+          </a:ln>
+        </p:spPr>
+        <p:style>
+          <a:lnRef idx="1">
+            <a:schemeClr val="accent1"/>
+          </a:lnRef>
+          <a:fillRef idx="3">
+            <a:schemeClr val="accent1"/>
+          </a:fillRef>
+          <a:effectRef idx="2">
+            <a:schemeClr val="accent1"/>
+          </a:effectRef>
+          <a:fontRef idx="minor">
+            <a:schemeClr val="lt1"/>
+          </a:fontRef>
+        </p:style>
+        <p:txBody>
+          <a:bodyPr rtlCol="0" anchor="ctr"/>
+          <a:lstStyle/>
+          <a:p>
+            <a:pPr algn="ctr"/>
+            <a:endParaRPr/>
+          </a:p>
+        </p:txBody>
+      </p:sp>
+      <p:sp>
+        <p:nvSpPr>
+          <p:cNvPr id="57" name="Rectangle 41">
+            <a:extLst>
+              <a:ext uri="{FF2B5EF4-FFF2-40B4-BE49-F238E27FC236}">
+                <a16:creationId xmlns:a16="http://schemas.microsoft.com/office/drawing/2014/main" id="{52FB8513-DA8F-55AA-EBD8-0A0A1EA34AF3}"/>
+              </a:ext>
+            </a:extLst>
+          </p:cNvPr>
+          <p:cNvSpPr/>
+          <p:nvPr/>
+        </p:nvSpPr>
+        <p:spPr>
+          <a:xfrm>
+            <a:off x="7900416" y="4190638"/>
+            <a:ext cx="3566160" cy="52508"/>
+          </a:xfrm>
+          <a:prstGeom prst="rect">
+            <a:avLst/>
+          </a:prstGeom>
+          <a:solidFill>
+            <a:schemeClr val="accent6">
+              <a:lumMod val="60000"/>
+              <a:lumOff val="40000"/>
+            </a:schemeClr>
+          </a:solidFill>
+          <a:ln>
+            <a:noFill/>
+          </a:ln>
+        </p:spPr>
+        <p:style>
+          <a:lnRef idx="1">
+            <a:schemeClr val="accent1"/>
+          </a:lnRef>
+          <a:fillRef idx="3">
+            <a:schemeClr val="accent1"/>
+          </a:fillRef>
+          <a:effectRef idx="2">
+            <a:schemeClr val="accent1"/>
+          </a:effectRef>
+          <a:fontRef idx="minor">
+            <a:schemeClr val="lt1"/>
+          </a:fontRef>
+        </p:style>
+        <p:txBody>
+          <a:bodyPr rtlCol="0" anchor="ctr"/>
+          <a:lstStyle/>
+          <a:p>
+            <a:pPr algn="ctr"/>
+            <a:endParaRPr/>
+          </a:p>
+        </p:txBody>
+      </p:sp>
+      <p:sp>
+        <p:nvSpPr>
+          <p:cNvPr id="58" name="TextBox 57">
+            <a:extLst>
+              <a:ext uri="{FF2B5EF4-FFF2-40B4-BE49-F238E27FC236}">
+                <a16:creationId xmlns:a16="http://schemas.microsoft.com/office/drawing/2014/main" id="{3FC7742E-4742-9E57-68BF-1B3E125F9C2B}"/>
+              </a:ext>
+            </a:extLst>
+          </p:cNvPr>
+          <p:cNvSpPr txBox="1"/>
+          <p:nvPr/>
+        </p:nvSpPr>
+        <p:spPr>
+          <a:xfrm>
+            <a:off x="8037576" y="4263790"/>
+            <a:ext cx="3383280" cy="461665"/>
+          </a:xfrm>
+          <a:prstGeom prst="rect">
+            <a:avLst/>
+          </a:prstGeom>
+          <a:noFill/>
+        </p:spPr>
+        <p:txBody>
+          <a:bodyPr wrap="square">
+            <a:spAutoFit/>
+          </a:bodyPr>
+          <a:lstStyle/>
+          <a:p>
+            <a:r>
+              <a:rPr lang="en-US" sz="1200" b="1" dirty="0" err="1">
+                <a:solidFill>
+                  <a:srgbClr val="F5801F"/>
+                </a:solidFill>
+              </a:rPr>
+              <a:t>min_words</a:t>
+            </a:r>
+            <a:endParaRPr lang="en-US" sz="1200" b="1" dirty="0">
+              <a:solidFill>
+                <a:srgbClr val="F5801F"/>
+              </a:solidFill>
+            </a:endParaRPr>
+          </a:p>
+          <a:p>
+            <a:pPr algn="l"/>
+            <a:endParaRPr sz="1200" b="1" i="0" dirty="0">
+              <a:solidFill>
+                <a:srgbClr val="64748B"/>
+              </a:solidFill>
+              <a:latin typeface="Calibri"/>
+            </a:endParaRPr>
+          </a:p>
+        </p:txBody>
+      </p:sp>
+      <p:sp>
+        <p:nvSpPr>
+          <p:cNvPr id="59" name="TextBox 58">
+            <a:extLst>
+              <a:ext uri="{FF2B5EF4-FFF2-40B4-BE49-F238E27FC236}">
+                <a16:creationId xmlns:a16="http://schemas.microsoft.com/office/drawing/2014/main" id="{64F1FFA7-B227-2D20-CA2A-E2C7395CA83C}"/>
+              </a:ext>
+            </a:extLst>
+          </p:cNvPr>
+          <p:cNvSpPr txBox="1"/>
+          <p:nvPr/>
+        </p:nvSpPr>
+        <p:spPr>
+          <a:xfrm>
+            <a:off x="8037576" y="4647838"/>
+            <a:ext cx="3383280" cy="261610"/>
+          </a:xfrm>
+          <a:prstGeom prst="rect">
+            <a:avLst/>
+          </a:prstGeom>
+          <a:noFill/>
+        </p:spPr>
+        <p:txBody>
+          <a:bodyPr wrap="square">
+            <a:spAutoFit/>
+          </a:bodyPr>
+          <a:lstStyle/>
+          <a:p>
+            <a:r>
+              <a:rPr lang="ru-RU" sz="1100" dirty="0">
+                <a:solidFill>
+                  <a:schemeClr val="bg1">
+                    <a:lumMod val="50000"/>
+                  </a:schemeClr>
+                </a:solidFill>
+              </a:rPr>
+              <a:t>Минимум слов из настроек функции</a:t>
+            </a:r>
+            <a:endParaRPr sz="1100" b="0" i="0" dirty="0">
+              <a:solidFill>
+                <a:schemeClr val="bg1">
+                  <a:lumMod val="50000"/>
+                </a:schemeClr>
+              </a:solidFill>
+              <a:latin typeface="Calibri"/>
+            </a:endParaRPr>
           </a:p>
         </p:txBody>
       </p:sp>
@@ -10399,7 +11528,7 @@
         <p:spPr>
           <a:xfrm>
             <a:off x="7616952" y="2130552"/>
-            <a:ext cx="1938528" cy="2331720"/>
+            <a:ext cx="1938528" cy="1384995"/>
           </a:xfrm>
           <a:prstGeom prst="rect">
             <a:avLst/>
@@ -10412,18 +11541,16 @@
           </a:bodyPr>
           <a:lstStyle/>
           <a:p>
-            <a:pPr algn="l"/>
-            <a:r>
-              <a:rPr sz="1200" b="0" i="0">
+            <a:r>
+              <a:rPr lang="ru-RU" sz="1200" dirty="0">
                 <a:solidFill>
                   <a:srgbClr val="64748B"/>
                 </a:solidFill>
-                <a:latin typeface="Calibri"/>
-              </a:rPr>
-              <a:t>Редактирование уже
-опубликованной →
-автоматически создаётся
-новая версия в function_versions</a:t>
+              </a:rPr>
+              <a:t>Авто: при редактировании опубликованной
+Вручную: кнопка «Сохранить версию»
+Удаление версий
+Другие видят версии (чтение)</a:t>
             </a:r>
           </a:p>
         </p:txBody>
@@ -10721,7 +11848,7 @@
         <p:spPr>
           <a:xfrm>
             <a:off x="640080" y="4754880"/>
-            <a:ext cx="5029200" cy="594360"/>
+            <a:ext cx="5029200" cy="461665"/>
           </a:xfrm>
           <a:prstGeom prst="rect">
             <a:avLst/>
@@ -10736,14 +11863,194 @@
           <a:p>
             <a:pPr algn="l"/>
             <a:r>
-              <a:rPr sz="1200" b="0" i="0">
+              <a:rPr sz="1200" b="0" i="0" dirty="0">
                 <a:solidFill>
                   <a:srgbClr val="D97706"/>
                 </a:solidFill>
                 <a:latin typeface="Calibri"/>
               </a:rPr>
-              <a:t>⚠  is_default = True → нельзя редактировать и удалять
-(5 стандартных функций защищены от изменений)</a:t>
+              <a:t>⚠  </a:t>
+            </a:r>
+            <a:r>
+              <a:rPr sz="1200" b="0" i="0" dirty="0" err="1">
+                <a:solidFill>
+                  <a:srgbClr val="D97706"/>
+                </a:solidFill>
+                <a:latin typeface="Calibri"/>
+              </a:rPr>
+              <a:t>is_default</a:t>
+            </a:r>
+            <a:r>
+              <a:rPr sz="1200" b="0" i="0" dirty="0">
+                <a:solidFill>
+                  <a:srgbClr val="D97706"/>
+                </a:solidFill>
+                <a:latin typeface="Calibri"/>
+              </a:rPr>
+              <a:t> = True → </a:t>
+            </a:r>
+            <a:r>
+              <a:rPr sz="1200" b="0" i="0" dirty="0" err="1">
+                <a:solidFill>
+                  <a:srgbClr val="D97706"/>
+                </a:solidFill>
+                <a:latin typeface="Calibri"/>
+              </a:rPr>
+              <a:t>нельзя</a:t>
+            </a:r>
+            <a:r>
+              <a:rPr sz="1200" b="0" i="0" dirty="0">
+                <a:solidFill>
+                  <a:srgbClr val="D97706"/>
+                </a:solidFill>
+                <a:latin typeface="Calibri"/>
+              </a:rPr>
+              <a:t> </a:t>
+            </a:r>
+            <a:r>
+              <a:rPr sz="1200" b="0" i="0" dirty="0" err="1">
+                <a:solidFill>
+                  <a:srgbClr val="D97706"/>
+                </a:solidFill>
+                <a:latin typeface="Calibri"/>
+              </a:rPr>
+              <a:t>редактировать</a:t>
+            </a:r>
+            <a:r>
+              <a:rPr sz="1200" b="0" i="0" dirty="0">
+                <a:solidFill>
+                  <a:srgbClr val="D97706"/>
+                </a:solidFill>
+                <a:latin typeface="Calibri"/>
+              </a:rPr>
+              <a:t> и </a:t>
+            </a:r>
+            <a:r>
+              <a:rPr sz="1200" b="0" i="0" dirty="0" err="1">
+                <a:solidFill>
+                  <a:srgbClr val="D97706"/>
+                </a:solidFill>
+                <a:latin typeface="Calibri"/>
+              </a:rPr>
+              <a:t>удалять</a:t>
+            </a:r>
+            <a:r>
+              <a:rPr sz="1200" b="0" i="0" dirty="0">
+                <a:solidFill>
+                  <a:srgbClr val="D97706"/>
+                </a:solidFill>
+                <a:latin typeface="Calibri"/>
+              </a:rPr>
+              <a:t>
+(</a:t>
+            </a:r>
+            <a:r>
+              <a:rPr lang="ru-RU" sz="1200" b="0" i="0" dirty="0">
+                <a:solidFill>
+                  <a:srgbClr val="D97706"/>
+                </a:solidFill>
+                <a:latin typeface="Calibri"/>
+              </a:rPr>
+              <a:t>6</a:t>
+            </a:r>
+            <a:r>
+              <a:rPr sz="1200" b="0" i="0" dirty="0">
+                <a:solidFill>
+                  <a:srgbClr val="D97706"/>
+                </a:solidFill>
+                <a:latin typeface="Calibri"/>
+              </a:rPr>
+              <a:t> </a:t>
+            </a:r>
+            <a:r>
+              <a:rPr sz="1200" b="0" i="0" dirty="0" err="1">
+                <a:solidFill>
+                  <a:srgbClr val="D97706"/>
+                </a:solidFill>
+                <a:latin typeface="Calibri"/>
+              </a:rPr>
+              <a:t>стандартных</a:t>
+            </a:r>
+            <a:r>
+              <a:rPr sz="1200" b="0" i="0" dirty="0">
+                <a:solidFill>
+                  <a:srgbClr val="D97706"/>
+                </a:solidFill>
+                <a:latin typeface="Calibri"/>
+              </a:rPr>
+              <a:t> </a:t>
+            </a:r>
+            <a:r>
+              <a:rPr sz="1200" b="0" i="0" dirty="0" err="1">
+                <a:solidFill>
+                  <a:srgbClr val="D97706"/>
+                </a:solidFill>
+                <a:latin typeface="Calibri"/>
+              </a:rPr>
+              <a:t>функций</a:t>
+            </a:r>
+            <a:r>
+              <a:rPr sz="1200" b="0" i="0" dirty="0">
+                <a:solidFill>
+                  <a:srgbClr val="D97706"/>
+                </a:solidFill>
+                <a:latin typeface="Calibri"/>
+              </a:rPr>
+              <a:t> </a:t>
+            </a:r>
+            <a:r>
+              <a:rPr sz="1200" b="0" i="0" dirty="0" err="1">
+                <a:solidFill>
+                  <a:srgbClr val="D97706"/>
+                </a:solidFill>
+                <a:latin typeface="Calibri"/>
+              </a:rPr>
+              <a:t>защищены</a:t>
+            </a:r>
+            <a:r>
+              <a:rPr sz="1200" b="0" i="0" dirty="0">
+                <a:solidFill>
+                  <a:srgbClr val="D97706"/>
+                </a:solidFill>
+                <a:latin typeface="Calibri"/>
+              </a:rPr>
+              <a:t> </a:t>
+            </a:r>
+            <a:r>
+              <a:rPr sz="1200" b="0" i="0" dirty="0" err="1">
+                <a:solidFill>
+                  <a:srgbClr val="D97706"/>
+                </a:solidFill>
+                <a:latin typeface="Calibri"/>
+              </a:rPr>
+              <a:t>от</a:t>
+            </a:r>
+            <a:r>
+              <a:rPr sz="1200" b="0" i="0" dirty="0">
+                <a:solidFill>
+                  <a:srgbClr val="D97706"/>
+                </a:solidFill>
+                <a:latin typeface="Calibri"/>
+              </a:rPr>
+              <a:t> </a:t>
+            </a:r>
+            <a:r>
+              <a:rPr sz="1200" b="0" i="0" dirty="0" err="1">
+                <a:solidFill>
+                  <a:srgbClr val="D97706"/>
+                </a:solidFill>
+                <a:latin typeface="Calibri"/>
+              </a:rPr>
+              <a:t>изменений</a:t>
+            </a:r>
+            <a:r>
+              <a:rPr sz="1200" b="0" i="0" dirty="0">
+                <a:solidFill>
+                  <a:srgbClr val="D97706"/>
+                </a:solidFill>
+                <a:latin typeface="Calibri"/>
+              </a:rPr>
+              <a:t>)</a:t>
             </a:r>
           </a:p>
         </p:txBody>
@@ -15313,14 +16620,41 @@
           <a:p>
             <a:pPr algn="l"/>
             <a:r>
-              <a:rPr sz="1000" b="0" i="0">
+              <a:rPr sz="1000" b="0" i="0" dirty="0" err="1">
                 <a:solidFill>
                   <a:srgbClr val="64748B"/>
                 </a:solidFill>
                 <a:latin typeface="Calibri"/>
               </a:rPr>
-              <a:t>get_current_user()
-→ supabase.auth.get_user()</a:t>
+              <a:t>get_current_user</a:t>
+            </a:r>
+            <a:r>
+              <a:rPr sz="1000" b="0" i="0" dirty="0">
+                <a:solidFill>
+                  <a:srgbClr val="64748B"/>
+                </a:solidFill>
+                <a:latin typeface="Calibri"/>
+              </a:rPr>
+              <a:t>()
+→ </a:t>
+            </a:r>
+            <a:r>
+              <a:rPr sz="1000" b="0" i="0" dirty="0" err="1">
+                <a:solidFill>
+                  <a:srgbClr val="64748B"/>
+                </a:solidFill>
+                <a:latin typeface="Calibri"/>
+              </a:rPr>
+              <a:t>supabase.auth.get_user</a:t>
+            </a:r>
+            <a:r>
+              <a:rPr sz="1000" b="0" i="0" dirty="0">
+                <a:solidFill>
+                  <a:srgbClr val="64748B"/>
+                </a:solidFill>
+                <a:latin typeface="Calibri"/>
+              </a:rPr>
+              <a:t>()</a:t>
             </a:r>
           </a:p>
         </p:txBody>
@@ -15393,21 +16727,165 @@
           <a:p>
             <a:pPr algn="l"/>
             <a:r>
-              <a:rPr sz="1000" b="0" i="0">
+              <a:rPr sz="1000" b="0" i="0" dirty="0">
                 <a:solidFill>
                   <a:srgbClr val="A5B4FC"/>
                 </a:solidFill>
                 <a:latin typeface="Calibri"/>
               </a:rPr>
-              <a:t>async def get_current_user(
+              <a:t>async def </a:t>
+            </a:r>
+            <a:r>
+              <a:rPr sz="1000" b="0" i="0" dirty="0" err="1">
+                <a:solidFill>
+                  <a:srgbClr val="A5B4FC"/>
+                </a:solidFill>
+                <a:latin typeface="Calibri"/>
+              </a:rPr>
+              <a:t>get_current_user</a:t>
+            </a:r>
+            <a:r>
+              <a:rPr sz="1000" b="0" i="0" dirty="0">
+                <a:solidFill>
+                  <a:srgbClr val="A5B4FC"/>
+                </a:solidFill>
+                <a:latin typeface="Calibri"/>
+              </a:rPr>
+              <a:t>(
     token: str = Depends(oauth2_scheme),
-    db = Depends(get_db)
+    </a:t>
+            </a:r>
+            <a:r>
+              <a:rPr sz="1000" b="0" i="0" dirty="0" err="1">
+                <a:solidFill>
+                  <a:srgbClr val="A5B4FC"/>
+                </a:solidFill>
+                <a:latin typeface="Calibri"/>
+              </a:rPr>
+              <a:t>db</a:t>
+            </a:r>
+            <a:r>
+              <a:rPr sz="1000" b="0" i="0" dirty="0">
+                <a:solidFill>
+                  <a:srgbClr val="A5B4FC"/>
+                </a:solidFill>
+                <a:latin typeface="Calibri"/>
+              </a:rPr>
+              <a:t> = Depends(</a:t>
+            </a:r>
+            <a:r>
+              <a:rPr sz="1000" b="0" i="0" dirty="0" err="1">
+                <a:solidFill>
+                  <a:srgbClr val="A5B4FC"/>
+                </a:solidFill>
+                <a:latin typeface="Calibri"/>
+              </a:rPr>
+              <a:t>get_db</a:t>
+            </a:r>
+            <a:r>
+              <a:rPr sz="1000" b="0" i="0" dirty="0">
+                <a:solidFill>
+                  <a:srgbClr val="A5B4FC"/>
+                </a:solidFill>
+                <a:latin typeface="Calibri"/>
+              </a:rPr>
+              <a:t>)
 ):
-    res = supabase.auth.get_user(token)
-    if not res.user:
-        raise HTTPException(401)
-    return {'user_id': res.user.id,
-            'email':   res.user.email}</a:t>
+    res = </a:t>
+            </a:r>
+            <a:r>
+              <a:rPr sz="1000" b="0" i="0" dirty="0" err="1">
+                <a:solidFill>
+                  <a:srgbClr val="A5B4FC"/>
+                </a:solidFill>
+                <a:latin typeface="Calibri"/>
+              </a:rPr>
+              <a:t>supabase.auth.get_user</a:t>
+            </a:r>
+            <a:r>
+              <a:rPr sz="1000" b="0" i="0" dirty="0">
+                <a:solidFill>
+                  <a:srgbClr val="A5B4FC"/>
+                </a:solidFill>
+                <a:latin typeface="Calibri"/>
+              </a:rPr>
+              <a:t>(token)
+    if not </a:t>
+            </a:r>
+            <a:r>
+              <a:rPr sz="1000" b="0" i="0" dirty="0" err="1">
+                <a:solidFill>
+                  <a:srgbClr val="A5B4FC"/>
+                </a:solidFill>
+                <a:latin typeface="Calibri"/>
+              </a:rPr>
+              <a:t>res.user</a:t>
+            </a:r>
+            <a:r>
+              <a:rPr sz="1000" b="0" i="0" dirty="0">
+                <a:solidFill>
+                  <a:srgbClr val="A5B4FC"/>
+                </a:solidFill>
+                <a:latin typeface="Calibri"/>
+              </a:rPr>
+              <a:t>:
+        raise </a:t>
+            </a:r>
+            <a:r>
+              <a:rPr sz="1000" b="0" i="0" dirty="0" err="1">
+                <a:solidFill>
+                  <a:srgbClr val="A5B4FC"/>
+                </a:solidFill>
+                <a:latin typeface="Calibri"/>
+              </a:rPr>
+              <a:t>HTTPException</a:t>
+            </a:r>
+            <a:r>
+              <a:rPr sz="1000" b="0" i="0" dirty="0">
+                <a:solidFill>
+                  <a:srgbClr val="A5B4FC"/>
+                </a:solidFill>
+                <a:latin typeface="Calibri"/>
+              </a:rPr>
+              <a:t>(401)
+    return {'</a:t>
+            </a:r>
+            <a:r>
+              <a:rPr sz="1000" b="0" i="0" dirty="0" err="1">
+                <a:solidFill>
+                  <a:srgbClr val="A5B4FC"/>
+                </a:solidFill>
+                <a:latin typeface="Calibri"/>
+              </a:rPr>
+              <a:t>user_id</a:t>
+            </a:r>
+            <a:r>
+              <a:rPr sz="1000" b="0" i="0" dirty="0">
+                <a:solidFill>
+                  <a:srgbClr val="A5B4FC"/>
+                </a:solidFill>
+                <a:latin typeface="Calibri"/>
+              </a:rPr>
+              <a:t>': res.user.id,
+            'email':   </a:t>
+            </a:r>
+            <a:r>
+              <a:rPr sz="1000" b="0" i="0" dirty="0" err="1">
+                <a:solidFill>
+                  <a:srgbClr val="A5B4FC"/>
+                </a:solidFill>
+                <a:latin typeface="Calibri"/>
+              </a:rPr>
+              <a:t>res.user.email</a:t>
+            </a:r>
+            <a:r>
+              <a:rPr sz="1000" b="0" i="0" dirty="0">
+                <a:solidFill>
+                  <a:srgbClr val="A5B4FC"/>
+                </a:solidFill>
+                <a:latin typeface="Calibri"/>
+              </a:rPr>
+              <a:t>}</a:t>
             </a:r>
           </a:p>
         </p:txBody>
@@ -19070,14 +20548,38 @@
           <a:p>
             <a:pPr algn="l"/>
             <a:r>
-              <a:rPr sz="1300" b="1" i="0">
+              <a:rPr lang="en-US" sz="1300" b="1" dirty="0" err="1">
                 <a:solidFill>
                   <a:srgbClr val="4F46E5"/>
                 </a:solidFill>
                 <a:latin typeface="Calibri"/>
               </a:rPr>
-              <a:t>users</a:t>
-            </a:r>
+              <a:t>u</a:t>
+            </a:r>
+            <a:r>
+              <a:rPr sz="1300" b="1" i="0" dirty="0" err="1">
+                <a:solidFill>
+                  <a:srgbClr val="4F46E5"/>
+                </a:solidFill>
+                <a:latin typeface="Calibri"/>
+              </a:rPr>
+              <a:t>ser</a:t>
+            </a:r>
+            <a:r>
+              <a:rPr lang="en-US" sz="1300" b="1" i="0" dirty="0" err="1">
+                <a:solidFill>
+                  <a:srgbClr val="4F46E5"/>
+                </a:solidFill>
+                <a:latin typeface="Calibri"/>
+              </a:rPr>
+              <a:t>_profiles</a:t>
+            </a:r>
+            <a:endParaRPr sz="1300" b="1" i="0" dirty="0">
+              <a:solidFill>
+                <a:srgbClr val="4F46E5"/>
+              </a:solidFill>
+              <a:latin typeface="Calibri"/>
+            </a:endParaRPr>
           </a:p>
         </p:txBody>
       </p:sp>
@@ -19512,14 +21014,20 @@
           <a:p>
             <a:pPr algn="l"/>
             <a:r>
-              <a:rPr sz="1300" b="1" i="0">
+              <a:rPr lang="en-US" sz="1300" b="1" dirty="0">
                 <a:solidFill>
                   <a:srgbClr val="4F46E5"/>
                 </a:solidFill>
                 <a:latin typeface="Calibri"/>
               </a:rPr>
-              <a:t>pupils</a:t>
-            </a:r>
+              <a:t>students</a:t>
+            </a:r>
+            <a:endParaRPr sz="1300" b="1" i="0" dirty="0">
+              <a:solidFill>
+                <a:srgbClr val="4F46E5"/>
+              </a:solidFill>
+              <a:latin typeface="Calibri"/>
+            </a:endParaRPr>
           </a:p>
         </p:txBody>
       </p:sp>
@@ -19876,14 +21384,29 @@
           <a:p>
             <a:pPr algn="l"/>
             <a:r>
-              <a:rPr sz="1300" b="1" i="0">
+              <a:rPr lang="en-US" sz="1300" b="1" dirty="0" err="1">
                 <a:solidFill>
                   <a:srgbClr val="4F46E5"/>
                 </a:solidFill>
                 <a:latin typeface="Calibri"/>
               </a:rPr>
-              <a:t>pupil_groups</a:t>
-            </a:r>
+              <a:t>student</a:t>
+            </a:r>
+            <a:r>
+              <a:rPr sz="1300" b="1" i="0" dirty="0" err="1">
+                <a:solidFill>
+                  <a:srgbClr val="4F46E5"/>
+                </a:solidFill>
+                <a:latin typeface="Calibri"/>
+              </a:rPr>
+              <a:t>_groups</a:t>
+            </a:r>
+            <a:endParaRPr sz="1300" b="1" i="0" dirty="0">
+              <a:solidFill>
+                <a:srgbClr val="4F46E5"/>
+              </a:solidFill>
+              <a:latin typeface="Calibri"/>
+            </a:endParaRPr>
           </a:p>
         </p:txBody>
       </p:sp>
@@ -21134,13 +22657,58 @@
           <a:p>
             <a:pPr algn="l"/>
             <a:r>
-              <a:rPr sz="1000" b="0" i="0">
+              <a:rPr sz="1000" b="0" i="0" dirty="0" err="1">
                 <a:solidFill>
                   <a:srgbClr val="1E293B"/>
                 </a:solidFill>
                 <a:latin typeface="Calibri"/>
               </a:rPr>
-              <a:t>Нативный async + SSE, автодокументация Swagger, DI через Depends()</a:t>
+              <a:t>Нативный</a:t>
+            </a:r>
+            <a:r>
+              <a:rPr sz="1000" b="0" i="0" dirty="0">
+                <a:solidFill>
+                  <a:srgbClr val="1E293B"/>
+                </a:solidFill>
+                <a:latin typeface="Calibri"/>
+              </a:rPr>
+              <a:t> async + SSE, </a:t>
+            </a:r>
+            <a:r>
+              <a:rPr sz="1000" b="0" i="0" dirty="0" err="1">
+                <a:solidFill>
+                  <a:srgbClr val="1E293B"/>
+                </a:solidFill>
+                <a:latin typeface="Calibri"/>
+              </a:rPr>
+              <a:t>автодокументация</a:t>
+            </a:r>
+            <a:r>
+              <a:rPr sz="1000" b="0" i="0" dirty="0">
+                <a:solidFill>
+                  <a:srgbClr val="1E293B"/>
+                </a:solidFill>
+                <a:latin typeface="Calibri"/>
+              </a:rPr>
+              <a:t> Swagger, DI </a:t>
+            </a:r>
+            <a:r>
+              <a:rPr sz="1000" b="0" i="0" dirty="0" err="1">
+                <a:solidFill>
+                  <a:srgbClr val="1E293B"/>
+                </a:solidFill>
+                <a:latin typeface="Calibri"/>
+              </a:rPr>
+              <a:t>через</a:t>
+            </a:r>
+            <a:r>
+              <a:rPr sz="1000" b="0" i="0" dirty="0">
+                <a:solidFill>
+                  <a:srgbClr val="1E293B"/>
+                </a:solidFill>
+                <a:latin typeface="Calibri"/>
+              </a:rPr>
+              <a:t> Depends()</a:t>
             </a:r>
           </a:p>
         </p:txBody>
@@ -21415,13 +22983,94 @@
           <a:p>
             <a:pPr algn="l"/>
             <a:r>
-              <a:rPr sz="1000" b="0" i="0">
+              <a:rPr sz="1000" b="0" i="0" dirty="0" err="1">
                 <a:solidFill>
                   <a:srgbClr val="1E293B"/>
                 </a:solidFill>
                 <a:latin typeface="Calibri"/>
               </a:rPr>
-              <a:t>Единственный язык с нативной поддержкой PaddleOCR, Tesseract и LLM</a:t>
+              <a:t>Единственный</a:t>
+            </a:r>
+            <a:r>
+              <a:rPr sz="1000" b="0" i="0" dirty="0">
+                <a:solidFill>
+                  <a:srgbClr val="1E293B"/>
+                </a:solidFill>
+                <a:latin typeface="Calibri"/>
+              </a:rPr>
+              <a:t> </a:t>
+            </a:r>
+            <a:r>
+              <a:rPr sz="1000" b="0" i="0" dirty="0" err="1">
+                <a:solidFill>
+                  <a:srgbClr val="1E293B"/>
+                </a:solidFill>
+                <a:latin typeface="Calibri"/>
+              </a:rPr>
+              <a:t>язык</a:t>
+            </a:r>
+            <a:r>
+              <a:rPr sz="1000" b="0" i="0" dirty="0">
+                <a:solidFill>
+                  <a:srgbClr val="1E293B"/>
+                </a:solidFill>
+                <a:latin typeface="Calibri"/>
+              </a:rPr>
+              <a:t> с </a:t>
+            </a:r>
+            <a:r>
+              <a:rPr sz="1000" b="0" i="0" dirty="0" err="1">
+                <a:solidFill>
+                  <a:srgbClr val="1E293B"/>
+                </a:solidFill>
+                <a:latin typeface="Calibri"/>
+              </a:rPr>
+              <a:t>нативной</a:t>
+            </a:r>
+            <a:r>
+              <a:rPr sz="1000" b="0" i="0" dirty="0">
+                <a:solidFill>
+                  <a:srgbClr val="1E293B"/>
+                </a:solidFill>
+                <a:latin typeface="Calibri"/>
+              </a:rPr>
+              <a:t> </a:t>
+            </a:r>
+            <a:r>
+              <a:rPr sz="1000" b="0" i="0" dirty="0" err="1">
+                <a:solidFill>
+                  <a:srgbClr val="1E293B"/>
+                </a:solidFill>
+                <a:latin typeface="Calibri"/>
+              </a:rPr>
+              <a:t>поддержкой</a:t>
+            </a:r>
+            <a:r>
+              <a:rPr sz="1000" b="0" i="0" dirty="0">
+                <a:solidFill>
+                  <a:srgbClr val="1E293B"/>
+                </a:solidFill>
+                <a:latin typeface="Calibri"/>
+              </a:rPr>
+              <a:t> </a:t>
+            </a:r>
+            <a:r>
+              <a:rPr sz="1000" b="0" i="0" dirty="0" err="1">
+                <a:solidFill>
+                  <a:srgbClr val="1E293B"/>
+                </a:solidFill>
+                <a:latin typeface="Calibri"/>
+              </a:rPr>
+              <a:t>PaddleOCR</a:t>
+            </a:r>
+            <a:r>
+              <a:rPr sz="1000" b="0" i="0" dirty="0">
+                <a:solidFill>
+                  <a:srgbClr val="1E293B"/>
+                </a:solidFill>
+                <a:latin typeface="Calibri"/>
+              </a:rPr>
+              <a:t>, Tesseract и LLM</a:t>
             </a:r>
           </a:p>
         </p:txBody>
@@ -21681,7 +23330,7 @@
         <p:spPr>
           <a:xfrm>
             <a:off x="4553712" y="2596896"/>
-            <a:ext cx="6501384" cy="292608"/>
+            <a:ext cx="6501384" cy="246221"/>
           </a:xfrm>
           <a:prstGeom prst="rect">
             <a:avLst/>
@@ -21696,14 +23345,74 @@
           <a:p>
             <a:pPr algn="l"/>
             <a:r>
-              <a:rPr sz="1000" b="0" i="0">
+              <a:rPr sz="1000" b="0" i="0" dirty="0" err="1">
                 <a:solidFill>
                   <a:srgbClr val="1E293B"/>
                 </a:solidFill>
                 <a:latin typeface="Calibri"/>
               </a:rPr>
-              <a:t>Полный async API, изоляция SQL от бизнес-логики, декларативные модели</a:t>
-            </a:r>
+              <a:t>Полный</a:t>
+            </a:r>
+            <a:r>
+              <a:rPr sz="1000" b="0" i="0" dirty="0">
+                <a:solidFill>
+                  <a:srgbClr val="1E293B"/>
+                </a:solidFill>
+                <a:latin typeface="Calibri"/>
+              </a:rPr>
+              <a:t> async API, </a:t>
+            </a:r>
+            <a:r>
+              <a:rPr sz="1000" b="0" i="0" dirty="0" err="1">
+                <a:solidFill>
+                  <a:srgbClr val="1E293B"/>
+                </a:solidFill>
+                <a:latin typeface="Calibri"/>
+              </a:rPr>
+              <a:t>изоляция</a:t>
+            </a:r>
+            <a:r>
+              <a:rPr sz="1000" b="0" i="0" dirty="0">
+                <a:solidFill>
+                  <a:srgbClr val="1E293B"/>
+                </a:solidFill>
+                <a:latin typeface="Calibri"/>
+              </a:rPr>
+              <a:t> SQL </a:t>
+            </a:r>
+            <a:r>
+              <a:rPr sz="1000" b="0" i="0" dirty="0" err="1">
+                <a:solidFill>
+                  <a:srgbClr val="1E293B"/>
+                </a:solidFill>
+                <a:latin typeface="Calibri"/>
+              </a:rPr>
+              <a:t>от</a:t>
+            </a:r>
+            <a:r>
+              <a:rPr sz="1000" b="0" i="0" dirty="0">
+                <a:solidFill>
+                  <a:srgbClr val="1E293B"/>
+                </a:solidFill>
+                <a:latin typeface="Calibri"/>
+              </a:rPr>
+              <a:t> </a:t>
+            </a:r>
+            <a:r>
+              <a:rPr sz="1000" b="0" i="0" dirty="0" err="1">
+                <a:solidFill>
+                  <a:srgbClr val="1E293B"/>
+                </a:solidFill>
+                <a:latin typeface="Calibri"/>
+              </a:rPr>
+              <a:t>бизнес-логики</a:t>
+            </a:r>
+            <a:endParaRPr sz="1000" b="0" i="0" dirty="0">
+              <a:solidFill>
+                <a:srgbClr val="1E293B"/>
+              </a:solidFill>
+              <a:latin typeface="Calibri"/>
+            </a:endParaRPr>
           </a:p>
         </p:txBody>
       </p:sp>
@@ -21977,14 +23686,92 @@
           <a:p>
             <a:pPr algn="l"/>
             <a:r>
-              <a:rPr sz="1000" b="0" i="0">
+              <a:rPr sz="1000" b="0" i="0" dirty="0" err="1">
                 <a:solidFill>
                   <a:srgbClr val="1E293B"/>
                 </a:solidFill>
                 <a:latin typeface="Calibri"/>
               </a:rPr>
-              <a:t>Управляемый PostgreSQL + готовая JWT-авторизация, бесплатный хостинг</a:t>
-            </a:r>
+              <a:t>Управляемый</a:t>
+            </a:r>
+            <a:r>
+              <a:rPr sz="1000" b="0" i="0" dirty="0">
+                <a:solidFill>
+                  <a:srgbClr val="1E293B"/>
+                </a:solidFill>
+                <a:latin typeface="Calibri"/>
+              </a:rPr>
+              <a:t> PostgreSQL + </a:t>
+            </a:r>
+            <a:r>
+              <a:rPr sz="1000" b="0" i="0" dirty="0" err="1">
+                <a:solidFill>
+                  <a:srgbClr val="1E293B"/>
+                </a:solidFill>
+                <a:latin typeface="Calibri"/>
+              </a:rPr>
+              <a:t>готовая</a:t>
+            </a:r>
+            <a:r>
+              <a:rPr sz="1000" b="0" i="0" dirty="0">
+                <a:solidFill>
+                  <a:srgbClr val="1E293B"/>
+                </a:solidFill>
+                <a:latin typeface="Calibri"/>
+              </a:rPr>
+              <a:t> JWT-</a:t>
+            </a:r>
+            <a:r>
+              <a:rPr sz="1000" b="0" i="0" dirty="0" err="1">
+                <a:solidFill>
+                  <a:srgbClr val="1E293B"/>
+                </a:solidFill>
+                <a:latin typeface="Calibri"/>
+              </a:rPr>
+              <a:t>авторизация</a:t>
+            </a:r>
+            <a:r>
+              <a:rPr sz="1000" b="0" i="0" dirty="0">
+                <a:solidFill>
+                  <a:srgbClr val="1E293B"/>
+                </a:solidFill>
+                <a:latin typeface="Calibri"/>
+              </a:rPr>
+              <a:t>, </a:t>
+            </a:r>
+            <a:r>
+              <a:rPr sz="1000" b="0" i="0" dirty="0" err="1">
+                <a:solidFill>
+                  <a:srgbClr val="1E293B"/>
+                </a:solidFill>
+                <a:latin typeface="Calibri"/>
+              </a:rPr>
+              <a:t>бесплатный</a:t>
+            </a:r>
+            <a:r>
+              <a:rPr sz="1000" b="0" i="0" dirty="0">
+                <a:solidFill>
+                  <a:srgbClr val="1E293B"/>
+                </a:solidFill>
+                <a:latin typeface="Calibri"/>
+              </a:rPr>
+              <a:t> </a:t>
+            </a:r>
+            <a:r>
+              <a:rPr sz="1000" b="0" i="0" dirty="0" err="1">
+                <a:solidFill>
+                  <a:srgbClr val="1E293B"/>
+                </a:solidFill>
+                <a:latin typeface="Calibri"/>
+              </a:rPr>
+              <a:t>хостинг</a:t>
+            </a:r>
+            <a:endParaRPr sz="1000" b="0" i="0" dirty="0">
+              <a:solidFill>
+                <a:srgbClr val="1E293B"/>
+              </a:solidFill>
+              <a:latin typeface="Calibri"/>
+            </a:endParaRPr>
           </a:p>
         </p:txBody>
       </p:sp>
@@ -22243,7 +24030,7 @@
         <p:spPr>
           <a:xfrm>
             <a:off x="4553712" y="3383280"/>
-            <a:ext cx="6501384" cy="292608"/>
+            <a:ext cx="6501384" cy="246221"/>
           </a:xfrm>
           <a:prstGeom prst="rect">
             <a:avLst/>
@@ -22258,14 +24045,74 @@
           <a:p>
             <a:pPr algn="l"/>
             <a:r>
-              <a:rPr sz="1000" b="0" i="0">
+              <a:rPr sz="1000" b="0" i="0" dirty="0" err="1">
                 <a:solidFill>
                   <a:srgbClr val="1E293B"/>
                 </a:solidFill>
                 <a:latin typeface="Calibri"/>
               </a:rPr>
-              <a:t>Наивысшая точность для рукописи, модель SVTR + детектор DB</a:t>
-            </a:r>
+              <a:t>Наивысшая</a:t>
+            </a:r>
+            <a:r>
+              <a:rPr sz="1000" b="0" i="0" dirty="0">
+                <a:solidFill>
+                  <a:srgbClr val="1E293B"/>
+                </a:solidFill>
+                <a:latin typeface="Calibri"/>
+              </a:rPr>
+              <a:t> </a:t>
+            </a:r>
+            <a:r>
+              <a:rPr sz="1000" b="0" i="0" dirty="0" err="1">
+                <a:solidFill>
+                  <a:srgbClr val="1E293B"/>
+                </a:solidFill>
+                <a:latin typeface="Calibri"/>
+              </a:rPr>
+              <a:t>точность</a:t>
+            </a:r>
+            <a:r>
+              <a:rPr sz="1000" b="0" i="0" dirty="0">
+                <a:solidFill>
+                  <a:srgbClr val="1E293B"/>
+                </a:solidFill>
+                <a:latin typeface="Calibri"/>
+              </a:rPr>
+              <a:t> </a:t>
+            </a:r>
+            <a:r>
+              <a:rPr sz="1000" b="0" i="0" dirty="0" err="1">
+                <a:solidFill>
+                  <a:srgbClr val="1E293B"/>
+                </a:solidFill>
+                <a:latin typeface="Calibri"/>
+              </a:rPr>
+              <a:t>для</a:t>
+            </a:r>
+            <a:r>
+              <a:rPr sz="1000" b="0" i="0" dirty="0">
+                <a:solidFill>
+                  <a:srgbClr val="1E293B"/>
+                </a:solidFill>
+                <a:latin typeface="Calibri"/>
+              </a:rPr>
+              <a:t> </a:t>
+            </a:r>
+            <a:r>
+              <a:rPr sz="1000" b="0" i="0" dirty="0" err="1">
+                <a:solidFill>
+                  <a:srgbClr val="1E293B"/>
+                </a:solidFill>
+                <a:latin typeface="Calibri"/>
+              </a:rPr>
+              <a:t>рукописи</a:t>
+            </a:r>
+            <a:endParaRPr sz="1000" b="0" i="0" dirty="0">
+              <a:solidFill>
+                <a:srgbClr val="1E293B"/>
+              </a:solidFill>
+              <a:latin typeface="Calibri"/>
+            </a:endParaRPr>
           </a:p>
         </p:txBody>
       </p:sp>
@@ -22539,14 +24386,110 @@
           <a:p>
             <a:pPr algn="l"/>
             <a:r>
-              <a:rPr sz="1000" b="0" i="0">
+              <a:rPr sz="1000" b="0" i="0" dirty="0" err="1">
                 <a:solidFill>
                   <a:srgbClr val="1E293B"/>
                 </a:solidFill>
                 <a:latin typeface="Calibri"/>
               </a:rPr>
-              <a:t>Компенсирует слабость PaddleOCR на печатном тексте</a:t>
-            </a:r>
+              <a:t>Компенсирует</a:t>
+            </a:r>
+            <a:r>
+              <a:rPr sz="1000" b="0" i="0" dirty="0">
+                <a:solidFill>
+                  <a:srgbClr val="1E293B"/>
+                </a:solidFill>
+                <a:latin typeface="Calibri"/>
+              </a:rPr>
+              <a:t> </a:t>
+            </a:r>
+            <a:r>
+              <a:rPr sz="1000" b="0" i="0" dirty="0" err="1">
+                <a:solidFill>
+                  <a:srgbClr val="1E293B"/>
+                </a:solidFill>
+                <a:latin typeface="Calibri"/>
+              </a:rPr>
+              <a:t>слабость</a:t>
+            </a:r>
+            <a:r>
+              <a:rPr sz="1000" b="0" i="0" dirty="0">
+                <a:solidFill>
+                  <a:srgbClr val="1E293B"/>
+                </a:solidFill>
+                <a:latin typeface="Calibri"/>
+              </a:rPr>
+              <a:t> </a:t>
+            </a:r>
+            <a:r>
+              <a:rPr sz="1000" b="0" i="0" dirty="0" err="1">
+                <a:solidFill>
+                  <a:srgbClr val="1E293B"/>
+                </a:solidFill>
+                <a:latin typeface="Calibri"/>
+              </a:rPr>
+              <a:t>PaddleOCR</a:t>
+            </a:r>
+            <a:r>
+              <a:rPr sz="1000" b="0" i="0" dirty="0">
+                <a:solidFill>
+                  <a:srgbClr val="1E293B"/>
+                </a:solidFill>
+                <a:latin typeface="Calibri"/>
+              </a:rPr>
+              <a:t> </a:t>
+            </a:r>
+            <a:r>
+              <a:rPr sz="1000" b="0" i="0" dirty="0" err="1">
+                <a:solidFill>
+                  <a:srgbClr val="1E293B"/>
+                </a:solidFill>
+                <a:latin typeface="Calibri"/>
+              </a:rPr>
+              <a:t>на</a:t>
+            </a:r>
+            <a:r>
+              <a:rPr sz="1000" b="0" i="0" dirty="0">
+                <a:solidFill>
+                  <a:srgbClr val="1E293B"/>
+                </a:solidFill>
+                <a:latin typeface="Calibri"/>
+              </a:rPr>
+              <a:t> </a:t>
+            </a:r>
+            <a:r>
+              <a:rPr sz="1000" b="0" i="0" dirty="0" err="1">
+                <a:solidFill>
+                  <a:srgbClr val="1E293B"/>
+                </a:solidFill>
+                <a:latin typeface="Calibri"/>
+              </a:rPr>
+              <a:t>печатном</a:t>
+            </a:r>
+            <a:r>
+              <a:rPr sz="1000" b="0" i="0" dirty="0">
+                <a:solidFill>
+                  <a:srgbClr val="1E293B"/>
+                </a:solidFill>
+                <a:latin typeface="Calibri"/>
+              </a:rPr>
+              <a:t> </a:t>
+            </a:r>
+            <a:r>
+              <a:rPr sz="1000" b="0" i="0" dirty="0" err="1">
+                <a:solidFill>
+                  <a:srgbClr val="1E293B"/>
+                </a:solidFill>
+                <a:latin typeface="Calibri"/>
+              </a:rPr>
+              <a:t>тексте</a:t>
+            </a:r>
+            <a:endParaRPr sz="1000" b="0" i="0" dirty="0">
+              <a:solidFill>
+                <a:srgbClr val="1E293B"/>
+              </a:solidFill>
+              <a:latin typeface="Calibri"/>
+            </a:endParaRPr>
           </a:p>
         </p:txBody>
       </p:sp>
@@ -22820,14 +24763,92 @@
           <a:p>
             <a:pPr algn="l"/>
             <a:r>
-              <a:rPr sz="1000" b="0" i="0">
+              <a:rPr sz="1000" b="0" i="0" dirty="0" err="1">
                 <a:solidFill>
                   <a:srgbClr val="1E293B"/>
                 </a:solidFill>
                 <a:latin typeface="Calibri"/>
               </a:rPr>
-              <a:t>Единый API для PDF/DOCX/PPTX/TXT от Microsoft, сохраняет структуру</a:t>
-            </a:r>
+              <a:t>Единый</a:t>
+            </a:r>
+            <a:r>
+              <a:rPr sz="1000" b="0" i="0" dirty="0">
+                <a:solidFill>
+                  <a:srgbClr val="1E293B"/>
+                </a:solidFill>
+                <a:latin typeface="Calibri"/>
+              </a:rPr>
+              <a:t> API </a:t>
+            </a:r>
+            <a:r>
+              <a:rPr sz="1000" b="0" i="0" dirty="0" err="1">
+                <a:solidFill>
+                  <a:srgbClr val="1E293B"/>
+                </a:solidFill>
+                <a:latin typeface="Calibri"/>
+              </a:rPr>
+              <a:t>для</a:t>
+            </a:r>
+            <a:r>
+              <a:rPr sz="1000" b="0" i="0" dirty="0">
+                <a:solidFill>
+                  <a:srgbClr val="1E293B"/>
+                </a:solidFill>
+                <a:latin typeface="Calibri"/>
+              </a:rPr>
+              <a:t> PDF/DOCX/PPTX/TXT </a:t>
+            </a:r>
+            <a:r>
+              <a:rPr sz="1000" b="0" i="0" dirty="0" err="1">
+                <a:solidFill>
+                  <a:srgbClr val="1E293B"/>
+                </a:solidFill>
+                <a:latin typeface="Calibri"/>
+              </a:rPr>
+              <a:t>от</a:t>
+            </a:r>
+            <a:r>
+              <a:rPr sz="1000" b="0" i="0" dirty="0">
+                <a:solidFill>
+                  <a:srgbClr val="1E293B"/>
+                </a:solidFill>
+                <a:latin typeface="Calibri"/>
+              </a:rPr>
+              <a:t> Microsoft, </a:t>
+            </a:r>
+            <a:r>
+              <a:rPr sz="1000" b="0" i="0" dirty="0" err="1">
+                <a:solidFill>
+                  <a:srgbClr val="1E293B"/>
+                </a:solidFill>
+                <a:latin typeface="Calibri"/>
+              </a:rPr>
+              <a:t>сохраняет</a:t>
+            </a:r>
+            <a:r>
+              <a:rPr sz="1000" b="0" i="0" dirty="0">
+                <a:solidFill>
+                  <a:srgbClr val="1E293B"/>
+                </a:solidFill>
+                <a:latin typeface="Calibri"/>
+              </a:rPr>
+              <a:t> </a:t>
+            </a:r>
+            <a:r>
+              <a:rPr sz="1000" b="0" i="0" dirty="0" err="1">
+                <a:solidFill>
+                  <a:srgbClr val="1E293B"/>
+                </a:solidFill>
+                <a:latin typeface="Calibri"/>
+              </a:rPr>
+              <a:t>структуру</a:t>
+            </a:r>
+            <a:endParaRPr sz="1000" b="0" i="0" dirty="0">
+              <a:solidFill>
+                <a:srgbClr val="1E293B"/>
+              </a:solidFill>
+              <a:latin typeface="Calibri"/>
+            </a:endParaRPr>
           </a:p>
         </p:txBody>
       </p:sp>
@@ -23134,78 +25155,6 @@
                 </a:solidFill>
                 <a:latin typeface="Calibri"/>
               </a:rPr>
-              <a:t> </a:t>
-            </a:r>
-            <a:r>
-              <a:rPr lang="en-US" sz="1000" b="0" i="0" dirty="0">
-                <a:solidFill>
-                  <a:srgbClr val="1E293B"/>
-                </a:solidFill>
-                <a:latin typeface="Calibri"/>
-              </a:rPr>
-              <a:t>-</a:t>
-            </a:r>
-            <a:r>
-              <a:rPr sz="1000" b="0" i="0" dirty="0">
-                <a:solidFill>
-                  <a:srgbClr val="1E293B"/>
-                </a:solidFill>
-                <a:latin typeface="Calibri"/>
-              </a:rPr>
-              <a:t> </a:t>
-            </a:r>
-            <a:r>
-              <a:rPr sz="1000" b="0" i="0" dirty="0" err="1">
-                <a:solidFill>
-                  <a:srgbClr val="1E293B"/>
-                </a:solidFill>
-                <a:latin typeface="Calibri"/>
-              </a:rPr>
-              <a:t>данные</a:t>
-            </a:r>
-            <a:r>
-              <a:rPr sz="1000" b="0" i="0" dirty="0">
-                <a:solidFill>
-                  <a:srgbClr val="1E293B"/>
-                </a:solidFill>
-                <a:latin typeface="Calibri"/>
-              </a:rPr>
-              <a:t> </a:t>
-            </a:r>
-            <a:r>
-              <a:rPr sz="1000" b="0" i="0" dirty="0" err="1">
-                <a:solidFill>
-                  <a:srgbClr val="1E293B"/>
-                </a:solidFill>
-                <a:latin typeface="Calibri"/>
-              </a:rPr>
-              <a:t>не</a:t>
-            </a:r>
-            <a:r>
-              <a:rPr sz="1000" b="0" i="0" dirty="0">
-                <a:solidFill>
-                  <a:srgbClr val="1E293B"/>
-                </a:solidFill>
-                <a:latin typeface="Calibri"/>
-              </a:rPr>
-              <a:t> </a:t>
-            </a:r>
-            <a:r>
-              <a:rPr sz="1000" b="0" i="0" dirty="0" err="1">
-                <a:solidFill>
-                  <a:srgbClr val="1E293B"/>
-                </a:solidFill>
-                <a:latin typeface="Calibri"/>
-              </a:rPr>
-              <a:t>утекают</a:t>
-            </a:r>
-            <a:r>
-              <a:rPr sz="1000" b="0" i="0" dirty="0">
-                <a:solidFill>
-                  <a:srgbClr val="1E293B"/>
-                </a:solidFill>
-                <a:latin typeface="Calibri"/>
-              </a:rPr>
               <a:t>; 7B </a:t>
             </a:r>
             <a:r>
@@ -23783,7 +25732,7 @@
         <p:spPr>
           <a:xfrm>
             <a:off x="4553712" y="5349240"/>
-            <a:ext cx="6501384" cy="292608"/>
+            <a:ext cx="6501384" cy="246221"/>
           </a:xfrm>
           <a:prstGeom prst="rect">
             <a:avLst/>
@@ -23798,14 +25747,110 @@
           <a:p>
             <a:pPr algn="l"/>
             <a:r>
-              <a:rPr sz="1000" b="0" i="0">
+              <a:rPr sz="1000" b="0" i="0" dirty="0" err="1">
                 <a:solidFill>
                   <a:srgbClr val="1E293B"/>
                 </a:solidFill>
                 <a:latin typeface="Calibri"/>
               </a:rPr>
-              <a:t>Обнаруживает ошибки типов на этапе сборки, улучшает IDE</a:t>
-            </a:r>
+              <a:t>Обнаруживает</a:t>
+            </a:r>
+            <a:r>
+              <a:rPr sz="1000" b="0" i="0" dirty="0">
+                <a:solidFill>
+                  <a:srgbClr val="1E293B"/>
+                </a:solidFill>
+                <a:latin typeface="Calibri"/>
+              </a:rPr>
+              <a:t> </a:t>
+            </a:r>
+            <a:r>
+              <a:rPr sz="1000" b="0" i="0" dirty="0" err="1">
+                <a:solidFill>
+                  <a:srgbClr val="1E293B"/>
+                </a:solidFill>
+                <a:latin typeface="Calibri"/>
+              </a:rPr>
+              <a:t>ошибки</a:t>
+            </a:r>
+            <a:r>
+              <a:rPr sz="1000" b="0" i="0" dirty="0">
+                <a:solidFill>
+                  <a:srgbClr val="1E293B"/>
+                </a:solidFill>
+                <a:latin typeface="Calibri"/>
+              </a:rPr>
+              <a:t> </a:t>
+            </a:r>
+            <a:r>
+              <a:rPr sz="1000" b="0" i="0" dirty="0" err="1">
+                <a:solidFill>
+                  <a:srgbClr val="1E293B"/>
+                </a:solidFill>
+                <a:latin typeface="Calibri"/>
+              </a:rPr>
+              <a:t>типов</a:t>
+            </a:r>
+            <a:r>
+              <a:rPr sz="1000" b="0" i="0" dirty="0">
+                <a:solidFill>
+                  <a:srgbClr val="1E293B"/>
+                </a:solidFill>
+                <a:latin typeface="Calibri"/>
+              </a:rPr>
+              <a:t> </a:t>
+            </a:r>
+            <a:r>
+              <a:rPr sz="1000" b="0" i="0" dirty="0" err="1">
+                <a:solidFill>
+                  <a:srgbClr val="1E293B"/>
+                </a:solidFill>
+                <a:latin typeface="Calibri"/>
+              </a:rPr>
+              <a:t>на</a:t>
+            </a:r>
+            <a:r>
+              <a:rPr sz="1000" b="0" i="0" dirty="0">
+                <a:solidFill>
+                  <a:srgbClr val="1E293B"/>
+                </a:solidFill>
+                <a:latin typeface="Calibri"/>
+              </a:rPr>
+              <a:t> </a:t>
+            </a:r>
+            <a:r>
+              <a:rPr sz="1000" b="0" i="0" dirty="0" err="1">
+                <a:solidFill>
+                  <a:srgbClr val="1E293B"/>
+                </a:solidFill>
+                <a:latin typeface="Calibri"/>
+              </a:rPr>
+              <a:t>этапе</a:t>
+            </a:r>
+            <a:r>
+              <a:rPr sz="1000" b="0" i="0" dirty="0">
+                <a:solidFill>
+                  <a:srgbClr val="1E293B"/>
+                </a:solidFill>
+                <a:latin typeface="Calibri"/>
+              </a:rPr>
+              <a:t> </a:t>
+            </a:r>
+            <a:r>
+              <a:rPr sz="1000" b="0" i="0" dirty="0" err="1">
+                <a:solidFill>
+                  <a:srgbClr val="1E293B"/>
+                </a:solidFill>
+                <a:latin typeface="Calibri"/>
+              </a:rPr>
+              <a:t>сборки</a:t>
+            </a:r>
+            <a:endParaRPr sz="1000" b="0" i="0" dirty="0">
+              <a:solidFill>
+                <a:srgbClr val="1E293B"/>
+              </a:solidFill>
+              <a:latin typeface="Calibri"/>
+            </a:endParaRPr>
           </a:p>
         </p:txBody>
       </p:sp>
@@ -24079,131 +26124,65 @@
           <a:p>
             <a:pPr algn="l"/>
             <a:r>
-              <a:rPr sz="1000" b="0" i="0" dirty="0" err="1">
+              <a:rPr lang="ru-RU" sz="1000" dirty="0">
                 <a:solidFill>
                   <a:srgbClr val="1E293B"/>
                 </a:solidFill>
                 <a:latin typeface="Calibri"/>
               </a:rPr>
-              <a:t>Мгновенный</a:t>
-            </a:r>
-            <a:r>
-              <a:rPr sz="1000" b="0" i="0" dirty="0">
+              <a:t>Высокая скорость</a:t>
+            </a:r>
+            <a:r>
+              <a:rPr lang="en-US" sz="1000" b="0" i="0" dirty="0">
                 <a:solidFill>
                   <a:srgbClr val="1E293B"/>
                 </a:solidFill>
                 <a:latin typeface="Calibri"/>
               </a:rPr>
-              <a:t> </a:t>
-            </a:r>
-            <a:r>
-              <a:rPr sz="1000" b="0" i="0" dirty="0" err="1">
+              <a:t>, Rolldown </a:t>
+            </a:r>
+            <a:r>
+              <a:rPr lang="ru-RU" sz="1000" b="0" i="0" dirty="0">
                 <a:solidFill>
                   <a:srgbClr val="1E293B"/>
                 </a:solidFill>
                 <a:latin typeface="Calibri"/>
               </a:rPr>
-              <a:t>старт</a:t>
-            </a:r>
-            <a:r>
-              <a:rPr sz="1000" b="0" i="0" dirty="0">
+              <a:t>на </a:t>
+            </a:r>
+            <a:r>
+              <a:rPr lang="en-US" sz="1000" b="0" i="0" dirty="0">
                 <a:solidFill>
                   <a:srgbClr val="1E293B"/>
                 </a:solidFill>
                 <a:latin typeface="Calibri"/>
               </a:rPr>
-              <a:t> </a:t>
-            </a:r>
-            <a:r>
-              <a:rPr sz="1000" b="0" i="0" dirty="0" err="1">
+              <a:t>Rust - </a:t>
+            </a:r>
+            <a:r>
+              <a:rPr lang="ru-RU" sz="1000" b="0" i="0" dirty="0">
                 <a:solidFill>
                   <a:srgbClr val="1E293B"/>
                 </a:solidFill>
                 <a:latin typeface="Calibri"/>
               </a:rPr>
-              <a:t>через</a:t>
-            </a:r>
-            <a:r>
-              <a:rPr sz="1000" b="0" i="0" dirty="0">
+              <a:t>быстрее </a:t>
+            </a:r>
+            <a:r>
+              <a:rPr lang="en-US" sz="1000" b="0" i="0" dirty="0">
                 <a:solidFill>
                   <a:srgbClr val="1E293B"/>
                 </a:solidFill>
                 <a:latin typeface="Calibri"/>
               </a:rPr>
-              <a:t> ES-</a:t>
-            </a:r>
-            <a:r>
-              <a:rPr sz="1000" b="0" i="0" dirty="0" err="1">
-                <a:solidFill>
-                  <a:srgbClr val="1E293B"/>
-                </a:solidFill>
-                <a:latin typeface="Calibri"/>
-              </a:rPr>
-              <a:t>модули</a:t>
-            </a:r>
-            <a:r>
-              <a:rPr sz="1000" b="0" i="0" dirty="0">
-                <a:solidFill>
-                  <a:srgbClr val="1E293B"/>
-                </a:solidFill>
-                <a:latin typeface="Calibri"/>
-              </a:rPr>
-              <a:t>, Rolldown </a:t>
-            </a:r>
-            <a:r>
-              <a:rPr sz="1000" b="0" i="0" dirty="0" err="1">
-                <a:solidFill>
-                  <a:srgbClr val="1E293B"/>
-                </a:solidFill>
-                <a:latin typeface="Calibri"/>
-              </a:rPr>
-              <a:t>на</a:t>
-            </a:r>
-            <a:r>
-              <a:rPr sz="1000" b="0" i="0" dirty="0">
-                <a:solidFill>
-                  <a:srgbClr val="1E293B"/>
-                </a:solidFill>
-                <a:latin typeface="Calibri"/>
-              </a:rPr>
-              <a:t> Rust </a:t>
-            </a:r>
-            <a:r>
-              <a:rPr lang="en-US" sz="1000" b="0" i="0" dirty="0">
-                <a:solidFill>
-                  <a:srgbClr val="1E293B"/>
-                </a:solidFill>
-                <a:latin typeface="Calibri"/>
-              </a:rPr>
-              <a:t>-</a:t>
-            </a:r>
-            <a:r>
-              <a:rPr sz="1000" b="0" i="0" dirty="0">
-                <a:solidFill>
-                  <a:srgbClr val="1E293B"/>
-                </a:solidFill>
-                <a:latin typeface="Calibri"/>
-              </a:rPr>
-              <a:t> </a:t>
-            </a:r>
-            <a:r>
-              <a:rPr sz="1000" b="0" i="0" dirty="0" err="1">
-                <a:solidFill>
-                  <a:srgbClr val="1E293B"/>
-                </a:solidFill>
-                <a:latin typeface="Calibri"/>
-              </a:rPr>
-              <a:t>быстрее</a:t>
-            </a:r>
-            <a:r>
-              <a:rPr sz="1000" b="0" i="0" dirty="0">
-                <a:solidFill>
-                  <a:srgbClr val="1E293B"/>
-                </a:solidFill>
-                <a:latin typeface="Calibri"/>
-              </a:rPr>
-              <a:t> Webpack</a:t>
-            </a:r>
+              <a:t>Webpack</a:t>
+            </a:r>
+            <a:endParaRPr sz="1000" b="0" i="0" dirty="0">
+              <a:solidFill>
+                <a:srgbClr val="1E293B"/>
+              </a:solidFill>
+              <a:latin typeface="Calibri"/>
+            </a:endParaRPr>
           </a:p>
         </p:txBody>
       </p:sp>
@@ -24462,7 +26441,7 @@
         <p:spPr>
           <a:xfrm>
             <a:off x="4553712" y="6135624"/>
-            <a:ext cx="6501384" cy="292608"/>
+            <a:ext cx="6501384" cy="246221"/>
           </a:xfrm>
           <a:prstGeom prst="rect">
             <a:avLst/>
@@ -24477,14 +26456,110 @@
           <a:p>
             <a:pPr algn="l"/>
             <a:r>
-              <a:rPr sz="1000" b="0" i="0">
+              <a:rPr sz="1000" b="0" i="0" dirty="0" err="1">
                 <a:solidFill>
                   <a:srgbClr val="1E293B"/>
                 </a:solidFill>
                 <a:latin typeface="Calibri"/>
               </a:rPr>
-              <a:t>Utility-first: стили прямо в JSX, v4 через Vite-плагин без конфига</a:t>
-            </a:r>
+              <a:t>стили</a:t>
+            </a:r>
+            <a:r>
+              <a:rPr sz="1000" b="0" i="0" dirty="0">
+                <a:solidFill>
+                  <a:srgbClr val="1E293B"/>
+                </a:solidFill>
+                <a:latin typeface="Calibri"/>
+              </a:rPr>
+              <a:t> </a:t>
+            </a:r>
+            <a:r>
+              <a:rPr sz="1000" b="0" i="0" dirty="0" err="1">
+                <a:solidFill>
+                  <a:srgbClr val="1E293B"/>
+                </a:solidFill>
+                <a:latin typeface="Calibri"/>
+              </a:rPr>
+              <a:t>прямо</a:t>
+            </a:r>
+            <a:r>
+              <a:rPr sz="1000" b="0" i="0" dirty="0">
+                <a:solidFill>
+                  <a:srgbClr val="1E293B"/>
+                </a:solidFill>
+                <a:latin typeface="Calibri"/>
+              </a:rPr>
+              <a:t> в JSX, v4 </a:t>
+            </a:r>
+            <a:r>
+              <a:rPr sz="1000" b="0" i="0" dirty="0" err="1">
+                <a:solidFill>
+                  <a:srgbClr val="1E293B"/>
+                </a:solidFill>
+                <a:latin typeface="Calibri"/>
+              </a:rPr>
+              <a:t>через</a:t>
+            </a:r>
+            <a:r>
+              <a:rPr sz="1000" b="0" i="0" dirty="0">
+                <a:solidFill>
+                  <a:srgbClr val="1E293B"/>
+                </a:solidFill>
+                <a:latin typeface="Calibri"/>
+              </a:rPr>
+              <a:t> Vite-</a:t>
+            </a:r>
+            <a:r>
+              <a:rPr sz="1000" b="0" i="0" dirty="0" err="1">
+                <a:solidFill>
+                  <a:srgbClr val="1E293B"/>
+                </a:solidFill>
+                <a:latin typeface="Calibri"/>
+              </a:rPr>
+              <a:t>плагин</a:t>
+            </a:r>
+            <a:r>
+              <a:rPr sz="1000" b="0" i="0" dirty="0">
+                <a:solidFill>
+                  <a:srgbClr val="1E293B"/>
+                </a:solidFill>
+                <a:latin typeface="Calibri"/>
+              </a:rPr>
+              <a:t> </a:t>
+            </a:r>
+            <a:r>
+              <a:rPr sz="1000" b="0" i="0" dirty="0" err="1">
+                <a:solidFill>
+                  <a:srgbClr val="1E293B"/>
+                </a:solidFill>
+                <a:latin typeface="Calibri"/>
+              </a:rPr>
+              <a:t>без</a:t>
+            </a:r>
+            <a:r>
+              <a:rPr sz="1000" b="0" i="0" dirty="0">
+                <a:solidFill>
+                  <a:srgbClr val="1E293B"/>
+                </a:solidFill>
+                <a:latin typeface="Calibri"/>
+              </a:rPr>
+              <a:t> </a:t>
+            </a:r>
+            <a:r>
+              <a:rPr sz="1000" b="0" i="0" dirty="0" err="1">
+                <a:solidFill>
+                  <a:srgbClr val="1E293B"/>
+                </a:solidFill>
+                <a:latin typeface="Calibri"/>
+              </a:rPr>
+              <a:t>конфига</a:t>
+            </a:r>
+            <a:endParaRPr sz="1000" b="0" i="0" dirty="0">
+              <a:solidFill>
+                <a:srgbClr val="1E293B"/>
+              </a:solidFill>
+              <a:latin typeface="Calibri"/>
+            </a:endParaRPr>
           </a:p>
         </p:txBody>
       </p:sp>
@@ -25469,20 +27544,272 @@
           <a:p>
             <a:pPr algn="l"/>
             <a:r>
-              <a:rPr sz="1100" b="0" i="0">
+              <a:rPr sz="1100" b="0" i="0" dirty="0">
                 <a:solidFill>
                   <a:srgbClr val="64748B"/>
                 </a:solidFill>
                 <a:latin typeface="Calibri"/>
               </a:rPr>
               <a:t>ЗАЧЕМ:
-Сервисы не знают про SQL.
-Легко сменить СУБД.
-Код тестируем.
+</a:t>
+            </a:r>
+            <a:r>
+              <a:rPr sz="1100" b="0" i="0" dirty="0" err="1">
+                <a:solidFill>
+                  <a:srgbClr val="64748B"/>
+                </a:solidFill>
+                <a:latin typeface="Calibri"/>
+              </a:rPr>
+              <a:t>Сервисы</a:t>
+            </a:r>
+            <a:r>
+              <a:rPr sz="1100" b="0" i="0" dirty="0">
+                <a:solidFill>
+                  <a:srgbClr val="64748B"/>
+                </a:solidFill>
+                <a:latin typeface="Calibri"/>
+              </a:rPr>
+              <a:t> </a:t>
+            </a:r>
+            <a:r>
+              <a:rPr sz="1100" b="0" i="0" dirty="0" err="1">
+                <a:solidFill>
+                  <a:srgbClr val="64748B"/>
+                </a:solidFill>
+                <a:latin typeface="Calibri"/>
+              </a:rPr>
+              <a:t>не</a:t>
+            </a:r>
+            <a:r>
+              <a:rPr sz="1100" b="0" i="0" dirty="0">
+                <a:solidFill>
+                  <a:srgbClr val="64748B"/>
+                </a:solidFill>
+                <a:latin typeface="Calibri"/>
+              </a:rPr>
+              <a:t> </a:t>
+            </a:r>
+            <a:r>
+              <a:rPr sz="1100" b="0" i="0" dirty="0" err="1">
+                <a:solidFill>
+                  <a:srgbClr val="64748B"/>
+                </a:solidFill>
+                <a:latin typeface="Calibri"/>
+              </a:rPr>
+              <a:t>знают</a:t>
+            </a:r>
+            <a:r>
+              <a:rPr sz="1100" b="0" i="0" dirty="0">
+                <a:solidFill>
+                  <a:srgbClr val="64748B"/>
+                </a:solidFill>
+                <a:latin typeface="Calibri"/>
+              </a:rPr>
+              <a:t> </a:t>
+            </a:r>
+            <a:r>
+              <a:rPr sz="1100" b="0" i="0" dirty="0" err="1">
+                <a:solidFill>
+                  <a:srgbClr val="64748B"/>
+                </a:solidFill>
+                <a:latin typeface="Calibri"/>
+              </a:rPr>
+              <a:t>про</a:t>
+            </a:r>
+            <a:r>
+              <a:rPr sz="1100" b="0" i="0" dirty="0">
+                <a:solidFill>
+                  <a:srgbClr val="64748B"/>
+                </a:solidFill>
+                <a:latin typeface="Calibri"/>
+              </a:rPr>
+              <a:t> SQL.
+</a:t>
+            </a:r>
+            <a:r>
+              <a:rPr sz="1100" b="0" i="0" dirty="0" err="1">
+                <a:solidFill>
+                  <a:srgbClr val="64748B"/>
+                </a:solidFill>
+                <a:latin typeface="Calibri"/>
+              </a:rPr>
+              <a:t>Легко</a:t>
+            </a:r>
+            <a:r>
+              <a:rPr sz="1100" b="0" i="0" dirty="0">
+                <a:solidFill>
+                  <a:srgbClr val="64748B"/>
+                </a:solidFill>
+                <a:latin typeface="Calibri"/>
+              </a:rPr>
+              <a:t> </a:t>
+            </a:r>
+            <a:r>
+              <a:rPr sz="1100" b="0" i="0" dirty="0" err="1">
+                <a:solidFill>
+                  <a:srgbClr val="64748B"/>
+                </a:solidFill>
+                <a:latin typeface="Calibri"/>
+              </a:rPr>
+              <a:t>сменить</a:t>
+            </a:r>
+            <a:r>
+              <a:rPr sz="1100" b="0" i="0" dirty="0">
+                <a:solidFill>
+                  <a:srgbClr val="64748B"/>
+                </a:solidFill>
+                <a:latin typeface="Calibri"/>
+              </a:rPr>
+              <a:t> СУБД.
+</a:t>
+            </a:r>
+            <a:r>
+              <a:rPr sz="1100" b="0" i="0" dirty="0" err="1">
+                <a:solidFill>
+                  <a:srgbClr val="64748B"/>
+                </a:solidFill>
+                <a:latin typeface="Calibri"/>
+              </a:rPr>
+              <a:t>Код</a:t>
+            </a:r>
+            <a:r>
+              <a:rPr sz="1100" b="0" i="0" dirty="0">
+                <a:solidFill>
+                  <a:srgbClr val="64748B"/>
+                </a:solidFill>
+                <a:latin typeface="Calibri"/>
+              </a:rPr>
+              <a:t> </a:t>
+            </a:r>
+            <a:r>
+              <a:rPr sz="1100" b="0" i="0" dirty="0" err="1">
+                <a:solidFill>
+                  <a:srgbClr val="64748B"/>
+                </a:solidFill>
+                <a:latin typeface="Calibri"/>
+              </a:rPr>
+              <a:t>тестируем</a:t>
+            </a:r>
+            <a:r>
+              <a:rPr sz="1100" b="0" i="0" dirty="0">
+                <a:solidFill>
+                  <a:srgbClr val="64748B"/>
+                </a:solidFill>
+                <a:latin typeface="Calibri"/>
+              </a:rPr>
+              <a:t>.
 КАК:
-CheckRepository, GroupRepository,
-FunctionRepository и другие.
-Единственное место с select/insert/update</a:t>
+</a:t>
+            </a:r>
+            <a:r>
+              <a:rPr sz="1100" b="0" i="0" dirty="0" err="1">
+                <a:solidFill>
+                  <a:srgbClr val="64748B"/>
+                </a:solidFill>
+                <a:latin typeface="Calibri"/>
+              </a:rPr>
+              <a:t>CheckRepository</a:t>
+            </a:r>
+            <a:r>
+              <a:rPr sz="1100" b="0" i="0" dirty="0">
+                <a:solidFill>
+                  <a:srgbClr val="64748B"/>
+                </a:solidFill>
+                <a:latin typeface="Calibri"/>
+              </a:rPr>
+              <a:t>, </a:t>
+            </a:r>
+            <a:r>
+              <a:rPr sz="1100" b="0" i="0" dirty="0" err="1">
+                <a:solidFill>
+                  <a:srgbClr val="64748B"/>
+                </a:solidFill>
+                <a:latin typeface="Calibri"/>
+              </a:rPr>
+              <a:t>GroupRepository</a:t>
+            </a:r>
+            <a:r>
+              <a:rPr sz="1100" b="0" i="0" dirty="0">
+                <a:solidFill>
+                  <a:srgbClr val="64748B"/>
+                </a:solidFill>
+                <a:latin typeface="Calibri"/>
+              </a:rPr>
+              <a:t>,
+</a:t>
+            </a:r>
+            <a:r>
+              <a:rPr sz="1100" b="0" i="0" dirty="0" err="1">
+                <a:solidFill>
+                  <a:srgbClr val="64748B"/>
+                </a:solidFill>
+                <a:latin typeface="Calibri"/>
+              </a:rPr>
+              <a:t>FunctionRepository</a:t>
+            </a:r>
+            <a:r>
+              <a:rPr sz="1100" b="0" i="0" dirty="0">
+                <a:solidFill>
+                  <a:srgbClr val="64748B"/>
+                </a:solidFill>
+                <a:latin typeface="Calibri"/>
+              </a:rPr>
+              <a:t> и </a:t>
+            </a:r>
+            <a:r>
+              <a:rPr sz="1100" b="0" i="0" dirty="0" err="1">
+                <a:solidFill>
+                  <a:srgbClr val="64748B"/>
+                </a:solidFill>
+                <a:latin typeface="Calibri"/>
+              </a:rPr>
+              <a:t>другие</a:t>
+            </a:r>
+            <a:r>
+              <a:rPr sz="1100" b="0" i="0" dirty="0">
+                <a:solidFill>
+                  <a:srgbClr val="64748B"/>
+                </a:solidFill>
+                <a:latin typeface="Calibri"/>
+              </a:rPr>
+              <a:t>.
+</a:t>
+            </a:r>
+            <a:r>
+              <a:rPr sz="1100" b="0" i="0" dirty="0" err="1">
+                <a:solidFill>
+                  <a:srgbClr val="64748B"/>
+                </a:solidFill>
+                <a:latin typeface="Calibri"/>
+              </a:rPr>
+              <a:t>Единственное</a:t>
+            </a:r>
+            <a:r>
+              <a:rPr sz="1100" b="0" i="0" dirty="0">
+                <a:solidFill>
+                  <a:srgbClr val="64748B"/>
+                </a:solidFill>
+                <a:latin typeface="Calibri"/>
+              </a:rPr>
+              <a:t> </a:t>
+            </a:r>
+            <a:r>
+              <a:rPr sz="1100" b="0" i="0" dirty="0" err="1">
+                <a:solidFill>
+                  <a:srgbClr val="64748B"/>
+                </a:solidFill>
+                <a:latin typeface="Calibri"/>
+              </a:rPr>
+              <a:t>место</a:t>
+            </a:r>
+            <a:r>
+              <a:rPr sz="1100" b="0" i="0" dirty="0">
+                <a:solidFill>
+                  <a:srgbClr val="64748B"/>
+                </a:solidFill>
+                <a:latin typeface="Calibri"/>
+              </a:rPr>
+              <a:t> с select/insert/update</a:t>
             </a:r>
           </a:p>
         </p:txBody>
@@ -25555,17 +27882,71 @@
           <a:p>
             <a:pPr algn="l"/>
             <a:r>
-              <a:rPr sz="1000" b="0" i="0">
+              <a:rPr sz="1000" b="0" i="0" dirty="0">
                 <a:solidFill>
                   <a:srgbClr val="A5B4FC"/>
                 </a:solidFill>
                 <a:latin typeface="Calibri"/>
               </a:rPr>
-              <a:t>class CheckRepository:
+              <a:t>class </a:t>
+            </a:r>
+            <a:r>
+              <a:rPr sz="1000" b="0" i="0" dirty="0" err="1">
+                <a:solidFill>
+                  <a:srgbClr val="A5B4FC"/>
+                </a:solidFill>
+                <a:latin typeface="Calibri"/>
+              </a:rPr>
+              <a:t>CheckRepository</a:t>
+            </a:r>
+            <a:r>
+              <a:rPr sz="1000" b="0" i="0" dirty="0">
+                <a:solidFill>
+                  <a:srgbClr val="A5B4FC"/>
+                </a:solidFill>
+                <a:latin typeface="Calibri"/>
+              </a:rPr>
+              <a:t>:
   async def create(self, data) -&gt; Check:
     obj = Check(**data)
-    self.db.add(obj)
-    await self.db.commit()
+    </a:t>
+            </a:r>
+            <a:r>
+              <a:rPr sz="1000" b="0" i="0" dirty="0" err="1">
+                <a:solidFill>
+                  <a:srgbClr val="A5B4FC"/>
+                </a:solidFill>
+                <a:latin typeface="Calibri"/>
+              </a:rPr>
+              <a:t>self.db.add</a:t>
+            </a:r>
+            <a:r>
+              <a:rPr sz="1000" b="0" i="0" dirty="0">
+                <a:solidFill>
+                  <a:srgbClr val="A5B4FC"/>
+                </a:solidFill>
+                <a:latin typeface="Calibri"/>
+              </a:rPr>
+              <a:t>(obj)
+    await </a:t>
+            </a:r>
+            <a:r>
+              <a:rPr sz="1000" b="0" i="0" dirty="0" err="1">
+                <a:solidFill>
+                  <a:srgbClr val="A5B4FC"/>
+                </a:solidFill>
+                <a:latin typeface="Calibri"/>
+              </a:rPr>
+              <a:t>self.db.commit</a:t>
+            </a:r>
+            <a:r>
+              <a:rPr sz="1000" b="0" i="0" dirty="0">
+                <a:solidFill>
+                  <a:srgbClr val="A5B4FC"/>
+                </a:solidFill>
+                <a:latin typeface="Calibri"/>
+              </a:rPr>
+              <a:t>()
     return obj</a:t>
             </a:r>
           </a:p>
@@ -26150,8 +28531,8 @@
         </p:nvSpPr>
         <p:spPr>
           <a:xfrm>
-            <a:off x="474675" y="1269062"/>
-            <a:ext cx="3259273" cy="923969"/>
+            <a:off x="385457" y="1179762"/>
+            <a:ext cx="2912914" cy="822997"/>
           </a:xfrm>
           <a:prstGeom prst="rect">
             <a:avLst/>
@@ -26194,8 +28575,8 @@
         </p:nvSpPr>
         <p:spPr>
           <a:xfrm>
-            <a:off x="334072" y="1434635"/>
-            <a:ext cx="1117465" cy="523220"/>
+            <a:off x="244854" y="1345335"/>
+            <a:ext cx="998714" cy="523220"/>
           </a:xfrm>
           <a:prstGeom prst="rect">
             <a:avLst/>
@@ -26229,8 +28610,8 @@
         </p:nvSpPr>
         <p:spPr>
           <a:xfrm>
-            <a:off x="1129985" y="1566897"/>
-            <a:ext cx="2236209" cy="307777"/>
+            <a:off x="1040767" y="1329650"/>
+            <a:ext cx="1998570" cy="523220"/>
           </a:xfrm>
           <a:prstGeom prst="rect">
             <a:avLst/>
@@ -26297,8 +28678,8 @@
         </p:nvSpPr>
         <p:spPr>
           <a:xfrm>
-            <a:off x="500621" y="3365282"/>
-            <a:ext cx="3259273" cy="923969"/>
+            <a:off x="411403" y="3275982"/>
+            <a:ext cx="2912914" cy="822997"/>
           </a:xfrm>
           <a:prstGeom prst="rect">
             <a:avLst/>
@@ -26341,8 +28722,8 @@
         </p:nvSpPr>
         <p:spPr>
           <a:xfrm>
-            <a:off x="411402" y="3505878"/>
-            <a:ext cx="1117465" cy="523220"/>
+            <a:off x="322184" y="3416578"/>
+            <a:ext cx="998714" cy="523220"/>
           </a:xfrm>
           <a:prstGeom prst="rect">
             <a:avLst/>
@@ -26376,8 +28757,8 @@
         </p:nvSpPr>
         <p:spPr>
           <a:xfrm>
-            <a:off x="1180918" y="3630467"/>
-            <a:ext cx="2368193" cy="307777"/>
+            <a:off x="1091699" y="3541167"/>
+            <a:ext cx="2116528" cy="307777"/>
           </a:xfrm>
           <a:prstGeom prst="rect">
             <a:avLst/>
@@ -26456,8 +28837,8 @@
         </p:nvSpPr>
         <p:spPr>
           <a:xfrm>
-            <a:off x="481630" y="2320268"/>
-            <a:ext cx="3259273" cy="923969"/>
+            <a:off x="392412" y="2230968"/>
+            <a:ext cx="2912914" cy="822997"/>
           </a:xfrm>
           <a:prstGeom prst="rect">
             <a:avLst/>
@@ -26500,8 +28881,8 @@
         </p:nvSpPr>
         <p:spPr>
           <a:xfrm>
-            <a:off x="403298" y="2451745"/>
-            <a:ext cx="1117465" cy="523220"/>
+            <a:off x="314080" y="2362445"/>
+            <a:ext cx="998714" cy="523220"/>
           </a:xfrm>
           <a:prstGeom prst="rect">
             <a:avLst/>
@@ -26535,8 +28916,8 @@
         </p:nvSpPr>
         <p:spPr>
           <a:xfrm>
-            <a:off x="1188695" y="2572765"/>
-            <a:ext cx="1769320" cy="307777"/>
+            <a:off x="1099476" y="2483465"/>
+            <a:ext cx="1581297" cy="307777"/>
           </a:xfrm>
           <a:prstGeom prst="rect">
             <a:avLst/>
@@ -26570,10 +28951,10 @@
       </p:sp>
       <p:pic>
         <p:nvPicPr>
-          <p:cNvPr id="29" name="Рисунок 28">
+          <p:cNvPr id="31" name="Рисунок 30">
             <a:extLst>
               <a:ext uri="{FF2B5EF4-FFF2-40B4-BE49-F238E27FC236}">
-                <a16:creationId xmlns:a16="http://schemas.microsoft.com/office/drawing/2014/main" id="{4D34E8DB-BE65-4261-9617-E0F2FAB1811D}"/>
+                <a16:creationId xmlns:a16="http://schemas.microsoft.com/office/drawing/2014/main" id="{ADF22E81-354A-DB38-2DDF-6A5EECD08FAE}"/>
               </a:ext>
             </a:extLst>
           </p:cNvPr>
@@ -26584,14 +28965,15 @@
         </p:nvPicPr>
         <p:blipFill>
           <a:blip r:embed="rId3"/>
+          <a:srcRect l="1406" t="2272" r="-212"/>
           <a:stretch>
             <a:fillRect/>
           </a:stretch>
         </p:blipFill>
         <p:spPr>
           <a:xfrm>
-            <a:off x="4590611" y="109838"/>
-            <a:ext cx="6892377" cy="6641238"/>
+            <a:off x="3429000" y="972983"/>
+            <a:ext cx="8745892" cy="5572679"/>
           </a:xfrm>
           <a:prstGeom prst="rect">
             <a:avLst/>
@@ -28687,14 +31069,92 @@
           <a:p>
             <a:pPr algn="l"/>
             <a:r>
-              <a:rPr sz="1300" b="0" i="0">
+              <a:rPr sz="1300" b="0" i="0" dirty="0" err="1">
                 <a:solidFill>
                   <a:srgbClr val="E0E7FF"/>
                 </a:solidFill>
                 <a:latin typeface="Calibri"/>
               </a:rPr>
-              <a:t>Две независимые части в одном git-репозитории, развёртывание через Docker</a:t>
-            </a:r>
+              <a:t>Две</a:t>
+            </a:r>
+            <a:r>
+              <a:rPr sz="1300" b="0" i="0" dirty="0">
+                <a:solidFill>
+                  <a:srgbClr val="E0E7FF"/>
+                </a:solidFill>
+                <a:latin typeface="Calibri"/>
+              </a:rPr>
+              <a:t> </a:t>
+            </a:r>
+            <a:r>
+              <a:rPr sz="1300" b="0" i="0" dirty="0" err="1">
+                <a:solidFill>
+                  <a:srgbClr val="E0E7FF"/>
+                </a:solidFill>
+                <a:latin typeface="Calibri"/>
+              </a:rPr>
+              <a:t>независимые</a:t>
+            </a:r>
+            <a:r>
+              <a:rPr sz="1300" b="0" i="0" dirty="0">
+                <a:solidFill>
+                  <a:srgbClr val="E0E7FF"/>
+                </a:solidFill>
+                <a:latin typeface="Calibri"/>
+              </a:rPr>
+              <a:t> </a:t>
+            </a:r>
+            <a:r>
+              <a:rPr sz="1300" b="0" i="0" dirty="0" err="1">
+                <a:solidFill>
+                  <a:srgbClr val="E0E7FF"/>
+                </a:solidFill>
+                <a:latin typeface="Calibri"/>
+              </a:rPr>
+              <a:t>части</a:t>
+            </a:r>
+            <a:r>
+              <a:rPr sz="1300" b="0" i="0" dirty="0">
+                <a:solidFill>
+                  <a:srgbClr val="E0E7FF"/>
+                </a:solidFill>
+                <a:latin typeface="Calibri"/>
+              </a:rPr>
+              <a:t> в </a:t>
+            </a:r>
+            <a:r>
+              <a:rPr sz="1300" b="0" i="0" dirty="0" err="1">
+                <a:solidFill>
+                  <a:srgbClr val="E0E7FF"/>
+                </a:solidFill>
+                <a:latin typeface="Calibri"/>
+              </a:rPr>
+              <a:t>одном</a:t>
+            </a:r>
+            <a:r>
+              <a:rPr sz="1300" b="0" i="0" dirty="0">
+                <a:solidFill>
+                  <a:srgbClr val="E0E7FF"/>
+                </a:solidFill>
+                <a:latin typeface="Calibri"/>
+              </a:rPr>
+              <a:t> git-</a:t>
+            </a:r>
+            <a:r>
+              <a:rPr sz="1300" b="0" i="0" dirty="0" err="1">
+                <a:solidFill>
+                  <a:srgbClr val="E0E7FF"/>
+                </a:solidFill>
+                <a:latin typeface="Calibri"/>
+              </a:rPr>
+              <a:t>репозитории</a:t>
+            </a:r>
+            <a:endParaRPr sz="1300" b="0" i="0" dirty="0">
+              <a:solidFill>
+                <a:srgbClr val="E0E7FF"/>
+              </a:solidFill>
+              <a:latin typeface="Calibri"/>
+            </a:endParaRPr>
           </a:p>
         </p:txBody>
       </p:sp>
@@ -29275,7 +31735,7 @@
         </p:nvSpPr>
         <p:spPr>
           <a:xfrm>
-            <a:off x="1280160" y="5257800"/>
+            <a:off x="1280160" y="5285232"/>
             <a:ext cx="4480560" cy="274320"/>
           </a:xfrm>
           <a:prstGeom prst="rect">
@@ -29416,7 +31876,7 @@
         <p:spPr>
           <a:xfrm>
             <a:off x="5394960" y="1298448"/>
-            <a:ext cx="3246120" cy="1261872"/>
+            <a:ext cx="6610004" cy="1261872"/>
           </a:xfrm>
           <a:prstGeom prst="rect">
             <a:avLst/>
@@ -29460,7 +31920,7 @@
         <p:spPr>
           <a:xfrm>
             <a:off x="5394960" y="1298448"/>
-            <a:ext cx="3246120" cy="63500"/>
+            <a:ext cx="6610004" cy="63500"/>
           </a:xfrm>
           <a:prstGeom prst="rect">
             <a:avLst/>
@@ -29504,7 +31964,7 @@
         <p:spPr>
           <a:xfrm>
             <a:off x="5394960" y="1298448"/>
-            <a:ext cx="54864" cy="1261872"/>
+            <a:ext cx="111718" cy="1261872"/>
           </a:xfrm>
           <a:prstGeom prst="rect">
             <a:avLst/>
@@ -29548,7 +32008,7 @@
         <p:spPr>
           <a:xfrm>
             <a:off x="5541264" y="1371600"/>
-            <a:ext cx="3044952" cy="347472"/>
+            <a:ext cx="6200370" cy="292388"/>
           </a:xfrm>
           <a:prstGeom prst="rect">
             <a:avLst/>
@@ -29583,7 +32043,7 @@
         <p:spPr>
           <a:xfrm>
             <a:off x="5541264" y="1755648"/>
-            <a:ext cx="3044952" cy="713232"/>
+            <a:ext cx="6200370" cy="600164"/>
           </a:xfrm>
           <a:prstGeom prst="rect">
             <a:avLst/>
@@ -29620,7 +32080,7 @@
         <p:spPr>
           <a:xfrm>
             <a:off x="5394960" y="2688336"/>
-            <a:ext cx="3246120" cy="1261872"/>
+            <a:ext cx="6610004" cy="1261872"/>
           </a:xfrm>
           <a:prstGeom prst="rect">
             <a:avLst/>
@@ -29664,7 +32124,7 @@
         <p:spPr>
           <a:xfrm>
             <a:off x="5394960" y="2688336"/>
-            <a:ext cx="3246120" cy="63500"/>
+            <a:ext cx="6610004" cy="63500"/>
           </a:xfrm>
           <a:prstGeom prst="rect">
             <a:avLst/>
@@ -29708,7 +32168,7 @@
         <p:spPr>
           <a:xfrm>
             <a:off x="5394960" y="2688336"/>
-            <a:ext cx="54864" cy="1261872"/>
+            <a:ext cx="111718" cy="1261872"/>
           </a:xfrm>
           <a:prstGeom prst="rect">
             <a:avLst/>
@@ -29752,7 +32212,7 @@
         <p:spPr>
           <a:xfrm>
             <a:off x="5541264" y="2761488"/>
-            <a:ext cx="3044952" cy="347472"/>
+            <a:ext cx="6200370" cy="292388"/>
           </a:xfrm>
           <a:prstGeom prst="rect">
             <a:avLst/>
@@ -29787,7 +32247,7 @@
         <p:spPr>
           <a:xfrm>
             <a:off x="5541264" y="3145536"/>
-            <a:ext cx="3044952" cy="600164"/>
+            <a:ext cx="6200370" cy="600164"/>
           </a:xfrm>
           <a:prstGeom prst="rect">
             <a:avLst/>
@@ -29931,14 +32391,14 @@
       </p:sp>
       <p:sp>
         <p:nvSpPr>
-          <p:cNvPr id="35" name="Rectangle 34"/>
+          <p:cNvPr id="40" name="Rectangle 39"/>
           <p:cNvSpPr/>
           <p:nvPr/>
         </p:nvSpPr>
         <p:spPr>
           <a:xfrm>
-            <a:off x="5394960" y="4078224"/>
-            <a:ext cx="3246120" cy="1261872"/>
+            <a:off x="5384951" y="4160520"/>
+            <a:ext cx="6610004" cy="1261872"/>
           </a:xfrm>
           <a:prstGeom prst="rect">
             <a:avLst/>
@@ -29975,218 +32435,14 @@
       </p:sp>
       <p:sp>
         <p:nvSpPr>
-          <p:cNvPr id="36" name="Rectangle 35"/>
-          <p:cNvSpPr/>
-          <p:nvPr/>
-        </p:nvSpPr>
-        <p:spPr>
-          <a:xfrm>
-            <a:off x="5394960" y="4078224"/>
-            <a:ext cx="3246120" cy="63500"/>
-          </a:xfrm>
-          <a:prstGeom prst="rect">
-            <a:avLst/>
-          </a:prstGeom>
-          <a:solidFill>
-            <a:srgbClr val="059669"/>
-          </a:solidFill>
-          <a:ln>
-            <a:noFill/>
-          </a:ln>
-        </p:spPr>
-        <p:style>
-          <a:lnRef idx="1">
-            <a:schemeClr val="accent1"/>
-          </a:lnRef>
-          <a:fillRef idx="3">
-            <a:schemeClr val="accent1"/>
-          </a:fillRef>
-          <a:effectRef idx="2">
-            <a:schemeClr val="accent1"/>
-          </a:effectRef>
-          <a:fontRef idx="minor">
-            <a:schemeClr val="lt1"/>
-          </a:fontRef>
-        </p:style>
-        <p:txBody>
-          <a:bodyPr rtlCol="0" anchor="ctr"/>
-          <a:lstStyle/>
-          <a:p>
-            <a:pPr algn="ctr"/>
-            <a:endParaRPr/>
-          </a:p>
-        </p:txBody>
-      </p:sp>
-      <p:sp>
-        <p:nvSpPr>
-          <p:cNvPr id="37" name="Rectangle 36"/>
-          <p:cNvSpPr/>
-          <p:nvPr/>
-        </p:nvSpPr>
-        <p:spPr>
-          <a:xfrm>
-            <a:off x="5394960" y="4078224"/>
-            <a:ext cx="54864" cy="1261872"/>
-          </a:xfrm>
-          <a:prstGeom prst="rect">
-            <a:avLst/>
-          </a:prstGeom>
-          <a:solidFill>
-            <a:srgbClr val="059669"/>
-          </a:solidFill>
-          <a:ln>
-            <a:noFill/>
-          </a:ln>
-        </p:spPr>
-        <p:style>
-          <a:lnRef idx="1">
-            <a:schemeClr val="accent1"/>
-          </a:lnRef>
-          <a:fillRef idx="3">
-            <a:schemeClr val="accent1"/>
-          </a:fillRef>
-          <a:effectRef idx="2">
-            <a:schemeClr val="accent1"/>
-          </a:effectRef>
-          <a:fontRef idx="minor">
-            <a:schemeClr val="lt1"/>
-          </a:fontRef>
-        </p:style>
-        <p:txBody>
-          <a:bodyPr rtlCol="0" anchor="ctr"/>
-          <a:lstStyle/>
-          <a:p>
-            <a:pPr algn="ctr"/>
-            <a:endParaRPr/>
-          </a:p>
-        </p:txBody>
-      </p:sp>
-      <p:sp>
-        <p:nvSpPr>
-          <p:cNvPr id="38" name="TextBox 37"/>
-          <p:cNvSpPr txBox="1"/>
-          <p:nvPr/>
-        </p:nvSpPr>
-        <p:spPr>
-          <a:xfrm>
-            <a:off x="5541264" y="4151376"/>
-            <a:ext cx="3044952" cy="347472"/>
-          </a:xfrm>
-          <a:prstGeom prst="rect">
-            <a:avLst/>
-          </a:prstGeom>
-          <a:noFill/>
-        </p:spPr>
-        <p:txBody>
-          <a:bodyPr wrap="square">
-            <a:spAutoFit/>
-          </a:bodyPr>
-          <a:lstStyle/>
-          <a:p>
-            <a:pPr algn="l"/>
-            <a:r>
-              <a:rPr sz="1300" b="1" i="0">
-                <a:solidFill>
-                  <a:srgbClr val="059669"/>
-                </a:solidFill>
-                <a:latin typeface="Calibri"/>
-              </a:rPr>
-              <a:t>docker-compose.yml</a:t>
-            </a:r>
-          </a:p>
-        </p:txBody>
-      </p:sp>
-      <p:sp>
-        <p:nvSpPr>
-          <p:cNvPr id="39" name="TextBox 38"/>
-          <p:cNvSpPr txBox="1"/>
-          <p:nvPr/>
-        </p:nvSpPr>
-        <p:spPr>
-          <a:xfrm>
-            <a:off x="5541264" y="4535424"/>
-            <a:ext cx="3044952" cy="713232"/>
-          </a:xfrm>
-          <a:prstGeom prst="rect">
-            <a:avLst/>
-          </a:prstGeom>
-          <a:noFill/>
-        </p:spPr>
-        <p:txBody>
-          <a:bodyPr wrap="square">
-            <a:spAutoFit/>
-          </a:bodyPr>
-          <a:lstStyle/>
-          <a:p>
-            <a:pPr algn="l"/>
-            <a:r>
-              <a:rPr sz="1100" b="0" i="0">
-                <a:solidFill>
-                  <a:srgbClr val="64748B"/>
-                </a:solidFill>
-                <a:latin typeface="Calibri"/>
-              </a:rPr>
-              <a:t>Запускает оба сервиса
-Раздаёт порты и переменные
-Простой деплой: docker-compose up</a:t>
-            </a:r>
-          </a:p>
-        </p:txBody>
-      </p:sp>
-      <p:sp>
-        <p:nvSpPr>
-          <p:cNvPr id="40" name="Rectangle 39"/>
-          <p:cNvSpPr/>
-          <p:nvPr/>
-        </p:nvSpPr>
-        <p:spPr>
-          <a:xfrm>
-            <a:off x="5394960" y="5468112"/>
-            <a:ext cx="3246120" cy="1261872"/>
-          </a:xfrm>
-          <a:prstGeom prst="rect">
-            <a:avLst/>
-          </a:prstGeom>
-          <a:solidFill>
-            <a:srgbClr val="FFFFFF"/>
-          </a:solidFill>
-          <a:ln>
-            <a:noFill/>
-          </a:ln>
-        </p:spPr>
-        <p:style>
-          <a:lnRef idx="1">
-            <a:schemeClr val="accent1"/>
-          </a:lnRef>
-          <a:fillRef idx="3">
-            <a:schemeClr val="accent1"/>
-          </a:fillRef>
-          <a:effectRef idx="2">
-            <a:schemeClr val="accent1"/>
-          </a:effectRef>
-          <a:fontRef idx="minor">
-            <a:schemeClr val="lt1"/>
-          </a:fontRef>
-        </p:style>
-        <p:txBody>
-          <a:bodyPr rtlCol="0" anchor="ctr"/>
-          <a:lstStyle/>
-          <a:p>
-            <a:pPr algn="ctr"/>
-            <a:endParaRPr/>
-          </a:p>
-        </p:txBody>
-      </p:sp>
-      <p:sp>
-        <p:nvSpPr>
           <p:cNvPr id="41" name="Rectangle 40"/>
           <p:cNvSpPr/>
           <p:nvPr/>
         </p:nvSpPr>
         <p:spPr>
           <a:xfrm>
-            <a:off x="5394960" y="5468112"/>
-            <a:ext cx="3246120" cy="63500"/>
+            <a:off x="5384951" y="4160520"/>
+            <a:ext cx="6610004" cy="63500"/>
           </a:xfrm>
           <a:prstGeom prst="rect">
             <a:avLst/>
@@ -30229,8 +32485,8 @@
         </p:nvSpPr>
         <p:spPr>
           <a:xfrm>
-            <a:off x="5394960" y="5468112"/>
-            <a:ext cx="54864" cy="1261872"/>
+            <a:off x="5384951" y="4160520"/>
+            <a:ext cx="111718" cy="1261872"/>
           </a:xfrm>
           <a:prstGeom prst="rect">
             <a:avLst/>
@@ -30273,8 +32529,8 @@
         </p:nvSpPr>
         <p:spPr>
           <a:xfrm>
-            <a:off x="5541264" y="5541264"/>
-            <a:ext cx="3044952" cy="292388"/>
+            <a:off x="5531255" y="4233672"/>
+            <a:ext cx="6200370" cy="292388"/>
           </a:xfrm>
           <a:prstGeom prst="rect">
             <a:avLst/>
@@ -30308,8 +32564,8 @@
         </p:nvSpPr>
         <p:spPr>
           <a:xfrm>
-            <a:off x="5541264" y="5925312"/>
-            <a:ext cx="3044952" cy="713232"/>
+            <a:off x="5531255" y="4617720"/>
+            <a:ext cx="6200370" cy="600164"/>
           </a:xfrm>
           <a:prstGeom prst="rect">
             <a:avLst/>
@@ -30333,140 +32589,6 @@
               <a:t>DATABASE_URL, Supabase keys
 Ollama URL и модель
 Безопасно: не входит в git</a:t>
-            </a:r>
-          </a:p>
-        </p:txBody>
-      </p:sp>
-      <p:sp>
-        <p:nvSpPr>
-          <p:cNvPr id="45" name="Rectangle 44"/>
-          <p:cNvSpPr/>
-          <p:nvPr/>
-        </p:nvSpPr>
-        <p:spPr>
-          <a:xfrm>
-            <a:off x="8823960" y="5788152"/>
-            <a:ext cx="3178650" cy="724898"/>
-          </a:xfrm>
-          <a:prstGeom prst="rect">
-            <a:avLst/>
-          </a:prstGeom>
-          <a:solidFill>
-            <a:srgbClr val="1E1B4B"/>
-          </a:solidFill>
-          <a:ln>
-            <a:noFill/>
-          </a:ln>
-        </p:spPr>
-        <p:style>
-          <a:lnRef idx="1">
-            <a:schemeClr val="accent1"/>
-          </a:lnRef>
-          <a:fillRef idx="3">
-            <a:schemeClr val="accent1"/>
-          </a:fillRef>
-          <a:effectRef idx="2">
-            <a:schemeClr val="accent1"/>
-          </a:effectRef>
-          <a:fontRef idx="minor">
-            <a:schemeClr val="lt1"/>
-          </a:fontRef>
-        </p:style>
-        <p:txBody>
-          <a:bodyPr rtlCol="0" anchor="ctr"/>
-          <a:lstStyle/>
-          <a:p>
-            <a:pPr algn="ctr"/>
-            <a:endParaRPr/>
-          </a:p>
-        </p:txBody>
-      </p:sp>
-      <p:sp>
-        <p:nvSpPr>
-          <p:cNvPr id="46" name="TextBox 45"/>
-          <p:cNvSpPr txBox="1"/>
-          <p:nvPr/>
-        </p:nvSpPr>
-        <p:spPr>
-          <a:xfrm>
-            <a:off x="8970264" y="5900106"/>
-            <a:ext cx="6126480" cy="400110"/>
-          </a:xfrm>
-          <a:prstGeom prst="rect">
-            <a:avLst/>
-          </a:prstGeom>
-          <a:noFill/>
-        </p:spPr>
-        <p:txBody>
-          <a:bodyPr wrap="square">
-            <a:spAutoFit/>
-          </a:bodyPr>
-          <a:lstStyle/>
-          <a:p>
-            <a:pPr algn="l"/>
-            <a:r>
-              <a:rPr sz="1000" b="0" i="0" dirty="0">
-                <a:solidFill>
-                  <a:srgbClr val="A5B4FC"/>
-                </a:solidFill>
-                <a:latin typeface="Calibri"/>
-              </a:rPr>
-              <a:t>docker-compose up --build    # </a:t>
-            </a:r>
-            <a:r>
-              <a:rPr sz="1000" b="0" i="0" dirty="0" err="1">
-                <a:solidFill>
-                  <a:srgbClr val="A5B4FC"/>
-                </a:solidFill>
-                <a:latin typeface="Calibri"/>
-              </a:rPr>
-              <a:t>запуск</a:t>
-            </a:r>
-            <a:r>
-              <a:rPr sz="1000" b="0" i="0" dirty="0">
-                <a:solidFill>
-                  <a:srgbClr val="A5B4FC"/>
-                </a:solidFill>
-                <a:latin typeface="Calibri"/>
-              </a:rPr>
-              <a:t> </a:t>
-            </a:r>
-            <a:r>
-              <a:rPr sz="1000" b="0" i="0" dirty="0" err="1">
-                <a:solidFill>
-                  <a:srgbClr val="A5B4FC"/>
-                </a:solidFill>
-                <a:latin typeface="Calibri"/>
-              </a:rPr>
-              <a:t>обоих</a:t>
-            </a:r>
-            <a:r>
-              <a:rPr sz="1000" b="0" i="0" dirty="0">
-                <a:solidFill>
-                  <a:srgbClr val="A5B4FC"/>
-                </a:solidFill>
-                <a:latin typeface="Calibri"/>
-              </a:rPr>
-              <a:t> </a:t>
-            </a:r>
-            <a:r>
-              <a:rPr sz="1000" b="0" i="0" dirty="0" err="1">
-                <a:solidFill>
-                  <a:srgbClr val="A5B4FC"/>
-                </a:solidFill>
-                <a:latin typeface="Calibri"/>
-              </a:rPr>
-              <a:t>сервисов</a:t>
-            </a:r>
-            <a:r>
-              <a:rPr sz="1000" b="0" i="0" dirty="0">
-                <a:solidFill>
-                  <a:srgbClr val="A5B4FC"/>
-                </a:solidFill>
-                <a:latin typeface="Calibri"/>
-              </a:rPr>
-              <a:t>
-# frontend → :5173   |   python-service → :8000</a:t>
             </a:r>
           </a:p>
         </p:txBody>
@@ -31627,7 +33749,7 @@
         <p:spPr>
           <a:xfrm>
             <a:off x="6858000" y="3236976"/>
-            <a:ext cx="4892040" cy="274320"/>
+            <a:ext cx="4892040" cy="261610"/>
           </a:xfrm>
           <a:prstGeom prst="rect">
             <a:avLst/>
@@ -31642,14 +33764,92 @@
           <a:p>
             <a:pPr algn="l"/>
             <a:r>
-              <a:rPr sz="1100" b="0" i="0">
+              <a:rPr sz="1100" b="0" i="0" dirty="0" err="1">
                 <a:solidFill>
                   <a:srgbClr val="E0E7FF"/>
                 </a:solidFill>
                 <a:latin typeface="Calibri"/>
               </a:rPr>
-              <a:t>Ученики, группы, папки, история с фильтрами</a:t>
-            </a:r>
+              <a:t>Ученики</a:t>
+            </a:r>
+            <a:r>
+              <a:rPr sz="1100" b="0" i="0" dirty="0">
+                <a:solidFill>
+                  <a:srgbClr val="E0E7FF"/>
+                </a:solidFill>
+                <a:latin typeface="Calibri"/>
+              </a:rPr>
+              <a:t>, </a:t>
+            </a:r>
+            <a:r>
+              <a:rPr sz="1100" b="0" i="0" dirty="0" err="1">
+                <a:solidFill>
+                  <a:srgbClr val="E0E7FF"/>
+                </a:solidFill>
+                <a:latin typeface="Calibri"/>
+              </a:rPr>
+              <a:t>группы</a:t>
+            </a:r>
+            <a:r>
+              <a:rPr sz="1100" b="0" i="0" dirty="0">
+                <a:solidFill>
+                  <a:srgbClr val="E0E7FF"/>
+                </a:solidFill>
+                <a:latin typeface="Calibri"/>
+              </a:rPr>
+              <a:t>, </a:t>
+            </a:r>
+            <a:r>
+              <a:rPr sz="1100" b="0" i="0" dirty="0" err="1">
+                <a:solidFill>
+                  <a:srgbClr val="E0E7FF"/>
+                </a:solidFill>
+                <a:latin typeface="Calibri"/>
+              </a:rPr>
+              <a:t>папки</a:t>
+            </a:r>
+            <a:r>
+              <a:rPr sz="1100" b="0" i="0" dirty="0">
+                <a:solidFill>
+                  <a:srgbClr val="E0E7FF"/>
+                </a:solidFill>
+                <a:latin typeface="Calibri"/>
+              </a:rPr>
+              <a:t>, </a:t>
+            </a:r>
+            <a:r>
+              <a:rPr sz="1100" b="0" i="0" dirty="0" err="1">
+                <a:solidFill>
+                  <a:srgbClr val="E0E7FF"/>
+                </a:solidFill>
+                <a:latin typeface="Calibri"/>
+              </a:rPr>
+              <a:t>история</a:t>
+            </a:r>
+            <a:r>
+              <a:rPr sz="1100" b="0" i="0" dirty="0">
+                <a:solidFill>
+                  <a:srgbClr val="E0E7FF"/>
+                </a:solidFill>
+                <a:latin typeface="Calibri"/>
+              </a:rPr>
+              <a:t> </a:t>
+            </a:r>
+            <a:r>
+              <a:rPr lang="ru-RU" sz="1100" dirty="0">
+                <a:solidFill>
+                  <a:srgbClr val="E0E7FF"/>
+                </a:solidFill>
+                <a:latin typeface="Calibri"/>
+              </a:rPr>
+              <a:t>, фильтрация</a:t>
+            </a:r>
+            <a:endParaRPr sz="1100" b="0" i="0" dirty="0">
+              <a:solidFill>
+                <a:srgbClr val="E0E7FF"/>
+              </a:solidFill>
+              <a:latin typeface="Calibri"/>
+            </a:endParaRPr>
           </a:p>
         </p:txBody>
       </p:sp>
@@ -31800,7 +34000,7 @@
         <p:spPr>
           <a:xfrm>
             <a:off x="1051560" y="4078224"/>
-            <a:ext cx="4892040" cy="274320"/>
+            <a:ext cx="4892040" cy="261610"/>
           </a:xfrm>
           <a:prstGeom prst="rect">
             <a:avLst/>
@@ -31815,163 +34015,92 @@
           <a:p>
             <a:pPr algn="l"/>
             <a:r>
-              <a:rPr sz="1100" b="0" i="0">
+              <a:rPr sz="1100" b="0" i="0" dirty="0" err="1">
                 <a:solidFill>
                   <a:srgbClr val="E0E7FF"/>
                 </a:solidFill>
                 <a:latin typeface="Calibri"/>
               </a:rPr>
-              <a:t>Публикация, копирование, версионирование промптов</a:t>
-            </a:r>
-          </a:p>
-        </p:txBody>
-      </p:sp>
-      <p:sp>
-        <p:nvSpPr>
-          <p:cNvPr id="34" name="Rectangle 33"/>
-          <p:cNvSpPr/>
-          <p:nvPr/>
-        </p:nvSpPr>
-        <p:spPr>
-          <a:xfrm>
-            <a:off x="6309360" y="3694176"/>
-            <a:ext cx="5577840" cy="713232"/>
-          </a:xfrm>
-          <a:prstGeom prst="rect">
-            <a:avLst/>
-          </a:prstGeom>
-          <a:solidFill>
-            <a:srgbClr val="3B38A0"/>
-          </a:solidFill>
-          <a:ln>
-            <a:noFill/>
-          </a:ln>
-        </p:spPr>
-        <p:style>
-          <a:lnRef idx="1">
-            <a:schemeClr val="accent1"/>
-          </a:lnRef>
-          <a:fillRef idx="3">
-            <a:schemeClr val="accent1"/>
-          </a:fillRef>
-          <a:effectRef idx="2">
-            <a:schemeClr val="accent1"/>
-          </a:effectRef>
-          <a:fontRef idx="minor">
-            <a:schemeClr val="lt1"/>
-          </a:fontRef>
-        </p:style>
-        <p:txBody>
-          <a:bodyPr rtlCol="0" anchor="ctr"/>
-          <a:lstStyle/>
-          <a:p>
-            <a:pPr algn="ctr"/>
-            <a:endParaRPr/>
-          </a:p>
-        </p:txBody>
-      </p:sp>
-      <p:sp>
-        <p:nvSpPr>
-          <p:cNvPr id="35" name="TextBox 34"/>
-          <p:cNvSpPr txBox="1"/>
-          <p:nvPr/>
-        </p:nvSpPr>
-        <p:spPr>
-          <a:xfrm>
-            <a:off x="6400800" y="3785616"/>
-            <a:ext cx="411480" cy="530352"/>
-          </a:xfrm>
-          <a:prstGeom prst="rect">
-            <a:avLst/>
-          </a:prstGeom>
-          <a:noFill/>
-        </p:spPr>
-        <p:txBody>
-          <a:bodyPr wrap="square">
-            <a:spAutoFit/>
-          </a:bodyPr>
-          <a:lstStyle/>
-          <a:p>
-            <a:pPr algn="l"/>
-            <a:r>
-              <a:rPr sz="2200" b="0" i="0">
-                <a:solidFill>
-                  <a:srgbClr val="1E293B"/>
-                </a:solidFill>
-                <a:latin typeface="Calibri"/>
-              </a:rPr>
-              <a:t>🐳</a:t>
-            </a:r>
-          </a:p>
-        </p:txBody>
-      </p:sp>
-      <p:sp>
-        <p:nvSpPr>
-          <p:cNvPr id="36" name="TextBox 35"/>
-          <p:cNvSpPr txBox="1"/>
-          <p:nvPr/>
-        </p:nvSpPr>
-        <p:spPr>
-          <a:xfrm>
-            <a:off x="6858000" y="3767328"/>
-            <a:ext cx="1371600" cy="320040"/>
-          </a:xfrm>
-          <a:prstGeom prst="rect">
-            <a:avLst/>
-          </a:prstGeom>
-          <a:noFill/>
-        </p:spPr>
-        <p:txBody>
-          <a:bodyPr wrap="square">
-            <a:spAutoFit/>
-          </a:bodyPr>
-          <a:lstStyle/>
-          <a:p>
-            <a:pPr algn="l"/>
-            <a:r>
-              <a:rPr sz="1300" b="1" i="0">
-                <a:solidFill>
-                  <a:srgbClr val="FFFFFF"/>
-                </a:solidFill>
-                <a:latin typeface="Calibri"/>
-              </a:rPr>
-              <a:t>Docker</a:t>
-            </a:r>
-          </a:p>
-        </p:txBody>
-      </p:sp>
-      <p:sp>
-        <p:nvSpPr>
-          <p:cNvPr id="37" name="TextBox 36"/>
-          <p:cNvSpPr txBox="1"/>
-          <p:nvPr/>
-        </p:nvSpPr>
-        <p:spPr>
-          <a:xfrm>
-            <a:off x="6858000" y="4078224"/>
-            <a:ext cx="4892040" cy="274320"/>
-          </a:xfrm>
-          <a:prstGeom prst="rect">
-            <a:avLst/>
-          </a:prstGeom>
-          <a:noFill/>
-        </p:spPr>
-        <p:txBody>
-          <a:bodyPr wrap="square">
-            <a:spAutoFit/>
-          </a:bodyPr>
-          <a:lstStyle/>
-          <a:p>
-            <a:pPr algn="l"/>
-            <a:r>
-              <a:rPr sz="1100" b="0" i="0">
+              <a:t>Публикация</a:t>
+            </a:r>
+            <a:r>
+              <a:rPr sz="1100" b="0" i="0" dirty="0">
                 <a:solidFill>
                   <a:srgbClr val="E0E7FF"/>
                 </a:solidFill>
                 <a:latin typeface="Calibri"/>
               </a:rPr>
-              <a:t>Готово к деплою на любом сервере</a:t>
-            </a:r>
+              <a:t>, </a:t>
+            </a:r>
+            <a:r>
+              <a:rPr sz="1100" b="0" i="0" dirty="0" err="1">
+                <a:solidFill>
+                  <a:srgbClr val="E0E7FF"/>
+                </a:solidFill>
+                <a:latin typeface="Calibri"/>
+              </a:rPr>
+              <a:t>копирование</a:t>
+            </a:r>
+            <a:r>
+              <a:rPr sz="1100" b="0" i="0" dirty="0">
+                <a:solidFill>
+                  <a:srgbClr val="E0E7FF"/>
+                </a:solidFill>
+                <a:latin typeface="Calibri"/>
+              </a:rPr>
+              <a:t>, </a:t>
+            </a:r>
+            <a:r>
+              <a:rPr sz="1100" b="0" i="0" dirty="0" err="1">
+                <a:solidFill>
+                  <a:srgbClr val="E0E7FF"/>
+                </a:solidFill>
+                <a:latin typeface="Calibri"/>
+              </a:rPr>
+              <a:t>версионирование</a:t>
+            </a:r>
+            <a:r>
+              <a:rPr sz="1100" b="0" i="0" dirty="0">
+                <a:solidFill>
+                  <a:srgbClr val="E0E7FF"/>
+                </a:solidFill>
+                <a:latin typeface="Calibri"/>
+              </a:rPr>
+              <a:t> </a:t>
+            </a:r>
+            <a:r>
+              <a:rPr sz="1100" b="0" i="0" dirty="0" err="1">
+                <a:solidFill>
+                  <a:srgbClr val="E0E7FF"/>
+                </a:solidFill>
+                <a:latin typeface="Calibri"/>
+              </a:rPr>
+              <a:t>промптов</a:t>
+            </a:r>
+            <a:r>
+              <a:rPr lang="en-US" sz="1100" dirty="0">
+                <a:solidFill>
+                  <a:srgbClr val="E0E7FF"/>
+                </a:solidFill>
+                <a:latin typeface="Calibri"/>
+              </a:rPr>
+              <a:t>,</a:t>
+            </a:r>
+            <a:r>
+              <a:rPr lang="ru-RU" sz="1100" dirty="0">
+                <a:solidFill>
+                  <a:srgbClr val="E0E7FF"/>
+                </a:solidFill>
+                <a:latin typeface="Calibri"/>
+              </a:rPr>
+              <a:t> удаление версий</a:t>
+            </a:r>
+            <a:endParaRPr sz="1100" b="0" i="0" dirty="0">
+              <a:solidFill>
+                <a:srgbClr val="E0E7FF"/>
+              </a:solidFill>
+              <a:latin typeface="Calibri"/>
+            </a:endParaRPr>
           </a:p>
         </p:txBody>
       </p:sp>
@@ -32279,14 +34408,227 @@
           <a:p>
             <a:pPr algn="l"/>
             <a:r>
-              <a:rPr sz="1600" b="1" i="0">
+              <a:rPr sz="1600" b="1" i="0" dirty="0">
                 <a:solidFill>
                   <a:srgbClr val="4F46E5"/>
                 </a:solidFill>
                 <a:latin typeface="Calibri"/>
               </a:rPr>
-              <a:t>ЦЕЛЬ: разработать веб-приложение для автоматической проверки рукописных и печатных работ учеников по русскому языку</a:t>
-            </a:r>
+              <a:t>ЦЕЛЬ: </a:t>
+            </a:r>
+            <a:r>
+              <a:rPr sz="1600" b="1" i="0" dirty="0" err="1">
+                <a:solidFill>
+                  <a:srgbClr val="4F46E5"/>
+                </a:solidFill>
+                <a:latin typeface="Calibri"/>
+              </a:rPr>
+              <a:t>разработать</a:t>
+            </a:r>
+            <a:r>
+              <a:rPr sz="1600" b="1" i="0" dirty="0">
+                <a:solidFill>
+                  <a:srgbClr val="4F46E5"/>
+                </a:solidFill>
+                <a:latin typeface="Calibri"/>
+              </a:rPr>
+              <a:t> </a:t>
+            </a:r>
+            <a:r>
+              <a:rPr sz="1600" b="1" i="0" dirty="0" err="1">
+                <a:solidFill>
+                  <a:srgbClr val="4F46E5"/>
+                </a:solidFill>
+                <a:latin typeface="Calibri"/>
+              </a:rPr>
+              <a:t>веб-приложение</a:t>
+            </a:r>
+            <a:r>
+              <a:rPr sz="1600" b="1" i="0" dirty="0">
+                <a:solidFill>
+                  <a:srgbClr val="4F46E5"/>
+                </a:solidFill>
+                <a:latin typeface="Calibri"/>
+              </a:rPr>
+              <a:t> </a:t>
+            </a:r>
+            <a:r>
+              <a:rPr sz="1600" b="1" i="0" dirty="0" err="1">
+                <a:solidFill>
+                  <a:srgbClr val="4F46E5"/>
+                </a:solidFill>
+                <a:latin typeface="Calibri"/>
+              </a:rPr>
+              <a:t>для</a:t>
+            </a:r>
+            <a:r>
+              <a:rPr sz="1600" b="1" i="0" dirty="0">
+                <a:solidFill>
+                  <a:srgbClr val="4F46E5"/>
+                </a:solidFill>
+                <a:latin typeface="Calibri"/>
+              </a:rPr>
+              <a:t> </a:t>
+            </a:r>
+            <a:r>
+              <a:rPr sz="1600" b="1" i="0" dirty="0" err="1">
+                <a:solidFill>
+                  <a:srgbClr val="4F46E5"/>
+                </a:solidFill>
+                <a:latin typeface="Calibri"/>
+              </a:rPr>
+              <a:t>автоматической</a:t>
+            </a:r>
+            <a:r>
+              <a:rPr sz="1600" b="1" i="0" dirty="0">
+                <a:solidFill>
+                  <a:srgbClr val="4F46E5"/>
+                </a:solidFill>
+                <a:latin typeface="Calibri"/>
+              </a:rPr>
+              <a:t> </a:t>
+            </a:r>
+            <a:r>
+              <a:rPr sz="1600" b="1" i="0" dirty="0" err="1">
+                <a:solidFill>
+                  <a:srgbClr val="4F46E5"/>
+                </a:solidFill>
+                <a:latin typeface="Calibri"/>
+              </a:rPr>
+              <a:t>проверки</a:t>
+            </a:r>
+            <a:r>
+              <a:rPr sz="1600" b="1" i="0" dirty="0">
+                <a:solidFill>
+                  <a:srgbClr val="4F46E5"/>
+                </a:solidFill>
+                <a:latin typeface="Calibri"/>
+              </a:rPr>
+              <a:t> </a:t>
+            </a:r>
+            <a:r>
+              <a:rPr sz="1600" b="1" i="0" dirty="0" err="1">
+                <a:solidFill>
+                  <a:srgbClr val="4F46E5"/>
+                </a:solidFill>
+                <a:latin typeface="Calibri"/>
+              </a:rPr>
+              <a:t>рукописных</a:t>
+            </a:r>
+            <a:r>
+              <a:rPr sz="1600" b="1" i="0" dirty="0">
+                <a:solidFill>
+                  <a:srgbClr val="4F46E5"/>
+                </a:solidFill>
+                <a:latin typeface="Calibri"/>
+              </a:rPr>
+              <a:t> и </a:t>
+            </a:r>
+            <a:r>
+              <a:rPr sz="1600" b="1" i="0" dirty="0" err="1">
+                <a:solidFill>
+                  <a:srgbClr val="4F46E5"/>
+                </a:solidFill>
+                <a:latin typeface="Calibri"/>
+              </a:rPr>
+              <a:t>печатных</a:t>
+            </a:r>
+            <a:r>
+              <a:rPr sz="1600" b="1" i="0" dirty="0">
+                <a:solidFill>
+                  <a:srgbClr val="4F46E5"/>
+                </a:solidFill>
+                <a:latin typeface="Calibri"/>
+              </a:rPr>
+              <a:t> </a:t>
+            </a:r>
+            <a:r>
+              <a:rPr sz="1600" b="1" i="0" dirty="0" err="1">
+                <a:solidFill>
+                  <a:srgbClr val="4F46E5"/>
+                </a:solidFill>
+                <a:latin typeface="Calibri"/>
+              </a:rPr>
+              <a:t>работ</a:t>
+            </a:r>
+            <a:r>
+              <a:rPr sz="1600" b="1" i="0" dirty="0">
+                <a:solidFill>
+                  <a:srgbClr val="4F46E5"/>
+                </a:solidFill>
+                <a:latin typeface="Calibri"/>
+              </a:rPr>
+              <a:t> </a:t>
+            </a:r>
+            <a:r>
+              <a:rPr sz="1600" b="1" i="0" dirty="0" err="1">
+                <a:solidFill>
+                  <a:srgbClr val="4F46E5"/>
+                </a:solidFill>
+                <a:latin typeface="Calibri"/>
+              </a:rPr>
+              <a:t>учеников</a:t>
+            </a:r>
+            <a:r>
+              <a:rPr sz="1600" b="1" i="0" dirty="0">
+                <a:solidFill>
+                  <a:srgbClr val="4F46E5"/>
+                </a:solidFill>
+                <a:latin typeface="Calibri"/>
+              </a:rPr>
+              <a:t> </a:t>
+            </a:r>
+            <a:r>
+              <a:rPr sz="1600" b="1" i="0" dirty="0" err="1">
+                <a:solidFill>
+                  <a:srgbClr val="4F46E5"/>
+                </a:solidFill>
+                <a:latin typeface="Calibri"/>
+              </a:rPr>
+              <a:t>по</a:t>
+            </a:r>
+            <a:r>
+              <a:rPr sz="1600" b="1" i="0" dirty="0">
+                <a:solidFill>
+                  <a:srgbClr val="4F46E5"/>
+                </a:solidFill>
+                <a:latin typeface="Calibri"/>
+              </a:rPr>
+              <a:t> </a:t>
+            </a:r>
+            <a:r>
+              <a:rPr sz="1600" b="1" i="0" dirty="0" err="1">
+                <a:solidFill>
+                  <a:srgbClr val="4F46E5"/>
+                </a:solidFill>
+                <a:latin typeface="Calibri"/>
+              </a:rPr>
+              <a:t>русскому</a:t>
+            </a:r>
+            <a:r>
+              <a:rPr sz="1600" b="1" i="0" dirty="0">
+                <a:solidFill>
+                  <a:srgbClr val="4F46E5"/>
+                </a:solidFill>
+                <a:latin typeface="Calibri"/>
+              </a:rPr>
+              <a:t> </a:t>
+            </a:r>
+            <a:r>
+              <a:rPr sz="1600" b="1" i="0" dirty="0" err="1">
+                <a:solidFill>
+                  <a:srgbClr val="4F46E5"/>
+                </a:solidFill>
+                <a:latin typeface="Calibri"/>
+              </a:rPr>
+              <a:t>языку</a:t>
+            </a:r>
+            <a:endParaRPr sz="1600" b="1" i="0" dirty="0">
+              <a:solidFill>
+                <a:srgbClr val="4F46E5"/>
+              </a:solidFill>
+              <a:latin typeface="Calibri"/>
+            </a:endParaRPr>
           </a:p>
         </p:txBody>
       </p:sp>
@@ -38284,7 +40626,7 @@
         </p:nvSpPr>
         <p:spPr>
           <a:xfrm>
-            <a:off x="0" y="0"/>
+            <a:off x="-13716" y="-14646"/>
             <a:ext cx="12188952" cy="1078992"/>
           </a:xfrm>
           <a:prstGeom prst="rect">
@@ -38503,8 +40845,8 @@
         </p:nvSpPr>
         <p:spPr>
           <a:xfrm>
-            <a:off x="457200" y="1371600"/>
-            <a:ext cx="2121408" cy="4297680"/>
+            <a:off x="210186" y="1371600"/>
+            <a:ext cx="1779161" cy="4215384"/>
           </a:xfrm>
           <a:prstGeom prst="rect">
             <a:avLst/>
@@ -38547,8 +40889,8 @@
         </p:nvSpPr>
         <p:spPr>
           <a:xfrm>
-            <a:off x="457200" y="1371600"/>
-            <a:ext cx="2121408" cy="101600"/>
+            <a:off x="210186" y="1371600"/>
+            <a:ext cx="1779161" cy="99654"/>
           </a:xfrm>
           <a:prstGeom prst="rect">
             <a:avLst/>
@@ -38591,8 +40933,8 @@
         </p:nvSpPr>
         <p:spPr>
           <a:xfrm>
-            <a:off x="457200" y="1371600"/>
-            <a:ext cx="2121408" cy="1371600"/>
+            <a:off x="210186" y="1371600"/>
+            <a:ext cx="1779161" cy="1345335"/>
           </a:xfrm>
           <a:prstGeom prst="rect">
             <a:avLst/>
@@ -38635,8 +40977,8 @@
         </p:nvSpPr>
         <p:spPr>
           <a:xfrm>
-            <a:off x="566928" y="1554480"/>
-            <a:ext cx="1938528" cy="1051560"/>
+            <a:off x="319914" y="1554480"/>
+            <a:ext cx="1625785" cy="553998"/>
           </a:xfrm>
           <a:prstGeom prst="rect">
             <a:avLst/>
@@ -38671,8 +41013,8 @@
         </p:nvSpPr>
         <p:spPr>
           <a:xfrm>
-            <a:off x="566928" y="2880360"/>
-            <a:ext cx="1938528" cy="646331"/>
+            <a:off x="319914" y="2880361"/>
+            <a:ext cx="1625785" cy="830997"/>
           </a:xfrm>
           <a:prstGeom prst="rect">
             <a:avLst/>
@@ -38804,8 +41146,8 @@
         </p:nvSpPr>
         <p:spPr>
           <a:xfrm>
-            <a:off x="2807208" y="1371600"/>
-            <a:ext cx="2121408" cy="4297680"/>
+            <a:off x="2189974" y="1371600"/>
+            <a:ext cx="1779161" cy="4215384"/>
           </a:xfrm>
           <a:prstGeom prst="rect">
             <a:avLst/>
@@ -38848,8 +41190,8 @@
         </p:nvSpPr>
         <p:spPr>
           <a:xfrm>
-            <a:off x="2807208" y="1371600"/>
-            <a:ext cx="2121408" cy="101600"/>
+            <a:off x="2189974" y="1371600"/>
+            <a:ext cx="1779161" cy="99654"/>
           </a:xfrm>
           <a:prstGeom prst="rect">
             <a:avLst/>
@@ -38892,8 +41234,8 @@
         </p:nvSpPr>
         <p:spPr>
           <a:xfrm>
-            <a:off x="2807208" y="1371600"/>
-            <a:ext cx="2121408" cy="1371600"/>
+            <a:off x="2189974" y="1371600"/>
+            <a:ext cx="1779161" cy="1345335"/>
           </a:xfrm>
           <a:prstGeom prst="rect">
             <a:avLst/>
@@ -38936,8 +41278,8 @@
         </p:nvSpPr>
         <p:spPr>
           <a:xfrm>
-            <a:off x="2916936" y="1554480"/>
-            <a:ext cx="1938528" cy="1051560"/>
+            <a:off x="2299702" y="1554480"/>
+            <a:ext cx="1625785" cy="553998"/>
           </a:xfrm>
           <a:prstGeom prst="rect">
             <a:avLst/>
@@ -38972,8 +41314,8 @@
         </p:nvSpPr>
         <p:spPr>
           <a:xfrm>
-            <a:off x="2916936" y="2880360"/>
-            <a:ext cx="1938528" cy="646331"/>
+            <a:off x="2299702" y="2880361"/>
+            <a:ext cx="1625785" cy="830997"/>
           </a:xfrm>
           <a:prstGeom prst="rect">
             <a:avLst/>
@@ -38986,107 +41328,47 @@
           </a:bodyPr>
           <a:lstStyle/>
           <a:p>
-            <a:pPr algn="l"/>
-            <a:r>
-              <a:rPr sz="1200" b="0" i="0" dirty="0">
+            <a:r>
+              <a:rPr lang="ru-RU" sz="1200" dirty="0">
                 <a:solidFill>
                   <a:srgbClr val="64748B"/>
                 </a:solidFill>
-                <a:latin typeface="Calibri"/>
-              </a:rPr>
-              <a:t>8 </a:t>
-            </a:r>
-            <a:r>
-              <a:rPr sz="1200" b="0" i="0" dirty="0" err="1">
+              </a:rPr>
+              <a:t>8 критериев:
+СК1</a:t>
+            </a:r>
+            <a:r>
+              <a:rPr lang="en-US" sz="1200" dirty="0">
                 <a:solidFill>
                   <a:srgbClr val="64748B"/>
                 </a:solidFill>
-                <a:latin typeface="Calibri"/>
-              </a:rPr>
-              <a:t>критериев</a:t>
-            </a:r>
-            <a:r>
-              <a:rPr sz="1200" b="0" i="0" dirty="0">
+              </a:rPr>
+              <a:t>-</a:t>
+            </a:r>
+            <a:r>
+              <a:rPr lang="ru-RU" sz="1200" dirty="0">
                 <a:solidFill>
                   <a:srgbClr val="64748B"/>
                 </a:solidFill>
-                <a:latin typeface="Calibri"/>
-              </a:rPr>
-              <a:t>:
-СК1</a:t>
-            </a:r>
-            <a:r>
-              <a:rPr lang="en-US" sz="1200" b="0" i="0" dirty="0">
+              </a:rPr>
+              <a:t>СК4 (содержание)
+ГК1</a:t>
+            </a:r>
+            <a:r>
+              <a:rPr lang="en-US" sz="1200" dirty="0">
                 <a:solidFill>
                   <a:srgbClr val="64748B"/>
                 </a:solidFill>
-                <a:latin typeface="Calibri"/>
               </a:rPr>
               <a:t>-</a:t>
             </a:r>
             <a:r>
-              <a:rPr sz="1200" b="0" i="0" dirty="0">
+              <a:rPr lang="ru-RU" sz="1200" dirty="0">
                 <a:solidFill>
                   <a:srgbClr val="64748B"/>
                 </a:solidFill>
-                <a:latin typeface="Calibri"/>
-              </a:rPr>
-              <a:t>СК4 (</a:t>
-            </a:r>
-            <a:r>
-              <a:rPr sz="1200" b="0" i="0" dirty="0" err="1">
-                <a:solidFill>
-                  <a:srgbClr val="64748B"/>
-                </a:solidFill>
-                <a:latin typeface="Calibri"/>
-              </a:rPr>
-              <a:t>содержание</a:t>
-            </a:r>
-            <a:r>
-              <a:rPr sz="1200" b="0" i="0" dirty="0">
-                <a:solidFill>
-                  <a:srgbClr val="64748B"/>
-                </a:solidFill>
-                <a:latin typeface="Calibri"/>
-              </a:rPr>
-              <a:t>)
-ГК1</a:t>
-            </a:r>
-            <a:r>
-              <a:rPr lang="en-US" sz="1200" b="0" i="0" dirty="0">
-                <a:solidFill>
-                  <a:srgbClr val="64748B"/>
-                </a:solidFill>
-                <a:latin typeface="Calibri"/>
-              </a:rPr>
-              <a:t>-</a:t>
-            </a:r>
-            <a:r>
-              <a:rPr sz="1200" b="0" i="0" dirty="0">
-                <a:solidFill>
-                  <a:srgbClr val="64748B"/>
-                </a:solidFill>
-                <a:latin typeface="Calibri"/>
-              </a:rPr>
-              <a:t>ГК4 (</a:t>
-            </a:r>
-            <a:r>
-              <a:rPr sz="1200" b="0" i="0" dirty="0" err="1">
-                <a:solidFill>
-                  <a:srgbClr val="64748B"/>
-                </a:solidFill>
-                <a:latin typeface="Calibri"/>
-              </a:rPr>
-              <a:t>грамотность</a:t>
-            </a:r>
-            <a:r>
-              <a:rPr sz="1200" b="0" i="0" dirty="0">
-                <a:solidFill>
-                  <a:srgbClr val="64748B"/>
-                </a:solidFill>
-                <a:latin typeface="Calibri"/>
-              </a:rPr>
-              <a:t>)</a:t>
+              </a:rPr>
+              <a:t>ГК4 (грамотность)</a:t>
             </a:r>
           </a:p>
         </p:txBody>
@@ -39099,8 +41381,8 @@
         </p:nvSpPr>
         <p:spPr>
           <a:xfrm>
-            <a:off x="5157216" y="1371600"/>
-            <a:ext cx="2121408" cy="4297680"/>
+            <a:off x="4169762" y="1371600"/>
+            <a:ext cx="1779161" cy="4215384"/>
           </a:xfrm>
           <a:prstGeom prst="rect">
             <a:avLst/>
@@ -39143,8 +41425,8 @@
         </p:nvSpPr>
         <p:spPr>
           <a:xfrm>
-            <a:off x="5157216" y="1371600"/>
-            <a:ext cx="2121408" cy="101600"/>
+            <a:off x="4169762" y="1371600"/>
+            <a:ext cx="1779161" cy="99654"/>
           </a:xfrm>
           <a:prstGeom prst="rect">
             <a:avLst/>
@@ -39187,8 +41469,8 @@
         </p:nvSpPr>
         <p:spPr>
           <a:xfrm>
-            <a:off x="5157216" y="1371600"/>
-            <a:ext cx="2121408" cy="1371600"/>
+            <a:off x="4169762" y="1371600"/>
+            <a:ext cx="1779161" cy="1345335"/>
           </a:xfrm>
           <a:prstGeom prst="rect">
             <a:avLst/>
@@ -39231,8 +41513,8 @@
         </p:nvSpPr>
         <p:spPr>
           <a:xfrm>
-            <a:off x="5266944" y="1554480"/>
-            <a:ext cx="1938528" cy="1051560"/>
+            <a:off x="4279490" y="1554480"/>
+            <a:ext cx="1625785" cy="553998"/>
           </a:xfrm>
           <a:prstGeom prst="rect">
             <a:avLst/>
@@ -39267,8 +41549,8 @@
         </p:nvSpPr>
         <p:spPr>
           <a:xfrm>
-            <a:off x="5266944" y="2880360"/>
-            <a:ext cx="1938528" cy="2651760"/>
+            <a:off x="4279490" y="2880361"/>
+            <a:ext cx="1625785" cy="830997"/>
           </a:xfrm>
           <a:prstGeom prst="rect">
             <a:avLst/>
@@ -39281,17 +41563,15 @@
           </a:bodyPr>
           <a:lstStyle/>
           <a:p>
-            <a:pPr algn="l"/>
-            <a:r>
-              <a:rPr sz="1200" b="0" i="0">
+            <a:r>
+              <a:rPr lang="ru-RU" sz="1200" dirty="0">
                 <a:solidFill>
                   <a:srgbClr val="64748B"/>
                 </a:solidFill>
-                <a:latin typeface="Calibri"/>
-              </a:rPr>
-              <a:t>12 критериев К1–К12
-по нормам ФИПИ
-Сумма баллов</a:t>
+              </a:rPr>
+              <a:t>10 критериев К1–К10
+по нормам ФИПИ 2026
+Максимум 22 балла</a:t>
             </a:r>
           </a:p>
         </p:txBody>
@@ -39304,8 +41584,8 @@
         </p:nvSpPr>
         <p:spPr>
           <a:xfrm>
-            <a:off x="7507224" y="1371600"/>
-            <a:ext cx="2121408" cy="4297680"/>
+            <a:off x="8176042" y="1371600"/>
+            <a:ext cx="1779161" cy="4215384"/>
           </a:xfrm>
           <a:prstGeom prst="rect">
             <a:avLst/>
@@ -39348,8 +41628,8 @@
         </p:nvSpPr>
         <p:spPr>
           <a:xfrm>
-            <a:off x="7507224" y="1371600"/>
-            <a:ext cx="2121408" cy="101600"/>
+            <a:off x="8176042" y="1371600"/>
+            <a:ext cx="1779161" cy="99654"/>
           </a:xfrm>
           <a:prstGeom prst="rect">
             <a:avLst/>
@@ -39392,8 +41672,517 @@
         </p:nvSpPr>
         <p:spPr>
           <a:xfrm>
-            <a:off x="7507224" y="1371600"/>
-            <a:ext cx="2121408" cy="1371600"/>
+            <a:off x="8176042" y="1371600"/>
+            <a:ext cx="1779161" cy="1345335"/>
+          </a:xfrm>
+          <a:prstGeom prst="rect">
+            <a:avLst/>
+          </a:prstGeom>
+          <a:solidFill>
+            <a:srgbClr val="00B0F0"/>
+          </a:solidFill>
+          <a:ln>
+            <a:noFill/>
+          </a:ln>
+        </p:spPr>
+        <p:style>
+          <a:lnRef idx="1">
+            <a:schemeClr val="accent1"/>
+          </a:lnRef>
+          <a:fillRef idx="3">
+            <a:schemeClr val="accent1"/>
+          </a:fillRef>
+          <a:effectRef idx="2">
+            <a:schemeClr val="accent1"/>
+          </a:effectRef>
+          <a:fontRef idx="minor">
+            <a:schemeClr val="lt1"/>
+          </a:fontRef>
+        </p:style>
+        <p:txBody>
+          <a:bodyPr rtlCol="0" anchor="ctr"/>
+          <a:lstStyle/>
+          <a:p>
+            <a:pPr algn="ctr"/>
+            <a:endParaRPr/>
+          </a:p>
+        </p:txBody>
+      </p:sp>
+      <p:sp>
+        <p:nvSpPr>
+          <p:cNvPr id="23" name="TextBox 22"/>
+          <p:cNvSpPr txBox="1"/>
+          <p:nvPr/>
+        </p:nvSpPr>
+        <p:spPr>
+          <a:xfrm>
+            <a:off x="8256266" y="1554480"/>
+            <a:ext cx="1625785" cy="784830"/>
+          </a:xfrm>
+          <a:prstGeom prst="rect">
+            <a:avLst/>
+          </a:prstGeom>
+          <a:noFill/>
+        </p:spPr>
+        <p:txBody>
+          <a:bodyPr wrap="square">
+            <a:spAutoFit/>
+          </a:bodyPr>
+          <a:lstStyle/>
+          <a:p>
+            <a:pPr algn="ctr"/>
+            <a:r>
+              <a:rPr sz="1500" b="1" i="0" dirty="0" err="1">
+                <a:solidFill>
+                  <a:srgbClr val="FFFFFF"/>
+                </a:solidFill>
+                <a:latin typeface="Calibri"/>
+              </a:rPr>
+              <a:t>Итоговое</a:t>
+            </a:r>
+            <a:r>
+              <a:rPr sz="1500" b="1" i="0" dirty="0">
+                <a:solidFill>
+                  <a:srgbClr val="FFFFFF"/>
+                </a:solidFill>
+                <a:latin typeface="Calibri"/>
+              </a:rPr>
+              <a:t>
+</a:t>
+            </a:r>
+            <a:r>
+              <a:rPr sz="1500" b="1" i="0" dirty="0" err="1">
+                <a:solidFill>
+                  <a:srgbClr val="FFFFFF"/>
+                </a:solidFill>
+                <a:latin typeface="Calibri"/>
+              </a:rPr>
+              <a:t>сочинение</a:t>
+            </a:r>
+            <a:r>
+              <a:rPr lang="en-US" sz="1500" b="1" dirty="0">
+                <a:solidFill>
+                  <a:schemeClr val="bg1"/>
+                </a:solidFill>
+                <a:latin typeface="Calibri"/>
+              </a:rPr>
+              <a:t> </a:t>
+            </a:r>
+          </a:p>
+          <a:p>
+            <a:pPr algn="ctr"/>
+            <a:r>
+              <a:rPr lang="en-US" sz="1500" b="1" i="0" dirty="0">
+                <a:solidFill>
+                  <a:schemeClr val="bg1"/>
+                </a:solidFill>
+                <a:latin typeface="Calibri"/>
+              </a:rPr>
+              <a:t>(</a:t>
+            </a:r>
+            <a:r>
+              <a:rPr lang="ru-RU" sz="1500" b="1" i="0" dirty="0">
+                <a:solidFill>
+                  <a:schemeClr val="bg1"/>
+                </a:solidFill>
+                <a:latin typeface="Calibri"/>
+              </a:rPr>
+              <a:t>вузовская)</a:t>
+            </a:r>
+            <a:endParaRPr lang="en-US" sz="1500" b="1" i="0" dirty="0">
+              <a:solidFill>
+                <a:srgbClr val="FFFFFF"/>
+              </a:solidFill>
+              <a:latin typeface="Calibri"/>
+            </a:endParaRPr>
+          </a:p>
+        </p:txBody>
+      </p:sp>
+      <p:sp>
+        <p:nvSpPr>
+          <p:cNvPr id="24" name="TextBox 23"/>
+          <p:cNvSpPr txBox="1"/>
+          <p:nvPr/>
+        </p:nvSpPr>
+        <p:spPr>
+          <a:xfrm>
+            <a:off x="8256266" y="2880361"/>
+            <a:ext cx="1625785" cy="646331"/>
+          </a:xfrm>
+          <a:prstGeom prst="rect">
+            <a:avLst/>
+          </a:prstGeom>
+          <a:noFill/>
+        </p:spPr>
+        <p:txBody>
+          <a:bodyPr wrap="square">
+            <a:spAutoFit/>
+          </a:bodyPr>
+          <a:lstStyle/>
+          <a:p>
+            <a:r>
+              <a:rPr lang="ru-RU" sz="1200" dirty="0">
+                <a:solidFill>
+                  <a:srgbClr val="64748B"/>
+                </a:solidFill>
+              </a:rPr>
+              <a:t>10 критериев К1–К10
+Максимум 20 баллов
+Для поступления</a:t>
+            </a:r>
+          </a:p>
+        </p:txBody>
+      </p:sp>
+      <p:sp>
+        <p:nvSpPr>
+          <p:cNvPr id="25" name="Rectangle 24"/>
+          <p:cNvSpPr/>
+          <p:nvPr/>
+        </p:nvSpPr>
+        <p:spPr>
+          <a:xfrm>
+            <a:off x="10199478" y="1371600"/>
+            <a:ext cx="1779161" cy="4215384"/>
+          </a:xfrm>
+          <a:prstGeom prst="rect">
+            <a:avLst/>
+          </a:prstGeom>
+          <a:solidFill>
+            <a:srgbClr val="FFFFFF"/>
+          </a:solidFill>
+          <a:ln>
+            <a:noFill/>
+          </a:ln>
+        </p:spPr>
+        <p:style>
+          <a:lnRef idx="1">
+            <a:schemeClr val="accent1"/>
+          </a:lnRef>
+          <a:fillRef idx="3">
+            <a:schemeClr val="accent1"/>
+          </a:fillRef>
+          <a:effectRef idx="2">
+            <a:schemeClr val="accent1"/>
+          </a:effectRef>
+          <a:fontRef idx="minor">
+            <a:schemeClr val="lt1"/>
+          </a:fontRef>
+        </p:style>
+        <p:txBody>
+          <a:bodyPr rtlCol="0" anchor="ctr"/>
+          <a:lstStyle/>
+          <a:p>
+            <a:pPr algn="ctr"/>
+            <a:endParaRPr/>
+          </a:p>
+        </p:txBody>
+      </p:sp>
+      <p:sp>
+        <p:nvSpPr>
+          <p:cNvPr id="26" name="Rectangle 25"/>
+          <p:cNvSpPr/>
+          <p:nvPr/>
+        </p:nvSpPr>
+        <p:spPr>
+          <a:xfrm>
+            <a:off x="10199478" y="1371600"/>
+            <a:ext cx="1779161" cy="99654"/>
+          </a:xfrm>
+          <a:prstGeom prst="rect">
+            <a:avLst/>
+          </a:prstGeom>
+          <a:solidFill>
+            <a:srgbClr val="0F766E"/>
+          </a:solidFill>
+          <a:ln>
+            <a:noFill/>
+          </a:ln>
+        </p:spPr>
+        <p:style>
+          <a:lnRef idx="1">
+            <a:schemeClr val="accent1"/>
+          </a:lnRef>
+          <a:fillRef idx="3">
+            <a:schemeClr val="accent1"/>
+          </a:fillRef>
+          <a:effectRef idx="2">
+            <a:schemeClr val="accent1"/>
+          </a:effectRef>
+          <a:fontRef idx="minor">
+            <a:schemeClr val="lt1"/>
+          </a:fontRef>
+        </p:style>
+        <p:txBody>
+          <a:bodyPr rtlCol="0" anchor="ctr"/>
+          <a:lstStyle/>
+          <a:p>
+            <a:pPr algn="ctr"/>
+            <a:endParaRPr/>
+          </a:p>
+        </p:txBody>
+      </p:sp>
+      <p:sp>
+        <p:nvSpPr>
+          <p:cNvPr id="27" name="Rectangle 26"/>
+          <p:cNvSpPr/>
+          <p:nvPr/>
+        </p:nvSpPr>
+        <p:spPr>
+          <a:xfrm>
+            <a:off x="10199478" y="1371600"/>
+            <a:ext cx="1779161" cy="1345335"/>
+          </a:xfrm>
+          <a:prstGeom prst="rect">
+            <a:avLst/>
+          </a:prstGeom>
+          <a:solidFill>
+            <a:srgbClr val="0F766E"/>
+          </a:solidFill>
+          <a:ln>
+            <a:noFill/>
+          </a:ln>
+        </p:spPr>
+        <p:style>
+          <a:lnRef idx="1">
+            <a:schemeClr val="accent1"/>
+          </a:lnRef>
+          <a:fillRef idx="3">
+            <a:schemeClr val="accent1"/>
+          </a:fillRef>
+          <a:effectRef idx="2">
+            <a:schemeClr val="accent1"/>
+          </a:effectRef>
+          <a:fontRef idx="minor">
+            <a:schemeClr val="lt1"/>
+          </a:fontRef>
+        </p:style>
+        <p:txBody>
+          <a:bodyPr rtlCol="0" anchor="ctr"/>
+          <a:lstStyle/>
+          <a:p>
+            <a:pPr algn="ctr"/>
+            <a:endParaRPr/>
+          </a:p>
+        </p:txBody>
+      </p:sp>
+      <p:sp>
+        <p:nvSpPr>
+          <p:cNvPr id="28" name="TextBox 27"/>
+          <p:cNvSpPr txBox="1"/>
+          <p:nvPr/>
+        </p:nvSpPr>
+        <p:spPr>
+          <a:xfrm>
+            <a:off x="10279702" y="1554480"/>
+            <a:ext cx="1625785" cy="553998"/>
+          </a:xfrm>
+          <a:prstGeom prst="rect">
+            <a:avLst/>
+          </a:prstGeom>
+          <a:noFill/>
+        </p:spPr>
+        <p:txBody>
+          <a:bodyPr wrap="square">
+            <a:spAutoFit/>
+          </a:bodyPr>
+          <a:lstStyle/>
+          <a:p>
+            <a:pPr algn="ctr"/>
+            <a:r>
+              <a:rPr sz="1500" b="1" i="0">
+                <a:solidFill>
+                  <a:srgbClr val="FFFFFF"/>
+                </a:solidFill>
+                <a:latin typeface="Calibri"/>
+              </a:rPr>
+              <a:t>Свободная
+проверка</a:t>
+            </a:r>
+          </a:p>
+        </p:txBody>
+      </p:sp>
+      <p:sp>
+        <p:nvSpPr>
+          <p:cNvPr id="29" name="TextBox 28"/>
+          <p:cNvSpPr txBox="1"/>
+          <p:nvPr/>
+        </p:nvSpPr>
+        <p:spPr>
+          <a:xfrm>
+            <a:off x="10279702" y="2880361"/>
+            <a:ext cx="1625785" cy="646331"/>
+          </a:xfrm>
+          <a:prstGeom prst="rect">
+            <a:avLst/>
+          </a:prstGeom>
+          <a:noFill/>
+        </p:spPr>
+        <p:txBody>
+          <a:bodyPr wrap="square">
+            <a:spAutoFit/>
+          </a:bodyPr>
+          <a:lstStyle/>
+          <a:p>
+            <a:pPr algn="l"/>
+            <a:r>
+              <a:rPr sz="1200" b="0" i="0">
+                <a:solidFill>
+                  <a:srgbClr val="64748B"/>
+                </a:solidFill>
+                <a:latin typeface="Calibri"/>
+              </a:rPr>
+              <a:t>Учитель сам
+формулирует задание
+ИИ его выполняет</a:t>
+            </a:r>
+          </a:p>
+        </p:txBody>
+      </p:sp>
+      <p:sp>
+        <p:nvSpPr>
+          <p:cNvPr id="30" name="Rectangle 29"/>
+          <p:cNvSpPr/>
+          <p:nvPr/>
+        </p:nvSpPr>
+        <p:spPr>
+          <a:xfrm>
+            <a:off x="457200" y="5852160"/>
+            <a:ext cx="11247120" cy="685800"/>
+          </a:xfrm>
+          <a:prstGeom prst="rect">
+            <a:avLst/>
+          </a:prstGeom>
+          <a:solidFill>
+            <a:srgbClr val="E0E7FF"/>
+          </a:solidFill>
+          <a:ln>
+            <a:noFill/>
+          </a:ln>
+        </p:spPr>
+        <p:style>
+          <a:lnRef idx="1">
+            <a:schemeClr val="accent1"/>
+          </a:lnRef>
+          <a:fillRef idx="3">
+            <a:schemeClr val="accent1"/>
+          </a:fillRef>
+          <a:effectRef idx="2">
+            <a:schemeClr val="accent1"/>
+          </a:effectRef>
+          <a:fontRef idx="minor">
+            <a:schemeClr val="lt1"/>
+          </a:fontRef>
+        </p:style>
+        <p:txBody>
+          <a:bodyPr rtlCol="0" anchor="ctr"/>
+          <a:lstStyle/>
+          <a:p>
+            <a:pPr algn="ctr"/>
+            <a:endParaRPr/>
+          </a:p>
+        </p:txBody>
+      </p:sp>
+      <p:sp>
+        <p:nvSpPr>
+          <p:cNvPr id="31" name="TextBox 30"/>
+          <p:cNvSpPr txBox="1"/>
+          <p:nvPr/>
+        </p:nvSpPr>
+        <p:spPr>
+          <a:xfrm>
+            <a:off x="685800" y="5943600"/>
+            <a:ext cx="10789920" cy="502920"/>
+          </a:xfrm>
+          <a:prstGeom prst="rect">
+            <a:avLst/>
+          </a:prstGeom>
+          <a:noFill/>
+        </p:spPr>
+        <p:txBody>
+          <a:bodyPr wrap="square">
+            <a:spAutoFit/>
+          </a:bodyPr>
+          <a:lstStyle/>
+          <a:p>
+            <a:pPr algn="l"/>
+            <a:r>
+              <a:rPr sz="1400" b="1" i="0">
+                <a:solidFill>
+                  <a:srgbClr val="4F46E5"/>
+                </a:solidFill>
+                <a:latin typeface="Calibri"/>
+              </a:rPr>
+              <a:t>✚  Пользователь может создать собственную функцию, опубликовать в галерею и поделиться с другими учителями</a:t>
+            </a:r>
+          </a:p>
+        </p:txBody>
+      </p:sp>
+      <p:sp>
+        <p:nvSpPr>
+          <p:cNvPr id="33" name="Rectangle 19">
+            <a:extLst>
+              <a:ext uri="{FF2B5EF4-FFF2-40B4-BE49-F238E27FC236}">
+                <a16:creationId xmlns:a16="http://schemas.microsoft.com/office/drawing/2014/main" id="{04AA3001-910F-78EF-88D0-DF285F92B989}"/>
+              </a:ext>
+            </a:extLst>
+          </p:cNvPr>
+          <p:cNvSpPr/>
+          <p:nvPr/>
+        </p:nvSpPr>
+        <p:spPr>
+          <a:xfrm>
+            <a:off x="6193198" y="1371600"/>
+            <a:ext cx="1779161" cy="4215384"/>
+          </a:xfrm>
+          <a:prstGeom prst="rect">
+            <a:avLst/>
+          </a:prstGeom>
+          <a:solidFill>
+            <a:srgbClr val="FFFFFF"/>
+          </a:solidFill>
+          <a:ln>
+            <a:noFill/>
+          </a:ln>
+        </p:spPr>
+        <p:style>
+          <a:lnRef idx="1">
+            <a:schemeClr val="accent1"/>
+          </a:lnRef>
+          <a:fillRef idx="3">
+            <a:schemeClr val="accent1"/>
+          </a:fillRef>
+          <a:effectRef idx="2">
+            <a:schemeClr val="accent1"/>
+          </a:effectRef>
+          <a:fontRef idx="minor">
+            <a:schemeClr val="lt1"/>
+          </a:fontRef>
+        </p:style>
+        <p:txBody>
+          <a:bodyPr rtlCol="0" anchor="ctr"/>
+          <a:lstStyle/>
+          <a:p>
+            <a:pPr algn="ctr"/>
+            <a:endParaRPr/>
+          </a:p>
+        </p:txBody>
+      </p:sp>
+      <p:sp>
+        <p:nvSpPr>
+          <p:cNvPr id="34" name="Rectangle 20">
+            <a:extLst>
+              <a:ext uri="{FF2B5EF4-FFF2-40B4-BE49-F238E27FC236}">
+                <a16:creationId xmlns:a16="http://schemas.microsoft.com/office/drawing/2014/main" id="{118483C9-D6D3-0CF8-76E8-136645C49DB6}"/>
+              </a:ext>
+            </a:extLst>
+          </p:cNvPr>
+          <p:cNvSpPr/>
+          <p:nvPr/>
+        </p:nvSpPr>
+        <p:spPr>
+          <a:xfrm>
+            <a:off x="6193198" y="1371600"/>
+            <a:ext cx="1779161" cy="99654"/>
           </a:xfrm>
           <a:prstGeom prst="rect">
             <a:avLst/>
@@ -39430,93 +42219,26 @@
       </p:sp>
       <p:sp>
         <p:nvSpPr>
-          <p:cNvPr id="23" name="TextBox 22"/>
-          <p:cNvSpPr txBox="1"/>
-          <p:nvPr/>
-        </p:nvSpPr>
-        <p:spPr>
-          <a:xfrm>
-            <a:off x="7616952" y="1554480"/>
-            <a:ext cx="1938528" cy="1051560"/>
-          </a:xfrm>
-          <a:prstGeom prst="rect">
-            <a:avLst/>
-          </a:prstGeom>
-          <a:noFill/>
-        </p:spPr>
-        <p:txBody>
-          <a:bodyPr wrap="square">
-            <a:spAutoFit/>
-          </a:bodyPr>
-          <a:lstStyle/>
-          <a:p>
-            <a:pPr algn="ctr"/>
-            <a:r>
-              <a:rPr sz="1500" b="1" i="0">
-                <a:solidFill>
-                  <a:srgbClr val="FFFFFF"/>
-                </a:solidFill>
-                <a:latin typeface="Calibri"/>
-              </a:rPr>
-              <a:t>Итоговое
-сочинение</a:t>
-            </a:r>
-          </a:p>
-        </p:txBody>
-      </p:sp>
-      <p:sp>
-        <p:nvSpPr>
-          <p:cNvPr id="24" name="TextBox 23"/>
-          <p:cNvSpPr txBox="1"/>
-          <p:nvPr/>
-        </p:nvSpPr>
-        <p:spPr>
-          <a:xfrm>
-            <a:off x="7616952" y="2880360"/>
-            <a:ext cx="1938528" cy="2651760"/>
-          </a:xfrm>
-          <a:prstGeom prst="rect">
-            <a:avLst/>
-          </a:prstGeom>
-          <a:noFill/>
-        </p:spPr>
-        <p:txBody>
-          <a:bodyPr wrap="square">
-            <a:spAutoFit/>
-          </a:bodyPr>
-          <a:lstStyle/>
-          <a:p>
-            <a:pPr algn="l"/>
-            <a:r>
-              <a:rPr sz="1200" b="0" i="0">
-                <a:solidFill>
-                  <a:srgbClr val="64748B"/>
-                </a:solidFill>
-                <a:latin typeface="Calibri"/>
-              </a:rPr>
-              <a:t>5 критериев К1–К5
-Зачёт / незачёт
-Допуск к ЕГЭ</a:t>
-            </a:r>
-          </a:p>
-        </p:txBody>
-      </p:sp>
-      <p:sp>
-        <p:nvSpPr>
-          <p:cNvPr id="25" name="Rectangle 24"/>
+          <p:cNvPr id="35" name="Rectangle 21">
+            <a:extLst>
+              <a:ext uri="{FF2B5EF4-FFF2-40B4-BE49-F238E27FC236}">
+                <a16:creationId xmlns:a16="http://schemas.microsoft.com/office/drawing/2014/main" id="{73E454F2-7C75-C019-E6D5-7E896EDF0F47}"/>
+              </a:ext>
+            </a:extLst>
+          </p:cNvPr>
           <p:cNvSpPr/>
           <p:nvPr/>
         </p:nvSpPr>
         <p:spPr>
           <a:xfrm>
-            <a:off x="9857232" y="1371600"/>
-            <a:ext cx="2121408" cy="4297680"/>
+            <a:off x="6193198" y="1371600"/>
+            <a:ext cx="1779161" cy="1345335"/>
           </a:xfrm>
           <a:prstGeom prst="rect">
             <a:avLst/>
           </a:prstGeom>
           <a:solidFill>
-            <a:srgbClr val="FFFFFF"/>
+            <a:srgbClr val="7C3AED"/>
           </a:solidFill>
           <a:ln>
             <a:noFill/>
@@ -39547,102 +42269,20 @@
       </p:sp>
       <p:sp>
         <p:nvSpPr>
-          <p:cNvPr id="26" name="Rectangle 25"/>
-          <p:cNvSpPr/>
-          <p:nvPr/>
-        </p:nvSpPr>
-        <p:spPr>
-          <a:xfrm>
-            <a:off x="9857232" y="1371600"/>
-            <a:ext cx="2121408" cy="101600"/>
-          </a:xfrm>
-          <a:prstGeom prst="rect">
-            <a:avLst/>
-          </a:prstGeom>
-          <a:solidFill>
-            <a:srgbClr val="0F766E"/>
-          </a:solidFill>
-          <a:ln>
-            <a:noFill/>
-          </a:ln>
-        </p:spPr>
-        <p:style>
-          <a:lnRef idx="1">
-            <a:schemeClr val="accent1"/>
-          </a:lnRef>
-          <a:fillRef idx="3">
-            <a:schemeClr val="accent1"/>
-          </a:fillRef>
-          <a:effectRef idx="2">
-            <a:schemeClr val="accent1"/>
-          </a:effectRef>
-          <a:fontRef idx="minor">
-            <a:schemeClr val="lt1"/>
-          </a:fontRef>
-        </p:style>
-        <p:txBody>
-          <a:bodyPr rtlCol="0" anchor="ctr"/>
-          <a:lstStyle/>
-          <a:p>
-            <a:pPr algn="ctr"/>
-            <a:endParaRPr/>
-          </a:p>
-        </p:txBody>
-      </p:sp>
-      <p:sp>
-        <p:nvSpPr>
-          <p:cNvPr id="27" name="Rectangle 26"/>
-          <p:cNvSpPr/>
-          <p:nvPr/>
-        </p:nvSpPr>
-        <p:spPr>
-          <a:xfrm>
-            <a:off x="9857232" y="1371600"/>
-            <a:ext cx="2121408" cy="1371600"/>
-          </a:xfrm>
-          <a:prstGeom prst="rect">
-            <a:avLst/>
-          </a:prstGeom>
-          <a:solidFill>
-            <a:srgbClr val="0F766E"/>
-          </a:solidFill>
-          <a:ln>
-            <a:noFill/>
-          </a:ln>
-        </p:spPr>
-        <p:style>
-          <a:lnRef idx="1">
-            <a:schemeClr val="accent1"/>
-          </a:lnRef>
-          <a:fillRef idx="3">
-            <a:schemeClr val="accent1"/>
-          </a:fillRef>
-          <a:effectRef idx="2">
-            <a:schemeClr val="accent1"/>
-          </a:effectRef>
-          <a:fontRef idx="minor">
-            <a:schemeClr val="lt1"/>
-          </a:fontRef>
-        </p:style>
-        <p:txBody>
-          <a:bodyPr rtlCol="0" anchor="ctr"/>
-          <a:lstStyle/>
-          <a:p>
-            <a:pPr algn="ctr"/>
-            <a:endParaRPr/>
-          </a:p>
-        </p:txBody>
-      </p:sp>
-      <p:sp>
-        <p:nvSpPr>
-          <p:cNvPr id="28" name="TextBox 27"/>
+          <p:cNvPr id="36" name="TextBox 35">
+            <a:extLst>
+              <a:ext uri="{FF2B5EF4-FFF2-40B4-BE49-F238E27FC236}">
+                <a16:creationId xmlns:a16="http://schemas.microsoft.com/office/drawing/2014/main" id="{56CCC016-2756-8D9A-CBD3-E3AF5CFDFD8E}"/>
+              </a:ext>
+            </a:extLst>
+          </p:cNvPr>
           <p:cNvSpPr txBox="1"/>
           <p:nvPr/>
         </p:nvSpPr>
         <p:spPr>
           <a:xfrm>
-            <a:off x="9966960" y="1554480"/>
-            <a:ext cx="1938528" cy="1051560"/>
+            <a:off x="6273422" y="1554480"/>
+            <a:ext cx="1625785" cy="800219"/>
           </a:xfrm>
           <a:prstGeom prst="rect">
             <a:avLst/>
@@ -39657,28 +42297,75 @@
           <a:p>
             <a:pPr algn="ctr"/>
             <a:r>
-              <a:rPr sz="1500" b="1" i="0">
+              <a:rPr sz="1500" b="1" i="0" dirty="0" err="1">
                 <a:solidFill>
                   <a:srgbClr val="FFFFFF"/>
                 </a:solidFill>
                 <a:latin typeface="Calibri"/>
               </a:rPr>
-              <a:t>Свободная
-проверка</a:t>
-            </a:r>
-          </a:p>
-        </p:txBody>
-      </p:sp>
-      <p:sp>
-        <p:nvSpPr>
-          <p:cNvPr id="29" name="TextBox 28"/>
+              <a:t>Итоговое</a:t>
+            </a:r>
+            <a:r>
+              <a:rPr sz="1500" b="1" i="0" dirty="0">
+                <a:solidFill>
+                  <a:srgbClr val="FFFFFF"/>
+                </a:solidFill>
+                <a:latin typeface="Calibri"/>
+              </a:rPr>
+              <a:t>
+</a:t>
+            </a:r>
+            <a:r>
+              <a:rPr sz="1500" b="1" i="0" dirty="0" err="1">
+                <a:solidFill>
+                  <a:srgbClr val="FFFFFF"/>
+                </a:solidFill>
+                <a:latin typeface="Calibri"/>
+              </a:rPr>
+              <a:t>сочинение</a:t>
+            </a:r>
+            <a:endParaRPr lang="en-US" sz="1500" b="1" i="0" dirty="0">
+              <a:solidFill>
+                <a:srgbClr val="FFFFFF"/>
+              </a:solidFill>
+              <a:latin typeface="Calibri"/>
+            </a:endParaRPr>
+          </a:p>
+          <a:p>
+            <a:pPr algn="ctr"/>
+            <a:r>
+              <a:rPr lang="ru-RU" sz="1600" b="1" dirty="0">
+                <a:solidFill>
+                  <a:schemeClr val="bg1"/>
+                </a:solidFill>
+              </a:rPr>
+              <a:t>(школьная)</a:t>
+            </a:r>
+            <a:endParaRPr sz="1500" b="1" i="0" dirty="0">
+              <a:solidFill>
+                <a:schemeClr val="bg1"/>
+              </a:solidFill>
+              <a:latin typeface="Calibri"/>
+            </a:endParaRPr>
+          </a:p>
+        </p:txBody>
+      </p:sp>
+      <p:sp>
+        <p:nvSpPr>
+          <p:cNvPr id="37" name="TextBox 36">
+            <a:extLst>
+              <a:ext uri="{FF2B5EF4-FFF2-40B4-BE49-F238E27FC236}">
+                <a16:creationId xmlns:a16="http://schemas.microsoft.com/office/drawing/2014/main" id="{B14775A7-8FBB-10FB-11D4-5D62D067A4DA}"/>
+              </a:ext>
+            </a:extLst>
+          </p:cNvPr>
           <p:cNvSpPr txBox="1"/>
           <p:nvPr/>
         </p:nvSpPr>
         <p:spPr>
           <a:xfrm>
-            <a:off x="9966960" y="2880360"/>
-            <a:ext cx="1938528" cy="2651760"/>
+            <a:off x="6273422" y="2880361"/>
+            <a:ext cx="1625785" cy="646331"/>
           </a:xfrm>
           <a:prstGeom prst="rect">
             <a:avLst/>
@@ -39691,96 +42378,15 @@
           </a:bodyPr>
           <a:lstStyle/>
           <a:p>
-            <a:pPr algn="l"/>
-            <a:r>
-              <a:rPr sz="1200" b="0" i="0">
+            <a:r>
+              <a:rPr lang="ru-RU" sz="1200" dirty="0">
                 <a:solidFill>
                   <a:srgbClr val="64748B"/>
                 </a:solidFill>
-                <a:latin typeface="Calibri"/>
-              </a:rPr>
-              <a:t>Учитель сам
-формулирует задание
-ИИ его выполняет</a:t>
-            </a:r>
-          </a:p>
-        </p:txBody>
-      </p:sp>
-      <p:sp>
-        <p:nvSpPr>
-          <p:cNvPr id="30" name="Rectangle 29"/>
-          <p:cNvSpPr/>
-          <p:nvPr/>
-        </p:nvSpPr>
-        <p:spPr>
-          <a:xfrm>
-            <a:off x="457200" y="5852160"/>
-            <a:ext cx="11247120" cy="685800"/>
-          </a:xfrm>
-          <a:prstGeom prst="rect">
-            <a:avLst/>
-          </a:prstGeom>
-          <a:solidFill>
-            <a:srgbClr val="E0E7FF"/>
-          </a:solidFill>
-          <a:ln>
-            <a:noFill/>
-          </a:ln>
-        </p:spPr>
-        <p:style>
-          <a:lnRef idx="1">
-            <a:schemeClr val="accent1"/>
-          </a:lnRef>
-          <a:fillRef idx="3">
-            <a:schemeClr val="accent1"/>
-          </a:fillRef>
-          <a:effectRef idx="2">
-            <a:schemeClr val="accent1"/>
-          </a:effectRef>
-          <a:fontRef idx="minor">
-            <a:schemeClr val="lt1"/>
-          </a:fontRef>
-        </p:style>
-        <p:txBody>
-          <a:bodyPr rtlCol="0" anchor="ctr"/>
-          <a:lstStyle/>
-          <a:p>
-            <a:pPr algn="ctr"/>
-            <a:endParaRPr/>
-          </a:p>
-        </p:txBody>
-      </p:sp>
-      <p:sp>
-        <p:nvSpPr>
-          <p:cNvPr id="31" name="TextBox 30"/>
-          <p:cNvSpPr txBox="1"/>
-          <p:nvPr/>
-        </p:nvSpPr>
-        <p:spPr>
-          <a:xfrm>
-            <a:off x="685800" y="5943600"/>
-            <a:ext cx="10789920" cy="502920"/>
-          </a:xfrm>
-          <a:prstGeom prst="rect">
-            <a:avLst/>
-          </a:prstGeom>
-          <a:noFill/>
-        </p:spPr>
-        <p:txBody>
-          <a:bodyPr wrap="square">
-            <a:spAutoFit/>
-          </a:bodyPr>
-          <a:lstStyle/>
-          <a:p>
-            <a:pPr algn="l"/>
-            <a:r>
-              <a:rPr sz="1400" b="1" i="0">
-                <a:solidFill>
-                  <a:srgbClr val="4F46E5"/>
-                </a:solidFill>
-                <a:latin typeface="Calibri"/>
-              </a:rPr>
-              <a:t>✚  Пользователь может создать собственную функцию, опубликовать в галерею и поделиться с другими учителями</a:t>
+              </a:rPr>
+              <a:t>5 критериев К1–К5
+Зачёт / незачёт
+Допуск к ЕГЭ</a:t>
             </a:r>
           </a:p>
         </p:txBody>
@@ -41486,14 +44092,29 @@
           <a:p>
             <a:pPr algn="l"/>
             <a:r>
-              <a:rPr sz="1100" b="0" i="0">
+              <a:rPr sz="1100" b="0" i="0" dirty="0">
                 <a:solidFill>
                   <a:srgbClr val="64748B"/>
                 </a:solidFill>
                 <a:latin typeface="Calibri"/>
               </a:rPr>
-              <a:t>JWT-авторизация</a:t>
-            </a:r>
+              <a:t>JWT-</a:t>
+            </a:r>
+            <a:r>
+              <a:rPr sz="1100" b="0" i="0" dirty="0" err="1">
+                <a:solidFill>
+                  <a:srgbClr val="64748B"/>
+                </a:solidFill>
+                <a:latin typeface="Calibri"/>
+              </a:rPr>
+              <a:t>авторизация</a:t>
+            </a:r>
+            <a:endParaRPr sz="1100" b="0" i="0" dirty="0">
+              <a:solidFill>
+                <a:srgbClr val="64748B"/>
+              </a:solidFill>
+              <a:latin typeface="Calibri"/>
+            </a:endParaRPr>
           </a:p>
         </p:txBody>
       </p:sp>
@@ -41629,7 +44250,7 @@
         <p:spPr>
           <a:xfrm>
             <a:off x="9043416" y="3447288"/>
-            <a:ext cx="2880360" cy="475488"/>
+            <a:ext cx="2880360" cy="261610"/>
           </a:xfrm>
           <a:prstGeom prst="rect">
             <a:avLst/>
@@ -41644,13 +44265,22 @@
           <a:p>
             <a:pPr algn="l"/>
             <a:r>
-              <a:rPr sz="1100" b="0" i="0">
+              <a:rPr sz="1100" b="0" i="0" dirty="0" err="1">
                 <a:solidFill>
                   <a:srgbClr val="64748B"/>
                 </a:solidFill>
                 <a:latin typeface="Calibri"/>
               </a:rPr>
-              <a:t>Supabase + SQLite (dev)</a:t>
+              <a:t>Supabase</a:t>
+            </a:r>
+            <a:r>
+              <a:rPr sz="1100" b="0" i="0" dirty="0">
+                <a:solidFill>
+                  <a:srgbClr val="64748B"/>
+                </a:solidFill>
+                <a:latin typeface="Calibri"/>
+              </a:rPr>
+              <a:t> </a:t>
             </a:r>
           </a:p>
         </p:txBody>
@@ -41834,164 +44464,6 @@
                 <a:latin typeface="Calibri"/>
               </a:rPr>
               <a:t>Локальный LLM</a:t>
-            </a:r>
-          </a:p>
-        </p:txBody>
-      </p:sp>
-      <p:sp>
-        <p:nvSpPr>
-          <p:cNvPr id="55" name="Rectangle 54"/>
-          <p:cNvSpPr/>
-          <p:nvPr/>
-        </p:nvSpPr>
-        <p:spPr>
-          <a:xfrm>
-            <a:off x="8915400" y="5230368"/>
-            <a:ext cx="3063240" cy="1078992"/>
-          </a:xfrm>
-          <a:prstGeom prst="rect">
-            <a:avLst/>
-          </a:prstGeom>
-          <a:solidFill>
-            <a:srgbClr val="FFF7ED"/>
-          </a:solidFill>
-          <a:ln>
-            <a:noFill/>
-          </a:ln>
-        </p:spPr>
-        <p:style>
-          <a:lnRef idx="1">
-            <a:schemeClr val="accent1"/>
-          </a:lnRef>
-          <a:fillRef idx="3">
-            <a:schemeClr val="accent1"/>
-          </a:fillRef>
-          <a:effectRef idx="2">
-            <a:schemeClr val="accent1"/>
-          </a:effectRef>
-          <a:fontRef idx="minor">
-            <a:schemeClr val="lt1"/>
-          </a:fontRef>
-        </p:style>
-        <p:txBody>
-          <a:bodyPr rtlCol="0" anchor="ctr"/>
-          <a:lstStyle/>
-          <a:p>
-            <a:pPr algn="ctr"/>
-            <a:endParaRPr/>
-          </a:p>
-        </p:txBody>
-      </p:sp>
-      <p:sp>
-        <p:nvSpPr>
-          <p:cNvPr id="56" name="Rectangle 55"/>
-          <p:cNvSpPr/>
-          <p:nvPr/>
-        </p:nvSpPr>
-        <p:spPr>
-          <a:xfrm>
-            <a:off x="8915400" y="5230368"/>
-            <a:ext cx="63500" cy="1078992"/>
-          </a:xfrm>
-          <a:prstGeom prst="rect">
-            <a:avLst/>
-          </a:prstGeom>
-          <a:solidFill>
-            <a:srgbClr val="D97706"/>
-          </a:solidFill>
-          <a:ln>
-            <a:noFill/>
-          </a:ln>
-        </p:spPr>
-        <p:style>
-          <a:lnRef idx="1">
-            <a:schemeClr val="accent1"/>
-          </a:lnRef>
-          <a:fillRef idx="3">
-            <a:schemeClr val="accent1"/>
-          </a:fillRef>
-          <a:effectRef idx="2">
-            <a:schemeClr val="accent1"/>
-          </a:effectRef>
-          <a:fontRef idx="minor">
-            <a:schemeClr val="lt1"/>
-          </a:fontRef>
-        </p:style>
-        <p:txBody>
-          <a:bodyPr rtlCol="0" anchor="ctr"/>
-          <a:lstStyle/>
-          <a:p>
-            <a:pPr algn="ctr"/>
-            <a:endParaRPr/>
-          </a:p>
-        </p:txBody>
-      </p:sp>
-      <p:sp>
-        <p:nvSpPr>
-          <p:cNvPr id="57" name="TextBox 56"/>
-          <p:cNvSpPr txBox="1"/>
-          <p:nvPr/>
-        </p:nvSpPr>
-        <p:spPr>
-          <a:xfrm>
-            <a:off x="9043416" y="5321808"/>
-            <a:ext cx="2880360" cy="384048"/>
-          </a:xfrm>
-          <a:prstGeom prst="rect">
-            <a:avLst/>
-          </a:prstGeom>
-          <a:noFill/>
-        </p:spPr>
-        <p:txBody>
-          <a:bodyPr wrap="square">
-            <a:spAutoFit/>
-          </a:bodyPr>
-          <a:lstStyle/>
-          <a:p>
-            <a:pPr algn="l"/>
-            <a:r>
-              <a:rPr sz="1300" b="1" i="0">
-                <a:solidFill>
-                  <a:srgbClr val="D97706"/>
-                </a:solidFill>
-                <a:latin typeface="Calibri"/>
-              </a:rPr>
-              <a:t>🐳  Docker</a:t>
-            </a:r>
-          </a:p>
-        </p:txBody>
-      </p:sp>
-      <p:sp>
-        <p:nvSpPr>
-          <p:cNvPr id="58" name="TextBox 57"/>
-          <p:cNvSpPr txBox="1"/>
-          <p:nvPr/>
-        </p:nvSpPr>
-        <p:spPr>
-          <a:xfrm>
-            <a:off x="9043416" y="5733288"/>
-            <a:ext cx="2880360" cy="475488"/>
-          </a:xfrm>
-          <a:prstGeom prst="rect">
-            <a:avLst/>
-          </a:prstGeom>
-          <a:noFill/>
-        </p:spPr>
-        <p:txBody>
-          <a:bodyPr wrap="square">
-            <a:spAutoFit/>
-          </a:bodyPr>
-          <a:lstStyle/>
-          <a:p>
-            <a:pPr algn="l"/>
-            <a:r>
-              <a:rPr sz="1100" b="0" i="0">
-                <a:solidFill>
-                  <a:srgbClr val="64748B"/>
-                </a:solidFill>
-                <a:latin typeface="Calibri"/>
-              </a:rPr>
-              <a:t>docker-compose up</a:t>
             </a:r>
           </a:p>
         </p:txBody>
